--- a/Curso Gas B/06 - ITC-ICG 09 - Instaladores y empresas instaladoras/06 - ITC-ICG 09 - Instaladores y empresas instaladoras - Vídeo 2.pptx
+++ b/Curso Gas B/06 - ITC-ICG 09 - Instaladores y empresas instaladoras/06 - ITC-ICG 09 - Instaladores y empresas instaladoras - Vídeo 2.pptx
@@ -21,6 +21,7 @@
     <p:sldId id="269" r:id="rId21"/>
     <p:sldId id="270" r:id="rId22"/>
     <p:sldId id="271" r:id="rId23"/>
+    <p:sldId id="272" r:id="rId24"/>
   </p:sldIdLst>
   <p:sldSz cx="12191695" cy="6858000" type="screen4x3"/>
   <p:notesSz cx="6858000" cy="9144000"/>
@@ -592,12 +593,12 @@
           <a:lstStyle/>
           <a:p>
             <a:r>
-              <a:t>N1: ¿Y por qué la empresa necesita un seguro tan grande?</a:t>
-            </a:r>
-          </a:p>
-          <a:p>
-            <a:r>
-              <a:t>N2: Porque el gas, cuando falla, no falla en pequeño. Antes de nada, la empresa tiene que disponer de los medios técnicos para trabajar con seguridad, las herramientas y los aparatos de medida. Y luego, la pieza más preguntada: un seguro de responsabilidad civil profesional que cubra los daños que puedas causar. Las cifras son números de examen puro, por siniestro: la categoría a, novecientos mil euros; la be, seiscientos mil euros; la ce, trescientos mil euros. Truco para no olvidarlos: van de mayor a menor según la letra, a más alcance más seguro, y bajan en saltos de trescientos mil. Novecientos, seiscientos, trescientos. ¿Por qué tanto? Porque si una instalación tuya provoca una fuga, una explosión o una intoxicación por monóxido de carbono, ese seguro es lo que responde por las víctimas y los daños. Tú, categoría be, seiscientos mil euros, y vigente en todo momento.</a:t>
+              <a:t>N1: ¿Basta con conocer a alguien que tenga el carné?</a:t>
+            </a:r>
+          </a:p>
+          <a:p>
+            <a:r>
+              <a:t>N2: No, y este es el requisito estrella del vídeo, así que grábalo. Una empresa necesita al menos un instalador de gas en plantilla, contratado a jornada completa, y de categoría igual o superior a la de la empresa. O sea, una empresa de categoría be necesita como mínimo un instalador be o a, dentro de la plantilla, no un colega que a veces le echa una mano. La lógica es de seguridad: durante el horario de la empresa siempre tiene que haber alguien habilitado y responsable. Ahora, hay formas válidas de cumplirlo sin contratar a nadie de fuera. Una: que el instalador sea uno de los socios de la sociedad, si trabaja a jornada completa. Dos: que la empresa seas tú mismo, autónomo dado de alta con tu carné. Y tres: en vez de uno a jornada completa, dos instaladores a media jornada que entre los dos cubran todo el horario. La idea es siempre la misma: alguien con carné al mando durante toda la actividad.</a:t>
             </a:r>
           </a:p>
         </p:txBody>
@@ -667,12 +668,12 @@
           <a:lstStyle/>
           <a:p>
             <a:r>
-              <a:t>N1: ¿Puedo firmar el boletín de una instalación que ha hecho otro?</a:t>
-            </a:r>
-          </a:p>
-          <a:p>
-            <a:r>
-              <a:t>N2: No, jamás, y es una de las prohibiciones más claras de toda la ITC. La empresa instaladora no puede facilitar, ceder ni vender certificados de instalaciones que no ha hecho ella misma. El certificado, el boletín, es la firma de que tu empresa ha montado y probado esa instalación. Si tú no la montaste, tú no la certificas. ¿Por qué está tan perseguido? Porque vender boletines es como firmar un examen que no has hecho: alguien pone su nombre y su responsabilidad a un trabajo que no controla, y detrás de ese papel hay una instalación de gas que puede reventar. Es de las infracciones que más se sancionan en el sector. Regla de una línea: si no la has hecho tú, no la firmas tú.</a:t>
+              <a:t>N1: ¿Y por qué la empresa necesita un seguro tan grande?</a:t>
+            </a:r>
+          </a:p>
+          <a:p>
+            <a:r>
+              <a:t>N2: Porque el gas, cuando falla, no falla en pequeño. Antes de nada, la empresa tiene que disponer de los medios técnicos para trabajar con seguridad, las herramientas y los aparatos de medida. Y luego, la pieza más preguntada: un seguro de responsabilidad civil profesional que cubra los daños que puedas causar. Las cifras son números de examen puro, por siniestro: la categoría a, novecientos mil euros; la be, seiscientos mil euros; la ce, trescientos mil euros. Truco para no olvidarlos: van de mayor a menor según la letra, a más alcance más seguro, y bajan en saltos de trescientos mil. Novecientos, seiscientos, trescientos. ¿Por qué tanto? Porque si una instalación tuya provoca una fuga, una explosión o una intoxicación por monóxido de carbono, ese seguro es lo que responde por las víctimas y los daños. Tú, categoría be, seiscientos mil euros, y vigente en todo momento.</a:t>
             </a:r>
           </a:p>
         </p:txBody>
@@ -742,12 +743,12 @@
           <a:lstStyle/>
           <a:p>
             <a:r>
-              <a:t>N1: ¿Y si me abren un expediente, cuánto tiempo tengo para defenderme?</a:t>
-            </a:r>
-          </a:p>
-          <a:p>
-            <a:r>
-              <a:t>N2: Tienes plazos concretos, y aquí es fácil liarse, así que vamos a ordenarlos. Cuando la Administración detecta un posible incumplimiento, abre un expediente y te da quince días naturales para alegar, es decir, para aportar tus pruebas y tus descargos, tu versión. Y si la infracción es grave, puede suspenderte cautelarmente la actividad mientras resuelve, por un periodo máximo de tres meses. Ahora la parte que cae en el examen: no confundas estos plazos con el del apartado anterior. Recuerda, el mes era para comunicar tú los cambios o el cese de tu empresa, algo voluntario. Estos dos, los quince días y los tres meses, son del régimen sancionador, cuando la cosa va mal. Tres plazos, tres situaciones: un mes para avisar, quince días para defenderte, tres meses de suspensión como tope.</a:t>
+              <a:t>N1: ¿Puedo firmar el boletín de una instalación que ha hecho otro?</a:t>
+            </a:r>
+          </a:p>
+          <a:p>
+            <a:r>
+              <a:t>N2: No, jamás, y es una de las prohibiciones más claras de toda la ITC. La empresa instaladora no puede facilitar, ceder ni vender certificados de instalaciones que no ha hecho ella misma. El certificado, el boletín, es la firma de que tu empresa ha montado y probado esa instalación. Si tú no la montaste, tú no la certificas. ¿Por qué está tan perseguido? Porque vender boletines es como firmar un examen que no has hecho: alguien pone su nombre y su responsabilidad a un trabajo que no controla, y detrás de ese papel hay una instalación de gas que puede reventar. Es de las infracciones que más se sancionan en el sector. Regla de una línea: si no la has hecho tú, no la firmas tú.</a:t>
             </a:r>
           </a:p>
         </p:txBody>
@@ -817,12 +818,12 @@
           <a:lstStyle/>
           <a:p>
             <a:r>
-              <a:t>N1: De todas las obligaciones, ¿cuáles caen más?</a:t>
-            </a:r>
-          </a:p>
-          <a:p>
-            <a:r>
-              <a:t>N2: Tres, y te las explico con su porqué. La primera, emitir los certificados reglamentarios: la empresa es quien firma y entrega el boletín de cada trabajo. La segunda, y la más preguntada, la garantía de cuatro años por mala ejecución: si montas mal y en esos cuatro años aparece un problema por tu trabajo, respondes tú y de las consecuencias que se deriven. Piénsalo como la garantía de tu obra, igual que un electrodoméstico trae la suya. La tercera, llevar dos registros, y ojo que aquí hay trampa porque son dos distintos con dos destinatarios distintos. Uno, el registro de certificados y de informes de anomalías, que está a disposición de la comunidad autónoma. Y dos, el registro de informes de anomalías de los controles periódicos, que está a disposición de las distribuidoras y comercializadores de gas licuado. Cada papel lo pide alguien distinto: no los mezcles.</a:t>
+              <a:t>N1: ¿Y si me abren un expediente, cuánto tiempo tengo para defenderme?</a:t>
+            </a:r>
+          </a:p>
+          <a:p>
+            <a:r>
+              <a:t>N2: Tienes plazos concretos, y aquí es fácil liarse, así que vamos a ordenarlos. Cuando la Administración detecta un posible incumplimiento, abre un expediente y te da quince días naturales para alegar, es decir, para aportar tus pruebas y tus descargos, tu versión. Y si la infracción es grave, puede suspenderte cautelarmente la actividad mientras resuelve, por un periodo máximo de tres meses. Ahora la parte que cae en el examen: no confundas estos plazos con el del apartado anterior. Recuerda, el mes era para comunicar tú los cambios o el cese de tu empresa, algo voluntario. Estos dos, los quince días y los tres meses, son del régimen sancionador, cuando la cosa va mal. Tres plazos, tres situaciones: un mes para avisar, quince días para defenderte, tres meses de suspensión como tope.</a:t>
             </a:r>
           </a:p>
         </p:txBody>
@@ -892,12 +893,12 @@
           <a:lstStyle/>
           <a:p>
             <a:r>
-              <a:t>N1: Volvemos a los aparatos gordos, ¿qué formación hace falta?</a:t>
-            </a:r>
-          </a:p>
-          <a:p>
-            <a:r>
-              <a:t>N2: Un plus de acreditación, sí, y aquí lo concretamos. Recuerda los aparatos del vídeo uno: los conducidos de tipo be y ce de más de veinticuatro coma cuatro kilovatios, y las vitrocerámicas de fuegos cubiertos. Para arrancarlos, mantenerlos o repararlos, cualquier instalador, de la categoría que sea, tiene que acreditar una de estas vías. La más habitual en el taller, con diferencia, es la acreditación del fabricante: el curso que te da la marca de la caldera para poder tocar sus equipos. Por eso, cuando instalas una caldera nueva, la marca exige que la ponga en marcha un servicio acreditado por ella. Las otras vías: un título universitario, un título de formación profesional o certificado de profesionalidad, la cualificación reconocida de otro país de la Unión Europea, o una certificación de entidad acreditada. Todas tienen que cubrir los contenidos del anexo dos, del apartado uno al diecisiete, que veremos en el vídeo tres.</a:t>
+              <a:t>N1: De todas las obligaciones, ¿cuáles caen más?</a:t>
+            </a:r>
+          </a:p>
+          <a:p>
+            <a:r>
+              <a:t>N2: Tres, y te las explico con su porqué. La primera, emitir los certificados reglamentarios: la empresa es quien firma y entrega el boletín de cada trabajo. La segunda, y la más preguntada, la garantía de cuatro años por mala ejecución: si montas mal y en esos cuatro años aparece un problema por tu trabajo, respondes tú y de las consecuencias que se deriven. Piénsalo como la garantía de tu obra, igual que un electrodoméstico trae la suya. La tercera, llevar dos registros, y ojo que aquí hay trampa porque son dos distintos con dos destinatarios distintos. Uno, el registro de certificados y de informes de anomalías, que está a disposición de la comunidad autónoma. Y dos, el registro de informes de anomalías de los controles periódicos, que está a disposición de las distribuidoras y comercializadores de gas licuado. Cada papel lo pide alguien distinto: no los mezcles.</a:t>
             </a:r>
           </a:p>
         </p:txBody>
@@ -967,12 +968,12 @@
           <a:lstStyle/>
           <a:p>
             <a:r>
-              <a:t>N1: ¿Y para el cambio de familia de gas es lo mismo?</a:t>
-            </a:r>
-          </a:p>
-          <a:p>
-            <a:r>
-              <a:t>N2: Casi, pero con dos diferencias que caen en el examen. La operación es adecuar un aparato por cambio de familia de gas, por ejemplo pasarlo de butano a gas natural. Primera diferencia: esto solo lo pueden acreditar las categorías a y be; la ce queda fuera, porque la ce trabaja con instalaciones que no cambian de familia de gas. Segunda diferencia: las vías son parecidas a las de antes, título, formación profesional, cualificación europea o certificación acreditada, pero se exige el anexo dos completo, no solo del uno al diecisiete, sino también el apartado dieciocho, que va justo de adaptar aparatos a otras familias de gas. Y un matiz de la vía del fabricante: su acreditación tiene que reconocer de forma explícita esa capacidad concreta de cambiar el gas; no vale una acreditación genérica. Chuleta: cuatro punto uno, arrancar los grandes, cualquier categoría, anexo del uno al diecisiete; cuatro punto dos, cambiar de gas, solo la a y la be, anexo completo.</a:t>
+              <a:t>N1: Volvemos a los aparatos gordos, ¿qué formación hace falta?</a:t>
+            </a:r>
+          </a:p>
+          <a:p>
+            <a:r>
+              <a:t>N2: Un plus de acreditación, sí, y aquí lo concretamos. Recuerda los aparatos del vídeo uno: los conducidos de tipo be y ce de más de veinticuatro coma cuatro kilovatios, y las vitrocerámicas de fuegos cubiertos. Para arrancarlos, mantenerlos o repararlos, cualquier instalador, de la categoría que sea, tiene que acreditar una de estas vías. La más habitual en el taller, con diferencia, es la acreditación del fabricante: el curso que te da la marca de la caldera para poder tocar sus equipos. Por eso, cuando instalas una caldera nueva, la marca exige que la ponga en marcha un servicio acreditado por ella. Las otras vías: un título universitario, un título de formación profesional o certificado de profesionalidad, la cualificación reconocida de otro país de la Unión Europea, o una certificación de entidad acreditada. Todas tienen que cubrir los contenidos del anexo dos, del apartado uno al diecisiete, que veremos en el vídeo tres.</a:t>
             </a:r>
           </a:p>
         </p:txBody>
@@ -1042,6 +1043,81 @@
           <a:lstStyle/>
           <a:p>
             <a:r>
+              <a:t>N1: ¿Y para el cambio de familia de gas es lo mismo?</a:t>
+            </a:r>
+          </a:p>
+          <a:p>
+            <a:r>
+              <a:t>N2: Casi, pero con dos diferencias que caen en el examen. La operación es adecuar un aparato por cambio de familia de gas, por ejemplo pasarlo de butano a gas natural. Primera diferencia: esto solo lo pueden acreditar las categorías a y be; la ce queda fuera, porque la ce trabaja con instalaciones que no cambian de familia de gas. Segunda diferencia: las vías son parecidas a las de antes, título, formación profesional, cualificación europea o certificación acreditada, pero se exige el anexo dos completo, no solo del uno al diecisiete, sino también el apartado dieciocho, que va justo de adaptar aparatos a otras familias de gas. Y un matiz de la vía del fabricante: su acreditación tiene que reconocer de forma explícita esa capacidad concreta de cambiar el gas; no vale una acreditación genérica. Chuleta: cuatro punto uno, arrancar los grandes, cualquier categoría, anexo del uno al diecisiete; cuatro punto dos, cambiar de gas, solo la a y la be, anexo completo.</a:t>
+            </a:r>
+          </a:p>
+        </p:txBody>
+      </p:sp>
+      <p:sp>
+        <p:nvSpPr>
+          <p:cNvPr id="4" name="Slide Number Placeholder 3"/>
+          <p:cNvSpPr>
+            <a:spLocks noGrp="1"/>
+          </p:cNvSpPr>
+          <p:nvPr>
+            <p:ph type="sldNum" idx="5" sz="quarter"/>
+          </p:nvPr>
+        </p:nvSpPr>
+        <p:spPr/>
+      </p:sp>
+    </p:spTree>
+  </p:cSld>
+  <p:clrMapOvr>
+    <a:masterClrMapping/>
+  </p:clrMapOvr>
+</p:notes>
+</file>
+
+<file path=ppt/notesSlides/notesSlide17.xml><?xml version="1.0" encoding="utf-8"?>
+<p:notes xmlns:a="http://schemas.openxmlformats.org/drawingml/2006/main" xmlns:p="http://schemas.openxmlformats.org/presentationml/2006/main" xmlns:r="http://schemas.openxmlformats.org/officeDocument/2006/relationships">
+  <p:cSld>
+    <p:spTree>
+      <p:nvGrpSpPr>
+        <p:cNvPr id="1" name=""/>
+        <p:cNvGrpSpPr/>
+        <p:nvPr/>
+      </p:nvGrpSpPr>
+      <p:grpSpPr>
+        <a:xfrm>
+          <a:off x="0" y="0"/>
+          <a:ext cx="0" cy="0"/>
+          <a:chOff x="0" y="0"/>
+          <a:chExt cx="0" cy="0"/>
+        </a:xfrm>
+      </p:grpSpPr>
+      <p:sp>
+        <p:nvSpPr>
+          <p:cNvPr id="2" name="Slide Image Placeholder 1"/>
+          <p:cNvSpPr>
+            <a:spLocks noGrp="1"/>
+          </p:cNvSpPr>
+          <p:nvPr>
+            <p:ph type="sldImg" idx="2"/>
+          </p:nvPr>
+        </p:nvSpPr>
+        <p:spPr/>
+      </p:sp>
+      <p:sp>
+        <p:nvSpPr>
+          <p:cNvPr id="3" name="Notes Placeholder 2"/>
+          <p:cNvSpPr>
+            <a:spLocks noGrp="1"/>
+          </p:cNvSpPr>
+          <p:nvPr>
+            <p:ph type="body" idx="3" sz="quarter"/>
+          </p:nvPr>
+        </p:nvSpPr>
+        <p:spPr/>
+        <p:txBody>
+          <a:bodyPr/>
+          <a:lstStyle/>
+          <a:p>
+            <a:r>
               <a:t>N1: Recapitulamos. ¿Qué me llevo de este vídeo?</a:t>
             </a:r>
           </a:p>
@@ -1200,16 +1276,7 @@
         <p:txBody>
           <a:bodyPr/>
           <a:lstStyle/>
-          <a:p>
-            <a:r>
-              <a:t>N1: ¿La empresa puede hacer cosas distintas que el instalador?</a:t>
-            </a:r>
-          </a:p>
-          <a:p>
-            <a:r>
-              <a:t>N2: No, y esto simplifica mucho el estudio. Una empresa instaladora es una persona física o jurídica, o sea, puede ser un autónomo o una sociedad, que se dedica a montar, reparar, mantener y hacer el control periódico de instalaciones de gas. La clave está aquí: la empresa hereda la categoría. Sus competencias son idénticas a las del instalador de la misma letra. Traducido: una empresa de categoría be puede hacer exactamente lo mismo que un instalador de categoría be, todo lo que vimos en el vídeo uno. No hay una lista aparte de operaciones para empresas. Entonces, ¿qué cambia entre persona y empresa? No lo que pueden hacer, sino los requisitos para existir: los papeles, el personal y el seguro. Eso es lo que vamos a ver ahora.</a:t>
-            </a:r>
-          </a:p>
+          <a:p/>
         </p:txBody>
       </p:sp>
       <p:sp>
@@ -1277,12 +1344,12 @@
           <a:lstStyle/>
           <a:p>
             <a:r>
-              <a:t>N1: ¿Y cómo se da de alta una empresa de gas, con mucho papeleo?</a:t>
-            </a:r>
-          </a:p>
-          <a:p>
-            <a:r>
-              <a:t>N2: Menos del que crees, y ahí está la gracia de la declaración responsable. Antes de empezar a trabajar, presentas ante el órgano competente de tu comunidad autónoma un documento en el que declaras varias cosas. Te las cuento como si rellenaras el formulario. Primero, para qué categoría vas a trabajar: la a, la be o la ce. Segundo, si además vas a hacer puesta en marcha, mantenimiento, reparación o adecuación de aparatos. Tercero, que cumples todos los requisitos que pide la ITC. Cuarto, que tienes la documentación que lo demuestra. Quinto, que te comprometes a mantener todo eso mientras trabajes. Y sexto, que te responsabilizas de que las instalaciones se ejecuten conforme al Reglamento. Fíjate en la idea de fondo: no entregas papeles, declaras bajo tu firma que cumples. La Administración se fía de tu palabra firmada.</a:t>
+              <a:t>N1: ¿La empresa puede hacer cosas distintas que el instalador?</a:t>
+            </a:r>
+          </a:p>
+          <a:p>
+            <a:r>
+              <a:t>N2: No, y esto simplifica mucho el estudio. Una empresa instaladora es una persona física o jurídica, o sea, puede ser un autónomo o una sociedad, que se dedica a montar, reparar, mantener y hacer el control periódico de instalaciones de gas. La clave está aquí: la empresa hereda la categoría. Sus competencias son idénticas a las del instalador de la misma letra. Traducido: una empresa de categoría be puede hacer exactamente lo mismo que un instalador de categoría be, todo lo que vimos en el vídeo uno. No hay una lista aparte de operaciones para empresas. Entonces, ¿qué cambia entre persona y empresa? No lo que pueden hacer, sino los requisitos para existir: los papeles, el personal y el seguro. Eso es lo que vamos a ver ahora.</a:t>
             </a:r>
           </a:p>
         </p:txBody>
@@ -1352,12 +1419,12 @@
           <a:lstStyle/>
           <a:p>
             <a:r>
-              <a:t>N1: ¿Y una empresa de fuera de España cómo entra?</a:t>
-            </a:r>
-          </a:p>
-          <a:p>
-            <a:r>
-              <a:t>N2: Con casi el mismo papel, para que veas que no es tan distinto. Aquí hablamos de una empresa legalmente establecida en otro país de la Unión Europea que quiere venir a trabajar a España de forma puntual; a eso se le llama régimen de libre prestación. Esa empresa, antes de empezar, presenta ante la comunidad autónoma donde va a actuar una declaración responsable con el mismo contenido que la de una empresa española: categoría, actividades de aparatos, que cumple, que tiene la documentación, que la mantiene y que responde de la ejecución. La única pieza extra: como su personal se formó fuera, tiene que hacer constar que dispone de la documentación que acredita esa cualificación, según las normas europeas de reconocimiento. No te líes con los dos apartados: uno es para quien se establece en España, y el otro para quien viene de la Unión Europea. El papel, en esencia, es el mismo.</a:t>
+              <a:t>N1: ¿Y cómo se da de alta una empresa de gas, con mucho papeleo?</a:t>
+            </a:r>
+          </a:p>
+          <a:p>
+            <a:r>
+              <a:t>N2: Menos del que crees, y ahí está la gracia de la declaración responsable. Antes de empezar a trabajar, presentas ante el órgano competente de tu comunidad autónoma un documento en el que declaras varias cosas. Te las cuento como si rellenaras el formulario. Primero, para qué categoría vas a trabajar: la a, la be o la ce. Segundo, si además vas a hacer puesta en marcha, mantenimiento, reparación o adecuación de aparatos. Tercero, que cumples todos los requisitos que pide la ITC. Cuarto, que tienes la documentación que lo demuestra. Quinto, que te comprometes a mantener todo eso mientras trabajes. Y sexto, que te responsabilizas de que las instalaciones se ejecuten conforme al Reglamento. Fíjate en la idea de fondo: no entregas papeles, declaras bajo tu firma que cumples. La Administración se fía de tu palabra firmada.</a:t>
             </a:r>
           </a:p>
         </p:txBody>
@@ -1427,12 +1494,12 @@
           <a:lstStyle/>
           <a:p>
             <a:r>
-              <a:t>N1: Si no entrego los papeles, ¿nadie los comprueba?</a:t>
-            </a:r>
-          </a:p>
-          <a:p>
-            <a:r>
-              <a:t>N2: Sí que los comprueban, pero después y cuando quieran. Ese es el espíritu de la declaración responsable. Primero, la comunidad autónoma tiene que dejarte presentarla por internet, por medios electrónicos; nada de colas obligatorias. Segundo, y esto es lo importante, no te pueden exigir que adjuntes la carpeta de documentación junto con la declaración. Tú firmas que cumples y con eso arrancas. Pero, y aquí viene el pero, esa documentación tiene que estar disponible para enseñarla de inmediato si la Administración te la pide en una inspección. Traducción de taller: ten siempre a mano, localizable, el seguro, los carnés y la prueba de tus medios. No vale decir cumplo pero no lo tengo aquí. Declaras, no entregas, pero lo tienes que tener listo para el momento en que llamen a la puerta.</a:t>
+              <a:t>N1: ¿Y una empresa de fuera de España cómo entra?</a:t>
+            </a:r>
+          </a:p>
+          <a:p>
+            <a:r>
+              <a:t>N2: Con casi el mismo papel, para que veas que no es tan distinto. Aquí hablamos de una empresa legalmente establecida en otro país de la Unión Europea que quiere venir a trabajar a España de forma puntual; a eso se le llama régimen de libre prestación. Esa empresa, antes de empezar, presenta ante la comunidad autónoma donde va a actuar una declaración responsable con el mismo contenido que la de una empresa española: categoría, actividades de aparatos, que cumple, que tiene la documentación, que la mantiene y que responde de la ejecución. La única pieza extra: como su personal se formó fuera, tiene que hacer constar que dispone de la documentación que acredita esa cualificación, según las normas europeas de reconocimiento. No te líes con los dos apartados: uno es para quien se establece en España, y el otro para quien viene de la Unión Europea. El papel, en esencia, es el mismo.</a:t>
             </a:r>
           </a:p>
         </p:txBody>
@@ -1502,12 +1569,12 @@
           <a:lstStyle/>
           <a:p>
             <a:r>
-              <a:t>N1: ¿Tengo que esperar a que me aprueben la declaración?</a:t>
-            </a:r>
-          </a:p>
-          <a:p>
-            <a:r>
-              <a:t>N2: No, y esto sorprende a mucha gente. En cuanto presentas la declaración responsable, quedas habilitado desde ese mismo momento; no hay que esperar a que nadie te la apruebe. Además, la comunidad autónoma te asigna de oficio, ella sola, un número de identificación, y manda tus datos al Registro Integrado Industrial, que es el gran fichero de empresas industriales. Y hay dos ventajas más que van juntas: la habilitación es por tiempo indefinido, no caduca ni la renuevas cada año, y vale en todo el territorio español, igual que el carné del instalador. Piénsalo: firmas, entregas, y desde ese segundo ya puedes trabajar en cualquier punto del país, para siempre, mientras sigas cumpliendo. Rápido y cómodo, pero recuerda que la comodidad viene con responsabilidad.</a:t>
+              <a:t>N1: Si no entrego los papeles, ¿nadie los comprueba?</a:t>
+            </a:r>
+          </a:p>
+          <a:p>
+            <a:r>
+              <a:t>N2: Sí que los comprueban, pero después y cuando quieran. Ese es el espíritu de la declaración responsable. Primero, la comunidad autónoma tiene que dejarte presentarla por internet, por medios electrónicos; nada de colas obligatorias. Segundo, y esto es lo importante, no te pueden exigir que adjuntes la carpeta de documentación junto con la declaración. Tú firmas que cumples y con eso arrancas. Pero, y aquí viene el pero, esa documentación tiene que estar disponible para enseñarla de inmediato si la Administración te la pide en una inspección. Traducción de taller: ten siempre a mano, localizable, el seguro, los carnés y la prueba de tus medios. No vale decir cumplo pero no lo tengo aquí. Declaras, no entregas, pero lo tienes que tener listo para el momento en que llamen a la puerta.</a:t>
             </a:r>
           </a:p>
         </p:txBody>
@@ -1577,12 +1644,12 @@
           <a:lstStyle/>
           <a:p>
             <a:r>
-              <a:t>N1: ¿Y si en la declaración pongo algo que no es cierto?</a:t>
-            </a:r>
-          </a:p>
-          <a:p>
-            <a:r>
-              <a:t>N2: Entonces tienes un problema serio, porque la firma es de verdad. Como no entregas papeles al principio, la Administración se reserva el derecho de comprobar después lo que declaraste. Y si detecta que no presentaste la declaración, o que mentiste, o que ocultaste un dato esencial, puede dictar una resolución, después de escucharte, que te deja sin poder seguir ejerciendo la actividad, con el régimen sancionador de la ley de industria por detrás. Por eso insisto: la declaración responsable es cómoda, pero es una firma con consecuencias. Y engancha con otra obligación: si cambia algo de tu empresa, el domicilio, la categoría, el seguro, o si cierras el negocio, tienes que comunicarlo en el plazo de un mes. Apunta ese mes, porque luego lo compararemos con otros plazos que se confunden.</a:t>
+              <a:t>N1: ¿Tengo que esperar a que me aprueben la declaración?</a:t>
+            </a:r>
+          </a:p>
+          <a:p>
+            <a:r>
+              <a:t>N2: No, y esto sorprende a mucha gente. En cuanto presentas la declaración responsable, quedas habilitado desde ese mismo momento; no hay que esperar a que nadie te la apruebe. Además, la comunidad autónoma te asigna de oficio, ella sola, un número de identificación, y manda tus datos al Registro Integrado Industrial, que es el gran fichero de empresas industriales. Y hay dos ventajas más que van juntas: la habilitación es por tiempo indefinido, no caduca ni la renuevas cada año, y vale en todo el territorio español, igual que el carné del instalador. Piénsalo: firmas, entregas, y desde ese segundo ya puedes trabajar en cualquier punto del país, para siempre, mientras sigas cumpliendo. Rápido y cómodo, pero recuerda que la comodidad viene con responsabilidad.</a:t>
             </a:r>
           </a:p>
         </p:txBody>
@@ -1652,12 +1719,12 @@
           <a:lstStyle/>
           <a:p>
             <a:r>
-              <a:t>N1: ¿Basta con conocer a alguien que tenga el carné?</a:t>
-            </a:r>
-          </a:p>
-          <a:p>
-            <a:r>
-              <a:t>N2: No, y este es el requisito estrella del vídeo, así que grábalo. Una empresa necesita al menos un instalador de gas en plantilla, contratado a jornada completa, y de categoría igual o superior a la de la empresa. O sea, una empresa de categoría be necesita como mínimo un instalador be o a, dentro de la plantilla, no un colega que a veces le echa una mano. La lógica es de seguridad: durante el horario de la empresa siempre tiene que haber alguien habilitado y responsable. Ahora, hay formas válidas de cumplirlo sin contratar a nadie de fuera. Una: que el instalador sea uno de los socios de la sociedad, si trabaja a jornada completa. Dos: que la empresa seas tú mismo, autónomo dado de alta con tu carné. Y tres: en vez de uno a jornada completa, dos instaladores a media jornada que entre los dos cubran todo el horario. La idea es siempre la misma: alguien con carné al mando durante toda la actividad.</a:t>
+              <a:t>N1: ¿Y si en la declaración pongo algo que no es cierto?</a:t>
+            </a:r>
+          </a:p>
+          <a:p>
+            <a:r>
+              <a:t>N2: Entonces tienes un problema serio, porque la firma es de verdad. Como no entregas papeles al principio, la Administración se reserva el derecho de comprobar después lo que declaraste. Y si detecta que no presentaste la declaración, o que mentiste, o que ocultaste un dato esencial, puede dictar una resolución, después de escucharte, que te deja sin poder seguir ejerciendo la actividad, con el régimen sancionador de la ley de industria por detrás. Por eso insisto: la declaración responsable es cómoda, pero es una firma con consecuencias. Y engancha con otra obligación: si cambia algo de tu empresa, el domicilio, la categoría, el seguro, o si cierras el negocio, tienes que comunicarlo en el plazo de un mes. Apunta ese mes, porque luego lo compararemos con otros plazos que se confunden.</a:t>
             </a:r>
           </a:p>
         </p:txBody>
@@ -4732,7 +4799,7 @@
             <a:r>
               <a:rPr sz="1400" b="1" i="0">
                 <a:solidFill>
-                  <a:srgbClr val="CADCFC"/>
+                  <a:srgbClr val="F4A24C"/>
                 </a:solidFill>
                 <a:latin typeface="Montserrat"/>
               </a:rPr>
@@ -4743,13 +4810,57 @@
       </p:sp>
       <p:sp>
         <p:nvSpPr>
-          <p:cNvPr id="4" name="TextBox 3"/>
+          <p:cNvPr id="4" name="Rounded Rectangle 3"/>
+          <p:cNvSpPr/>
+          <p:nvPr/>
+        </p:nvSpPr>
+        <p:spPr>
+          <a:xfrm>
+            <a:off x="868680" y="2057400"/>
+            <a:ext cx="1463040" cy="82296"/>
+          </a:xfrm>
+          <a:prstGeom prst="roundRect">
+            <a:avLst/>
+          </a:prstGeom>
+          <a:solidFill>
+            <a:srgbClr val="E8801A"/>
+          </a:solidFill>
+          <a:ln>
+            <a:noFill/>
+          </a:ln>
+          <a:effectLst/>
+        </p:spPr>
+        <p:style>
+          <a:lnRef idx="1">
+            <a:schemeClr val="accent1"/>
+          </a:lnRef>
+          <a:fillRef idx="3">
+            <a:schemeClr val="accent1"/>
+          </a:fillRef>
+          <a:effectRef idx="2">
+            <a:schemeClr val="accent1"/>
+          </a:effectRef>
+          <a:fontRef idx="minor">
+            <a:schemeClr val="lt1"/>
+          </a:fontRef>
+        </p:style>
+        <p:txBody>
+          <a:bodyPr rtlCol="0" anchor="ctr"/>
+          <a:lstStyle/>
+          <a:p>
+            <a:pPr algn="ctr"/>
+          </a:p>
+        </p:txBody>
+      </p:sp>
+      <p:sp>
+        <p:nvSpPr>
+          <p:cNvPr id="5" name="TextBox 4"/>
           <p:cNvSpPr txBox="1"/>
           <p:nvPr/>
         </p:nvSpPr>
         <p:spPr>
           <a:xfrm>
-            <a:off x="822960" y="2194560"/>
+            <a:off x="822960" y="2286000"/>
             <a:ext cx="10515600" cy="2011680"/>
           </a:xfrm>
           <a:prstGeom prst="rect">
@@ -4788,7 +4899,7 @@
       </p:sp>
       <p:sp>
         <p:nvSpPr>
-          <p:cNvPr id="5" name="TextBox 4"/>
+          <p:cNvPr id="6" name="TextBox 5"/>
           <p:cNvSpPr txBox="1"/>
           <p:nvPr/>
         </p:nvSpPr>
@@ -4912,7 +5023,7 @@
                 </a:solidFill>
                 <a:latin typeface="Montserrat"/>
               </a:rPr>
-              <a:t>010 / 016</a:t>
+              <a:t>010 / 017</a:t>
             </a:r>
           </a:p>
         </p:txBody>
@@ -4960,7 +5071,7 @@
         <p:spPr>
           <a:xfrm>
             <a:off x="822960" y="457200"/>
-            <a:ext cx="8229600" cy="365760"/>
+            <a:ext cx="10058400" cy="365760"/>
           </a:xfrm>
           <a:prstGeom prst="rect">
             <a:avLst/>
@@ -4974,13 +5085,13 @@
           <a:lstStyle/>
           <a:p>
             <a:r>
-              <a:rPr sz="1200" b="1" i="0">
-                <a:solidFill>
-                  <a:srgbClr val="64748B"/>
-                </a:solidFill>
-                <a:latin typeface="Montserrat"/>
-              </a:rPr>
-              <a:t>APARTADO 3.8 · SEGURO</a:t>
+              <a:rPr sz="1300" b="1" i="0">
+                <a:solidFill>
+                  <a:srgbClr val="E8801A"/>
+                </a:solidFill>
+                <a:latin typeface="Montserrat"/>
+              </a:rPr>
+              <a:t>APARTADO 3.8 · PERSONAL</a:t>
             </a:r>
           </a:p>
         </p:txBody>
@@ -5008,26 +5119,70 @@
           <a:lstStyle/>
           <a:p>
             <a:r>
-              <a:rPr sz="2700" b="1" i="0">
+              <a:rPr sz="2800" b="1" i="0">
                 <a:solidFill>
                   <a:srgbClr val="1E2761"/>
                 </a:solidFill>
                 <a:latin typeface="Montserrat"/>
               </a:rPr>
-              <a:t>El seguro: 900, 600 y 300</a:t>
-            </a:r>
-          </a:p>
-        </p:txBody>
-      </p:sp>
-      <p:sp>
-        <p:nvSpPr>
-          <p:cNvPr id="7" name="TextBox 6"/>
+              <a:t>Un instalador en plantilla</a:t>
+            </a:r>
+          </a:p>
+        </p:txBody>
+      </p:sp>
+      <p:sp>
+        <p:nvSpPr>
+          <p:cNvPr id="7" name="Rounded Rectangle 6"/>
+          <p:cNvSpPr/>
+          <p:nvPr/>
+        </p:nvSpPr>
+        <p:spPr>
+          <a:xfrm>
+            <a:off x="868680" y="1627632"/>
+            <a:ext cx="2011680" cy="73152"/>
+          </a:xfrm>
+          <a:prstGeom prst="roundRect">
+            <a:avLst/>
+          </a:prstGeom>
+          <a:solidFill>
+            <a:srgbClr val="E8801A"/>
+          </a:solidFill>
+          <a:ln>
+            <a:noFill/>
+          </a:ln>
+          <a:effectLst/>
+        </p:spPr>
+        <p:style>
+          <a:lnRef idx="1">
+            <a:schemeClr val="accent1"/>
+          </a:lnRef>
+          <a:fillRef idx="3">
+            <a:schemeClr val="accent1"/>
+          </a:fillRef>
+          <a:effectRef idx="2">
+            <a:schemeClr val="accent1"/>
+          </a:effectRef>
+          <a:fontRef idx="minor">
+            <a:schemeClr val="lt1"/>
+          </a:fontRef>
+        </p:style>
+        <p:txBody>
+          <a:bodyPr rtlCol="0" anchor="ctr"/>
+          <a:lstStyle/>
+          <a:p>
+            <a:pPr algn="ctr"/>
+          </a:p>
+        </p:txBody>
+      </p:sp>
+      <p:sp>
+        <p:nvSpPr>
+          <p:cNvPr id="8" name="TextBox 7"/>
           <p:cNvSpPr txBox="1"/>
           <p:nvPr/>
         </p:nvSpPr>
         <p:spPr>
           <a:xfrm>
-            <a:off x="822960" y="1920240"/>
+            <a:off x="822960" y="1965960"/>
             <a:ext cx="4983480" cy="4206240"/>
           </a:xfrm>
           <a:prstGeom prst="rect">
@@ -5043,17 +5198,17 @@
           <a:p>
             <a:pPr>
               <a:spcAft>
-                <a:spcPts val="1000"/>
+                <a:spcPts val="1100"/>
               </a:spcAft>
             </a:pPr>
             <a:r>
               <a:rPr sz="1600" b="1" i="0">
                 <a:solidFill>
-                  <a:srgbClr val="2E3A80"/>
-                </a:solidFill>
-                <a:latin typeface="Montserrat"/>
-              </a:rPr>
-              <a:t>•  </a:t>
+                  <a:srgbClr val="E8801A"/>
+                </a:solidFill>
+                <a:latin typeface="Montserrat"/>
+              </a:rPr>
+              <a:t>▸  </a:t>
             </a:r>
             <a:r>
               <a:rPr sz="1600" b="0" i="0">
@@ -5062,23 +5217,23 @@
                 </a:solidFill>
                 <a:latin typeface="Montserrat"/>
               </a:rPr>
-              <a:t>Medios técnicos para trabajar seguro</a:t>
+              <a:t>Categoría igual o superior a la empresa</a:t>
             </a:r>
           </a:p>
           <a:p>
             <a:pPr>
               <a:spcAft>
-                <a:spcPts val="1000"/>
+                <a:spcPts val="1100"/>
               </a:spcAft>
             </a:pPr>
             <a:r>
               <a:rPr sz="1600" b="1" i="0">
                 <a:solidFill>
-                  <a:srgbClr val="2E3A80"/>
-                </a:solidFill>
-                <a:latin typeface="Montserrat"/>
-              </a:rPr>
-              <a:t>•  </a:t>
+                  <a:srgbClr val="E8801A"/>
+                </a:solidFill>
+                <a:latin typeface="Montserrat"/>
+              </a:rPr>
+              <a:t>▸  </a:t>
             </a:r>
             <a:r>
               <a:rPr sz="1600" b="0" i="0">
@@ -5087,23 +5242,23 @@
                 </a:solidFill>
                 <a:latin typeface="Montserrat"/>
               </a:rPr>
-              <a:t>A = 900.000 € por siniestro</a:t>
+              <a:t>En plantilla y a jornada completa</a:t>
             </a:r>
           </a:p>
           <a:p>
             <a:pPr>
               <a:spcAft>
-                <a:spcPts val="1000"/>
+                <a:spcPts val="1100"/>
               </a:spcAft>
             </a:pPr>
             <a:r>
               <a:rPr sz="1600" b="1" i="0">
                 <a:solidFill>
-                  <a:srgbClr val="2E3A80"/>
-                </a:solidFill>
-                <a:latin typeface="Montserrat"/>
-              </a:rPr>
-              <a:t>•  </a:t>
+                  <a:srgbClr val="E8801A"/>
+                </a:solidFill>
+                <a:latin typeface="Montserrat"/>
+              </a:rPr>
+              <a:t>▸  </a:t>
             </a:r>
             <a:r>
               <a:rPr sz="1600" b="0" i="0">
@@ -5112,23 +5267,23 @@
                 </a:solidFill>
                 <a:latin typeface="Montserrat"/>
               </a:rPr>
-              <a:t>B = 600.000 € por siniestro</a:t>
+              <a:t>Vale el socio o el autónomo con carné</a:t>
             </a:r>
           </a:p>
           <a:p>
             <a:pPr>
               <a:spcAft>
-                <a:spcPts val="1000"/>
+                <a:spcPts val="1100"/>
               </a:spcAft>
             </a:pPr>
             <a:r>
               <a:rPr sz="1600" b="1" i="0">
                 <a:solidFill>
-                  <a:srgbClr val="2E3A80"/>
-                </a:solidFill>
-                <a:latin typeface="Montserrat"/>
-              </a:rPr>
-              <a:t>•  </a:t>
+                  <a:srgbClr val="E8801A"/>
+                </a:solidFill>
+                <a:latin typeface="Montserrat"/>
+              </a:rPr>
+              <a:t>▸  </a:t>
             </a:r>
             <a:r>
               <a:rPr sz="1600" b="0" i="0">
@@ -5137,14 +5292,14 @@
                 </a:solidFill>
                 <a:latin typeface="Montserrat"/>
               </a:rPr>
-              <a:t>C = 300.000 € por siniestro</a:t>
-            </a:r>
-          </a:p>
-        </p:txBody>
-      </p:sp>
-      <p:sp>
-        <p:nvSpPr>
-          <p:cNvPr id="8" name="imgph" descr="IMGQ:insurance policy document with signature"/>
+              <a:t>O dos a media jornada que cubran el horario</a:t>
+            </a:r>
+          </a:p>
+        </p:txBody>
+      </p:sp>
+      <p:sp>
+        <p:nvSpPr>
+          <p:cNvPr id="9" name="imgph" descr="IMGQ:team of gas installers working together"/>
           <p:cNvSpPr/>
           <p:nvPr/>
         </p:nvSpPr>
@@ -5190,7 +5345,7 @@
       </p:sp>
       <p:sp>
         <p:nvSpPr>
-          <p:cNvPr id="9" name="TextBox 8"/>
+          <p:cNvPr id="10" name="TextBox 9"/>
           <p:cNvSpPr txBox="1"/>
           <p:nvPr/>
         </p:nvSpPr>
@@ -5230,7 +5385,7 @@
                 </a:solidFill>
                 <a:latin typeface="Montserrat"/>
               </a:rPr>
-              <a:t>insurance policy document with signature</a:t>
+              <a:t>team of gas installers working together</a:t>
             </a:r>
           </a:p>
         </p:txBody>
@@ -5327,7 +5482,7 @@
                 </a:solidFill>
                 <a:latin typeface="Montserrat"/>
               </a:rPr>
-              <a:t>011 / 016</a:t>
+              <a:t>011 / 017</a:t>
             </a:r>
           </a:p>
         </p:txBody>
@@ -5375,7 +5530,7 @@
         <p:spPr>
           <a:xfrm>
             <a:off x="822960" y="457200"/>
-            <a:ext cx="8229600" cy="365760"/>
+            <a:ext cx="10058400" cy="365760"/>
           </a:xfrm>
           <a:prstGeom prst="rect">
             <a:avLst/>
@@ -5389,13 +5544,13 @@
           <a:lstStyle/>
           <a:p>
             <a:r>
-              <a:rPr sz="1200" b="1" i="0">
-                <a:solidFill>
-                  <a:srgbClr val="64748B"/>
-                </a:solidFill>
-                <a:latin typeface="Montserrat"/>
-              </a:rPr>
-              <a:t>APARTADO 3.9 · PROHIBICIÓN</a:t>
+              <a:rPr sz="1300" b="1" i="0">
+                <a:solidFill>
+                  <a:srgbClr val="E8801A"/>
+                </a:solidFill>
+                <a:latin typeface="Montserrat"/>
+              </a:rPr>
+              <a:t>APARTADO 3.8 · SEGURO</a:t>
             </a:r>
           </a:p>
         </p:txBody>
@@ -5423,26 +5578,70 @@
           <a:lstStyle/>
           <a:p>
             <a:r>
-              <a:rPr sz="2700" b="1" i="0">
+              <a:rPr sz="2800" b="1" i="0">
                 <a:solidFill>
                   <a:srgbClr val="1E2761"/>
                 </a:solidFill>
                 <a:latin typeface="Montserrat"/>
               </a:rPr>
-              <a:t>Nada de vender boletines</a:t>
-            </a:r>
-          </a:p>
-        </p:txBody>
-      </p:sp>
-      <p:sp>
-        <p:nvSpPr>
-          <p:cNvPr id="7" name="TextBox 6"/>
+              <a:t>El seguro: 900, 600 y 300</a:t>
+            </a:r>
+          </a:p>
+        </p:txBody>
+      </p:sp>
+      <p:sp>
+        <p:nvSpPr>
+          <p:cNvPr id="7" name="Rounded Rectangle 6"/>
+          <p:cNvSpPr/>
+          <p:nvPr/>
+        </p:nvSpPr>
+        <p:spPr>
+          <a:xfrm>
+            <a:off x="868680" y="1627632"/>
+            <a:ext cx="2011680" cy="73152"/>
+          </a:xfrm>
+          <a:prstGeom prst="roundRect">
+            <a:avLst/>
+          </a:prstGeom>
+          <a:solidFill>
+            <a:srgbClr val="E8801A"/>
+          </a:solidFill>
+          <a:ln>
+            <a:noFill/>
+          </a:ln>
+          <a:effectLst/>
+        </p:spPr>
+        <p:style>
+          <a:lnRef idx="1">
+            <a:schemeClr val="accent1"/>
+          </a:lnRef>
+          <a:fillRef idx="3">
+            <a:schemeClr val="accent1"/>
+          </a:fillRef>
+          <a:effectRef idx="2">
+            <a:schemeClr val="accent1"/>
+          </a:effectRef>
+          <a:fontRef idx="minor">
+            <a:schemeClr val="lt1"/>
+          </a:fontRef>
+        </p:style>
+        <p:txBody>
+          <a:bodyPr rtlCol="0" anchor="ctr"/>
+          <a:lstStyle/>
+          <a:p>
+            <a:pPr algn="ctr"/>
+          </a:p>
+        </p:txBody>
+      </p:sp>
+      <p:sp>
+        <p:nvSpPr>
+          <p:cNvPr id="8" name="TextBox 7"/>
           <p:cNvSpPr txBox="1"/>
           <p:nvPr/>
         </p:nvSpPr>
         <p:spPr>
           <a:xfrm>
-            <a:off x="822960" y="1920240"/>
+            <a:off x="822960" y="1965960"/>
             <a:ext cx="4983480" cy="4206240"/>
           </a:xfrm>
           <a:prstGeom prst="rect">
@@ -5458,17 +5657,17 @@
           <a:p>
             <a:pPr>
               <a:spcAft>
-                <a:spcPts val="1000"/>
+                <a:spcPts val="1100"/>
               </a:spcAft>
             </a:pPr>
             <a:r>
               <a:rPr sz="1600" b="1" i="0">
                 <a:solidFill>
-                  <a:srgbClr val="2E3A80"/>
-                </a:solidFill>
-                <a:latin typeface="Montserrat"/>
-              </a:rPr>
-              <a:t>•  </a:t>
+                  <a:srgbClr val="E8801A"/>
+                </a:solidFill>
+                <a:latin typeface="Montserrat"/>
+              </a:rPr>
+              <a:t>▸  </a:t>
             </a:r>
             <a:r>
               <a:rPr sz="1600" b="0" i="0">
@@ -5477,23 +5676,23 @@
                 </a:solidFill>
                 <a:latin typeface="Montserrat"/>
               </a:rPr>
-              <a:t>No cedas certificados de obras ajenas</a:t>
+              <a:t>Medios técnicos para trabajar seguro</a:t>
             </a:r>
           </a:p>
           <a:p>
             <a:pPr>
               <a:spcAft>
-                <a:spcPts val="1000"/>
+                <a:spcPts val="1100"/>
               </a:spcAft>
             </a:pPr>
             <a:r>
               <a:rPr sz="1600" b="1" i="0">
                 <a:solidFill>
-                  <a:srgbClr val="2E3A80"/>
-                </a:solidFill>
-                <a:latin typeface="Montserrat"/>
-              </a:rPr>
-              <a:t>•  </a:t>
+                  <a:srgbClr val="E8801A"/>
+                </a:solidFill>
+                <a:latin typeface="Montserrat"/>
+              </a:rPr>
+              <a:t>▸  </a:t>
             </a:r>
             <a:r>
               <a:rPr sz="1600" b="0" i="0">
@@ -5502,23 +5701,23 @@
                 </a:solidFill>
                 <a:latin typeface="Montserrat"/>
               </a:rPr>
-              <a:t>Si no la montas, no la firmas</a:t>
+              <a:t>A = 900.000 € por siniestro</a:t>
             </a:r>
           </a:p>
           <a:p>
             <a:pPr>
               <a:spcAft>
-                <a:spcPts val="1000"/>
+                <a:spcPts val="1100"/>
               </a:spcAft>
             </a:pPr>
             <a:r>
               <a:rPr sz="1600" b="1" i="0">
                 <a:solidFill>
-                  <a:srgbClr val="2E3A80"/>
-                </a:solidFill>
-                <a:latin typeface="Montserrat"/>
-              </a:rPr>
-              <a:t>•  </a:t>
+                  <a:srgbClr val="E8801A"/>
+                </a:solidFill>
+                <a:latin typeface="Montserrat"/>
+              </a:rPr>
+              <a:t>▸  </a:t>
             </a:r>
             <a:r>
               <a:rPr sz="1600" b="0" i="0">
@@ -5527,14 +5726,39 @@
                 </a:solidFill>
                 <a:latin typeface="Montserrat"/>
               </a:rPr>
-              <a:t>De las infracciones más perseguidas</a:t>
-            </a:r>
-          </a:p>
-        </p:txBody>
-      </p:sp>
-      <p:sp>
-        <p:nvSpPr>
-          <p:cNvPr id="8" name="imgph" descr="IMGQ:gas installation certificate with stamp"/>
+              <a:t>B = 600.000 € por siniestro</a:t>
+            </a:r>
+          </a:p>
+          <a:p>
+            <a:pPr>
+              <a:spcAft>
+                <a:spcPts val="1100"/>
+              </a:spcAft>
+            </a:pPr>
+            <a:r>
+              <a:rPr sz="1600" b="1" i="0">
+                <a:solidFill>
+                  <a:srgbClr val="E8801A"/>
+                </a:solidFill>
+                <a:latin typeface="Montserrat"/>
+              </a:rPr>
+              <a:t>▸  </a:t>
+            </a:r>
+            <a:r>
+              <a:rPr sz="1600" b="0" i="0">
+                <a:solidFill>
+                  <a:srgbClr val="1B2330"/>
+                </a:solidFill>
+                <a:latin typeface="Montserrat"/>
+              </a:rPr>
+              <a:t>C = 300.000 € por siniestro</a:t>
+            </a:r>
+          </a:p>
+        </p:txBody>
+      </p:sp>
+      <p:sp>
+        <p:nvSpPr>
+          <p:cNvPr id="9" name="imgph" descr="IMGQ:insurance policy document with signature"/>
           <p:cNvSpPr/>
           <p:nvPr/>
         </p:nvSpPr>
@@ -5580,7 +5804,7 @@
       </p:sp>
       <p:sp>
         <p:nvSpPr>
-          <p:cNvPr id="9" name="TextBox 8"/>
+          <p:cNvPr id="10" name="TextBox 9"/>
           <p:cNvSpPr txBox="1"/>
           <p:nvPr/>
         </p:nvSpPr>
@@ -5620,7 +5844,7 @@
                 </a:solidFill>
                 <a:latin typeface="Montserrat"/>
               </a:rPr>
-              <a:t>gas installation certificate with stamp</a:t>
+              <a:t>insurance policy document with signature</a:t>
             </a:r>
           </a:p>
         </p:txBody>
@@ -5717,7 +5941,7 @@
                 </a:solidFill>
                 <a:latin typeface="Montserrat"/>
               </a:rPr>
-              <a:t>012 / 016</a:t>
+              <a:t>012 / 017</a:t>
             </a:r>
           </a:p>
         </p:txBody>
@@ -5765,7 +5989,7 @@
         <p:spPr>
           <a:xfrm>
             <a:off x="822960" y="457200"/>
-            <a:ext cx="8229600" cy="365760"/>
+            <a:ext cx="10058400" cy="365760"/>
           </a:xfrm>
           <a:prstGeom prst="rect">
             <a:avLst/>
@@ -5779,13 +6003,13 @@
           <a:lstStyle/>
           <a:p>
             <a:r>
-              <a:rPr sz="1200" b="1" i="0">
-                <a:solidFill>
-                  <a:srgbClr val="64748B"/>
-                </a:solidFill>
-                <a:latin typeface="Montserrat"/>
-              </a:rPr>
-              <a:t>APARTADO 3.10 · RÉGIMEN DE CONTROL</a:t>
+              <a:rPr sz="1300" b="1" i="0">
+                <a:solidFill>
+                  <a:srgbClr val="E8801A"/>
+                </a:solidFill>
+                <a:latin typeface="Montserrat"/>
+              </a:rPr>
+              <a:t>APARTADO 3.9 · PROHIBICIÓN</a:t>
             </a:r>
           </a:p>
         </p:txBody>
@@ -5813,26 +6037,70 @@
           <a:lstStyle/>
           <a:p>
             <a:r>
-              <a:rPr sz="2700" b="1" i="0">
+              <a:rPr sz="2800" b="1" i="0">
                 <a:solidFill>
                   <a:srgbClr val="1E2761"/>
                 </a:solidFill>
                 <a:latin typeface="Montserrat"/>
               </a:rPr>
-              <a:t>Dos plazos que se confunden</a:t>
-            </a:r>
-          </a:p>
-        </p:txBody>
-      </p:sp>
-      <p:sp>
-        <p:nvSpPr>
-          <p:cNvPr id="7" name="TextBox 6"/>
+              <a:t>Nada de vender boletines</a:t>
+            </a:r>
+          </a:p>
+        </p:txBody>
+      </p:sp>
+      <p:sp>
+        <p:nvSpPr>
+          <p:cNvPr id="7" name="Rounded Rectangle 6"/>
+          <p:cNvSpPr/>
+          <p:nvPr/>
+        </p:nvSpPr>
+        <p:spPr>
+          <a:xfrm>
+            <a:off x="868680" y="1627632"/>
+            <a:ext cx="2011680" cy="73152"/>
+          </a:xfrm>
+          <a:prstGeom prst="roundRect">
+            <a:avLst/>
+          </a:prstGeom>
+          <a:solidFill>
+            <a:srgbClr val="E8801A"/>
+          </a:solidFill>
+          <a:ln>
+            <a:noFill/>
+          </a:ln>
+          <a:effectLst/>
+        </p:spPr>
+        <p:style>
+          <a:lnRef idx="1">
+            <a:schemeClr val="accent1"/>
+          </a:lnRef>
+          <a:fillRef idx="3">
+            <a:schemeClr val="accent1"/>
+          </a:fillRef>
+          <a:effectRef idx="2">
+            <a:schemeClr val="accent1"/>
+          </a:effectRef>
+          <a:fontRef idx="minor">
+            <a:schemeClr val="lt1"/>
+          </a:fontRef>
+        </p:style>
+        <p:txBody>
+          <a:bodyPr rtlCol="0" anchor="ctr"/>
+          <a:lstStyle/>
+          <a:p>
+            <a:pPr algn="ctr"/>
+          </a:p>
+        </p:txBody>
+      </p:sp>
+      <p:sp>
+        <p:nvSpPr>
+          <p:cNvPr id="8" name="TextBox 7"/>
           <p:cNvSpPr txBox="1"/>
           <p:nvPr/>
         </p:nvSpPr>
         <p:spPr>
           <a:xfrm>
-            <a:off x="822960" y="1920240"/>
+            <a:off x="822960" y="1965960"/>
             <a:ext cx="4983480" cy="4206240"/>
           </a:xfrm>
           <a:prstGeom prst="rect">
@@ -5848,17 +6116,17 @@
           <a:p>
             <a:pPr>
               <a:spcAft>
-                <a:spcPts val="1000"/>
+                <a:spcPts val="1100"/>
               </a:spcAft>
             </a:pPr>
             <a:r>
               <a:rPr sz="1600" b="1" i="0">
                 <a:solidFill>
-                  <a:srgbClr val="2E3A80"/>
-                </a:solidFill>
-                <a:latin typeface="Montserrat"/>
-              </a:rPr>
-              <a:t>•  </a:t>
+                  <a:srgbClr val="E8801A"/>
+                </a:solidFill>
+                <a:latin typeface="Montserrat"/>
+              </a:rPr>
+              <a:t>▸  </a:t>
             </a:r>
             <a:r>
               <a:rPr sz="1600" b="0" i="0">
@@ -5867,23 +6135,23 @@
                 </a:solidFill>
                 <a:latin typeface="Montserrat"/>
               </a:rPr>
-              <a:t>15 días naturales para alegar</a:t>
+              <a:t>No cedas certificados de obras ajenas</a:t>
             </a:r>
           </a:p>
           <a:p>
             <a:pPr>
               <a:spcAft>
-                <a:spcPts val="1000"/>
+                <a:spcPts val="1100"/>
               </a:spcAft>
             </a:pPr>
             <a:r>
               <a:rPr sz="1600" b="1" i="0">
                 <a:solidFill>
-                  <a:srgbClr val="2E3A80"/>
-                </a:solidFill>
-                <a:latin typeface="Montserrat"/>
-              </a:rPr>
-              <a:t>•  </a:t>
+                  <a:srgbClr val="E8801A"/>
+                </a:solidFill>
+                <a:latin typeface="Montserrat"/>
+              </a:rPr>
+              <a:t>▸  </a:t>
             </a:r>
             <a:r>
               <a:rPr sz="1600" b="0" i="0">
@@ -5892,23 +6160,23 @@
                 </a:solidFill>
                 <a:latin typeface="Montserrat"/>
               </a:rPr>
-              <a:t>Suspensión cautelar: máximo 3 meses</a:t>
+              <a:t>Si no la montas, no la firmas</a:t>
             </a:r>
           </a:p>
           <a:p>
             <a:pPr>
               <a:spcAft>
-                <a:spcPts val="1000"/>
+                <a:spcPts val="1100"/>
               </a:spcAft>
             </a:pPr>
             <a:r>
               <a:rPr sz="1600" b="1" i="0">
                 <a:solidFill>
-                  <a:srgbClr val="2E3A80"/>
-                </a:solidFill>
-                <a:latin typeface="Montserrat"/>
-              </a:rPr>
-              <a:t>•  </a:t>
+                  <a:srgbClr val="E8801A"/>
+                </a:solidFill>
+                <a:latin typeface="Montserrat"/>
+              </a:rPr>
+              <a:t>▸  </a:t>
             </a:r>
             <a:r>
               <a:rPr sz="1600" b="0" i="0">
@@ -5917,14 +6185,14 @@
                 </a:solidFill>
                 <a:latin typeface="Montserrat"/>
               </a:rPr>
-              <a:t>No los confundas con el mes del cese</a:t>
-            </a:r>
-          </a:p>
-        </p:txBody>
-      </p:sp>
-      <p:sp>
-        <p:nvSpPr>
-          <p:cNvPr id="8" name="imgph" descr="IMGQ:calendar with marked deadline dates"/>
+              <a:t>De las infracciones más perseguidas</a:t>
+            </a:r>
+          </a:p>
+        </p:txBody>
+      </p:sp>
+      <p:sp>
+        <p:nvSpPr>
+          <p:cNvPr id="9" name="imgph" descr="IMGQ:gas installation certificate with stamp"/>
           <p:cNvSpPr/>
           <p:nvPr/>
         </p:nvSpPr>
@@ -5970,7 +6238,7 @@
       </p:sp>
       <p:sp>
         <p:nvSpPr>
-          <p:cNvPr id="9" name="TextBox 8"/>
+          <p:cNvPr id="10" name="TextBox 9"/>
           <p:cNvSpPr txBox="1"/>
           <p:nvPr/>
         </p:nvSpPr>
@@ -6010,7 +6278,7 @@
                 </a:solidFill>
                 <a:latin typeface="Montserrat"/>
               </a:rPr>
-              <a:t>calendar with marked deadline dates</a:t>
+              <a:t>gas installation certificate with stamp</a:t>
             </a:r>
           </a:p>
         </p:txBody>
@@ -6107,7 +6375,7 @@
                 </a:solidFill>
                 <a:latin typeface="Montserrat"/>
               </a:rPr>
-              <a:t>013 / 016</a:t>
+              <a:t>013 / 017</a:t>
             </a:r>
           </a:p>
         </p:txBody>
@@ -6155,7 +6423,7 @@
         <p:spPr>
           <a:xfrm>
             <a:off x="822960" y="457200"/>
-            <a:ext cx="8229600" cy="365760"/>
+            <a:ext cx="10058400" cy="365760"/>
           </a:xfrm>
           <a:prstGeom prst="rect">
             <a:avLst/>
@@ -6169,13 +6437,13 @@
           <a:lstStyle/>
           <a:p>
             <a:r>
-              <a:rPr sz="1200" b="1" i="0">
-                <a:solidFill>
-                  <a:srgbClr val="64748B"/>
-                </a:solidFill>
-                <a:latin typeface="Montserrat"/>
-              </a:rPr>
-              <a:t>APARTADO 3.12 · OBLIGACIONES</a:t>
+              <a:rPr sz="1300" b="1" i="0">
+                <a:solidFill>
+                  <a:srgbClr val="E8801A"/>
+                </a:solidFill>
+                <a:latin typeface="Montserrat"/>
+              </a:rPr>
+              <a:t>APARTADO 3.10 · RÉGIMEN DE CONTROL</a:t>
             </a:r>
           </a:p>
         </p:txBody>
@@ -6203,26 +6471,70 @@
           <a:lstStyle/>
           <a:p>
             <a:r>
-              <a:rPr sz="2700" b="1" i="0">
+              <a:rPr sz="2800" b="1" i="0">
                 <a:solidFill>
                   <a:srgbClr val="1E2761"/>
                 </a:solidFill>
                 <a:latin typeface="Montserrat"/>
               </a:rPr>
-              <a:t>Certificados, garantía y registros</a:t>
-            </a:r>
-          </a:p>
-        </p:txBody>
-      </p:sp>
-      <p:sp>
-        <p:nvSpPr>
-          <p:cNvPr id="7" name="TextBox 6"/>
+              <a:t>Dos plazos que se confunden</a:t>
+            </a:r>
+          </a:p>
+        </p:txBody>
+      </p:sp>
+      <p:sp>
+        <p:nvSpPr>
+          <p:cNvPr id="7" name="Rounded Rectangle 6"/>
+          <p:cNvSpPr/>
+          <p:nvPr/>
+        </p:nvSpPr>
+        <p:spPr>
+          <a:xfrm>
+            <a:off x="868680" y="1627632"/>
+            <a:ext cx="2011680" cy="73152"/>
+          </a:xfrm>
+          <a:prstGeom prst="roundRect">
+            <a:avLst/>
+          </a:prstGeom>
+          <a:solidFill>
+            <a:srgbClr val="E8801A"/>
+          </a:solidFill>
+          <a:ln>
+            <a:noFill/>
+          </a:ln>
+          <a:effectLst/>
+        </p:spPr>
+        <p:style>
+          <a:lnRef idx="1">
+            <a:schemeClr val="accent1"/>
+          </a:lnRef>
+          <a:fillRef idx="3">
+            <a:schemeClr val="accent1"/>
+          </a:fillRef>
+          <a:effectRef idx="2">
+            <a:schemeClr val="accent1"/>
+          </a:effectRef>
+          <a:fontRef idx="minor">
+            <a:schemeClr val="lt1"/>
+          </a:fontRef>
+        </p:style>
+        <p:txBody>
+          <a:bodyPr rtlCol="0" anchor="ctr"/>
+          <a:lstStyle/>
+          <a:p>
+            <a:pPr algn="ctr"/>
+          </a:p>
+        </p:txBody>
+      </p:sp>
+      <p:sp>
+        <p:nvSpPr>
+          <p:cNvPr id="8" name="TextBox 7"/>
           <p:cNvSpPr txBox="1"/>
           <p:nvPr/>
         </p:nvSpPr>
         <p:spPr>
           <a:xfrm>
-            <a:off x="822960" y="1920240"/>
+            <a:off x="822960" y="1965960"/>
             <a:ext cx="4983480" cy="4206240"/>
           </a:xfrm>
           <a:prstGeom prst="rect">
@@ -6238,17 +6550,17 @@
           <a:p>
             <a:pPr>
               <a:spcAft>
-                <a:spcPts val="1000"/>
+                <a:spcPts val="1100"/>
               </a:spcAft>
             </a:pPr>
             <a:r>
               <a:rPr sz="1600" b="1" i="0">
                 <a:solidFill>
-                  <a:srgbClr val="2E3A80"/>
-                </a:solidFill>
-                <a:latin typeface="Montserrat"/>
-              </a:rPr>
-              <a:t>•  </a:t>
+                  <a:srgbClr val="E8801A"/>
+                </a:solidFill>
+                <a:latin typeface="Montserrat"/>
+              </a:rPr>
+              <a:t>▸  </a:t>
             </a:r>
             <a:r>
               <a:rPr sz="1600" b="0" i="0">
@@ -6257,23 +6569,23 @@
                 </a:solidFill>
                 <a:latin typeface="Montserrat"/>
               </a:rPr>
-              <a:t>Emitir los certificados reglamentarios</a:t>
+              <a:t>15 días naturales para alegar</a:t>
             </a:r>
           </a:p>
           <a:p>
             <a:pPr>
               <a:spcAft>
-                <a:spcPts val="1000"/>
+                <a:spcPts val="1100"/>
               </a:spcAft>
             </a:pPr>
             <a:r>
               <a:rPr sz="1600" b="1" i="0">
                 <a:solidFill>
-                  <a:srgbClr val="2E3A80"/>
-                </a:solidFill>
-                <a:latin typeface="Montserrat"/>
-              </a:rPr>
-              <a:t>•  </a:t>
+                  <a:srgbClr val="E8801A"/>
+                </a:solidFill>
+                <a:latin typeface="Montserrat"/>
+              </a:rPr>
+              <a:t>▸  </a:t>
             </a:r>
             <a:r>
               <a:rPr sz="1600" b="0" i="0">
@@ -6282,23 +6594,23 @@
                 </a:solidFill>
                 <a:latin typeface="Montserrat"/>
               </a:rPr>
-              <a:t>Garantía de 4 años por mala ejecución</a:t>
+              <a:t>Suspensión cautelar: máximo 3 meses</a:t>
             </a:r>
           </a:p>
           <a:p>
             <a:pPr>
               <a:spcAft>
-                <a:spcPts val="1000"/>
+                <a:spcPts val="1100"/>
               </a:spcAft>
             </a:pPr>
             <a:r>
               <a:rPr sz="1600" b="1" i="0">
                 <a:solidFill>
-                  <a:srgbClr val="2E3A80"/>
-                </a:solidFill>
-                <a:latin typeface="Montserrat"/>
-              </a:rPr>
-              <a:t>•  </a:t>
+                  <a:srgbClr val="E8801A"/>
+                </a:solidFill>
+                <a:latin typeface="Montserrat"/>
+              </a:rPr>
+              <a:t>▸  </a:t>
             </a:r>
             <a:r>
               <a:rPr sz="1600" b="0" i="0">
@@ -6307,39 +6619,14 @@
                 </a:solidFill>
                 <a:latin typeface="Montserrat"/>
               </a:rPr>
-              <a:t>Un registro para la comunidad autónoma</a:t>
-            </a:r>
-          </a:p>
-          <a:p>
-            <a:pPr>
-              <a:spcAft>
-                <a:spcPts val="1000"/>
-              </a:spcAft>
-            </a:pPr>
-            <a:r>
-              <a:rPr sz="1600" b="1" i="0">
-                <a:solidFill>
-                  <a:srgbClr val="2E3A80"/>
-                </a:solidFill>
-                <a:latin typeface="Montserrat"/>
-              </a:rPr>
-              <a:t>•  </a:t>
-            </a:r>
-            <a:r>
-              <a:rPr sz="1600" b="0" i="0">
-                <a:solidFill>
-                  <a:srgbClr val="1B2330"/>
-                </a:solidFill>
-                <a:latin typeface="Montserrat"/>
-              </a:rPr>
-              <a:t>Otro registro para la distribuidora</a:t>
-            </a:r>
-          </a:p>
-        </p:txBody>
-      </p:sp>
-      <p:sp>
-        <p:nvSpPr>
-          <p:cNvPr id="8" name="imgph" descr="IMGQ:filing cabinet with document records"/>
+              <a:t>No los confundas con el mes del cese</a:t>
+            </a:r>
+          </a:p>
+        </p:txBody>
+      </p:sp>
+      <p:sp>
+        <p:nvSpPr>
+          <p:cNvPr id="9" name="imgph" descr="IMGQ:calendar with marked deadline dates"/>
           <p:cNvSpPr/>
           <p:nvPr/>
         </p:nvSpPr>
@@ -6385,7 +6672,7 @@
       </p:sp>
       <p:sp>
         <p:nvSpPr>
-          <p:cNvPr id="9" name="TextBox 8"/>
+          <p:cNvPr id="10" name="TextBox 9"/>
           <p:cNvSpPr txBox="1"/>
           <p:nvPr/>
         </p:nvSpPr>
@@ -6425,7 +6712,7 @@
                 </a:solidFill>
                 <a:latin typeface="Montserrat"/>
               </a:rPr>
-              <a:t>filing cabinet with document records</a:t>
+              <a:t>calendar with marked deadline dates</a:t>
             </a:r>
           </a:p>
         </p:txBody>
@@ -6522,7 +6809,7 @@
                 </a:solidFill>
                 <a:latin typeface="Montserrat"/>
               </a:rPr>
-              <a:t>014 / 016</a:t>
+              <a:t>014 / 017</a:t>
             </a:r>
           </a:p>
         </p:txBody>
@@ -6570,7 +6857,7 @@
         <p:spPr>
           <a:xfrm>
             <a:off x="822960" y="457200"/>
-            <a:ext cx="8229600" cy="365760"/>
+            <a:ext cx="10058400" cy="365760"/>
           </a:xfrm>
           <a:prstGeom prst="rect">
             <a:avLst/>
@@ -6584,13 +6871,13 @@
           <a:lstStyle/>
           <a:p>
             <a:r>
-              <a:rPr sz="1200" b="1" i="0">
-                <a:solidFill>
-                  <a:srgbClr val="64748B"/>
-                </a:solidFill>
-                <a:latin typeface="Montserrat"/>
-              </a:rPr>
-              <a:t>APARTADO 4.1 · APARATOS GRANDES</a:t>
+              <a:rPr sz="1300" b="1" i="0">
+                <a:solidFill>
+                  <a:srgbClr val="E8801A"/>
+                </a:solidFill>
+                <a:latin typeface="Montserrat"/>
+              </a:rPr>
+              <a:t>APARTADO 3.12 · OBLIGACIONES</a:t>
             </a:r>
           </a:p>
         </p:txBody>
@@ -6618,26 +6905,70 @@
           <a:lstStyle/>
           <a:p>
             <a:r>
-              <a:rPr sz="2700" b="1" i="0">
+              <a:rPr sz="2800" b="1" i="0">
                 <a:solidFill>
                   <a:srgbClr val="1E2761"/>
                 </a:solidFill>
                 <a:latin typeface="Montserrat"/>
               </a:rPr>
-              <a:t>Los aparatos gordos piden un plus</a:t>
-            </a:r>
-          </a:p>
-        </p:txBody>
-      </p:sp>
-      <p:sp>
-        <p:nvSpPr>
-          <p:cNvPr id="7" name="TextBox 6"/>
+              <a:t>Certificados, garantía y registros</a:t>
+            </a:r>
+          </a:p>
+        </p:txBody>
+      </p:sp>
+      <p:sp>
+        <p:nvSpPr>
+          <p:cNvPr id="7" name="Rounded Rectangle 6"/>
+          <p:cNvSpPr/>
+          <p:nvPr/>
+        </p:nvSpPr>
+        <p:spPr>
+          <a:xfrm>
+            <a:off x="868680" y="1627632"/>
+            <a:ext cx="2011680" cy="73152"/>
+          </a:xfrm>
+          <a:prstGeom prst="roundRect">
+            <a:avLst/>
+          </a:prstGeom>
+          <a:solidFill>
+            <a:srgbClr val="E8801A"/>
+          </a:solidFill>
+          <a:ln>
+            <a:noFill/>
+          </a:ln>
+          <a:effectLst/>
+        </p:spPr>
+        <p:style>
+          <a:lnRef idx="1">
+            <a:schemeClr val="accent1"/>
+          </a:lnRef>
+          <a:fillRef idx="3">
+            <a:schemeClr val="accent1"/>
+          </a:fillRef>
+          <a:effectRef idx="2">
+            <a:schemeClr val="accent1"/>
+          </a:effectRef>
+          <a:fontRef idx="minor">
+            <a:schemeClr val="lt1"/>
+          </a:fontRef>
+        </p:style>
+        <p:txBody>
+          <a:bodyPr rtlCol="0" anchor="ctr"/>
+          <a:lstStyle/>
+          <a:p>
+            <a:pPr algn="ctr"/>
+          </a:p>
+        </p:txBody>
+      </p:sp>
+      <p:sp>
+        <p:nvSpPr>
+          <p:cNvPr id="8" name="TextBox 7"/>
           <p:cNvSpPr txBox="1"/>
           <p:nvPr/>
         </p:nvSpPr>
         <p:spPr>
           <a:xfrm>
-            <a:off x="822960" y="1920240"/>
+            <a:off x="822960" y="1965960"/>
             <a:ext cx="4983480" cy="4206240"/>
           </a:xfrm>
           <a:prstGeom prst="rect">
@@ -6653,17 +6984,17 @@
           <a:p>
             <a:pPr>
               <a:spcAft>
-                <a:spcPts val="1000"/>
+                <a:spcPts val="1100"/>
               </a:spcAft>
             </a:pPr>
             <a:r>
               <a:rPr sz="1600" b="1" i="0">
                 <a:solidFill>
-                  <a:srgbClr val="2E3A80"/>
-                </a:solidFill>
-                <a:latin typeface="Montserrat"/>
-              </a:rPr>
-              <a:t>•  </a:t>
+                  <a:srgbClr val="E8801A"/>
+                </a:solidFill>
+                <a:latin typeface="Montserrat"/>
+              </a:rPr>
+              <a:t>▸  </a:t>
             </a:r>
             <a:r>
               <a:rPr sz="1600" b="0" i="0">
@@ -6672,23 +7003,23 @@
                 </a:solidFill>
                 <a:latin typeface="Montserrat"/>
               </a:rPr>
-              <a:t>Conducidos &gt; 24,4 kW y vitro cubierta</a:t>
+              <a:t>Emitir los certificados reglamentarios</a:t>
             </a:r>
           </a:p>
           <a:p>
             <a:pPr>
               <a:spcAft>
-                <a:spcPts val="1000"/>
+                <a:spcPts val="1100"/>
               </a:spcAft>
             </a:pPr>
             <a:r>
               <a:rPr sz="1600" b="1" i="0">
                 <a:solidFill>
-                  <a:srgbClr val="2E3A80"/>
-                </a:solidFill>
-                <a:latin typeface="Montserrat"/>
-              </a:rPr>
-              <a:t>•  </a:t>
+                  <a:srgbClr val="E8801A"/>
+                </a:solidFill>
+                <a:latin typeface="Montserrat"/>
+              </a:rPr>
+              <a:t>▸  </a:t>
             </a:r>
             <a:r>
               <a:rPr sz="1600" b="0" i="0">
@@ -6697,23 +7028,23 @@
                 </a:solidFill>
                 <a:latin typeface="Montserrat"/>
               </a:rPr>
-              <a:t>Cualquier categoría puede acreditarlo</a:t>
+              <a:t>Garantía de 4 años por mala ejecución</a:t>
             </a:r>
           </a:p>
           <a:p>
             <a:pPr>
               <a:spcAft>
-                <a:spcPts val="1000"/>
+                <a:spcPts val="1100"/>
               </a:spcAft>
             </a:pPr>
             <a:r>
               <a:rPr sz="1600" b="1" i="0">
                 <a:solidFill>
-                  <a:srgbClr val="2E3A80"/>
-                </a:solidFill>
-                <a:latin typeface="Montserrat"/>
-              </a:rPr>
-              <a:t>•  </a:t>
+                  <a:srgbClr val="E8801A"/>
+                </a:solidFill>
+                <a:latin typeface="Montserrat"/>
+              </a:rPr>
+              <a:t>▸  </a:t>
             </a:r>
             <a:r>
               <a:rPr sz="1600" b="0" i="0">
@@ -6722,23 +7053,23 @@
                 </a:solidFill>
                 <a:latin typeface="Montserrat"/>
               </a:rPr>
-              <a:t>Vía más habitual: acreditación del fabricante</a:t>
+              <a:t>Un registro para la comunidad autónoma</a:t>
             </a:r>
           </a:p>
           <a:p>
             <a:pPr>
               <a:spcAft>
-                <a:spcPts val="1000"/>
+                <a:spcPts val="1100"/>
               </a:spcAft>
             </a:pPr>
             <a:r>
               <a:rPr sz="1600" b="1" i="0">
                 <a:solidFill>
-                  <a:srgbClr val="2E3A80"/>
-                </a:solidFill>
-                <a:latin typeface="Montserrat"/>
-              </a:rPr>
-              <a:t>•  </a:t>
+                  <a:srgbClr val="E8801A"/>
+                </a:solidFill>
+                <a:latin typeface="Montserrat"/>
+              </a:rPr>
+              <a:t>▸  </a:t>
             </a:r>
             <a:r>
               <a:rPr sz="1600" b="0" i="0">
@@ -6747,14 +7078,14 @@
                 </a:solidFill>
                 <a:latin typeface="Montserrat"/>
               </a:rPr>
-              <a:t>O título, FP o entidad acreditada</a:t>
-            </a:r>
-          </a:p>
-        </p:txBody>
-      </p:sp>
-      <p:sp>
-        <p:nvSpPr>
-          <p:cNvPr id="8" name="imgph" descr="IMGQ:large commercial gas boiler room"/>
+              <a:t>Otro registro para la distribuidora</a:t>
+            </a:r>
+          </a:p>
+        </p:txBody>
+      </p:sp>
+      <p:sp>
+        <p:nvSpPr>
+          <p:cNvPr id="9" name="imgph" descr="IMGQ:filing cabinet with document records"/>
           <p:cNvSpPr/>
           <p:nvPr/>
         </p:nvSpPr>
@@ -6800,7 +7131,7 @@
       </p:sp>
       <p:sp>
         <p:nvSpPr>
-          <p:cNvPr id="9" name="TextBox 8"/>
+          <p:cNvPr id="10" name="TextBox 9"/>
           <p:cNvSpPr txBox="1"/>
           <p:nvPr/>
         </p:nvSpPr>
@@ -6840,7 +7171,7 @@
                 </a:solidFill>
                 <a:latin typeface="Montserrat"/>
               </a:rPr>
-              <a:t>large commercial gas boiler room</a:t>
+              <a:t>filing cabinet with document records</a:t>
             </a:r>
           </a:p>
         </p:txBody>
@@ -6937,7 +7268,7 @@
                 </a:solidFill>
                 <a:latin typeface="Montserrat"/>
               </a:rPr>
-              <a:t>015 / 016</a:t>
+              <a:t>015 / 017</a:t>
             </a:r>
           </a:p>
         </p:txBody>
@@ -6985,7 +7316,7 @@
         <p:spPr>
           <a:xfrm>
             <a:off x="822960" y="457200"/>
-            <a:ext cx="8229600" cy="365760"/>
+            <a:ext cx="10058400" cy="365760"/>
           </a:xfrm>
           <a:prstGeom prst="rect">
             <a:avLst/>
@@ -6999,13 +7330,13 @@
           <a:lstStyle/>
           <a:p>
             <a:r>
-              <a:rPr sz="1200" b="1" i="0">
-                <a:solidFill>
-                  <a:srgbClr val="64748B"/>
-                </a:solidFill>
-                <a:latin typeface="Montserrat"/>
-              </a:rPr>
-              <a:t>APARTADO 4.2 · CAMBIO DE GAS</a:t>
+              <a:rPr sz="1300" b="1" i="0">
+                <a:solidFill>
+                  <a:srgbClr val="E8801A"/>
+                </a:solidFill>
+                <a:latin typeface="Montserrat"/>
+              </a:rPr>
+              <a:t>APARTADO 4.1 · APARATOS GRANDES</a:t>
             </a:r>
           </a:p>
         </p:txBody>
@@ -7033,26 +7364,70 @@
           <a:lstStyle/>
           <a:p>
             <a:r>
-              <a:rPr sz="2700" b="1" i="0">
+              <a:rPr sz="2800" b="1" i="0">
                 <a:solidFill>
                   <a:srgbClr val="1E2761"/>
                 </a:solidFill>
                 <a:latin typeface="Montserrat"/>
               </a:rPr>
-              <a:t>Cambio de familia: solo A y B</a:t>
-            </a:r>
-          </a:p>
-        </p:txBody>
-      </p:sp>
-      <p:sp>
-        <p:nvSpPr>
-          <p:cNvPr id="7" name="TextBox 6"/>
+              <a:t>Los aparatos gordos piden un plus</a:t>
+            </a:r>
+          </a:p>
+        </p:txBody>
+      </p:sp>
+      <p:sp>
+        <p:nvSpPr>
+          <p:cNvPr id="7" name="Rounded Rectangle 6"/>
+          <p:cNvSpPr/>
+          <p:nvPr/>
+        </p:nvSpPr>
+        <p:spPr>
+          <a:xfrm>
+            <a:off x="868680" y="1627632"/>
+            <a:ext cx="2011680" cy="73152"/>
+          </a:xfrm>
+          <a:prstGeom prst="roundRect">
+            <a:avLst/>
+          </a:prstGeom>
+          <a:solidFill>
+            <a:srgbClr val="E8801A"/>
+          </a:solidFill>
+          <a:ln>
+            <a:noFill/>
+          </a:ln>
+          <a:effectLst/>
+        </p:spPr>
+        <p:style>
+          <a:lnRef idx="1">
+            <a:schemeClr val="accent1"/>
+          </a:lnRef>
+          <a:fillRef idx="3">
+            <a:schemeClr val="accent1"/>
+          </a:fillRef>
+          <a:effectRef idx="2">
+            <a:schemeClr val="accent1"/>
+          </a:effectRef>
+          <a:fontRef idx="minor">
+            <a:schemeClr val="lt1"/>
+          </a:fontRef>
+        </p:style>
+        <p:txBody>
+          <a:bodyPr rtlCol="0" anchor="ctr"/>
+          <a:lstStyle/>
+          <a:p>
+            <a:pPr algn="ctr"/>
+          </a:p>
+        </p:txBody>
+      </p:sp>
+      <p:sp>
+        <p:nvSpPr>
+          <p:cNvPr id="8" name="TextBox 7"/>
           <p:cNvSpPr txBox="1"/>
           <p:nvPr/>
         </p:nvSpPr>
         <p:spPr>
           <a:xfrm>
-            <a:off x="822960" y="1920240"/>
+            <a:off x="822960" y="1965960"/>
             <a:ext cx="4983480" cy="4206240"/>
           </a:xfrm>
           <a:prstGeom prst="rect">
@@ -7068,17 +7443,17 @@
           <a:p>
             <a:pPr>
               <a:spcAft>
-                <a:spcPts val="1000"/>
+                <a:spcPts val="1100"/>
               </a:spcAft>
             </a:pPr>
             <a:r>
               <a:rPr sz="1600" b="1" i="0">
                 <a:solidFill>
-                  <a:srgbClr val="2E3A80"/>
-                </a:solidFill>
-                <a:latin typeface="Montserrat"/>
-              </a:rPr>
-              <a:t>•  </a:t>
+                  <a:srgbClr val="E8801A"/>
+                </a:solidFill>
+                <a:latin typeface="Montserrat"/>
+              </a:rPr>
+              <a:t>▸  </a:t>
             </a:r>
             <a:r>
               <a:rPr sz="1600" b="0" i="0">
@@ -7087,23 +7462,23 @@
                 </a:solidFill>
                 <a:latin typeface="Montserrat"/>
               </a:rPr>
-              <a:t>Adecuar de una familia de gas a otra</a:t>
+              <a:t>Conducidos &gt; 24,4 kW y vitro cubierta</a:t>
             </a:r>
           </a:p>
           <a:p>
             <a:pPr>
               <a:spcAft>
-                <a:spcPts val="1000"/>
+                <a:spcPts val="1100"/>
               </a:spcAft>
             </a:pPr>
             <a:r>
               <a:rPr sz="1600" b="1" i="0">
                 <a:solidFill>
-                  <a:srgbClr val="2E3A80"/>
-                </a:solidFill>
-                <a:latin typeface="Montserrat"/>
-              </a:rPr>
-              <a:t>•  </a:t>
+                  <a:srgbClr val="E8801A"/>
+                </a:solidFill>
+                <a:latin typeface="Montserrat"/>
+              </a:rPr>
+              <a:t>▸  </a:t>
             </a:r>
             <a:r>
               <a:rPr sz="1600" b="0" i="0">
@@ -7112,23 +7487,23 @@
                 </a:solidFill>
                 <a:latin typeface="Montserrat"/>
               </a:rPr>
-              <a:t>Solo categorías A o B</a:t>
+              <a:t>Cualquier categoría puede acreditarlo</a:t>
             </a:r>
           </a:p>
           <a:p>
             <a:pPr>
               <a:spcAft>
-                <a:spcPts val="1000"/>
+                <a:spcPts val="1100"/>
               </a:spcAft>
             </a:pPr>
             <a:r>
               <a:rPr sz="1600" b="1" i="0">
                 <a:solidFill>
-                  <a:srgbClr val="2E3A80"/>
-                </a:solidFill>
-                <a:latin typeface="Montserrat"/>
-              </a:rPr>
-              <a:t>•  </a:t>
+                  <a:srgbClr val="E8801A"/>
+                </a:solidFill>
+                <a:latin typeface="Montserrat"/>
+              </a:rPr>
+              <a:t>▸  </a:t>
             </a:r>
             <a:r>
               <a:rPr sz="1600" b="0" i="0">
@@ -7137,23 +7512,23 @@
                 </a:solidFill>
                 <a:latin typeface="Montserrat"/>
               </a:rPr>
-              <a:t>La C queda fuera</a:t>
+              <a:t>Vía más habitual: acreditación del fabricante</a:t>
             </a:r>
           </a:p>
           <a:p>
             <a:pPr>
               <a:spcAft>
-                <a:spcPts val="1000"/>
+                <a:spcPts val="1100"/>
               </a:spcAft>
             </a:pPr>
             <a:r>
               <a:rPr sz="1600" b="1" i="0">
                 <a:solidFill>
-                  <a:srgbClr val="2E3A80"/>
-                </a:solidFill>
-                <a:latin typeface="Montserrat"/>
-              </a:rPr>
-              <a:t>•  </a:t>
+                  <a:srgbClr val="E8801A"/>
+                </a:solidFill>
+                <a:latin typeface="Montserrat"/>
+              </a:rPr>
+              <a:t>▸  </a:t>
             </a:r>
             <a:r>
               <a:rPr sz="1600" b="0" i="0">
@@ -7162,14 +7537,14 @@
                 </a:solidFill>
                 <a:latin typeface="Montserrat"/>
               </a:rPr>
-              <a:t>Fabricante: reconocimiento explícito</a:t>
-            </a:r>
-          </a:p>
-        </p:txBody>
-      </p:sp>
-      <p:sp>
-        <p:nvSpPr>
-          <p:cNvPr id="8" name="imgph" descr="IMGQ:technician adjusting gas valve on appliance"/>
+              <a:t>O título, FP o entidad acreditada</a:t>
+            </a:r>
+          </a:p>
+        </p:txBody>
+      </p:sp>
+      <p:sp>
+        <p:nvSpPr>
+          <p:cNvPr id="9" name="imgph" descr="IMGQ:large commercial gas boiler room"/>
           <p:cNvSpPr/>
           <p:nvPr/>
         </p:nvSpPr>
@@ -7215,7 +7590,7 @@
       </p:sp>
       <p:sp>
         <p:nvSpPr>
-          <p:cNvPr id="9" name="TextBox 8"/>
+          <p:cNvPr id="10" name="TextBox 9"/>
           <p:cNvSpPr txBox="1"/>
           <p:nvPr/>
         </p:nvSpPr>
@@ -7255,7 +7630,7 @@
                 </a:solidFill>
                 <a:latin typeface="Montserrat"/>
               </a:rPr>
-              <a:t>technician adjusting gas valve on appliance</a:t>
+              <a:t>large commercial gas boiler room</a:t>
             </a:r>
           </a:p>
         </p:txBody>
@@ -7293,6 +7668,465 @@
             <a:avLst/>
           </a:prstGeom>
           <a:solidFill>
+            <a:srgbClr val="FFFFFF"/>
+          </a:solidFill>
+          <a:ln>
+            <a:noFill/>
+          </a:ln>
+          <a:effectLst/>
+        </p:spPr>
+        <p:style>
+          <a:lnRef idx="1">
+            <a:schemeClr val="accent1"/>
+          </a:lnRef>
+          <a:fillRef idx="3">
+            <a:schemeClr val="accent1"/>
+          </a:fillRef>
+          <a:effectRef idx="2">
+            <a:schemeClr val="accent1"/>
+          </a:effectRef>
+          <a:fontRef idx="minor">
+            <a:schemeClr val="lt1"/>
+          </a:fontRef>
+        </p:style>
+        <p:txBody>
+          <a:bodyPr rtlCol="0" anchor="ctr"/>
+          <a:lstStyle/>
+          <a:p>
+            <a:pPr algn="ctr"/>
+          </a:p>
+        </p:txBody>
+      </p:sp>
+      <p:sp>
+        <p:nvSpPr>
+          <p:cNvPr id="3" name="TextBox 2"/>
+          <p:cNvSpPr txBox="1"/>
+          <p:nvPr/>
+        </p:nvSpPr>
+        <p:spPr>
+          <a:xfrm>
+            <a:off x="10607040" y="320040"/>
+            <a:ext cx="1371600" cy="365760"/>
+          </a:xfrm>
+          <a:prstGeom prst="rect">
+            <a:avLst/>
+          </a:prstGeom>
+          <a:noFill/>
+        </p:spPr>
+        <p:txBody>
+          <a:bodyPr wrap="square">
+            <a:spAutoFit/>
+          </a:bodyPr>
+          <a:lstStyle/>
+          <a:p>
+            <a:pPr algn="r"/>
+            <a:r>
+              <a:rPr sz="1000" b="1" i="0">
+                <a:solidFill>
+                  <a:srgbClr val="64748B"/>
+                </a:solidFill>
+                <a:latin typeface="Montserrat"/>
+              </a:rPr>
+              <a:t>016 / 017</a:t>
+            </a:r>
+          </a:p>
+        </p:txBody>
+      </p:sp>
+      <p:sp>
+        <p:nvSpPr>
+          <p:cNvPr id="4" name="TextBox 3"/>
+          <p:cNvSpPr txBox="1"/>
+          <p:nvPr/>
+        </p:nvSpPr>
+        <p:spPr>
+          <a:xfrm>
+            <a:off x="457200" y="6419088"/>
+            <a:ext cx="8229600" cy="365760"/>
+          </a:xfrm>
+          <a:prstGeom prst="rect">
+            <a:avLst/>
+          </a:prstGeom>
+          <a:noFill/>
+        </p:spPr>
+        <p:txBody>
+          <a:bodyPr wrap="square">
+            <a:spAutoFit/>
+          </a:bodyPr>
+          <a:lstStyle/>
+          <a:p>
+            <a:r>
+              <a:rPr sz="900" b="0" i="0">
+                <a:solidFill>
+                  <a:srgbClr val="64748B"/>
+                </a:solidFill>
+                <a:latin typeface="Montserrat"/>
+              </a:rPr>
+              <a:t>Curso Gas B · Tema 06 · Instaladores y empresas instaladoras</a:t>
+            </a:r>
+          </a:p>
+        </p:txBody>
+      </p:sp>
+      <p:sp>
+        <p:nvSpPr>
+          <p:cNvPr id="5" name="TextBox 4"/>
+          <p:cNvSpPr txBox="1"/>
+          <p:nvPr/>
+        </p:nvSpPr>
+        <p:spPr>
+          <a:xfrm>
+            <a:off x="822960" y="457200"/>
+            <a:ext cx="10058400" cy="365760"/>
+          </a:xfrm>
+          <a:prstGeom prst="rect">
+            <a:avLst/>
+          </a:prstGeom>
+          <a:noFill/>
+        </p:spPr>
+        <p:txBody>
+          <a:bodyPr wrap="square">
+            <a:spAutoFit/>
+          </a:bodyPr>
+          <a:lstStyle/>
+          <a:p>
+            <a:r>
+              <a:rPr sz="1300" b="1" i="0">
+                <a:solidFill>
+                  <a:srgbClr val="E8801A"/>
+                </a:solidFill>
+                <a:latin typeface="Montserrat"/>
+              </a:rPr>
+              <a:t>APARTADO 4.2 · CAMBIO DE GAS</a:t>
+            </a:r>
+          </a:p>
+        </p:txBody>
+      </p:sp>
+      <p:sp>
+        <p:nvSpPr>
+          <p:cNvPr id="6" name="TextBox 5"/>
+          <p:cNvSpPr txBox="1"/>
+          <p:nvPr/>
+        </p:nvSpPr>
+        <p:spPr>
+          <a:xfrm>
+            <a:off x="822960" y="868680"/>
+            <a:ext cx="10515600" cy="914400"/>
+          </a:xfrm>
+          <a:prstGeom prst="rect">
+            <a:avLst/>
+          </a:prstGeom>
+          <a:noFill/>
+        </p:spPr>
+        <p:txBody>
+          <a:bodyPr wrap="square">
+            <a:spAutoFit/>
+          </a:bodyPr>
+          <a:lstStyle/>
+          <a:p>
+            <a:r>
+              <a:rPr sz="2800" b="1" i="0">
+                <a:solidFill>
+                  <a:srgbClr val="1E2761"/>
+                </a:solidFill>
+                <a:latin typeface="Montserrat"/>
+              </a:rPr>
+              <a:t>Cambio de familia: solo A y B</a:t>
+            </a:r>
+          </a:p>
+        </p:txBody>
+      </p:sp>
+      <p:sp>
+        <p:nvSpPr>
+          <p:cNvPr id="7" name="Rounded Rectangle 6"/>
+          <p:cNvSpPr/>
+          <p:nvPr/>
+        </p:nvSpPr>
+        <p:spPr>
+          <a:xfrm>
+            <a:off x="868680" y="1627632"/>
+            <a:ext cx="2011680" cy="73152"/>
+          </a:xfrm>
+          <a:prstGeom prst="roundRect">
+            <a:avLst/>
+          </a:prstGeom>
+          <a:solidFill>
+            <a:srgbClr val="E8801A"/>
+          </a:solidFill>
+          <a:ln>
+            <a:noFill/>
+          </a:ln>
+          <a:effectLst/>
+        </p:spPr>
+        <p:style>
+          <a:lnRef idx="1">
+            <a:schemeClr val="accent1"/>
+          </a:lnRef>
+          <a:fillRef idx="3">
+            <a:schemeClr val="accent1"/>
+          </a:fillRef>
+          <a:effectRef idx="2">
+            <a:schemeClr val="accent1"/>
+          </a:effectRef>
+          <a:fontRef idx="minor">
+            <a:schemeClr val="lt1"/>
+          </a:fontRef>
+        </p:style>
+        <p:txBody>
+          <a:bodyPr rtlCol="0" anchor="ctr"/>
+          <a:lstStyle/>
+          <a:p>
+            <a:pPr algn="ctr"/>
+          </a:p>
+        </p:txBody>
+      </p:sp>
+      <p:sp>
+        <p:nvSpPr>
+          <p:cNvPr id="8" name="TextBox 7"/>
+          <p:cNvSpPr txBox="1"/>
+          <p:nvPr/>
+        </p:nvSpPr>
+        <p:spPr>
+          <a:xfrm>
+            <a:off x="822960" y="1965960"/>
+            <a:ext cx="4983480" cy="4206240"/>
+          </a:xfrm>
+          <a:prstGeom prst="rect">
+            <a:avLst/>
+          </a:prstGeom>
+          <a:noFill/>
+        </p:spPr>
+        <p:txBody>
+          <a:bodyPr wrap="square">
+            <a:spAutoFit/>
+          </a:bodyPr>
+          <a:lstStyle/>
+          <a:p>
+            <a:pPr>
+              <a:spcAft>
+                <a:spcPts val="1100"/>
+              </a:spcAft>
+            </a:pPr>
+            <a:r>
+              <a:rPr sz="1600" b="1" i="0">
+                <a:solidFill>
+                  <a:srgbClr val="E8801A"/>
+                </a:solidFill>
+                <a:latin typeface="Montserrat"/>
+              </a:rPr>
+              <a:t>▸  </a:t>
+            </a:r>
+            <a:r>
+              <a:rPr sz="1600" b="0" i="0">
+                <a:solidFill>
+                  <a:srgbClr val="1B2330"/>
+                </a:solidFill>
+                <a:latin typeface="Montserrat"/>
+              </a:rPr>
+              <a:t>Adecuar de una familia de gas a otra</a:t>
+            </a:r>
+          </a:p>
+          <a:p>
+            <a:pPr>
+              <a:spcAft>
+                <a:spcPts val="1100"/>
+              </a:spcAft>
+            </a:pPr>
+            <a:r>
+              <a:rPr sz="1600" b="1" i="0">
+                <a:solidFill>
+                  <a:srgbClr val="E8801A"/>
+                </a:solidFill>
+                <a:latin typeface="Montserrat"/>
+              </a:rPr>
+              <a:t>▸  </a:t>
+            </a:r>
+            <a:r>
+              <a:rPr sz="1600" b="0" i="0">
+                <a:solidFill>
+                  <a:srgbClr val="1B2330"/>
+                </a:solidFill>
+                <a:latin typeface="Montserrat"/>
+              </a:rPr>
+              <a:t>Solo categorías A o B</a:t>
+            </a:r>
+          </a:p>
+          <a:p>
+            <a:pPr>
+              <a:spcAft>
+                <a:spcPts val="1100"/>
+              </a:spcAft>
+            </a:pPr>
+            <a:r>
+              <a:rPr sz="1600" b="1" i="0">
+                <a:solidFill>
+                  <a:srgbClr val="E8801A"/>
+                </a:solidFill>
+                <a:latin typeface="Montserrat"/>
+              </a:rPr>
+              <a:t>▸  </a:t>
+            </a:r>
+            <a:r>
+              <a:rPr sz="1600" b="0" i="0">
+                <a:solidFill>
+                  <a:srgbClr val="1B2330"/>
+                </a:solidFill>
+                <a:latin typeface="Montserrat"/>
+              </a:rPr>
+              <a:t>La C queda fuera</a:t>
+            </a:r>
+          </a:p>
+          <a:p>
+            <a:pPr>
+              <a:spcAft>
+                <a:spcPts val="1100"/>
+              </a:spcAft>
+            </a:pPr>
+            <a:r>
+              <a:rPr sz="1600" b="1" i="0">
+                <a:solidFill>
+                  <a:srgbClr val="E8801A"/>
+                </a:solidFill>
+                <a:latin typeface="Montserrat"/>
+              </a:rPr>
+              <a:t>▸  </a:t>
+            </a:r>
+            <a:r>
+              <a:rPr sz="1600" b="0" i="0">
+                <a:solidFill>
+                  <a:srgbClr val="1B2330"/>
+                </a:solidFill>
+                <a:latin typeface="Montserrat"/>
+              </a:rPr>
+              <a:t>Fabricante: reconocimiento explícito</a:t>
+            </a:r>
+          </a:p>
+        </p:txBody>
+      </p:sp>
+      <p:sp>
+        <p:nvSpPr>
+          <p:cNvPr id="9" name="imgph" descr="IMGQ:technician adjusting gas valve on appliance"/>
+          <p:cNvSpPr/>
+          <p:nvPr/>
+        </p:nvSpPr>
+        <p:spPr>
+          <a:xfrm>
+            <a:off x="5806440" y="1051560"/>
+            <a:ext cx="5298947" cy="4629150"/>
+          </a:xfrm>
+          <a:prstGeom prst="roundRect">
+            <a:avLst/>
+          </a:prstGeom>
+          <a:solidFill>
+            <a:srgbClr val="F3F6FB"/>
+          </a:solidFill>
+          <a:ln w="12700">
+            <a:solidFill>
+              <a:srgbClr val="C7D2E6"/>
+            </a:solidFill>
+          </a:ln>
+          <a:effectLst/>
+        </p:spPr>
+        <p:style>
+          <a:lnRef idx="1">
+            <a:schemeClr val="accent1"/>
+          </a:lnRef>
+          <a:fillRef idx="3">
+            <a:schemeClr val="accent1"/>
+          </a:fillRef>
+          <a:effectRef idx="2">
+            <a:schemeClr val="accent1"/>
+          </a:effectRef>
+          <a:fontRef idx="minor">
+            <a:schemeClr val="lt1"/>
+          </a:fontRef>
+        </p:style>
+        <p:txBody>
+          <a:bodyPr rtlCol="0" anchor="ctr"/>
+          <a:lstStyle/>
+          <a:p>
+            <a:pPr algn="ctr"/>
+          </a:p>
+        </p:txBody>
+      </p:sp>
+      <p:sp>
+        <p:nvSpPr>
+          <p:cNvPr id="10" name="TextBox 9"/>
+          <p:cNvSpPr txBox="1"/>
+          <p:nvPr/>
+        </p:nvSpPr>
+        <p:spPr>
+          <a:xfrm>
+            <a:off x="6080760" y="2726055"/>
+            <a:ext cx="4750307" cy="1280160"/>
+          </a:xfrm>
+          <a:prstGeom prst="rect">
+            <a:avLst/>
+          </a:prstGeom>
+          <a:noFill/>
+        </p:spPr>
+        <p:txBody>
+          <a:bodyPr wrap="square">
+            <a:spAutoFit/>
+          </a:bodyPr>
+          <a:lstStyle/>
+          <a:p>
+            <a:pPr algn="ctr"/>
+            <a:r>
+              <a:rPr sz="1400" b="1" i="0">
+                <a:solidFill>
+                  <a:srgbClr val="64748B"/>
+                </a:solidFill>
+                <a:latin typeface="Montserrat"/>
+              </a:rPr>
+              <a:t>IMAGEN REALISTA</a:t>
+            </a:r>
+          </a:p>
+          <a:p>
+            <a:pPr algn="ctr"/>
+            <a:r>
+              <a:rPr sz="1100" b="0" i="1">
+                <a:solidFill>
+                  <a:srgbClr val="64748B"/>
+                </a:solidFill>
+                <a:latin typeface="Montserrat"/>
+              </a:rPr>
+              <a:t>technician adjusting gas valve on appliance</a:t>
+            </a:r>
+          </a:p>
+        </p:txBody>
+      </p:sp>
+    </p:spTree>
+  </p:cSld>
+  <p:clrMapOvr>
+    <a:masterClrMapping/>
+  </p:clrMapOvr>
+</p:sld>
+</file>
+
+<file path=ppt/slides/slide17.xml><?xml version="1.0" encoding="utf-8"?>
+<p:sld xmlns:a="http://schemas.openxmlformats.org/drawingml/2006/main" xmlns:p="http://schemas.openxmlformats.org/presentationml/2006/main" xmlns:r="http://schemas.openxmlformats.org/officeDocument/2006/relationships">
+  <p:cSld>
+    <p:spTree>
+      <p:nvGrpSpPr>
+        <p:cNvPr id="1" name=""/>
+        <p:cNvGrpSpPr/>
+        <p:nvPr/>
+      </p:nvGrpSpPr>
+      <p:grpSpPr/>
+      <p:sp>
+        <p:nvSpPr>
+          <p:cNvPr id="2" name="Rectangle 1"/>
+          <p:cNvSpPr/>
+          <p:nvPr/>
+        </p:nvSpPr>
+        <p:spPr>
+          <a:xfrm>
+            <a:off x="0" y="0"/>
+            <a:ext cx="12191695" cy="6858000"/>
+          </a:xfrm>
+          <a:prstGeom prst="rect">
+            <a:avLst/>
+          </a:prstGeom>
+          <a:solidFill>
             <a:srgbClr val="1E2761"/>
           </a:solidFill>
           <a:ln>
@@ -7347,7 +8181,7 @@
             <a:r>
               <a:rPr sz="1400" b="1" i="0">
                 <a:solidFill>
-                  <a:srgbClr val="CADCFC"/>
+                  <a:srgbClr val="F4A24C"/>
                 </a:solidFill>
                 <a:latin typeface="Montserrat"/>
               </a:rPr>
@@ -7358,13 +8192,57 @@
       </p:sp>
       <p:sp>
         <p:nvSpPr>
-          <p:cNvPr id="4" name="TextBox 3"/>
+          <p:cNvPr id="4" name="Rounded Rectangle 3"/>
+          <p:cNvSpPr/>
+          <p:nvPr/>
+        </p:nvSpPr>
+        <p:spPr>
+          <a:xfrm>
+            <a:off x="868680" y="1051560"/>
+            <a:ext cx="1463040" cy="82296"/>
+          </a:xfrm>
+          <a:prstGeom prst="roundRect">
+            <a:avLst/>
+          </a:prstGeom>
+          <a:solidFill>
+            <a:srgbClr val="E8801A"/>
+          </a:solidFill>
+          <a:ln>
+            <a:noFill/>
+          </a:ln>
+          <a:effectLst/>
+        </p:spPr>
+        <p:style>
+          <a:lnRef idx="1">
+            <a:schemeClr val="accent1"/>
+          </a:lnRef>
+          <a:fillRef idx="3">
+            <a:schemeClr val="accent1"/>
+          </a:fillRef>
+          <a:effectRef idx="2">
+            <a:schemeClr val="accent1"/>
+          </a:effectRef>
+          <a:fontRef idx="minor">
+            <a:schemeClr val="lt1"/>
+          </a:fontRef>
+        </p:style>
+        <p:txBody>
+          <a:bodyPr rtlCol="0" anchor="ctr"/>
+          <a:lstStyle/>
+          <a:p>
+            <a:pPr algn="ctr"/>
+          </a:p>
+        </p:txBody>
+      </p:sp>
+      <p:sp>
+        <p:nvSpPr>
+          <p:cNvPr id="5" name="TextBox 4"/>
           <p:cNvSpPr txBox="1"/>
           <p:nvPr/>
         </p:nvSpPr>
         <p:spPr>
           <a:xfrm>
-            <a:off x="822960" y="1143000"/>
+            <a:off x="822960" y="1234440"/>
             <a:ext cx="10515600" cy="1097280"/>
           </a:xfrm>
           <a:prstGeom prst="rect">
@@ -7392,14 +8270,14 @@
       </p:sp>
       <p:sp>
         <p:nvSpPr>
-          <p:cNvPr id="5" name="TextBox 4"/>
+          <p:cNvPr id="6" name="TextBox 5"/>
           <p:cNvSpPr txBox="1"/>
           <p:nvPr/>
         </p:nvSpPr>
         <p:spPr>
           <a:xfrm>
-            <a:off x="822960" y="2514600"/>
-            <a:ext cx="10515600" cy="2834640"/>
+            <a:off x="822960" y="2606040"/>
+            <a:ext cx="10515600" cy="2743200"/>
           </a:xfrm>
           <a:prstGeom prst="rect">
             <a:avLst/>
@@ -7420,7 +8298,7 @@
             <a:r>
               <a:rPr sz="2000" b="1" i="0">
                 <a:solidFill>
-                  <a:srgbClr val="CADCFC"/>
+                  <a:srgbClr val="F4A24C"/>
                 </a:solidFill>
                 <a:latin typeface="Montserrat"/>
               </a:rPr>
@@ -7445,7 +8323,7 @@
             <a:r>
               <a:rPr sz="2000" b="1" i="0">
                 <a:solidFill>
-                  <a:srgbClr val="CADCFC"/>
+                  <a:srgbClr val="F4A24C"/>
                 </a:solidFill>
                 <a:latin typeface="Montserrat"/>
               </a:rPr>
@@ -7470,7 +8348,7 @@
             <a:r>
               <a:rPr sz="2000" b="1" i="0">
                 <a:solidFill>
-                  <a:srgbClr val="CADCFC"/>
+                  <a:srgbClr val="F4A24C"/>
                 </a:solidFill>
                 <a:latin typeface="Montserrat"/>
               </a:rPr>
@@ -7495,7 +8373,7 @@
             <a:r>
               <a:rPr sz="2000" b="1" i="0">
                 <a:solidFill>
-                  <a:srgbClr val="CADCFC"/>
+                  <a:srgbClr val="F4A24C"/>
                 </a:solidFill>
                 <a:latin typeface="Montserrat"/>
               </a:rPr>
@@ -7515,20 +8393,20 @@
       </p:sp>
       <p:sp>
         <p:nvSpPr>
-          <p:cNvPr id="6" name="Rounded Rectangle 5"/>
+          <p:cNvPr id="7" name="Rounded Rectangle 6"/>
           <p:cNvSpPr/>
           <p:nvPr/>
         </p:nvSpPr>
         <p:spPr>
           <a:xfrm>
             <a:off x="822960" y="5532120"/>
-            <a:ext cx="10515600" cy="777240"/>
+            <a:ext cx="10515600" cy="822960"/>
           </a:xfrm>
           <a:prstGeom prst="roundRect">
             <a:avLst/>
           </a:prstGeom>
           <a:solidFill>
-            <a:srgbClr val="2E3A80"/>
+            <a:srgbClr val="E8801A"/>
           </a:solidFill>
           <a:ln>
             <a:noFill/>
@@ -7559,13 +8437,13 @@
       </p:sp>
       <p:sp>
         <p:nvSpPr>
-          <p:cNvPr id="7" name="TextBox 6"/>
+          <p:cNvPr id="8" name="TextBox 7"/>
           <p:cNvSpPr txBox="1"/>
           <p:nvPr/>
         </p:nvSpPr>
         <p:spPr>
           <a:xfrm>
-            <a:off x="1051560" y="5605272"/>
+            <a:off x="1051560" y="5623560"/>
             <a:ext cx="10058400" cy="640080"/>
           </a:xfrm>
           <a:prstGeom prst="rect">
@@ -7582,7 +8460,7 @@
             <a:r>
               <a:rPr sz="1500" b="1" i="1">
                 <a:solidFill>
-                  <a:srgbClr val="CADCFC"/>
+                  <a:srgbClr val="1E2761"/>
                 </a:solidFill>
                 <a:latin typeface="Montserrat"/>
               </a:rPr>
@@ -7683,7 +8561,7 @@
                 </a:solidFill>
                 <a:latin typeface="Montserrat"/>
               </a:rPr>
-              <a:t>002 / 016</a:t>
+              <a:t>002 / 017</a:t>
             </a:r>
           </a:p>
         </p:txBody>
@@ -7747,7 +8625,7 @@
             <a:r>
               <a:rPr sz="2700" b="1" i="0">
                 <a:solidFill>
-                  <a:srgbClr val="1E2761"/>
+                  <a:srgbClr val="E8801A"/>
                 </a:solidFill>
                 <a:latin typeface="Montserrat"/>
               </a:rPr>
@@ -7759,6 +8637,50 @@
       <p:sp>
         <p:nvSpPr>
           <p:cNvPr id="6" name="Rounded Rectangle 5"/>
+          <p:cNvSpPr/>
+          <p:nvPr/>
+        </p:nvSpPr>
+        <p:spPr>
+          <a:xfrm>
+            <a:off x="868680" y="1234440"/>
+            <a:ext cx="1463040" cy="73152"/>
+          </a:xfrm>
+          <a:prstGeom prst="roundRect">
+            <a:avLst/>
+          </a:prstGeom>
+          <a:solidFill>
+            <a:srgbClr val="1E2761"/>
+          </a:solidFill>
+          <a:ln>
+            <a:noFill/>
+          </a:ln>
+          <a:effectLst/>
+        </p:spPr>
+        <p:style>
+          <a:lnRef idx="1">
+            <a:schemeClr val="accent1"/>
+          </a:lnRef>
+          <a:fillRef idx="3">
+            <a:schemeClr val="accent1"/>
+          </a:fillRef>
+          <a:effectRef idx="2">
+            <a:schemeClr val="accent1"/>
+          </a:effectRef>
+          <a:fontRef idx="minor">
+            <a:schemeClr val="lt1"/>
+          </a:fontRef>
+        </p:style>
+        <p:txBody>
+          <a:bodyPr rtlCol="0" anchor="ctr"/>
+          <a:lstStyle/>
+          <a:p>
+            <a:pPr algn="ctr"/>
+          </a:p>
+        </p:txBody>
+      </p:sp>
+      <p:sp>
+        <p:nvSpPr>
+          <p:cNvPr id="7" name="Rounded Rectangle 6"/>
           <p:cNvSpPr/>
           <p:nvPr/>
         </p:nvSpPr>
@@ -7804,7 +8726,7 @@
       </p:sp>
       <p:sp>
         <p:nvSpPr>
-          <p:cNvPr id="7" name="TextBox 6"/>
+          <p:cNvPr id="8" name="TextBox 7"/>
           <p:cNvSpPr txBox="1"/>
           <p:nvPr/>
         </p:nvSpPr>
@@ -7839,7 +8761,7 @@
       </p:sp>
       <p:sp>
         <p:nvSpPr>
-          <p:cNvPr id="8" name="TextBox 7"/>
+          <p:cNvPr id="9" name="TextBox 8"/>
           <p:cNvSpPr txBox="1"/>
           <p:nvPr/>
         </p:nvSpPr>
@@ -7874,7 +8796,7 @@
       </p:sp>
       <p:sp>
         <p:nvSpPr>
-          <p:cNvPr id="9" name="Rounded Rectangle 8"/>
+          <p:cNvPr id="10" name="Rounded Rectangle 9"/>
           <p:cNvSpPr/>
           <p:nvPr/>
         </p:nvSpPr>
@@ -7920,7 +8842,7 @@
       </p:sp>
       <p:sp>
         <p:nvSpPr>
-          <p:cNvPr id="10" name="TextBox 9"/>
+          <p:cNvPr id="11" name="TextBox 10"/>
           <p:cNvSpPr txBox="1"/>
           <p:nvPr/>
         </p:nvSpPr>
@@ -7955,7 +8877,7 @@
       </p:sp>
       <p:sp>
         <p:nvSpPr>
-          <p:cNvPr id="11" name="TextBox 10"/>
+          <p:cNvPr id="12" name="TextBox 11"/>
           <p:cNvSpPr txBox="1"/>
           <p:nvPr/>
         </p:nvSpPr>
@@ -7990,7 +8912,7 @@
       </p:sp>
       <p:sp>
         <p:nvSpPr>
-          <p:cNvPr id="12" name="Rounded Rectangle 11"/>
+          <p:cNvPr id="13" name="Rounded Rectangle 12"/>
           <p:cNvSpPr/>
           <p:nvPr/>
         </p:nvSpPr>
@@ -8036,7 +8958,7 @@
       </p:sp>
       <p:sp>
         <p:nvSpPr>
-          <p:cNvPr id="13" name="TextBox 12"/>
+          <p:cNvPr id="14" name="TextBox 13"/>
           <p:cNvSpPr txBox="1"/>
           <p:nvPr/>
         </p:nvSpPr>
@@ -8071,7 +8993,7 @@
       </p:sp>
       <p:sp>
         <p:nvSpPr>
-          <p:cNvPr id="14" name="TextBox 13"/>
+          <p:cNvPr id="15" name="TextBox 14"/>
           <p:cNvSpPr txBox="1"/>
           <p:nvPr/>
         </p:nvSpPr>
@@ -8196,7 +9118,7 @@
                 </a:solidFill>
                 <a:latin typeface="Montserrat"/>
               </a:rPr>
-              <a:t>003 / 016</a:t>
+              <a:t>003 / 017</a:t>
             </a:r>
           </a:p>
         </p:txBody>
@@ -8243,7 +9165,7 @@
         </p:nvSpPr>
         <p:spPr>
           <a:xfrm>
-            <a:off x="822960" y="457200"/>
+            <a:off x="822960" y="502920"/>
             <a:ext cx="8229600" cy="365760"/>
           </a:xfrm>
           <a:prstGeom prst="rect">
@@ -8258,13 +9180,13 @@
           <a:lstStyle/>
           <a:p>
             <a:r>
-              <a:rPr sz="1200" b="1" i="0">
-                <a:solidFill>
-                  <a:srgbClr val="64748B"/>
-                </a:solidFill>
-                <a:latin typeface="Montserrat"/>
-              </a:rPr>
-              <a:t>APARTADO 3 · LA EMPRESA</a:t>
+              <a:rPr sz="1300" b="1" i="0">
+                <a:solidFill>
+                  <a:srgbClr val="E8801A"/>
+                </a:solidFill>
+                <a:latin typeface="Montserrat"/>
+              </a:rPr>
+              <a:t>PARTES DE ESTE VÍDEO</a:t>
             </a:r>
           </a:p>
         </p:txBody>
@@ -8277,7 +9199,7 @@
         </p:nvSpPr>
         <p:spPr>
           <a:xfrm>
-            <a:off x="822960" y="868680"/>
+            <a:off x="822960" y="914400"/>
             <a:ext cx="10515600" cy="914400"/>
           </a:xfrm>
           <a:prstGeom prst="rect">
@@ -8298,155 +9220,30 @@
                 </a:solidFill>
                 <a:latin typeface="Montserrat"/>
               </a:rPr>
-              <a:t>Qué es la empresa instaladora</a:t>
-            </a:r>
-          </a:p>
-        </p:txBody>
-      </p:sp>
-      <p:sp>
-        <p:nvSpPr>
-          <p:cNvPr id="7" name="TextBox 6"/>
-          <p:cNvSpPr txBox="1"/>
-          <p:nvPr/>
-        </p:nvSpPr>
-        <p:spPr>
-          <a:xfrm>
-            <a:off x="822960" y="1920240"/>
-            <a:ext cx="4983480" cy="4206240"/>
-          </a:xfrm>
-          <a:prstGeom prst="rect">
-            <a:avLst/>
-          </a:prstGeom>
-          <a:noFill/>
-        </p:spPr>
-        <p:txBody>
-          <a:bodyPr wrap="square">
-            <a:spAutoFit/>
-          </a:bodyPr>
-          <a:lstStyle/>
-          <a:p>
-            <a:pPr>
-              <a:spcAft>
-                <a:spcPts val="1000"/>
-              </a:spcAft>
-            </a:pPr>
-            <a:r>
-              <a:rPr sz="1600" b="1" i="0">
-                <a:solidFill>
-                  <a:srgbClr val="2E3A80"/>
-                </a:solidFill>
-                <a:latin typeface="Montserrat"/>
-              </a:rPr>
-              <a:t>•  </a:t>
-            </a:r>
-            <a:r>
-              <a:rPr sz="1600" b="0" i="0">
-                <a:solidFill>
-                  <a:srgbClr val="1B2330"/>
-                </a:solidFill>
-                <a:latin typeface="Montserrat"/>
-              </a:rPr>
-              <a:t>Persona física o jurídica</a:t>
-            </a:r>
-          </a:p>
-          <a:p>
-            <a:pPr>
-              <a:spcAft>
-                <a:spcPts val="1000"/>
-              </a:spcAft>
-            </a:pPr>
-            <a:r>
-              <a:rPr sz="1600" b="1" i="0">
-                <a:solidFill>
-                  <a:srgbClr val="2E3A80"/>
-                </a:solidFill>
-                <a:latin typeface="Montserrat"/>
-              </a:rPr>
-              <a:t>•  </a:t>
-            </a:r>
-            <a:r>
-              <a:rPr sz="1600" b="0" i="0">
-                <a:solidFill>
-                  <a:srgbClr val="1B2330"/>
-                </a:solidFill>
-                <a:latin typeface="Montserrat"/>
-              </a:rPr>
-              <a:t>Monta, repara, mantiene y controla</a:t>
-            </a:r>
-          </a:p>
-          <a:p>
-            <a:pPr>
-              <a:spcAft>
-                <a:spcPts val="1000"/>
-              </a:spcAft>
-            </a:pPr>
-            <a:r>
-              <a:rPr sz="1600" b="1" i="0">
-                <a:solidFill>
-                  <a:srgbClr val="2E3A80"/>
-                </a:solidFill>
-                <a:latin typeface="Montserrat"/>
-              </a:rPr>
-              <a:t>•  </a:t>
-            </a:r>
-            <a:r>
-              <a:rPr sz="1600" b="0" i="0">
-                <a:solidFill>
-                  <a:srgbClr val="1B2330"/>
-                </a:solidFill>
-                <a:latin typeface="Montserrat"/>
-              </a:rPr>
-              <a:t>Hereda la categoría del instalador</a:t>
-            </a:r>
-          </a:p>
-          <a:p>
-            <a:pPr>
-              <a:spcAft>
-                <a:spcPts val="1000"/>
-              </a:spcAft>
-            </a:pPr>
-            <a:r>
-              <a:rPr sz="1600" b="1" i="0">
-                <a:solidFill>
-                  <a:srgbClr val="2E3A80"/>
-                </a:solidFill>
-                <a:latin typeface="Montserrat"/>
-              </a:rPr>
-              <a:t>•  </a:t>
-            </a:r>
-            <a:r>
-              <a:rPr sz="1600" b="0" i="0">
-                <a:solidFill>
-                  <a:srgbClr val="1B2330"/>
-                </a:solidFill>
-                <a:latin typeface="Montserrat"/>
-              </a:rPr>
-              <a:t>Empresa B = instalador B</a:t>
-            </a:r>
-          </a:p>
-        </p:txBody>
-      </p:sp>
-      <p:sp>
-        <p:nvSpPr>
-          <p:cNvPr id="8" name="imgph" descr="IMGQ:gas installation company van with tools"/>
+              <a:t>En este vídeo</a:t>
+            </a:r>
+          </a:p>
+        </p:txBody>
+      </p:sp>
+      <p:sp>
+        <p:nvSpPr>
+          <p:cNvPr id="7" name="Rounded Rectangle 6"/>
           <p:cNvSpPr/>
           <p:nvPr/>
         </p:nvSpPr>
         <p:spPr>
           <a:xfrm>
-            <a:off x="5806440" y="1051560"/>
-            <a:ext cx="5298947" cy="4629150"/>
+            <a:off x="868680" y="1673352"/>
+            <a:ext cx="2011680" cy="73152"/>
           </a:xfrm>
           <a:prstGeom prst="roundRect">
             <a:avLst/>
           </a:prstGeom>
           <a:solidFill>
-            <a:srgbClr val="F3F6FB"/>
+            <a:srgbClr val="E8801A"/>
           </a:solidFill>
-          <a:ln w="12700">
-            <a:solidFill>
-              <a:srgbClr val="C7D2E6"/>
-            </a:solidFill>
+          <a:ln>
+            <a:noFill/>
           </a:ln>
           <a:effectLst/>
         </p:spPr>
@@ -8474,14 +9271,14 @@
       </p:sp>
       <p:sp>
         <p:nvSpPr>
-          <p:cNvPr id="9" name="TextBox 8"/>
+          <p:cNvPr id="8" name="TextBox 7"/>
           <p:cNvSpPr txBox="1"/>
           <p:nvPr/>
         </p:nvSpPr>
         <p:spPr>
           <a:xfrm>
-            <a:off x="6080760" y="2726055"/>
-            <a:ext cx="4750307" cy="1280160"/>
+            <a:off x="822960" y="2103120"/>
+            <a:ext cx="10515600" cy="4023360"/>
           </a:xfrm>
           <a:prstGeom prst="rect">
             <a:avLst/>
@@ -8494,27 +9291,228 @@
           </a:bodyPr>
           <a:lstStyle/>
           <a:p>
-            <a:pPr algn="ctr"/>
-            <a:r>
-              <a:rPr sz="1400" b="1" i="0">
-                <a:solidFill>
-                  <a:srgbClr val="64748B"/>
-                </a:solidFill>
-                <a:latin typeface="Montserrat"/>
-              </a:rPr>
-              <a:t>IMAGEN REALISTA</a:t>
-            </a:r>
-          </a:p>
-          <a:p>
-            <a:pPr algn="ctr"/>
-            <a:r>
-              <a:rPr sz="1100" b="0" i="1">
-                <a:solidFill>
-                  <a:srgbClr val="64748B"/>
-                </a:solidFill>
-                <a:latin typeface="Montserrat"/>
-              </a:rPr>
-              <a:t>gas installation company van with tools</a:t>
+            <a:pPr>
+              <a:spcAft>
+                <a:spcPts val="900"/>
+              </a:spcAft>
+            </a:pPr>
+            <a:r>
+              <a:rPr sz="1800" b="1" i="0">
+                <a:solidFill>
+                  <a:srgbClr val="E8801A"/>
+                </a:solidFill>
+                <a:latin typeface="Montserrat"/>
+              </a:rPr>
+              <a:t>01   </a:t>
+            </a:r>
+            <a:r>
+              <a:rPr sz="1700" b="0" i="0">
+                <a:solidFill>
+                  <a:srgbClr val="1B2330"/>
+                </a:solidFill>
+                <a:latin typeface="Montserrat"/>
+              </a:rPr>
+              <a:t>Apartado 3</a:t>
+            </a:r>
+          </a:p>
+          <a:p>
+            <a:pPr>
+              <a:spcAft>
+                <a:spcPts val="900"/>
+              </a:spcAft>
+            </a:pPr>
+            <a:r>
+              <a:rPr sz="1800" b="1" i="0">
+                <a:solidFill>
+                  <a:srgbClr val="E8801A"/>
+                </a:solidFill>
+                <a:latin typeface="Montserrat"/>
+              </a:rPr>
+              <a:t>02   </a:t>
+            </a:r>
+            <a:r>
+              <a:rPr sz="1700" b="0" i="0">
+                <a:solidFill>
+                  <a:srgbClr val="1B2330"/>
+                </a:solidFill>
+                <a:latin typeface="Montserrat"/>
+              </a:rPr>
+              <a:t>Apartado 3.1</a:t>
+            </a:r>
+          </a:p>
+          <a:p>
+            <a:pPr>
+              <a:spcAft>
+                <a:spcPts val="900"/>
+              </a:spcAft>
+            </a:pPr>
+            <a:r>
+              <a:rPr sz="1800" b="1" i="0">
+                <a:solidFill>
+                  <a:srgbClr val="E8801A"/>
+                </a:solidFill>
+                <a:latin typeface="Montserrat"/>
+              </a:rPr>
+              <a:t>03   </a:t>
+            </a:r>
+            <a:r>
+              <a:rPr sz="1700" b="0" i="0">
+                <a:solidFill>
+                  <a:srgbClr val="1B2330"/>
+                </a:solidFill>
+                <a:latin typeface="Montserrat"/>
+              </a:rPr>
+              <a:t>Apartado 3.2</a:t>
+            </a:r>
+          </a:p>
+          <a:p>
+            <a:pPr>
+              <a:spcAft>
+                <a:spcPts val="900"/>
+              </a:spcAft>
+            </a:pPr>
+            <a:r>
+              <a:rPr sz="1800" b="1" i="0">
+                <a:solidFill>
+                  <a:srgbClr val="E8801A"/>
+                </a:solidFill>
+                <a:latin typeface="Montserrat"/>
+              </a:rPr>
+              <a:t>04   </a:t>
+            </a:r>
+            <a:r>
+              <a:rPr sz="1700" b="0" i="0">
+                <a:solidFill>
+                  <a:srgbClr val="1B2330"/>
+                </a:solidFill>
+                <a:latin typeface="Montserrat"/>
+              </a:rPr>
+              <a:t>Apartado 3.3</a:t>
+            </a:r>
+          </a:p>
+          <a:p>
+            <a:pPr>
+              <a:spcAft>
+                <a:spcPts val="900"/>
+              </a:spcAft>
+            </a:pPr>
+            <a:r>
+              <a:rPr sz="1800" b="1" i="0">
+                <a:solidFill>
+                  <a:srgbClr val="E8801A"/>
+                </a:solidFill>
+                <a:latin typeface="Montserrat"/>
+              </a:rPr>
+              <a:t>05   </a:t>
+            </a:r>
+            <a:r>
+              <a:rPr sz="1700" b="0" i="0">
+                <a:solidFill>
+                  <a:srgbClr val="1B2330"/>
+                </a:solidFill>
+                <a:latin typeface="Montserrat"/>
+              </a:rPr>
+              <a:t>Apartados 3.4 y 3.5</a:t>
+            </a:r>
+          </a:p>
+          <a:p>
+            <a:pPr>
+              <a:spcAft>
+                <a:spcPts val="900"/>
+              </a:spcAft>
+            </a:pPr>
+            <a:r>
+              <a:rPr sz="1800" b="1" i="0">
+                <a:solidFill>
+                  <a:srgbClr val="E8801A"/>
+                </a:solidFill>
+                <a:latin typeface="Montserrat"/>
+              </a:rPr>
+              <a:t>06   </a:t>
+            </a:r>
+            <a:r>
+              <a:rPr sz="1700" b="0" i="0">
+                <a:solidFill>
+                  <a:srgbClr val="1B2330"/>
+                </a:solidFill>
+                <a:latin typeface="Montserrat"/>
+              </a:rPr>
+              <a:t>Apartados 3.6 y 3.7</a:t>
+            </a:r>
+          </a:p>
+          <a:p>
+            <a:pPr>
+              <a:spcAft>
+                <a:spcPts val="900"/>
+              </a:spcAft>
+            </a:pPr>
+            <a:r>
+              <a:rPr sz="1800" b="1" i="0">
+                <a:solidFill>
+                  <a:srgbClr val="E8801A"/>
+                </a:solidFill>
+                <a:latin typeface="Montserrat"/>
+              </a:rPr>
+              <a:t>07   </a:t>
+            </a:r>
+            <a:r>
+              <a:rPr sz="1700" b="0" i="0">
+                <a:solidFill>
+                  <a:srgbClr val="1B2330"/>
+                </a:solidFill>
+                <a:latin typeface="Montserrat"/>
+              </a:rPr>
+              <a:t>Apartado 3.8</a:t>
+            </a:r>
+          </a:p>
+          <a:p>
+            <a:pPr>
+              <a:spcAft>
+                <a:spcPts val="900"/>
+              </a:spcAft>
+            </a:pPr>
+            <a:r>
+              <a:rPr sz="1800" b="1" i="0">
+                <a:solidFill>
+                  <a:srgbClr val="E8801A"/>
+                </a:solidFill>
+                <a:latin typeface="Montserrat"/>
+              </a:rPr>
+              <a:t>08   </a:t>
+            </a:r>
+            <a:r>
+              <a:rPr sz="1700" b="0" i="0">
+                <a:solidFill>
+                  <a:srgbClr val="1B2330"/>
+                </a:solidFill>
+                <a:latin typeface="Montserrat"/>
+              </a:rPr>
+              <a:t>Apartado 3.9</a:t>
+            </a:r>
+          </a:p>
+          <a:p>
+            <a:pPr>
+              <a:spcAft>
+                <a:spcPts val="900"/>
+              </a:spcAft>
+            </a:pPr>
+            <a:r>
+              <a:rPr sz="1800" b="1" i="0">
+                <a:solidFill>
+                  <a:srgbClr val="E8801A"/>
+                </a:solidFill>
+                <a:latin typeface="Montserrat"/>
+              </a:rPr>
+              <a:t>09   </a:t>
+            </a:r>
+            <a:r>
+              <a:rPr sz="1700" b="0" i="0">
+                <a:solidFill>
+                  <a:srgbClr val="1B2330"/>
+                </a:solidFill>
+                <a:latin typeface="Montserrat"/>
+              </a:rPr>
+              <a:t>Apartado 3.10</a:t>
             </a:r>
           </a:p>
         </p:txBody>
@@ -8611,7 +9609,7 @@
                 </a:solidFill>
                 <a:latin typeface="Montserrat"/>
               </a:rPr>
-              <a:t>004 / 016</a:t>
+              <a:t>004 / 017</a:t>
             </a:r>
           </a:p>
         </p:txBody>
@@ -8659,7 +9657,7 @@
         <p:spPr>
           <a:xfrm>
             <a:off x="822960" y="457200"/>
-            <a:ext cx="8229600" cy="365760"/>
+            <a:ext cx="10058400" cy="365760"/>
           </a:xfrm>
           <a:prstGeom prst="rect">
             <a:avLst/>
@@ -8673,13 +9671,13 @@
           <a:lstStyle/>
           <a:p>
             <a:r>
-              <a:rPr sz="1200" b="1" i="0">
-                <a:solidFill>
-                  <a:srgbClr val="64748B"/>
-                </a:solidFill>
-                <a:latin typeface="Montserrat"/>
-              </a:rPr>
-              <a:t>APARTADO 3.1 · ALTA</a:t>
+              <a:rPr sz="1300" b="1" i="0">
+                <a:solidFill>
+                  <a:srgbClr val="E8801A"/>
+                </a:solidFill>
+                <a:latin typeface="Montserrat"/>
+              </a:rPr>
+              <a:t>APARTADO 3 · LA EMPRESA</a:t>
             </a:r>
           </a:p>
         </p:txBody>
@@ -8707,26 +9705,70 @@
           <a:lstStyle/>
           <a:p>
             <a:r>
-              <a:rPr sz="2700" b="1" i="0">
+              <a:rPr sz="2800" b="1" i="0">
                 <a:solidFill>
                   <a:srgbClr val="1E2761"/>
                 </a:solidFill>
                 <a:latin typeface="Montserrat"/>
               </a:rPr>
-              <a:t>La declaración responsable</a:t>
-            </a:r>
-          </a:p>
-        </p:txBody>
-      </p:sp>
-      <p:sp>
-        <p:nvSpPr>
-          <p:cNvPr id="7" name="TextBox 6"/>
+              <a:t>Qué es la empresa instaladora</a:t>
+            </a:r>
+          </a:p>
+        </p:txBody>
+      </p:sp>
+      <p:sp>
+        <p:nvSpPr>
+          <p:cNvPr id="7" name="Rounded Rectangle 6"/>
+          <p:cNvSpPr/>
+          <p:nvPr/>
+        </p:nvSpPr>
+        <p:spPr>
+          <a:xfrm>
+            <a:off x="868680" y="1627632"/>
+            <a:ext cx="2011680" cy="73152"/>
+          </a:xfrm>
+          <a:prstGeom prst="roundRect">
+            <a:avLst/>
+          </a:prstGeom>
+          <a:solidFill>
+            <a:srgbClr val="E8801A"/>
+          </a:solidFill>
+          <a:ln>
+            <a:noFill/>
+          </a:ln>
+          <a:effectLst/>
+        </p:spPr>
+        <p:style>
+          <a:lnRef idx="1">
+            <a:schemeClr val="accent1"/>
+          </a:lnRef>
+          <a:fillRef idx="3">
+            <a:schemeClr val="accent1"/>
+          </a:fillRef>
+          <a:effectRef idx="2">
+            <a:schemeClr val="accent1"/>
+          </a:effectRef>
+          <a:fontRef idx="minor">
+            <a:schemeClr val="lt1"/>
+          </a:fontRef>
+        </p:style>
+        <p:txBody>
+          <a:bodyPr rtlCol="0" anchor="ctr"/>
+          <a:lstStyle/>
+          <a:p>
+            <a:pPr algn="ctr"/>
+          </a:p>
+        </p:txBody>
+      </p:sp>
+      <p:sp>
+        <p:nvSpPr>
+          <p:cNvPr id="8" name="TextBox 7"/>
           <p:cNvSpPr txBox="1"/>
           <p:nvPr/>
         </p:nvSpPr>
         <p:spPr>
           <a:xfrm>
-            <a:off x="822960" y="1920240"/>
+            <a:off x="822960" y="1965960"/>
             <a:ext cx="4983480" cy="4206240"/>
           </a:xfrm>
           <a:prstGeom prst="rect">
@@ -8742,17 +9784,17 @@
           <a:p>
             <a:pPr>
               <a:spcAft>
-                <a:spcPts val="1000"/>
+                <a:spcPts val="1100"/>
               </a:spcAft>
             </a:pPr>
             <a:r>
               <a:rPr sz="1600" b="1" i="0">
                 <a:solidFill>
-                  <a:srgbClr val="2E3A80"/>
-                </a:solidFill>
-                <a:latin typeface="Montserrat"/>
-              </a:rPr>
-              <a:t>•  </a:t>
+                  <a:srgbClr val="E8801A"/>
+                </a:solidFill>
+                <a:latin typeface="Montserrat"/>
+              </a:rPr>
+              <a:t>▸  </a:t>
             </a:r>
             <a:r>
               <a:rPr sz="1600" b="0" i="0">
@@ -8761,23 +9803,23 @@
                 </a:solidFill>
                 <a:latin typeface="Montserrat"/>
               </a:rPr>
-              <a:t>Se presenta ante la comunidad autónoma</a:t>
+              <a:t>Persona física o jurídica</a:t>
             </a:r>
           </a:p>
           <a:p>
             <a:pPr>
               <a:spcAft>
-                <a:spcPts val="1000"/>
+                <a:spcPts val="1100"/>
               </a:spcAft>
             </a:pPr>
             <a:r>
               <a:rPr sz="1600" b="1" i="0">
                 <a:solidFill>
-                  <a:srgbClr val="2E3A80"/>
-                </a:solidFill>
-                <a:latin typeface="Montserrat"/>
-              </a:rPr>
-              <a:t>•  </a:t>
+                  <a:srgbClr val="E8801A"/>
+                </a:solidFill>
+                <a:latin typeface="Montserrat"/>
+              </a:rPr>
+              <a:t>▸  </a:t>
             </a:r>
             <a:r>
               <a:rPr sz="1600" b="0" i="0">
@@ -8786,23 +9828,23 @@
                 </a:solidFill>
                 <a:latin typeface="Montserrat"/>
               </a:rPr>
-              <a:t>Antes de empezar la actividad</a:t>
+              <a:t>Monta, repara, mantiene y controla</a:t>
             </a:r>
           </a:p>
           <a:p>
             <a:pPr>
               <a:spcAft>
-                <a:spcPts val="1000"/>
+                <a:spcPts val="1100"/>
               </a:spcAft>
             </a:pPr>
             <a:r>
               <a:rPr sz="1600" b="1" i="0">
                 <a:solidFill>
-                  <a:srgbClr val="2E3A80"/>
-                </a:solidFill>
-                <a:latin typeface="Montserrat"/>
-              </a:rPr>
-              <a:t>•  </a:t>
+                  <a:srgbClr val="E8801A"/>
+                </a:solidFill>
+                <a:latin typeface="Montserrat"/>
+              </a:rPr>
+              <a:t>▸  </a:t>
             </a:r>
             <a:r>
               <a:rPr sz="1600" b="0" i="0">
@@ -8811,23 +9853,23 @@
                 </a:solidFill>
                 <a:latin typeface="Montserrat"/>
               </a:rPr>
-              <a:t>Declaras categoría y actividades</a:t>
+              <a:t>Hereda la categoría del instalador</a:t>
             </a:r>
           </a:p>
           <a:p>
             <a:pPr>
               <a:spcAft>
-                <a:spcPts val="1000"/>
+                <a:spcPts val="1100"/>
               </a:spcAft>
             </a:pPr>
             <a:r>
               <a:rPr sz="1600" b="1" i="0">
                 <a:solidFill>
-                  <a:srgbClr val="2E3A80"/>
-                </a:solidFill>
-                <a:latin typeface="Montserrat"/>
-              </a:rPr>
-              <a:t>•  </a:t>
+                  <a:srgbClr val="E8801A"/>
+                </a:solidFill>
+                <a:latin typeface="Montserrat"/>
+              </a:rPr>
+              <a:t>▸  </a:t>
             </a:r>
             <a:r>
               <a:rPr sz="1600" b="0" i="0">
@@ -8836,14 +9878,14 @@
                 </a:solidFill>
                 <a:latin typeface="Montserrat"/>
               </a:rPr>
-              <a:t>Declaras que cumples y respondes</a:t>
-            </a:r>
-          </a:p>
-        </p:txBody>
-      </p:sp>
-      <p:sp>
-        <p:nvSpPr>
-          <p:cNvPr id="8" name="imgph" descr="IMGQ:person signing official form document"/>
+              <a:t>Empresa B = instalador B</a:t>
+            </a:r>
+          </a:p>
+        </p:txBody>
+      </p:sp>
+      <p:sp>
+        <p:nvSpPr>
+          <p:cNvPr id="9" name="imgph" descr="IMGQ:gas installation company van with tools"/>
           <p:cNvSpPr/>
           <p:nvPr/>
         </p:nvSpPr>
@@ -8889,7 +9931,7 @@
       </p:sp>
       <p:sp>
         <p:nvSpPr>
-          <p:cNvPr id="9" name="TextBox 8"/>
+          <p:cNvPr id="10" name="TextBox 9"/>
           <p:cNvSpPr txBox="1"/>
           <p:nvPr/>
         </p:nvSpPr>
@@ -8929,7 +9971,7 @@
                 </a:solidFill>
                 <a:latin typeface="Montserrat"/>
               </a:rPr>
-              <a:t>person signing official form document</a:t>
+              <a:t>gas installation company van with tools</a:t>
             </a:r>
           </a:p>
         </p:txBody>
@@ -9026,7 +10068,7 @@
                 </a:solidFill>
                 <a:latin typeface="Montserrat"/>
               </a:rPr>
-              <a:t>005 / 016</a:t>
+              <a:t>005 / 017</a:t>
             </a:r>
           </a:p>
         </p:txBody>
@@ -9074,7 +10116,7 @@
         <p:spPr>
           <a:xfrm>
             <a:off x="822960" y="457200"/>
-            <a:ext cx="8229600" cy="365760"/>
+            <a:ext cx="10058400" cy="365760"/>
           </a:xfrm>
           <a:prstGeom prst="rect">
             <a:avLst/>
@@ -9088,13 +10130,13 @@
           <a:lstStyle/>
           <a:p>
             <a:r>
-              <a:rPr sz="1200" b="1" i="0">
-                <a:solidFill>
-                  <a:srgbClr val="64748B"/>
-                </a:solidFill>
-                <a:latin typeface="Montserrat"/>
-              </a:rPr>
-              <a:t>APARTADO 3.2 · EMPRESAS DE LA UE</a:t>
+              <a:rPr sz="1300" b="1" i="0">
+                <a:solidFill>
+                  <a:srgbClr val="E8801A"/>
+                </a:solidFill>
+                <a:latin typeface="Montserrat"/>
+              </a:rPr>
+              <a:t>APARTADO 3.1 · ALTA</a:t>
             </a:r>
           </a:p>
         </p:txBody>
@@ -9122,26 +10164,70 @@
           <a:lstStyle/>
           <a:p>
             <a:r>
-              <a:rPr sz="2700" b="1" i="0">
+              <a:rPr sz="2800" b="1" i="0">
                 <a:solidFill>
                   <a:srgbClr val="1E2761"/>
                 </a:solidFill>
                 <a:latin typeface="Montserrat"/>
               </a:rPr>
-              <a:t>Empresas de otro país de la UE</a:t>
-            </a:r>
-          </a:p>
-        </p:txBody>
-      </p:sp>
-      <p:sp>
-        <p:nvSpPr>
-          <p:cNvPr id="7" name="TextBox 6"/>
+              <a:t>La declaración responsable</a:t>
+            </a:r>
+          </a:p>
+        </p:txBody>
+      </p:sp>
+      <p:sp>
+        <p:nvSpPr>
+          <p:cNvPr id="7" name="Rounded Rectangle 6"/>
+          <p:cNvSpPr/>
+          <p:nvPr/>
+        </p:nvSpPr>
+        <p:spPr>
+          <a:xfrm>
+            <a:off x="868680" y="1627632"/>
+            <a:ext cx="2011680" cy="73152"/>
+          </a:xfrm>
+          <a:prstGeom prst="roundRect">
+            <a:avLst/>
+          </a:prstGeom>
+          <a:solidFill>
+            <a:srgbClr val="E8801A"/>
+          </a:solidFill>
+          <a:ln>
+            <a:noFill/>
+          </a:ln>
+          <a:effectLst/>
+        </p:spPr>
+        <p:style>
+          <a:lnRef idx="1">
+            <a:schemeClr val="accent1"/>
+          </a:lnRef>
+          <a:fillRef idx="3">
+            <a:schemeClr val="accent1"/>
+          </a:fillRef>
+          <a:effectRef idx="2">
+            <a:schemeClr val="accent1"/>
+          </a:effectRef>
+          <a:fontRef idx="minor">
+            <a:schemeClr val="lt1"/>
+          </a:fontRef>
+        </p:style>
+        <p:txBody>
+          <a:bodyPr rtlCol="0" anchor="ctr"/>
+          <a:lstStyle/>
+          <a:p>
+            <a:pPr algn="ctr"/>
+          </a:p>
+        </p:txBody>
+      </p:sp>
+      <p:sp>
+        <p:nvSpPr>
+          <p:cNvPr id="8" name="TextBox 7"/>
           <p:cNvSpPr txBox="1"/>
           <p:nvPr/>
         </p:nvSpPr>
         <p:spPr>
           <a:xfrm>
-            <a:off x="822960" y="1920240"/>
+            <a:off x="822960" y="1965960"/>
             <a:ext cx="4983480" cy="4206240"/>
           </a:xfrm>
           <a:prstGeom prst="rect">
@@ -9157,17 +10243,17 @@
           <a:p>
             <a:pPr>
               <a:spcAft>
-                <a:spcPts val="1000"/>
+                <a:spcPts val="1100"/>
               </a:spcAft>
             </a:pPr>
             <a:r>
               <a:rPr sz="1600" b="1" i="0">
                 <a:solidFill>
-                  <a:srgbClr val="2E3A80"/>
-                </a:solidFill>
-                <a:latin typeface="Montserrat"/>
-              </a:rPr>
-              <a:t>•  </a:t>
+                  <a:srgbClr val="E8801A"/>
+                </a:solidFill>
+                <a:latin typeface="Montserrat"/>
+              </a:rPr>
+              <a:t>▸  </a:t>
             </a:r>
             <a:r>
               <a:rPr sz="1600" b="0" i="0">
@@ -9176,23 +10262,23 @@
                 </a:solidFill>
                 <a:latin typeface="Montserrat"/>
               </a:rPr>
-              <a:t>Régimen de libre prestación</a:t>
+              <a:t>Se presenta ante la comunidad autónoma</a:t>
             </a:r>
           </a:p>
           <a:p>
             <a:pPr>
               <a:spcAft>
-                <a:spcPts val="1000"/>
+                <a:spcPts val="1100"/>
               </a:spcAft>
             </a:pPr>
             <a:r>
               <a:rPr sz="1600" b="1" i="0">
                 <a:solidFill>
-                  <a:srgbClr val="2E3A80"/>
-                </a:solidFill>
-                <a:latin typeface="Montserrat"/>
-              </a:rPr>
-              <a:t>•  </a:t>
+                  <a:srgbClr val="E8801A"/>
+                </a:solidFill>
+                <a:latin typeface="Montserrat"/>
+              </a:rPr>
+              <a:t>▸  </a:t>
             </a:r>
             <a:r>
               <a:rPr sz="1600" b="0" i="0">
@@ -9201,23 +10287,23 @@
                 </a:solidFill>
                 <a:latin typeface="Montserrat"/>
               </a:rPr>
-              <a:t>Misma declaración responsable</a:t>
+              <a:t>Antes de empezar la actividad</a:t>
             </a:r>
           </a:p>
           <a:p>
             <a:pPr>
               <a:spcAft>
-                <a:spcPts val="1000"/>
+                <a:spcPts val="1100"/>
               </a:spcAft>
             </a:pPr>
             <a:r>
               <a:rPr sz="1600" b="1" i="0">
                 <a:solidFill>
-                  <a:srgbClr val="2E3A80"/>
-                </a:solidFill>
-                <a:latin typeface="Montserrat"/>
-              </a:rPr>
-              <a:t>•  </a:t>
+                  <a:srgbClr val="E8801A"/>
+                </a:solidFill>
+                <a:latin typeface="Montserrat"/>
+              </a:rPr>
+              <a:t>▸  </a:t>
             </a:r>
             <a:r>
               <a:rPr sz="1600" b="0" i="0">
@@ -9226,23 +10312,23 @@
                 </a:solidFill>
                 <a:latin typeface="Montserrat"/>
               </a:rPr>
-              <a:t>Antes de iniciar la actividad</a:t>
+              <a:t>Declaras categoría y actividades</a:t>
             </a:r>
           </a:p>
           <a:p>
             <a:pPr>
               <a:spcAft>
-                <a:spcPts val="1000"/>
+                <a:spcPts val="1100"/>
               </a:spcAft>
             </a:pPr>
             <a:r>
               <a:rPr sz="1600" b="1" i="0">
                 <a:solidFill>
-                  <a:srgbClr val="2E3A80"/>
-                </a:solidFill>
-                <a:latin typeface="Montserrat"/>
-              </a:rPr>
-              <a:t>•  </a:t>
+                  <a:srgbClr val="E8801A"/>
+                </a:solidFill>
+                <a:latin typeface="Montserrat"/>
+              </a:rPr>
+              <a:t>▸  </a:t>
             </a:r>
             <a:r>
               <a:rPr sz="1600" b="0" i="0">
@@ -9251,14 +10337,14 @@
                 </a:solidFill>
                 <a:latin typeface="Montserrat"/>
               </a:rPr>
-              <a:t>Acreditan el personal cualificado</a:t>
-            </a:r>
-          </a:p>
-        </p:txBody>
-      </p:sp>
-      <p:sp>
-        <p:nvSpPr>
-          <p:cNvPr id="8" name="imgph" descr="IMGQ:european union flags outside building"/>
+              <a:t>Declaras que cumples y respondes</a:t>
+            </a:r>
+          </a:p>
+        </p:txBody>
+      </p:sp>
+      <p:sp>
+        <p:nvSpPr>
+          <p:cNvPr id="9" name="imgph" descr="IMGQ:person signing official form document"/>
           <p:cNvSpPr/>
           <p:nvPr/>
         </p:nvSpPr>
@@ -9304,7 +10390,7 @@
       </p:sp>
       <p:sp>
         <p:nvSpPr>
-          <p:cNvPr id="9" name="TextBox 8"/>
+          <p:cNvPr id="10" name="TextBox 9"/>
           <p:cNvSpPr txBox="1"/>
           <p:nvPr/>
         </p:nvSpPr>
@@ -9344,7 +10430,7 @@
                 </a:solidFill>
                 <a:latin typeface="Montserrat"/>
               </a:rPr>
-              <a:t>european union flags outside building</a:t>
+              <a:t>person signing official form document</a:t>
             </a:r>
           </a:p>
         </p:txBody>
@@ -9441,7 +10527,7 @@
                 </a:solidFill>
                 <a:latin typeface="Montserrat"/>
               </a:rPr>
-              <a:t>006 / 016</a:t>
+              <a:t>006 / 017</a:t>
             </a:r>
           </a:p>
         </p:txBody>
@@ -9489,7 +10575,7 @@
         <p:spPr>
           <a:xfrm>
             <a:off x="822960" y="457200"/>
-            <a:ext cx="8229600" cy="365760"/>
+            <a:ext cx="10058400" cy="365760"/>
           </a:xfrm>
           <a:prstGeom prst="rect">
             <a:avLst/>
@@ -9503,13 +10589,13 @@
           <a:lstStyle/>
           <a:p>
             <a:r>
-              <a:rPr sz="1200" b="1" i="0">
-                <a:solidFill>
-                  <a:srgbClr val="64748B"/>
-                </a:solidFill>
-                <a:latin typeface="Montserrat"/>
-              </a:rPr>
-              <a:t>APARTADO 3.3 · DOCUMENTACIÓN</a:t>
+              <a:rPr sz="1300" b="1" i="0">
+                <a:solidFill>
+                  <a:srgbClr val="E8801A"/>
+                </a:solidFill>
+                <a:latin typeface="Montserrat"/>
+              </a:rPr>
+              <a:t>APARTADO 3.2 · EMPRESAS DE LA UE</a:t>
             </a:r>
           </a:p>
         </p:txBody>
@@ -9537,26 +10623,70 @@
           <a:lstStyle/>
           <a:p>
             <a:r>
-              <a:rPr sz="2700" b="1" i="0">
+              <a:rPr sz="2800" b="1" i="0">
                 <a:solidFill>
                   <a:srgbClr val="1E2761"/>
                 </a:solidFill>
                 <a:latin typeface="Montserrat"/>
               </a:rPr>
-              <a:t>Declaras, pero no entregas</a:t>
-            </a:r>
-          </a:p>
-        </p:txBody>
-      </p:sp>
-      <p:sp>
-        <p:nvSpPr>
-          <p:cNvPr id="7" name="TextBox 6"/>
+              <a:t>Empresas de otro país de la UE</a:t>
+            </a:r>
+          </a:p>
+        </p:txBody>
+      </p:sp>
+      <p:sp>
+        <p:nvSpPr>
+          <p:cNvPr id="7" name="Rounded Rectangle 6"/>
+          <p:cNvSpPr/>
+          <p:nvPr/>
+        </p:nvSpPr>
+        <p:spPr>
+          <a:xfrm>
+            <a:off x="868680" y="1627632"/>
+            <a:ext cx="2011680" cy="73152"/>
+          </a:xfrm>
+          <a:prstGeom prst="roundRect">
+            <a:avLst/>
+          </a:prstGeom>
+          <a:solidFill>
+            <a:srgbClr val="E8801A"/>
+          </a:solidFill>
+          <a:ln>
+            <a:noFill/>
+          </a:ln>
+          <a:effectLst/>
+        </p:spPr>
+        <p:style>
+          <a:lnRef idx="1">
+            <a:schemeClr val="accent1"/>
+          </a:lnRef>
+          <a:fillRef idx="3">
+            <a:schemeClr val="accent1"/>
+          </a:fillRef>
+          <a:effectRef idx="2">
+            <a:schemeClr val="accent1"/>
+          </a:effectRef>
+          <a:fontRef idx="minor">
+            <a:schemeClr val="lt1"/>
+          </a:fontRef>
+        </p:style>
+        <p:txBody>
+          <a:bodyPr rtlCol="0" anchor="ctr"/>
+          <a:lstStyle/>
+          <a:p>
+            <a:pPr algn="ctr"/>
+          </a:p>
+        </p:txBody>
+      </p:sp>
+      <p:sp>
+        <p:nvSpPr>
+          <p:cNvPr id="8" name="TextBox 7"/>
           <p:cNvSpPr txBox="1"/>
           <p:nvPr/>
         </p:nvSpPr>
         <p:spPr>
           <a:xfrm>
-            <a:off x="822960" y="1920240"/>
+            <a:off x="822960" y="1965960"/>
             <a:ext cx="4983480" cy="4206240"/>
           </a:xfrm>
           <a:prstGeom prst="rect">
@@ -9572,17 +10702,17 @@
           <a:p>
             <a:pPr>
               <a:spcAft>
-                <a:spcPts val="1000"/>
+                <a:spcPts val="1100"/>
               </a:spcAft>
             </a:pPr>
             <a:r>
               <a:rPr sz="1600" b="1" i="0">
                 <a:solidFill>
-                  <a:srgbClr val="2E3A80"/>
-                </a:solidFill>
-                <a:latin typeface="Montserrat"/>
-              </a:rPr>
-              <a:t>•  </a:t>
+                  <a:srgbClr val="E8801A"/>
+                </a:solidFill>
+                <a:latin typeface="Montserrat"/>
+              </a:rPr>
+              <a:t>▸  </a:t>
             </a:r>
             <a:r>
               <a:rPr sz="1600" b="0" i="0">
@@ -9591,23 +10721,23 @@
                 </a:solidFill>
                 <a:latin typeface="Montserrat"/>
               </a:rPr>
-              <a:t>Se puede hacer por medios electrónicos</a:t>
+              <a:t>Régimen de libre prestación</a:t>
             </a:r>
           </a:p>
           <a:p>
             <a:pPr>
               <a:spcAft>
-                <a:spcPts val="1000"/>
+                <a:spcPts val="1100"/>
               </a:spcAft>
             </a:pPr>
             <a:r>
               <a:rPr sz="1600" b="1" i="0">
                 <a:solidFill>
-                  <a:srgbClr val="2E3A80"/>
-                </a:solidFill>
-                <a:latin typeface="Montserrat"/>
-              </a:rPr>
-              <a:t>•  </a:t>
+                  <a:srgbClr val="E8801A"/>
+                </a:solidFill>
+                <a:latin typeface="Montserrat"/>
+              </a:rPr>
+              <a:t>▸  </a:t>
             </a:r>
             <a:r>
               <a:rPr sz="1600" b="0" i="0">
@@ -9616,23 +10746,23 @@
                 </a:solidFill>
                 <a:latin typeface="Montserrat"/>
               </a:rPr>
-              <a:t>No se exige adjuntar la documentación</a:t>
+              <a:t>Misma declaración responsable</a:t>
             </a:r>
           </a:p>
           <a:p>
             <a:pPr>
               <a:spcAft>
-                <a:spcPts val="1000"/>
+                <a:spcPts val="1100"/>
               </a:spcAft>
             </a:pPr>
             <a:r>
               <a:rPr sz="1600" b="1" i="0">
                 <a:solidFill>
-                  <a:srgbClr val="2E3A80"/>
-                </a:solidFill>
-                <a:latin typeface="Montserrat"/>
-              </a:rPr>
-              <a:t>•  </a:t>
+                  <a:srgbClr val="E8801A"/>
+                </a:solidFill>
+                <a:latin typeface="Montserrat"/>
+              </a:rPr>
+              <a:t>▸  </a:t>
             </a:r>
             <a:r>
               <a:rPr sz="1600" b="0" i="0">
@@ -9641,23 +10771,23 @@
                 </a:solidFill>
                 <a:latin typeface="Montserrat"/>
               </a:rPr>
-              <a:t>Debe estar disponible al instante</a:t>
+              <a:t>Antes de iniciar la actividad</a:t>
             </a:r>
           </a:p>
           <a:p>
             <a:pPr>
               <a:spcAft>
-                <a:spcPts val="1000"/>
+                <a:spcPts val="1100"/>
               </a:spcAft>
             </a:pPr>
             <a:r>
               <a:rPr sz="1600" b="1" i="0">
                 <a:solidFill>
-                  <a:srgbClr val="2E3A80"/>
-                </a:solidFill>
-                <a:latin typeface="Montserrat"/>
-              </a:rPr>
-              <a:t>•  </a:t>
+                  <a:srgbClr val="E8801A"/>
+                </a:solidFill>
+                <a:latin typeface="Montserrat"/>
+              </a:rPr>
+              <a:t>▸  </a:t>
             </a:r>
             <a:r>
               <a:rPr sz="1600" b="0" i="0">
@@ -9666,14 +10796,14 @@
                 </a:solidFill>
                 <a:latin typeface="Montserrat"/>
               </a:rPr>
-              <a:t>La Administración puede pedirla</a:t>
-            </a:r>
-          </a:p>
-        </p:txBody>
-      </p:sp>
-      <p:sp>
-        <p:nvSpPr>
-          <p:cNvPr id="8" name="imgph" descr="IMGQ:gas technician showing paperwork to inspector"/>
+              <a:t>Acreditan el personal cualificado</a:t>
+            </a:r>
+          </a:p>
+        </p:txBody>
+      </p:sp>
+      <p:sp>
+        <p:nvSpPr>
+          <p:cNvPr id="9" name="imgph" descr="IMGQ:european union flags outside building"/>
           <p:cNvSpPr/>
           <p:nvPr/>
         </p:nvSpPr>
@@ -9719,7 +10849,7 @@
       </p:sp>
       <p:sp>
         <p:nvSpPr>
-          <p:cNvPr id="9" name="TextBox 8"/>
+          <p:cNvPr id="10" name="TextBox 9"/>
           <p:cNvSpPr txBox="1"/>
           <p:nvPr/>
         </p:nvSpPr>
@@ -9759,7 +10889,7 @@
                 </a:solidFill>
                 <a:latin typeface="Montserrat"/>
               </a:rPr>
-              <a:t>gas technician showing paperwork to inspector</a:t>
+              <a:t>european union flags outside building</a:t>
             </a:r>
           </a:p>
         </p:txBody>
@@ -9856,7 +10986,7 @@
                 </a:solidFill>
                 <a:latin typeface="Montserrat"/>
               </a:rPr>
-              <a:t>007 / 016</a:t>
+              <a:t>007 / 017</a:t>
             </a:r>
           </a:p>
         </p:txBody>
@@ -9904,7 +11034,7 @@
         <p:spPr>
           <a:xfrm>
             <a:off x="822960" y="457200"/>
-            <a:ext cx="8229600" cy="365760"/>
+            <a:ext cx="10058400" cy="365760"/>
           </a:xfrm>
           <a:prstGeom prst="rect">
             <a:avLst/>
@@ -9918,13 +11048,13 @@
           <a:lstStyle/>
           <a:p>
             <a:r>
-              <a:rPr sz="1200" b="1" i="0">
-                <a:solidFill>
-                  <a:srgbClr val="64748B"/>
-                </a:solidFill>
-                <a:latin typeface="Montserrat"/>
-              </a:rPr>
-              <a:t>APARTADOS 3.4 Y 3.5 · HABILITACIÓN</a:t>
+              <a:rPr sz="1300" b="1" i="0">
+                <a:solidFill>
+                  <a:srgbClr val="E8801A"/>
+                </a:solidFill>
+                <a:latin typeface="Montserrat"/>
+              </a:rPr>
+              <a:t>APARTADO 3.3 · DOCUMENTACIÓN</a:t>
             </a:r>
           </a:p>
         </p:txBody>
@@ -9952,26 +11082,70 @@
           <a:lstStyle/>
           <a:p>
             <a:r>
-              <a:rPr sz="2700" b="1" i="0">
+              <a:rPr sz="2800" b="1" i="0">
                 <a:solidFill>
                   <a:srgbClr val="1E2761"/>
                 </a:solidFill>
                 <a:latin typeface="Montserrat"/>
               </a:rPr>
-              <a:t>Habilitada al instante y para siempre</a:t>
-            </a:r>
-          </a:p>
-        </p:txBody>
-      </p:sp>
-      <p:sp>
-        <p:nvSpPr>
-          <p:cNvPr id="7" name="TextBox 6"/>
+              <a:t>Declaras, pero no entregas</a:t>
+            </a:r>
+          </a:p>
+        </p:txBody>
+      </p:sp>
+      <p:sp>
+        <p:nvSpPr>
+          <p:cNvPr id="7" name="Rounded Rectangle 6"/>
+          <p:cNvSpPr/>
+          <p:nvPr/>
+        </p:nvSpPr>
+        <p:spPr>
+          <a:xfrm>
+            <a:off x="868680" y="1627632"/>
+            <a:ext cx="2011680" cy="73152"/>
+          </a:xfrm>
+          <a:prstGeom prst="roundRect">
+            <a:avLst/>
+          </a:prstGeom>
+          <a:solidFill>
+            <a:srgbClr val="E8801A"/>
+          </a:solidFill>
+          <a:ln>
+            <a:noFill/>
+          </a:ln>
+          <a:effectLst/>
+        </p:spPr>
+        <p:style>
+          <a:lnRef idx="1">
+            <a:schemeClr val="accent1"/>
+          </a:lnRef>
+          <a:fillRef idx="3">
+            <a:schemeClr val="accent1"/>
+          </a:fillRef>
+          <a:effectRef idx="2">
+            <a:schemeClr val="accent1"/>
+          </a:effectRef>
+          <a:fontRef idx="minor">
+            <a:schemeClr val="lt1"/>
+          </a:fontRef>
+        </p:style>
+        <p:txBody>
+          <a:bodyPr rtlCol="0" anchor="ctr"/>
+          <a:lstStyle/>
+          <a:p>
+            <a:pPr algn="ctr"/>
+          </a:p>
+        </p:txBody>
+      </p:sp>
+      <p:sp>
+        <p:nvSpPr>
+          <p:cNvPr id="8" name="TextBox 7"/>
           <p:cNvSpPr txBox="1"/>
           <p:nvPr/>
         </p:nvSpPr>
         <p:spPr>
           <a:xfrm>
-            <a:off x="822960" y="1920240"/>
+            <a:off x="822960" y="1965960"/>
             <a:ext cx="4983480" cy="4206240"/>
           </a:xfrm>
           <a:prstGeom prst="rect">
@@ -9987,17 +11161,17 @@
           <a:p>
             <a:pPr>
               <a:spcAft>
-                <a:spcPts val="1000"/>
+                <a:spcPts val="1100"/>
               </a:spcAft>
             </a:pPr>
             <a:r>
               <a:rPr sz="1600" b="1" i="0">
                 <a:solidFill>
-                  <a:srgbClr val="2E3A80"/>
-                </a:solidFill>
-                <a:latin typeface="Montserrat"/>
-              </a:rPr>
-              <a:t>•  </a:t>
+                  <a:srgbClr val="E8801A"/>
+                </a:solidFill>
+                <a:latin typeface="Montserrat"/>
+              </a:rPr>
+              <a:t>▸  </a:t>
             </a:r>
             <a:r>
               <a:rPr sz="1600" b="0" i="0">
@@ -10006,23 +11180,23 @@
                 </a:solidFill>
                 <a:latin typeface="Montserrat"/>
               </a:rPr>
-              <a:t>La CA te asigna un número de identificación</a:t>
+              <a:t>Se puede hacer por medios electrónicos</a:t>
             </a:r>
           </a:p>
           <a:p>
             <a:pPr>
               <a:spcAft>
-                <a:spcPts val="1000"/>
+                <a:spcPts val="1100"/>
               </a:spcAft>
             </a:pPr>
             <a:r>
               <a:rPr sz="1600" b="1" i="0">
                 <a:solidFill>
-                  <a:srgbClr val="2E3A80"/>
-                </a:solidFill>
-                <a:latin typeface="Montserrat"/>
-              </a:rPr>
-              <a:t>•  </a:t>
+                  <a:srgbClr val="E8801A"/>
+                </a:solidFill>
+                <a:latin typeface="Montserrat"/>
+              </a:rPr>
+              <a:t>▸  </a:t>
             </a:r>
             <a:r>
               <a:rPr sz="1600" b="0" i="0">
@@ -10031,23 +11205,23 @@
                 </a:solidFill>
                 <a:latin typeface="Montserrat"/>
               </a:rPr>
-              <a:t>Alta en el Registro Integrado Industrial</a:t>
+              <a:t>No se exige adjuntar la documentación</a:t>
             </a:r>
           </a:p>
           <a:p>
             <a:pPr>
               <a:spcAft>
-                <a:spcPts val="1000"/>
+                <a:spcPts val="1100"/>
               </a:spcAft>
             </a:pPr>
             <a:r>
               <a:rPr sz="1600" b="1" i="0">
                 <a:solidFill>
-                  <a:srgbClr val="2E3A80"/>
-                </a:solidFill>
-                <a:latin typeface="Montserrat"/>
-              </a:rPr>
-              <a:t>•  </a:t>
+                  <a:srgbClr val="E8801A"/>
+                </a:solidFill>
+                <a:latin typeface="Montserrat"/>
+              </a:rPr>
+              <a:t>▸  </a:t>
             </a:r>
             <a:r>
               <a:rPr sz="1600" b="0" i="0">
@@ -10056,23 +11230,23 @@
                 </a:solidFill>
                 <a:latin typeface="Montserrat"/>
               </a:rPr>
-              <a:t>Habilita desde que la presentas</a:t>
+              <a:t>Debe estar disponible al instante</a:t>
             </a:r>
           </a:p>
           <a:p>
             <a:pPr>
               <a:spcAft>
-                <a:spcPts val="1000"/>
+                <a:spcPts val="1100"/>
               </a:spcAft>
             </a:pPr>
             <a:r>
               <a:rPr sz="1600" b="1" i="0">
                 <a:solidFill>
-                  <a:srgbClr val="2E3A80"/>
-                </a:solidFill>
-                <a:latin typeface="Montserrat"/>
-              </a:rPr>
-              <a:t>•  </a:t>
+                  <a:srgbClr val="E8801A"/>
+                </a:solidFill>
+                <a:latin typeface="Montserrat"/>
+              </a:rPr>
+              <a:t>▸  </a:t>
             </a:r>
             <a:r>
               <a:rPr sz="1600" b="0" i="0">
@@ -10081,14 +11255,14 @@
                 </a:solidFill>
                 <a:latin typeface="Montserrat"/>
               </a:rPr>
-              <a:t>Por tiempo indefinido y en toda España</a:t>
-            </a:r>
-          </a:p>
-        </p:txBody>
-      </p:sp>
-      <p:sp>
-        <p:nvSpPr>
-          <p:cNvPr id="8" name="imgph" descr="IMGQ:official registry stamp on document"/>
+              <a:t>La Administración puede pedirla</a:t>
+            </a:r>
+          </a:p>
+        </p:txBody>
+      </p:sp>
+      <p:sp>
+        <p:nvSpPr>
+          <p:cNvPr id="9" name="imgph" descr="IMGQ:gas technician showing paperwork to inspector"/>
           <p:cNvSpPr/>
           <p:nvPr/>
         </p:nvSpPr>
@@ -10134,7 +11308,7 @@
       </p:sp>
       <p:sp>
         <p:nvSpPr>
-          <p:cNvPr id="9" name="TextBox 8"/>
+          <p:cNvPr id="10" name="TextBox 9"/>
           <p:cNvSpPr txBox="1"/>
           <p:nvPr/>
         </p:nvSpPr>
@@ -10174,7 +11348,7 @@
                 </a:solidFill>
                 <a:latin typeface="Montserrat"/>
               </a:rPr>
-              <a:t>official registry stamp on document</a:t>
+              <a:t>gas technician showing paperwork to inspector</a:t>
             </a:r>
           </a:p>
         </p:txBody>
@@ -10271,7 +11445,7 @@
                 </a:solidFill>
                 <a:latin typeface="Montserrat"/>
               </a:rPr>
-              <a:t>008 / 016</a:t>
+              <a:t>008 / 017</a:t>
             </a:r>
           </a:p>
         </p:txBody>
@@ -10319,7 +11493,7 @@
         <p:spPr>
           <a:xfrm>
             <a:off x="822960" y="457200"/>
-            <a:ext cx="8229600" cy="365760"/>
+            <a:ext cx="10058400" cy="365760"/>
           </a:xfrm>
           <a:prstGeom prst="rect">
             <a:avLst/>
@@ -10333,13 +11507,13 @@
           <a:lstStyle/>
           <a:p>
             <a:r>
-              <a:rPr sz="1200" b="1" i="0">
-                <a:solidFill>
-                  <a:srgbClr val="64748B"/>
-                </a:solidFill>
-                <a:latin typeface="Montserrat"/>
-              </a:rPr>
-              <a:t>APARTADOS 3.6 Y 3.7 · CONTROL</a:t>
+              <a:rPr sz="1300" b="1" i="0">
+                <a:solidFill>
+                  <a:srgbClr val="E8801A"/>
+                </a:solidFill>
+                <a:latin typeface="Montserrat"/>
+              </a:rPr>
+              <a:t>APARTADOS 3.4 Y 3.5 · HABILITACIÓN</a:t>
             </a:r>
           </a:p>
         </p:txBody>
@@ -10367,26 +11541,70 @@
           <a:lstStyle/>
           <a:p>
             <a:r>
-              <a:rPr sz="2700" b="1" i="0">
+              <a:rPr sz="2800" b="1" i="0">
                 <a:solidFill>
                   <a:srgbClr val="1E2761"/>
                 </a:solidFill>
                 <a:latin typeface="Montserrat"/>
               </a:rPr>
-              <a:t>Te comprueban después; avisa en un mes</a:t>
-            </a:r>
-          </a:p>
-        </p:txBody>
-      </p:sp>
-      <p:sp>
-        <p:nvSpPr>
-          <p:cNvPr id="7" name="TextBox 6"/>
+              <a:t>Habilitada al instante y para siempre</a:t>
+            </a:r>
+          </a:p>
+        </p:txBody>
+      </p:sp>
+      <p:sp>
+        <p:nvSpPr>
+          <p:cNvPr id="7" name="Rounded Rectangle 6"/>
+          <p:cNvSpPr/>
+          <p:nvPr/>
+        </p:nvSpPr>
+        <p:spPr>
+          <a:xfrm>
+            <a:off x="868680" y="1627632"/>
+            <a:ext cx="2011680" cy="73152"/>
+          </a:xfrm>
+          <a:prstGeom prst="roundRect">
+            <a:avLst/>
+          </a:prstGeom>
+          <a:solidFill>
+            <a:srgbClr val="E8801A"/>
+          </a:solidFill>
+          <a:ln>
+            <a:noFill/>
+          </a:ln>
+          <a:effectLst/>
+        </p:spPr>
+        <p:style>
+          <a:lnRef idx="1">
+            <a:schemeClr val="accent1"/>
+          </a:lnRef>
+          <a:fillRef idx="3">
+            <a:schemeClr val="accent1"/>
+          </a:fillRef>
+          <a:effectRef idx="2">
+            <a:schemeClr val="accent1"/>
+          </a:effectRef>
+          <a:fontRef idx="minor">
+            <a:schemeClr val="lt1"/>
+          </a:fontRef>
+        </p:style>
+        <p:txBody>
+          <a:bodyPr rtlCol="0" anchor="ctr"/>
+          <a:lstStyle/>
+          <a:p>
+            <a:pPr algn="ctr"/>
+          </a:p>
+        </p:txBody>
+      </p:sp>
+      <p:sp>
+        <p:nvSpPr>
+          <p:cNvPr id="8" name="TextBox 7"/>
           <p:cNvSpPr txBox="1"/>
           <p:nvPr/>
         </p:nvSpPr>
         <p:spPr>
           <a:xfrm>
-            <a:off x="822960" y="1920240"/>
+            <a:off x="822960" y="1965960"/>
             <a:ext cx="4983480" cy="4206240"/>
           </a:xfrm>
           <a:prstGeom prst="rect">
@@ -10402,17 +11620,17 @@
           <a:p>
             <a:pPr>
               <a:spcAft>
-                <a:spcPts val="1000"/>
+                <a:spcPts val="1100"/>
               </a:spcAft>
             </a:pPr>
             <a:r>
               <a:rPr sz="1600" b="1" i="0">
                 <a:solidFill>
-                  <a:srgbClr val="2E3A80"/>
-                </a:solidFill>
-                <a:latin typeface="Montserrat"/>
-              </a:rPr>
-              <a:t>•  </a:t>
+                  <a:srgbClr val="E8801A"/>
+                </a:solidFill>
+                <a:latin typeface="Montserrat"/>
+              </a:rPr>
+              <a:t>▸  </a:t>
             </a:r>
             <a:r>
               <a:rPr sz="1600" b="0" i="0">
@@ -10421,23 +11639,23 @@
                 </a:solidFill>
                 <a:latin typeface="Montserrat"/>
               </a:rPr>
-              <a:t>La Administración comprueba a posteriori</a:t>
+              <a:t>La CA te asigna un número de identificación</a:t>
             </a:r>
           </a:p>
           <a:p>
             <a:pPr>
               <a:spcAft>
-                <a:spcPts val="1000"/>
+                <a:spcPts val="1100"/>
               </a:spcAft>
             </a:pPr>
             <a:r>
               <a:rPr sz="1600" b="1" i="0">
                 <a:solidFill>
-                  <a:srgbClr val="2E3A80"/>
-                </a:solidFill>
-                <a:latin typeface="Montserrat"/>
-              </a:rPr>
-              <a:t>•  </a:t>
+                  <a:srgbClr val="E8801A"/>
+                </a:solidFill>
+                <a:latin typeface="Montserrat"/>
+              </a:rPr>
+              <a:t>▸  </a:t>
             </a:r>
             <a:r>
               <a:rPr sz="1600" b="0" i="0">
@@ -10446,23 +11664,23 @@
                 </a:solidFill>
                 <a:latin typeface="Montserrat"/>
               </a:rPr>
-              <a:t>Mentir u omitir: fuera de la actividad</a:t>
+              <a:t>Alta en el Registro Integrado Industrial</a:t>
             </a:r>
           </a:p>
           <a:p>
             <a:pPr>
               <a:spcAft>
-                <a:spcPts val="1000"/>
+                <a:spcPts val="1100"/>
               </a:spcAft>
             </a:pPr>
             <a:r>
               <a:rPr sz="1600" b="1" i="0">
                 <a:solidFill>
-                  <a:srgbClr val="2E3A80"/>
-                </a:solidFill>
-                <a:latin typeface="Montserrat"/>
-              </a:rPr>
-              <a:t>•  </a:t>
+                  <a:srgbClr val="E8801A"/>
+                </a:solidFill>
+                <a:latin typeface="Montserrat"/>
+              </a:rPr>
+              <a:t>▸  </a:t>
             </a:r>
             <a:r>
               <a:rPr sz="1600" b="0" i="0">
@@ -10471,23 +11689,23 @@
                 </a:solidFill>
                 <a:latin typeface="Montserrat"/>
               </a:rPr>
-              <a:t>Cambios o cese: comunicar en 1 mes</a:t>
+              <a:t>Habilita desde que la presentas</a:t>
             </a:r>
           </a:p>
           <a:p>
             <a:pPr>
               <a:spcAft>
-                <a:spcPts val="1000"/>
+                <a:spcPts val="1100"/>
               </a:spcAft>
             </a:pPr>
             <a:r>
               <a:rPr sz="1600" b="1" i="0">
                 <a:solidFill>
-                  <a:srgbClr val="2E3A80"/>
-                </a:solidFill>
-                <a:latin typeface="Montserrat"/>
-              </a:rPr>
-              <a:t>•  </a:t>
+                  <a:srgbClr val="E8801A"/>
+                </a:solidFill>
+                <a:latin typeface="Montserrat"/>
+              </a:rPr>
+              <a:t>▸  </a:t>
             </a:r>
             <a:r>
               <a:rPr sz="1600" b="0" i="0">
@@ -10496,14 +11714,14 @@
                 </a:solidFill>
                 <a:latin typeface="Montserrat"/>
               </a:rPr>
-              <a:t>La firma es de verdad</a:t>
-            </a:r>
-          </a:p>
-        </p:txBody>
-      </p:sp>
-      <p:sp>
-        <p:nvSpPr>
-          <p:cNvPr id="8" name="imgph" descr="IMGQ:inspector checking documents with clipboard"/>
+              <a:t>Por tiempo indefinido y en toda España</a:t>
+            </a:r>
+          </a:p>
+        </p:txBody>
+      </p:sp>
+      <p:sp>
+        <p:nvSpPr>
+          <p:cNvPr id="9" name="imgph" descr="IMGQ:official registry stamp on document"/>
           <p:cNvSpPr/>
           <p:nvPr/>
         </p:nvSpPr>
@@ -10549,7 +11767,7 @@
       </p:sp>
       <p:sp>
         <p:nvSpPr>
-          <p:cNvPr id="9" name="TextBox 8"/>
+          <p:cNvPr id="10" name="TextBox 9"/>
           <p:cNvSpPr txBox="1"/>
           <p:nvPr/>
         </p:nvSpPr>
@@ -10589,7 +11807,7 @@
                 </a:solidFill>
                 <a:latin typeface="Montserrat"/>
               </a:rPr>
-              <a:t>inspector checking documents with clipboard</a:t>
+              <a:t>official registry stamp on document</a:t>
             </a:r>
           </a:p>
         </p:txBody>
@@ -10686,7 +11904,7 @@
                 </a:solidFill>
                 <a:latin typeface="Montserrat"/>
               </a:rPr>
-              <a:t>009 / 016</a:t>
+              <a:t>009 / 017</a:t>
             </a:r>
           </a:p>
         </p:txBody>
@@ -10734,7 +11952,7 @@
         <p:spPr>
           <a:xfrm>
             <a:off x="822960" y="457200"/>
-            <a:ext cx="8229600" cy="365760"/>
+            <a:ext cx="10058400" cy="365760"/>
           </a:xfrm>
           <a:prstGeom prst="rect">
             <a:avLst/>
@@ -10748,13 +11966,13 @@
           <a:lstStyle/>
           <a:p>
             <a:r>
-              <a:rPr sz="1200" b="1" i="0">
-                <a:solidFill>
-                  <a:srgbClr val="64748B"/>
-                </a:solidFill>
-                <a:latin typeface="Montserrat"/>
-              </a:rPr>
-              <a:t>APARTADO 3.8 · PERSONAL</a:t>
+              <a:rPr sz="1300" b="1" i="0">
+                <a:solidFill>
+                  <a:srgbClr val="E8801A"/>
+                </a:solidFill>
+                <a:latin typeface="Montserrat"/>
+              </a:rPr>
+              <a:t>APARTADOS 3.6 Y 3.7 · CONTROL</a:t>
             </a:r>
           </a:p>
         </p:txBody>
@@ -10782,26 +12000,70 @@
           <a:lstStyle/>
           <a:p>
             <a:r>
-              <a:rPr sz="2700" b="1" i="0">
+              <a:rPr sz="2800" b="1" i="0">
                 <a:solidFill>
                   <a:srgbClr val="1E2761"/>
                 </a:solidFill>
                 <a:latin typeface="Montserrat"/>
               </a:rPr>
-              <a:t>Un instalador en plantilla</a:t>
-            </a:r>
-          </a:p>
-        </p:txBody>
-      </p:sp>
-      <p:sp>
-        <p:nvSpPr>
-          <p:cNvPr id="7" name="TextBox 6"/>
+              <a:t>Te comprueban después; avisa en un mes</a:t>
+            </a:r>
+          </a:p>
+        </p:txBody>
+      </p:sp>
+      <p:sp>
+        <p:nvSpPr>
+          <p:cNvPr id="7" name="Rounded Rectangle 6"/>
+          <p:cNvSpPr/>
+          <p:nvPr/>
+        </p:nvSpPr>
+        <p:spPr>
+          <a:xfrm>
+            <a:off x="868680" y="1627632"/>
+            <a:ext cx="2011680" cy="73152"/>
+          </a:xfrm>
+          <a:prstGeom prst="roundRect">
+            <a:avLst/>
+          </a:prstGeom>
+          <a:solidFill>
+            <a:srgbClr val="E8801A"/>
+          </a:solidFill>
+          <a:ln>
+            <a:noFill/>
+          </a:ln>
+          <a:effectLst/>
+        </p:spPr>
+        <p:style>
+          <a:lnRef idx="1">
+            <a:schemeClr val="accent1"/>
+          </a:lnRef>
+          <a:fillRef idx="3">
+            <a:schemeClr val="accent1"/>
+          </a:fillRef>
+          <a:effectRef idx="2">
+            <a:schemeClr val="accent1"/>
+          </a:effectRef>
+          <a:fontRef idx="minor">
+            <a:schemeClr val="lt1"/>
+          </a:fontRef>
+        </p:style>
+        <p:txBody>
+          <a:bodyPr rtlCol="0" anchor="ctr"/>
+          <a:lstStyle/>
+          <a:p>
+            <a:pPr algn="ctr"/>
+          </a:p>
+        </p:txBody>
+      </p:sp>
+      <p:sp>
+        <p:nvSpPr>
+          <p:cNvPr id="8" name="TextBox 7"/>
           <p:cNvSpPr txBox="1"/>
           <p:nvPr/>
         </p:nvSpPr>
         <p:spPr>
           <a:xfrm>
-            <a:off x="822960" y="1920240"/>
+            <a:off x="822960" y="1965960"/>
             <a:ext cx="4983480" cy="4206240"/>
           </a:xfrm>
           <a:prstGeom prst="rect">
@@ -10817,17 +12079,17 @@
           <a:p>
             <a:pPr>
               <a:spcAft>
-                <a:spcPts val="1000"/>
+                <a:spcPts val="1100"/>
               </a:spcAft>
             </a:pPr>
             <a:r>
               <a:rPr sz="1600" b="1" i="0">
                 <a:solidFill>
-                  <a:srgbClr val="2E3A80"/>
-                </a:solidFill>
-                <a:latin typeface="Montserrat"/>
-              </a:rPr>
-              <a:t>•  </a:t>
+                  <a:srgbClr val="E8801A"/>
+                </a:solidFill>
+                <a:latin typeface="Montserrat"/>
+              </a:rPr>
+              <a:t>▸  </a:t>
             </a:r>
             <a:r>
               <a:rPr sz="1600" b="0" i="0">
@@ -10836,23 +12098,23 @@
                 </a:solidFill>
                 <a:latin typeface="Montserrat"/>
               </a:rPr>
-              <a:t>Categoría igual o superior a la empresa</a:t>
+              <a:t>La Administración comprueba a posteriori</a:t>
             </a:r>
           </a:p>
           <a:p>
             <a:pPr>
               <a:spcAft>
-                <a:spcPts val="1000"/>
+                <a:spcPts val="1100"/>
               </a:spcAft>
             </a:pPr>
             <a:r>
               <a:rPr sz="1600" b="1" i="0">
                 <a:solidFill>
-                  <a:srgbClr val="2E3A80"/>
-                </a:solidFill>
-                <a:latin typeface="Montserrat"/>
-              </a:rPr>
-              <a:t>•  </a:t>
+                  <a:srgbClr val="E8801A"/>
+                </a:solidFill>
+                <a:latin typeface="Montserrat"/>
+              </a:rPr>
+              <a:t>▸  </a:t>
             </a:r>
             <a:r>
               <a:rPr sz="1600" b="0" i="0">
@@ -10861,23 +12123,23 @@
                 </a:solidFill>
                 <a:latin typeface="Montserrat"/>
               </a:rPr>
-              <a:t>En plantilla y a jornada completa</a:t>
+              <a:t>Mentir u omitir: fuera de la actividad</a:t>
             </a:r>
           </a:p>
           <a:p>
             <a:pPr>
               <a:spcAft>
-                <a:spcPts val="1000"/>
+                <a:spcPts val="1100"/>
               </a:spcAft>
             </a:pPr>
             <a:r>
               <a:rPr sz="1600" b="1" i="0">
                 <a:solidFill>
-                  <a:srgbClr val="2E3A80"/>
-                </a:solidFill>
-                <a:latin typeface="Montserrat"/>
-              </a:rPr>
-              <a:t>•  </a:t>
+                  <a:srgbClr val="E8801A"/>
+                </a:solidFill>
+                <a:latin typeface="Montserrat"/>
+              </a:rPr>
+              <a:t>▸  </a:t>
             </a:r>
             <a:r>
               <a:rPr sz="1600" b="0" i="0">
@@ -10886,23 +12148,23 @@
                 </a:solidFill>
                 <a:latin typeface="Montserrat"/>
               </a:rPr>
-              <a:t>Vale el socio o el autónomo con carné</a:t>
+              <a:t>Cambios o cese: comunicar en 1 mes</a:t>
             </a:r>
           </a:p>
           <a:p>
             <a:pPr>
               <a:spcAft>
-                <a:spcPts val="1000"/>
+                <a:spcPts val="1100"/>
               </a:spcAft>
             </a:pPr>
             <a:r>
               <a:rPr sz="1600" b="1" i="0">
                 <a:solidFill>
-                  <a:srgbClr val="2E3A80"/>
-                </a:solidFill>
-                <a:latin typeface="Montserrat"/>
-              </a:rPr>
-              <a:t>•  </a:t>
+                  <a:srgbClr val="E8801A"/>
+                </a:solidFill>
+                <a:latin typeface="Montserrat"/>
+              </a:rPr>
+              <a:t>▸  </a:t>
             </a:r>
             <a:r>
               <a:rPr sz="1600" b="0" i="0">
@@ -10911,14 +12173,14 @@
                 </a:solidFill>
                 <a:latin typeface="Montserrat"/>
               </a:rPr>
-              <a:t>O dos a media jornada que cubran el horario</a:t>
-            </a:r>
-          </a:p>
-        </p:txBody>
-      </p:sp>
-      <p:sp>
-        <p:nvSpPr>
-          <p:cNvPr id="8" name="imgph" descr="IMGQ:team of gas installers working together"/>
+              <a:t>La firma es de verdad</a:t>
+            </a:r>
+          </a:p>
+        </p:txBody>
+      </p:sp>
+      <p:sp>
+        <p:nvSpPr>
+          <p:cNvPr id="9" name="imgph" descr="IMGQ:inspector checking documents with clipboard"/>
           <p:cNvSpPr/>
           <p:nvPr/>
         </p:nvSpPr>
@@ -10964,7 +12226,7 @@
       </p:sp>
       <p:sp>
         <p:nvSpPr>
-          <p:cNvPr id="9" name="TextBox 8"/>
+          <p:cNvPr id="10" name="TextBox 9"/>
           <p:cNvSpPr txBox="1"/>
           <p:nvPr/>
         </p:nvSpPr>
@@ -11004,7 +12266,7 @@
                 </a:solidFill>
                 <a:latin typeface="Montserrat"/>
               </a:rPr>
-              <a:t>team of gas installers working together</a:t>
+              <a:t>inspector checking documents with clipboard</a:t>
             </a:r>
           </a:p>
         </p:txBody>

--- a/Curso Gas B/06 - ITC-ICG 09 - Instaladores y empresas instaladoras/06 - ITC-ICG 09 - Instaladores y empresas instaladoras - Vídeo 2.pptx
+++ b/Curso Gas B/06 - ITC-ICG 09 - Instaladores y empresas instaladoras/06 - ITC-ICG 09 - Instaladores y empresas instaladoras - Vídeo 2.pptx
@@ -22,6 +22,10 @@
     <p:sldId id="270" r:id="rId22"/>
     <p:sldId id="271" r:id="rId23"/>
     <p:sldId id="272" r:id="rId24"/>
+    <p:sldId id="273" r:id="rId25"/>
+    <p:sldId id="274" r:id="rId26"/>
+    <p:sldId id="275" r:id="rId27"/>
+    <p:sldId id="276" r:id="rId28"/>
   </p:sldIdLst>
   <p:sldSz cx="12191695" cy="6858000" type="screen4x3"/>
   <p:notesSz cx="6858000" cy="9144000"/>
@@ -743,12 +747,12 @@
           <a:lstStyle/>
           <a:p>
             <a:r>
-              <a:t>N1: ¿Puedo firmar el boletín de una instalación que ha hecho otro?</a:t>
-            </a:r>
-          </a:p>
-          <a:p>
-            <a:r>
-              <a:t>N2: No, jamás, y es una de las prohibiciones más claras de toda la ITC. La empresa instaladora no puede facilitar, ceder ni vender certificados de instalaciones que no ha hecho ella misma. El certificado, el boletín, es la firma de que tu empresa ha montado y probado esa instalación. Si tú no la montaste, tú no la certificas. ¿Por qué está tan perseguido? Porque vender boletines es como firmar un examen que no has hecho: alguien pone su nombre y su responsabilidad a un trabajo que no controla, y detrás de ese papel hay una instalación de gas que puede reventar. Es de las infracciones que más se sancionan en el sector. Regla de una línea: si no la has hecho tú, no la firmas tú.</a:t>
+              <a:t>N1: Pregunta de número puro, de las que caen sí o sí. Tu empresa es categoría be: ¿cuánto seguro por siniestro necesitas?</a:t>
+            </a:r>
+          </a:p>
+          <a:p>
+            <a:r>
+              <a:t>N2: Acuérdate del truco: bajan de mayor a menor con la letra y en saltos de trescientos mil. La be está justo en el medio.</a:t>
             </a:r>
           </a:p>
         </p:txBody>
@@ -818,12 +822,12 @@
           <a:lstStyle/>
           <a:p>
             <a:r>
-              <a:t>N1: ¿Y si me abren un expediente, cuánto tiempo tengo para defenderme?</a:t>
-            </a:r>
-          </a:p>
-          <a:p>
-            <a:r>
-              <a:t>N2: Tienes plazos concretos, y aquí es fácil liarse, así que vamos a ordenarlos. Cuando la Administración detecta un posible incumplimiento, abre un expediente y te da quince días naturales para alegar, es decir, para aportar tus pruebas y tus descargos, tu versión. Y si la infracción es grave, puede suspenderte cautelarmente la actividad mientras resuelve, por un periodo máximo de tres meses. Ahora la parte que cae en el examen: no confundas estos plazos con el del apartado anterior. Recuerda, el mes era para comunicar tú los cambios o el cese de tu empresa, algo voluntario. Estos dos, los quince días y los tres meses, son del régimen sancionador, cuando la cosa va mal. Tres plazos, tres situaciones: un mes para avisar, quince días para defenderte, tres meses de suspensión como tope.</a:t>
+              <a:t>N1: ¿Por qué seiscientos mil y no otra cifra?</a:t>
+            </a:r>
+          </a:p>
+          <a:p>
+            <a:r>
+              <a:t>N2: Porque las tres cuantías son novecientos mil la a, seiscientos mil la be y trescientos mil la ce. La be, la reina del día a día, cae en medio: seiscientos mil euros por siniestro, y siempre vigente. La trampa suele ser colarte el millón doscientos mil, que no existe en la norma.</a:t>
             </a:r>
           </a:p>
         </p:txBody>
@@ -893,12 +897,12 @@
           <a:lstStyle/>
           <a:p>
             <a:r>
-              <a:t>N1: De todas las obligaciones, ¿cuáles caen más?</a:t>
-            </a:r>
-          </a:p>
-          <a:p>
-            <a:r>
-              <a:t>N2: Tres, y te las explico con su porqué. La primera, emitir los certificados reglamentarios: la empresa es quien firma y entrega el boletín de cada trabajo. La segunda, y la más preguntada, la garantía de cuatro años por mala ejecución: si montas mal y en esos cuatro años aparece un problema por tu trabajo, respondes tú y de las consecuencias que se deriven. Piénsalo como la garantía de tu obra, igual que un electrodoméstico trae la suya. La tercera, llevar dos registros, y ojo que aquí hay trampa porque son dos distintos con dos destinatarios distintos. Uno, el registro de certificados y de informes de anomalías, que está a disposición de la comunidad autónoma. Y dos, el registro de informes de anomalías de los controles periódicos, que está a disposición de las distribuidoras y comercializadores de gas licuado. Cada papel lo pide alguien distinto: no los mezcles.</a:t>
+              <a:t>N1: ¿Puedo firmar el boletín de una instalación que ha hecho otro?</a:t>
+            </a:r>
+          </a:p>
+          <a:p>
+            <a:r>
+              <a:t>N2: No, jamás, y es una de las prohibiciones más claras de toda la ITC. La empresa instaladora no puede facilitar, ceder ni vender certificados de instalaciones que no ha hecho ella misma. El certificado, el boletín, es la firma de que tu empresa ha montado y probado esa instalación. Si tú no la montaste, tú no la certificas. ¿Por qué está tan perseguido? Porque vender boletines es como firmar un examen que no has hecho: alguien pone su nombre y su responsabilidad a un trabajo que no controla, y detrás de ese papel hay una instalación de gas que puede reventar. Es de las infracciones que más se sancionan en el sector. Regla de una línea: si no la has hecho tú, no la firmas tú.</a:t>
             </a:r>
           </a:p>
         </p:txBody>
@@ -968,12 +972,12 @@
           <a:lstStyle/>
           <a:p>
             <a:r>
-              <a:t>N1: Volvemos a los aparatos gordos, ¿qué formación hace falta?</a:t>
-            </a:r>
-          </a:p>
-          <a:p>
-            <a:r>
-              <a:t>N2: Un plus de acreditación, sí, y aquí lo concretamos. Recuerda los aparatos del vídeo uno: los conducidos de tipo be y ce de más de veinticuatro coma cuatro kilovatios, y las vitrocerámicas de fuegos cubiertos. Para arrancarlos, mantenerlos o repararlos, cualquier instalador, de la categoría que sea, tiene que acreditar una de estas vías. La más habitual en el taller, con diferencia, es la acreditación del fabricante: el curso que te da la marca de la caldera para poder tocar sus equipos. Por eso, cuando instalas una caldera nueva, la marca exige que la ponga en marcha un servicio acreditado por ella. Las otras vías: un título universitario, un título de formación profesional o certificado de profesionalidad, la cualificación reconocida de otro país de la Unión Europea, o una certificación de entidad acreditada. Todas tienen que cubrir los contenidos del anexo dos, del apartado uno al diecisiete, que veremos en el vídeo tres.</a:t>
+              <a:t>N1: ¿Y si me abren un expediente, cuánto tiempo tengo para defenderme?</a:t>
+            </a:r>
+          </a:p>
+          <a:p>
+            <a:r>
+              <a:t>N2: Tienes plazos concretos, y aquí es fácil liarse, así que vamos a ordenarlos. Cuando la Administración detecta un posible incumplimiento, abre un expediente y te da quince días naturales para alegar, es decir, para aportar tus pruebas y tus descargos, tu versión. Y si la infracción es grave, puede suspenderte cautelarmente la actividad mientras resuelve, por un periodo máximo de tres meses. Ahora la parte que cae en el examen: no confundas estos plazos con el del apartado anterior. Recuerda, el mes era para comunicar tú los cambios o el cese de tu empresa, algo voluntario. Estos dos, los quince días y los tres meses, son del régimen sancionador, cuando la cosa va mal. Tres plazos, tres situaciones: un mes para avisar, quince días para defenderte, tres meses de suspensión como tope.</a:t>
             </a:r>
           </a:p>
         </p:txBody>
@@ -1043,12 +1047,12 @@
           <a:lstStyle/>
           <a:p>
             <a:r>
-              <a:t>N1: ¿Y para el cambio de familia de gas es lo mismo?</a:t>
-            </a:r>
-          </a:p>
-          <a:p>
-            <a:r>
-              <a:t>N2: Casi, pero con dos diferencias que caen en el examen. La operación es adecuar un aparato por cambio de familia de gas, por ejemplo pasarlo de butano a gas natural. Primera diferencia: esto solo lo pueden acreditar las categorías a y be; la ce queda fuera, porque la ce trabaja con instalaciones que no cambian de familia de gas. Segunda diferencia: las vías son parecidas a las de antes, título, formación profesional, cualificación europea o certificación acreditada, pero se exige el anexo dos completo, no solo del uno al diecisiete, sino también el apartado dieciocho, que va justo de adaptar aparatos a otras familias de gas. Y un matiz de la vía del fabricante: su acreditación tiene que reconocer de forma explícita esa capacidad concreta de cambiar el gas; no vale una acreditación genérica. Chuleta: cuatro punto uno, arrancar los grandes, cualquier categoría, anexo del uno al diecisiete; cuatro punto dos, cambiar de gas, solo la a y la be, anexo completo.</a:t>
+              <a:t>N1: Cuidado, que aquí el examen mezcla plazos a propósito. ¿Cuánto tienes para avisar de un cambio de datos o del cierre de tu empresa?</a:t>
+            </a:r>
+          </a:p>
+          <a:p>
+            <a:r>
+              <a:t>N2: Hay tres plazos en este vídeo y solo uno es el correcto para avisar tú, por tu cuenta. Los otros son del régimen sancionador.</a:t>
             </a:r>
           </a:p>
         </p:txBody>
@@ -1118,22 +1122,162 @@
           <a:lstStyle/>
           <a:p>
             <a:r>
-              <a:t>N1: Recapitulamos. ¿Qué me llevo de este vídeo?</a:t>
-            </a:r>
-          </a:p>
-          <a:p>
-            <a:r>
-              <a:t>N2: La empresa completa, montada pieza a pieza. Primera, se arranca con una declaración responsable ante tu comunidad autónoma: firmas que cumples, y quedas habilitado desde ese mismo momento, para siempre y en toda España. Cómodo, pero es una firma de verdad: si mientes u omites algo esencial, te quedas fuera. Segunda, para sostener la categoría necesitas al menos un instalador en plantilla, de categoría igual o superior, a jornada completa. Tercera, los números que caen sí o sí: el seguro por siniestro, novecientos mil la a, seiscientos mil la be, trescientos mil la ce, siempre vigente; y la garantía de cuatro años por mala ejecución. Y cuarta, los tres plazos que se confunden: un mes para avisar de cambios o cese, quince días para alegar en un expediente, y tres meses de suspensión como tope.</a:t>
-            </a:r>
-          </a:p>
-          <a:p>
-            <a:r>
-              <a:t>N1: ¿Y cómo lo enfoco para el examen?</a:t>
-            </a:r>
-          </a:p>
-          <a:p>
-            <a:r>
-              <a:t>N2: El examen adora estos números y estos plazos, y suele mezclarlos a propósito para ver si los distingues. Si tienes claro qué es cada cifra y de qué apartado sale, no caes en la trampa. Y en la obra, esto es lo que te mantiene legal: sin seguro vigente o sin instalador en plantilla, tu empresa no puede firmar un boletín, y sin boletín válido no hay gas. Fíjate lo que llevas ya: sabes quién es el instalador, qué puede tocar, y ahora cómo se monta y se sostiene la empresa. Hoy eres más gasista que ayer. Solo nos queda una pieza: el temario oficial, los anexos, que es lo que te van a preguntar en el examen de tu comunidad. Vamos con el último vídeo.</a:t>
+              <a:t>N1: ¿Por qué un mes y no quince días o tres meses?</a:t>
+            </a:r>
+          </a:p>
+          <a:p>
+            <a:r>
+              <a:t>N2: Porque el mes es el plazo para comunicar tú los cambios o el cese, algo voluntario. Los quince días naturales son para alegar cuando te abren expediente, y los tres meses son el tope de la suspensión cautelar si la infracción es grave. Y los cuatro años son la garantía por mala ejecución, otra cosa distinta. Ordénalos: un mes para avisar, quince días para defenderte, tres meses de suspensión como tope.</a:t>
+            </a:r>
+          </a:p>
+        </p:txBody>
+      </p:sp>
+      <p:sp>
+        <p:nvSpPr>
+          <p:cNvPr id="4" name="Slide Number Placeholder 3"/>
+          <p:cNvSpPr>
+            <a:spLocks noGrp="1"/>
+          </p:cNvSpPr>
+          <p:nvPr>
+            <p:ph type="sldNum" idx="5" sz="quarter"/>
+          </p:nvPr>
+        </p:nvSpPr>
+        <p:spPr/>
+      </p:sp>
+    </p:spTree>
+  </p:cSld>
+  <p:clrMapOvr>
+    <a:masterClrMapping/>
+  </p:clrMapOvr>
+</p:notes>
+</file>
+
+<file path=ppt/notesSlides/notesSlide18.xml><?xml version="1.0" encoding="utf-8"?>
+<p:notes xmlns:a="http://schemas.openxmlformats.org/drawingml/2006/main" xmlns:p="http://schemas.openxmlformats.org/presentationml/2006/main" xmlns:r="http://schemas.openxmlformats.org/officeDocument/2006/relationships">
+  <p:cSld>
+    <p:spTree>
+      <p:nvGrpSpPr>
+        <p:cNvPr id="1" name=""/>
+        <p:cNvGrpSpPr/>
+        <p:nvPr/>
+      </p:nvGrpSpPr>
+      <p:grpSpPr>
+        <a:xfrm>
+          <a:off x="0" y="0"/>
+          <a:ext cx="0" cy="0"/>
+          <a:chOff x="0" y="0"/>
+          <a:chExt cx="0" cy="0"/>
+        </a:xfrm>
+      </p:grpSpPr>
+      <p:sp>
+        <p:nvSpPr>
+          <p:cNvPr id="2" name="Slide Image Placeholder 1"/>
+          <p:cNvSpPr>
+            <a:spLocks noGrp="1"/>
+          </p:cNvSpPr>
+          <p:nvPr>
+            <p:ph type="sldImg" idx="2"/>
+          </p:nvPr>
+        </p:nvSpPr>
+        <p:spPr/>
+      </p:sp>
+      <p:sp>
+        <p:nvSpPr>
+          <p:cNvPr id="3" name="Notes Placeholder 2"/>
+          <p:cNvSpPr>
+            <a:spLocks noGrp="1"/>
+          </p:cNvSpPr>
+          <p:nvPr>
+            <p:ph type="body" idx="3" sz="quarter"/>
+          </p:nvPr>
+        </p:nvSpPr>
+        <p:spPr/>
+        <p:txBody>
+          <a:bodyPr/>
+          <a:lstStyle/>
+          <a:p>
+            <a:r>
+              <a:t>N1: De todas las obligaciones, ¿cuáles caen más?</a:t>
+            </a:r>
+          </a:p>
+          <a:p>
+            <a:r>
+              <a:t>N2: Tres, y te las explico con su porqué. La primera, emitir los certificados reglamentarios: la empresa es quien firma y entrega el boletín de cada trabajo. La segunda, y la más preguntada, la garantía de cuatro años por mala ejecución: si montas mal y en esos cuatro años aparece un problema por tu trabajo, respondes tú y de las consecuencias que se deriven. Piénsalo como la garantía de tu obra, igual que un electrodoméstico trae la suya. La tercera, llevar dos registros, y ojo que aquí hay trampa porque son dos distintos con dos destinatarios distintos. Uno, el registro de certificados y de informes de anomalías, que está a disposición de la comunidad autónoma. Y dos, el registro de informes de anomalías de los controles periódicos, que está a disposición de las distribuidoras y comercializadores de gas licuado. Cada papel lo pide alguien distinto: no los mezcles.</a:t>
+            </a:r>
+          </a:p>
+        </p:txBody>
+      </p:sp>
+      <p:sp>
+        <p:nvSpPr>
+          <p:cNvPr id="4" name="Slide Number Placeholder 3"/>
+          <p:cNvSpPr>
+            <a:spLocks noGrp="1"/>
+          </p:cNvSpPr>
+          <p:nvPr>
+            <p:ph type="sldNum" idx="5" sz="quarter"/>
+          </p:nvPr>
+        </p:nvSpPr>
+        <p:spPr/>
+      </p:sp>
+    </p:spTree>
+  </p:cSld>
+  <p:clrMapOvr>
+    <a:masterClrMapping/>
+  </p:clrMapOvr>
+</p:notes>
+</file>
+
+<file path=ppt/notesSlides/notesSlide19.xml><?xml version="1.0" encoding="utf-8"?>
+<p:notes xmlns:a="http://schemas.openxmlformats.org/drawingml/2006/main" xmlns:p="http://schemas.openxmlformats.org/presentationml/2006/main" xmlns:r="http://schemas.openxmlformats.org/officeDocument/2006/relationships">
+  <p:cSld>
+    <p:spTree>
+      <p:nvGrpSpPr>
+        <p:cNvPr id="1" name=""/>
+        <p:cNvGrpSpPr/>
+        <p:nvPr/>
+      </p:nvGrpSpPr>
+      <p:grpSpPr>
+        <a:xfrm>
+          <a:off x="0" y="0"/>
+          <a:ext cx="0" cy="0"/>
+          <a:chOff x="0" y="0"/>
+          <a:chExt cx="0" cy="0"/>
+        </a:xfrm>
+      </p:grpSpPr>
+      <p:sp>
+        <p:nvSpPr>
+          <p:cNvPr id="2" name="Slide Image Placeholder 1"/>
+          <p:cNvSpPr>
+            <a:spLocks noGrp="1"/>
+          </p:cNvSpPr>
+          <p:nvPr>
+            <p:ph type="sldImg" idx="2"/>
+          </p:nvPr>
+        </p:nvSpPr>
+        <p:spPr/>
+      </p:sp>
+      <p:sp>
+        <p:nvSpPr>
+          <p:cNvPr id="3" name="Notes Placeholder 2"/>
+          <p:cNvSpPr>
+            <a:spLocks noGrp="1"/>
+          </p:cNvSpPr>
+          <p:nvPr>
+            <p:ph type="body" idx="3" sz="quarter"/>
+          </p:nvPr>
+        </p:nvSpPr>
+        <p:spPr/>
+        <p:txBody>
+          <a:bodyPr/>
+          <a:lstStyle/>
+          <a:p>
+            <a:r>
+              <a:t>N1: Volvemos a los aparatos gordos, ¿qué formación hace falta?</a:t>
+            </a:r>
+          </a:p>
+          <a:p>
+            <a:r>
+              <a:t>N2: Un plus de acreditación, sí, y aquí lo concretamos. Recuerda los aparatos del vídeo uno: los conducidos de tipo be y ce de más de veinticuatro coma cuatro kilovatios, y las vitrocerámicas de fuegos cubiertos. Para arrancarlos, mantenerlos o repararlos, cualquier instalador, de la categoría que sea, tiene que acreditar una de estas vías. La más habitual en el taller, con diferencia, es la acreditación del fabricante: el curso que te da la marca de la caldera para poder tocar sus equipos. Por eso, cuando instalas una caldera nueva, la marca exige que la ponga en marcha un servicio acreditado por ella. Las otras vías: un título universitario, un título de formación profesional o certificado de profesionalidad, la cualificación reconocida de otro país de la Unión Europea, o una certificación de entidad acreditada. Todas tienen que cubrir los contenidos del anexo dos, del apartado uno al diecisiete, que veremos en el vídeo tres.</a:t>
             </a:r>
           </a:p>
         </p:txBody>
@@ -1209,6 +1353,166 @@
           <a:p>
             <a:r>
               <a:t>N2: Porque son los tres que más se preguntan de este vídeo, y conviene tenerlos desde el principio. El primero, seiscientos mil euros: es el seguro de responsabilidad civil que necesita una empresa de categoría be por cada siniestro; ahora veremos que la a y la ce tienen otras cifras. El segundo, cuatro años: es la garantía que da la empresa por su trabajo; si montas mal y en esos cuatro años aparece un problema por tu obra, respondes tú. Y el tercero, un mes: es el plazo que tienes para avisar a la Administración si cambia algo de tu empresa o si cierras. Quédate con la foto general; ahora los desarrollamos uno a uno.</a:t>
+            </a:r>
+          </a:p>
+        </p:txBody>
+      </p:sp>
+      <p:sp>
+        <p:nvSpPr>
+          <p:cNvPr id="4" name="Slide Number Placeholder 3"/>
+          <p:cNvSpPr>
+            <a:spLocks noGrp="1"/>
+          </p:cNvSpPr>
+          <p:nvPr>
+            <p:ph type="sldNum" idx="5" sz="quarter"/>
+          </p:nvPr>
+        </p:nvSpPr>
+        <p:spPr/>
+      </p:sp>
+    </p:spTree>
+  </p:cSld>
+  <p:clrMapOvr>
+    <a:masterClrMapping/>
+  </p:clrMapOvr>
+</p:notes>
+</file>
+
+<file path=ppt/notesSlides/notesSlide20.xml><?xml version="1.0" encoding="utf-8"?>
+<p:notes xmlns:a="http://schemas.openxmlformats.org/drawingml/2006/main" xmlns:p="http://schemas.openxmlformats.org/presentationml/2006/main" xmlns:r="http://schemas.openxmlformats.org/officeDocument/2006/relationships">
+  <p:cSld>
+    <p:spTree>
+      <p:nvGrpSpPr>
+        <p:cNvPr id="1" name=""/>
+        <p:cNvGrpSpPr/>
+        <p:nvPr/>
+      </p:nvGrpSpPr>
+      <p:grpSpPr>
+        <a:xfrm>
+          <a:off x="0" y="0"/>
+          <a:ext cx="0" cy="0"/>
+          <a:chOff x="0" y="0"/>
+          <a:chExt cx="0" cy="0"/>
+        </a:xfrm>
+      </p:grpSpPr>
+      <p:sp>
+        <p:nvSpPr>
+          <p:cNvPr id="2" name="Slide Image Placeholder 1"/>
+          <p:cNvSpPr>
+            <a:spLocks noGrp="1"/>
+          </p:cNvSpPr>
+          <p:nvPr>
+            <p:ph type="sldImg" idx="2"/>
+          </p:nvPr>
+        </p:nvSpPr>
+        <p:spPr/>
+      </p:sp>
+      <p:sp>
+        <p:nvSpPr>
+          <p:cNvPr id="3" name="Notes Placeholder 2"/>
+          <p:cNvSpPr>
+            <a:spLocks noGrp="1"/>
+          </p:cNvSpPr>
+          <p:nvPr>
+            <p:ph type="body" idx="3" sz="quarter"/>
+          </p:nvPr>
+        </p:nvSpPr>
+        <p:spPr/>
+        <p:txBody>
+          <a:bodyPr/>
+          <a:lstStyle/>
+          <a:p>
+            <a:r>
+              <a:t>N1: ¿Y para el cambio de familia de gas es lo mismo?</a:t>
+            </a:r>
+          </a:p>
+          <a:p>
+            <a:r>
+              <a:t>N2: Casi, pero con dos diferencias que caen en el examen. La operación es adecuar un aparato por cambio de familia de gas, por ejemplo pasarlo de butano a gas natural. Primera diferencia: esto solo lo pueden acreditar las categorías a y be; la ce queda fuera, porque la ce trabaja con instalaciones que no cambian de familia de gas. Segunda diferencia: las vías son parecidas a las de antes, título, formación profesional, cualificación europea o certificación acreditada, pero se exige el anexo dos completo, no solo del uno al diecisiete, sino también el apartado dieciocho, que va justo de adaptar aparatos a otras familias de gas. Y un matiz de la vía del fabricante: su acreditación tiene que reconocer de forma explícita esa capacidad concreta de cambiar el gas; no vale una acreditación genérica. Chuleta: cuatro punto uno, arrancar los grandes, cualquier categoría, anexo del uno al diecisiete; cuatro punto dos, cambiar de gas, solo la a y la be, anexo completo.</a:t>
+            </a:r>
+          </a:p>
+        </p:txBody>
+      </p:sp>
+      <p:sp>
+        <p:nvSpPr>
+          <p:cNvPr id="4" name="Slide Number Placeholder 3"/>
+          <p:cNvSpPr>
+            <a:spLocks noGrp="1"/>
+          </p:cNvSpPr>
+          <p:nvPr>
+            <p:ph type="sldNum" idx="5" sz="quarter"/>
+          </p:nvPr>
+        </p:nvSpPr>
+        <p:spPr/>
+      </p:sp>
+    </p:spTree>
+  </p:cSld>
+  <p:clrMapOvr>
+    <a:masterClrMapping/>
+  </p:clrMapOvr>
+</p:notes>
+</file>
+
+<file path=ppt/notesSlides/notesSlide21.xml><?xml version="1.0" encoding="utf-8"?>
+<p:notes xmlns:a="http://schemas.openxmlformats.org/drawingml/2006/main" xmlns:p="http://schemas.openxmlformats.org/presentationml/2006/main" xmlns:r="http://schemas.openxmlformats.org/officeDocument/2006/relationships">
+  <p:cSld>
+    <p:spTree>
+      <p:nvGrpSpPr>
+        <p:cNvPr id="1" name=""/>
+        <p:cNvGrpSpPr/>
+        <p:nvPr/>
+      </p:nvGrpSpPr>
+      <p:grpSpPr>
+        <a:xfrm>
+          <a:off x="0" y="0"/>
+          <a:ext cx="0" cy="0"/>
+          <a:chOff x="0" y="0"/>
+          <a:chExt cx="0" cy="0"/>
+        </a:xfrm>
+      </p:grpSpPr>
+      <p:sp>
+        <p:nvSpPr>
+          <p:cNvPr id="2" name="Slide Image Placeholder 1"/>
+          <p:cNvSpPr>
+            <a:spLocks noGrp="1"/>
+          </p:cNvSpPr>
+          <p:nvPr>
+            <p:ph type="sldImg" idx="2"/>
+          </p:nvPr>
+        </p:nvSpPr>
+        <p:spPr/>
+      </p:sp>
+      <p:sp>
+        <p:nvSpPr>
+          <p:cNvPr id="3" name="Notes Placeholder 2"/>
+          <p:cNvSpPr>
+            <a:spLocks noGrp="1"/>
+          </p:cNvSpPr>
+          <p:nvPr>
+            <p:ph type="body" idx="3" sz="quarter"/>
+          </p:nvPr>
+        </p:nvSpPr>
+        <p:spPr/>
+        <p:txBody>
+          <a:bodyPr/>
+          <a:lstStyle/>
+          <a:p>
+            <a:r>
+              <a:t>N1: Recapitulamos. ¿Qué me llevo de este vídeo?</a:t>
+            </a:r>
+          </a:p>
+          <a:p>
+            <a:r>
+              <a:t>N2: La empresa completa, montada pieza a pieza. Primera, se arranca con una declaración responsable ante tu comunidad autónoma: firmas que cumples, y quedas habilitado desde ese mismo momento, para siempre y en toda España. Cómodo, pero es una firma de verdad: si mientes u omites algo esencial, te quedas fuera. Segunda, para sostener la categoría necesitas al menos un instalador en plantilla, de categoría igual o superior, a jornada completa. Tercera, los números que caen sí o sí: el seguro por siniestro, novecientos mil la a, seiscientos mil la be, trescientos mil la ce, siempre vigente; y la garantía de cuatro años por mala ejecución. Y cuarta, los tres plazos que se confunden: un mes para avisar de cambios o cese, quince días para alegar en un expediente, y tres meses de suspensión como tope.</a:t>
+            </a:r>
+          </a:p>
+          <a:p>
+            <a:r>
+              <a:t>N1: ¿Y cómo lo enfoco para el examen?</a:t>
+            </a:r>
+          </a:p>
+          <a:p>
+            <a:r>
+              <a:t>N2: El examen adora estos números y estos plazos, y suele mezclarlos a propósito para ver si los distingues. Si tienes claro qué es cada cifra y de qué apartado sale, no caes en la trampa. Y en la obra, esto es lo que te mantiene legal: sin seguro vigente o sin instalador en plantilla, tu empresa no puede firmar un boletín, y sin boletín válido no hay gas. Fíjate lo que llevas ya: sabes quién es el instalador, qué puede tocar, y ahora cómo se monta y se sostiene la empresa. Hoy eres más gasista que ayer. Solo nos queda una pieza: el temario oficial, los anexos, que es lo que te van a preguntar en el examen de tu comunidad. Vamos con el último vídeo.</a:t>
             </a:r>
           </a:p>
         </p:txBody>
@@ -4810,7 +5114,7 @@
       </p:sp>
       <p:sp>
         <p:nvSpPr>
-          <p:cNvPr id="4" name="Rounded Rectangle 3"/>
+          <p:cNvPr id="4" name="Rectangle 3"/>
           <p:cNvSpPr/>
           <p:nvPr/>
         </p:nvSpPr>
@@ -4819,7 +5123,7 @@
             <a:off x="868680" y="2057400"/>
             <a:ext cx="1463040" cy="82296"/>
           </a:xfrm>
-          <a:prstGeom prst="roundRect">
+          <a:prstGeom prst="rect">
             <a:avLst/>
           </a:prstGeom>
           <a:solidFill>
@@ -4936,6 +5240,18 @@
   <p:clrMapOvr>
     <a:masterClrMapping/>
   </p:clrMapOvr>
+  <mc:AlternateContent xmlns:mc="http://schemas.openxmlformats.org/markup-compatibility/2006">
+    <mc:Choice xmlns:p14="http://schemas.microsoft.com/office/powerpoint/2010/main" Requires="p14">
+      <p:transition spd="med" p14:dur="700">
+        <p14:cube dir="l"/>
+      </p:transition>
+    </mc:Choice>
+    <mc:Fallback>
+      <p:transition spd="med">
+        <p:push dir="l"/>
+      </p:transition>
+    </mc:Fallback>
+  </mc:AlternateContent>
 </p:sld>
 </file>
 
@@ -5023,7 +5339,7 @@
                 </a:solidFill>
                 <a:latin typeface="Montserrat"/>
               </a:rPr>
-              <a:t>010 / 017</a:t>
+              <a:t>010 / 021</a:t>
             </a:r>
           </a:p>
         </p:txBody>
@@ -5132,7 +5448,7 @@
       </p:sp>
       <p:sp>
         <p:nvSpPr>
-          <p:cNvPr id="7" name="Rounded Rectangle 6"/>
+          <p:cNvPr id="7" name="Rectangle 6"/>
           <p:cNvSpPr/>
           <p:nvPr/>
         </p:nvSpPr>
@@ -5141,7 +5457,7 @@
             <a:off x="868680" y="1627632"/>
             <a:ext cx="2011680" cy="73152"/>
           </a:xfrm>
-          <a:prstGeom prst="roundRect">
+          <a:prstGeom prst="rect">
             <a:avLst/>
           </a:prstGeom>
           <a:solidFill>
@@ -5183,7 +5499,7 @@
         <p:spPr>
           <a:xfrm>
             <a:off x="822960" y="1965960"/>
-            <a:ext cx="4983480" cy="4206240"/>
+            <a:ext cx="5029200" cy="4206240"/>
           </a:xfrm>
           <a:prstGeom prst="rect">
             <a:avLst/>
@@ -5305,8 +5621,8 @@
         </p:nvSpPr>
         <p:spPr>
           <a:xfrm>
-            <a:off x="5806440" y="1051560"/>
-            <a:ext cx="5298947" cy="4629150"/>
+            <a:off x="6080760" y="1965960"/>
+            <a:ext cx="5303520" cy="4572000"/>
           </a:xfrm>
           <a:prstGeom prst="roundRect">
             <a:avLst/>
@@ -5351,8 +5667,8 @@
         </p:nvSpPr>
         <p:spPr>
           <a:xfrm>
-            <a:off x="6080760" y="2726055"/>
-            <a:ext cx="4750307" cy="1280160"/>
+            <a:off x="6355080" y="3611880"/>
+            <a:ext cx="4754880" cy="1280160"/>
           </a:xfrm>
           <a:prstGeom prst="rect">
             <a:avLst/>
@@ -5373,7 +5689,7 @@
                 </a:solidFill>
                 <a:latin typeface="Montserrat"/>
               </a:rPr>
-              <a:t>IMAGEN REALISTA</a:t>
+              <a:t>IMAGEN</a:t>
             </a:r>
           </a:p>
           <a:p>
@@ -5395,6 +5711,18 @@
   <p:clrMapOvr>
     <a:masterClrMapping/>
   </p:clrMapOvr>
+  <mc:AlternateContent xmlns:mc="http://schemas.openxmlformats.org/markup-compatibility/2006">
+    <mc:Choice xmlns:p14="http://schemas.microsoft.com/office/powerpoint/2010/main" Requires="p14">
+      <p:transition spd="med" p14:dur="700">
+        <p14:cube dir="r"/>
+      </p:transition>
+    </mc:Choice>
+    <mc:Fallback>
+      <p:transition spd="med">
+        <p:push dir="r"/>
+      </p:transition>
+    </mc:Fallback>
+  </mc:AlternateContent>
 </p:sld>
 </file>
 
@@ -5482,7 +5810,7 @@
                 </a:solidFill>
                 <a:latin typeface="Montserrat"/>
               </a:rPr>
-              <a:t>011 / 017</a:t>
+              <a:t>011 / 021</a:t>
             </a:r>
           </a:p>
         </p:txBody>
@@ -5591,7 +5919,7 @@
       </p:sp>
       <p:sp>
         <p:nvSpPr>
-          <p:cNvPr id="7" name="Rounded Rectangle 6"/>
+          <p:cNvPr id="7" name="Rectangle 6"/>
           <p:cNvSpPr/>
           <p:nvPr/>
         </p:nvSpPr>
@@ -5600,7 +5928,7 @@
             <a:off x="868680" y="1627632"/>
             <a:ext cx="2011680" cy="73152"/>
           </a:xfrm>
-          <a:prstGeom prst="roundRect">
+          <a:prstGeom prst="rect">
             <a:avLst/>
           </a:prstGeom>
           <a:solidFill>
@@ -5641,8 +5969,8 @@
         </p:nvSpPr>
         <p:spPr>
           <a:xfrm>
-            <a:off x="822960" y="1965960"/>
-            <a:ext cx="4983480" cy="4206240"/>
+            <a:off x="6355080" y="1965960"/>
+            <a:ext cx="5029200" cy="4206240"/>
           </a:xfrm>
           <a:prstGeom prst="rect">
             <a:avLst/>
@@ -5764,8 +6092,8 @@
         </p:nvSpPr>
         <p:spPr>
           <a:xfrm>
-            <a:off x="5806440" y="1051560"/>
-            <a:ext cx="5298947" cy="4629150"/>
+            <a:off x="822960" y="1965960"/>
+            <a:ext cx="5303520" cy="4572000"/>
           </a:xfrm>
           <a:prstGeom prst="roundRect">
             <a:avLst/>
@@ -5810,8 +6138,8 @@
         </p:nvSpPr>
         <p:spPr>
           <a:xfrm>
-            <a:off x="6080760" y="2726055"/>
-            <a:ext cx="4750307" cy="1280160"/>
+            <a:off x="1097280" y="3611880"/>
+            <a:ext cx="4754880" cy="1280160"/>
           </a:xfrm>
           <a:prstGeom prst="rect">
             <a:avLst/>
@@ -5832,7 +6160,7 @@
                 </a:solidFill>
                 <a:latin typeface="Montserrat"/>
               </a:rPr>
-              <a:t>IMAGEN REALISTA</a:t>
+              <a:t>IMAGEN</a:t>
             </a:r>
           </a:p>
           <a:p>
@@ -5854,6 +6182,18 @@
   <p:clrMapOvr>
     <a:masterClrMapping/>
   </p:clrMapOvr>
+  <mc:AlternateContent xmlns:mc="http://schemas.openxmlformats.org/markup-compatibility/2006">
+    <mc:Choice xmlns:p14="http://schemas.microsoft.com/office/powerpoint/2010/main" Requires="p14">
+      <p:transition spd="med" p14:dur="700">
+        <p14:cube dir="l"/>
+      </p:transition>
+    </mc:Choice>
+    <mc:Fallback>
+      <p:transition spd="med">
+        <p:push dir="l"/>
+      </p:transition>
+    </mc:Fallback>
+  </mc:AlternateContent>
 </p:sld>
 </file>
 
@@ -5941,7 +6281,7 @@
                 </a:solidFill>
                 <a:latin typeface="Montserrat"/>
               </a:rPr>
-              <a:t>012 / 017</a:t>
+              <a:t>012 / 021</a:t>
             </a:r>
           </a:p>
         </p:txBody>
@@ -5982,84 +6322,16 @@
       </p:sp>
       <p:sp>
         <p:nvSpPr>
-          <p:cNvPr id="5" name="TextBox 4"/>
-          <p:cNvSpPr txBox="1"/>
-          <p:nvPr/>
-        </p:nvSpPr>
-        <p:spPr>
-          <a:xfrm>
-            <a:off x="822960" y="457200"/>
-            <a:ext cx="10058400" cy="365760"/>
-          </a:xfrm>
-          <a:prstGeom prst="rect">
-            <a:avLst/>
-          </a:prstGeom>
-          <a:noFill/>
-        </p:spPr>
-        <p:txBody>
-          <a:bodyPr wrap="square">
-            <a:spAutoFit/>
-          </a:bodyPr>
-          <a:lstStyle/>
-          <a:p>
-            <a:r>
-              <a:rPr sz="1300" b="1" i="0">
-                <a:solidFill>
-                  <a:srgbClr val="E8801A"/>
-                </a:solidFill>
-                <a:latin typeface="Montserrat"/>
-              </a:rPr>
-              <a:t>APARTADO 3.9 · PROHIBICIÓN</a:t>
-            </a:r>
-          </a:p>
-        </p:txBody>
-      </p:sp>
-      <p:sp>
-        <p:nvSpPr>
-          <p:cNvPr id="6" name="TextBox 5"/>
-          <p:cNvSpPr txBox="1"/>
-          <p:nvPr/>
-        </p:nvSpPr>
-        <p:spPr>
-          <a:xfrm>
-            <a:off x="822960" y="868680"/>
-            <a:ext cx="10515600" cy="914400"/>
-          </a:xfrm>
-          <a:prstGeom prst="rect">
-            <a:avLst/>
-          </a:prstGeom>
-          <a:noFill/>
-        </p:spPr>
-        <p:txBody>
-          <a:bodyPr wrap="square">
-            <a:spAutoFit/>
-          </a:bodyPr>
-          <a:lstStyle/>
-          <a:p>
-            <a:r>
-              <a:rPr sz="2800" b="1" i="0">
-                <a:solidFill>
-                  <a:srgbClr val="1E2761"/>
-                </a:solidFill>
-                <a:latin typeface="Montserrat"/>
-              </a:rPr>
-              <a:t>Nada de vender boletines</a:t>
-            </a:r>
-          </a:p>
-        </p:txBody>
-      </p:sp>
-      <p:sp>
-        <p:nvSpPr>
-          <p:cNvPr id="7" name="Rounded Rectangle 6"/>
+          <p:cNvPr id="5" name="Rectangle 4"/>
           <p:cNvSpPr/>
           <p:nvPr/>
         </p:nvSpPr>
         <p:spPr>
           <a:xfrm>
-            <a:off x="868680" y="1627632"/>
-            <a:ext cx="2011680" cy="73152"/>
-          </a:xfrm>
-          <a:prstGeom prst="roundRect">
+            <a:off x="0" y="0"/>
+            <a:ext cx="12191695" cy="1143000"/>
+          </a:xfrm>
+          <a:prstGeom prst="rect">
             <a:avLst/>
           </a:prstGeom>
           <a:solidFill>
@@ -6094,14 +6366,14 @@
       </p:sp>
       <p:sp>
         <p:nvSpPr>
-          <p:cNvPr id="8" name="TextBox 7"/>
+          <p:cNvPr id="6" name="TextBox 5"/>
           <p:cNvSpPr txBox="1"/>
           <p:nvPr/>
         </p:nvSpPr>
         <p:spPr>
           <a:xfrm>
-            <a:off x="822960" y="1965960"/>
-            <a:ext cx="4983480" cy="4206240"/>
+            <a:off x="822960" y="274320"/>
+            <a:ext cx="10515600" cy="640080"/>
           </a:xfrm>
           <a:prstGeom prst="rect">
             <a:avLst/>
@@ -6114,92 +6386,62 @@
           </a:bodyPr>
           <a:lstStyle/>
           <a:p>
-            <a:pPr>
-              <a:spcAft>
-                <a:spcPts val="1100"/>
-              </a:spcAft>
-            </a:pPr>
-            <a:r>
-              <a:rPr sz="1600" b="1" i="0">
-                <a:solidFill>
-                  <a:srgbClr val="E8801A"/>
-                </a:solidFill>
-                <a:latin typeface="Montserrat"/>
-              </a:rPr>
-              <a:t>▸  </a:t>
-            </a:r>
-            <a:r>
-              <a:rPr sz="1600" b="0" i="0">
-                <a:solidFill>
-                  <a:srgbClr val="1B2330"/>
-                </a:solidFill>
-                <a:latin typeface="Montserrat"/>
-              </a:rPr>
-              <a:t>No cedas certificados de obras ajenas</a:t>
-            </a:r>
-          </a:p>
-          <a:p>
-            <a:pPr>
-              <a:spcAft>
-                <a:spcPts val="1100"/>
-              </a:spcAft>
-            </a:pPr>
-            <a:r>
-              <a:rPr sz="1600" b="1" i="0">
-                <a:solidFill>
-                  <a:srgbClr val="E8801A"/>
-                </a:solidFill>
-                <a:latin typeface="Montserrat"/>
-              </a:rPr>
-              <a:t>▸  </a:t>
-            </a:r>
-            <a:r>
-              <a:rPr sz="1600" b="0" i="0">
-                <a:solidFill>
-                  <a:srgbClr val="1B2330"/>
-                </a:solidFill>
-                <a:latin typeface="Montserrat"/>
-              </a:rPr>
-              <a:t>Si no la montas, no la firmas</a:t>
-            </a:r>
-          </a:p>
-          <a:p>
-            <a:pPr>
-              <a:spcAft>
-                <a:spcPts val="1100"/>
-              </a:spcAft>
-            </a:pPr>
-            <a:r>
-              <a:rPr sz="1600" b="1" i="0">
-                <a:solidFill>
-                  <a:srgbClr val="E8801A"/>
-                </a:solidFill>
-                <a:latin typeface="Montserrat"/>
-              </a:rPr>
-              <a:t>▸  </a:t>
-            </a:r>
-            <a:r>
-              <a:rPr sz="1600" b="0" i="0">
-                <a:solidFill>
-                  <a:srgbClr val="1B2330"/>
-                </a:solidFill>
-                <a:latin typeface="Montserrat"/>
-              </a:rPr>
-              <a:t>De las infracciones más perseguidas</a:t>
-            </a:r>
-          </a:p>
-        </p:txBody>
-      </p:sp>
-      <p:sp>
-        <p:nvSpPr>
-          <p:cNvPr id="9" name="imgph" descr="IMGQ:gas installation certificate with stamp"/>
+            <a:r>
+              <a:rPr sz="2400" b="1" i="0">
+                <a:solidFill>
+                  <a:srgbClr val="FFFFFF"/>
+                </a:solidFill>
+                <a:latin typeface="Montserrat"/>
+              </a:rPr>
+              <a:t>⚡  PREGUNTA RÁPIDA</a:t>
+            </a:r>
+          </a:p>
+        </p:txBody>
+      </p:sp>
+      <p:sp>
+        <p:nvSpPr>
+          <p:cNvPr id="7" name="TextBox 6"/>
+          <p:cNvSpPr txBox="1"/>
+          <p:nvPr/>
+        </p:nvSpPr>
+        <p:spPr>
+          <a:xfrm>
+            <a:off x="822960" y="1508760"/>
+            <a:ext cx="10515600" cy="1371600"/>
+          </a:xfrm>
+          <a:prstGeom prst="rect">
+            <a:avLst/>
+          </a:prstGeom>
+          <a:noFill/>
+        </p:spPr>
+        <p:txBody>
+          <a:bodyPr wrap="square">
+            <a:spAutoFit/>
+          </a:bodyPr>
+          <a:lstStyle/>
+          <a:p>
+            <a:r>
+              <a:rPr sz="2400" b="1" i="0">
+                <a:solidFill>
+                  <a:srgbClr val="1E2761"/>
+                </a:solidFill>
+                <a:latin typeface="Montserrat"/>
+              </a:rPr>
+              <a:t>¿Qué seguro de responsabilidad civil por siniestro necesita una empresa instaladora de categoría B?</a:t>
+            </a:r>
+          </a:p>
+        </p:txBody>
+      </p:sp>
+      <p:sp>
+        <p:nvSpPr>
+          <p:cNvPr id="8" name="Rounded Rectangle 7"/>
           <p:cNvSpPr/>
           <p:nvPr/>
         </p:nvSpPr>
         <p:spPr>
           <a:xfrm>
-            <a:off x="5806440" y="1051560"/>
-            <a:ext cx="5298947" cy="4629150"/>
+            <a:off x="822960" y="3291840"/>
+            <a:ext cx="4983480" cy="1143000"/>
           </a:xfrm>
           <a:prstGeom prst="roundRect">
             <a:avLst/>
@@ -6238,14 +6480,58 @@
       </p:sp>
       <p:sp>
         <p:nvSpPr>
+          <p:cNvPr id="9" name="Rectangle 8"/>
+          <p:cNvSpPr/>
+          <p:nvPr/>
+        </p:nvSpPr>
+        <p:spPr>
+          <a:xfrm>
+            <a:off x="822960" y="3291840"/>
+            <a:ext cx="640080" cy="1143000"/>
+          </a:xfrm>
+          <a:prstGeom prst="rect">
+            <a:avLst/>
+          </a:prstGeom>
+          <a:solidFill>
+            <a:srgbClr val="1E2761"/>
+          </a:solidFill>
+          <a:ln>
+            <a:noFill/>
+          </a:ln>
+          <a:effectLst/>
+        </p:spPr>
+        <p:style>
+          <a:lnRef idx="1">
+            <a:schemeClr val="accent1"/>
+          </a:lnRef>
+          <a:fillRef idx="3">
+            <a:schemeClr val="accent1"/>
+          </a:fillRef>
+          <a:effectRef idx="2">
+            <a:schemeClr val="accent1"/>
+          </a:effectRef>
+          <a:fontRef idx="minor">
+            <a:schemeClr val="lt1"/>
+          </a:fontRef>
+        </p:style>
+        <p:txBody>
+          <a:bodyPr rtlCol="0" anchor="ctr"/>
+          <a:lstStyle/>
+          <a:p>
+            <a:pPr algn="ctr"/>
+          </a:p>
+        </p:txBody>
+      </p:sp>
+      <p:sp>
+        <p:nvSpPr>
           <p:cNvPr id="10" name="TextBox 9"/>
           <p:cNvSpPr txBox="1"/>
           <p:nvPr/>
         </p:nvSpPr>
         <p:spPr>
           <a:xfrm>
-            <a:off x="6080760" y="2726055"/>
-            <a:ext cx="4750307" cy="1280160"/>
+            <a:off x="822960" y="3611880"/>
+            <a:ext cx="640080" cy="548640"/>
           </a:xfrm>
           <a:prstGeom prst="rect">
             <a:avLst/>
@@ -6260,25 +6546,524 @@
           <a:p>
             <a:pPr algn="ctr"/>
             <a:r>
-              <a:rPr sz="1400" b="1" i="0">
-                <a:solidFill>
-                  <a:srgbClr val="64748B"/>
-                </a:solidFill>
-                <a:latin typeface="Montserrat"/>
-              </a:rPr>
-              <a:t>IMAGEN REALISTA</a:t>
-            </a:r>
-          </a:p>
+              <a:rPr sz="2200" b="1" i="0">
+                <a:solidFill>
+                  <a:srgbClr val="FFFFFF"/>
+                </a:solidFill>
+                <a:latin typeface="Montserrat"/>
+              </a:rPr>
+              <a:t>A</a:t>
+            </a:r>
+          </a:p>
+        </p:txBody>
+      </p:sp>
+      <p:sp>
+        <p:nvSpPr>
+          <p:cNvPr id="11" name="TextBox 10"/>
+          <p:cNvSpPr txBox="1"/>
+          <p:nvPr/>
+        </p:nvSpPr>
+        <p:spPr>
+          <a:xfrm>
+            <a:off x="1600200" y="3474720"/>
+            <a:ext cx="4114800" cy="868680"/>
+          </a:xfrm>
+          <a:prstGeom prst="rect">
+            <a:avLst/>
+          </a:prstGeom>
+          <a:noFill/>
+        </p:spPr>
+        <p:txBody>
+          <a:bodyPr wrap="square">
+            <a:spAutoFit/>
+          </a:bodyPr>
+          <a:lstStyle/>
+          <a:p>
+            <a:r>
+              <a:rPr sz="1400" b="0" i="0">
+                <a:solidFill>
+                  <a:srgbClr val="1B2330"/>
+                </a:solidFill>
+                <a:latin typeface="Montserrat"/>
+              </a:rPr>
+              <a:t>600.000 €</a:t>
+            </a:r>
+          </a:p>
+        </p:txBody>
+      </p:sp>
+      <p:sp>
+        <p:nvSpPr>
+          <p:cNvPr id="12" name="Rounded Rectangle 11"/>
+          <p:cNvSpPr/>
+          <p:nvPr/>
+        </p:nvSpPr>
+        <p:spPr>
+          <a:xfrm>
+            <a:off x="6355080" y="3291840"/>
+            <a:ext cx="4983480" cy="1143000"/>
+          </a:xfrm>
+          <a:prstGeom prst="roundRect">
+            <a:avLst/>
+          </a:prstGeom>
+          <a:solidFill>
+            <a:srgbClr val="F3F6FB"/>
+          </a:solidFill>
+          <a:ln w="12700">
+            <a:solidFill>
+              <a:srgbClr val="C7D2E6"/>
+            </a:solidFill>
+          </a:ln>
+          <a:effectLst/>
+        </p:spPr>
+        <p:style>
+          <a:lnRef idx="1">
+            <a:schemeClr val="accent1"/>
+          </a:lnRef>
+          <a:fillRef idx="3">
+            <a:schemeClr val="accent1"/>
+          </a:fillRef>
+          <a:effectRef idx="2">
+            <a:schemeClr val="accent1"/>
+          </a:effectRef>
+          <a:fontRef idx="minor">
+            <a:schemeClr val="lt1"/>
+          </a:fontRef>
+        </p:style>
+        <p:txBody>
+          <a:bodyPr rtlCol="0" anchor="ctr"/>
+          <a:lstStyle/>
           <a:p>
             <a:pPr algn="ctr"/>
-            <a:r>
-              <a:rPr sz="1100" b="0" i="1">
-                <a:solidFill>
-                  <a:srgbClr val="64748B"/>
-                </a:solidFill>
-                <a:latin typeface="Montserrat"/>
-              </a:rPr>
-              <a:t>gas installation certificate with stamp</a:t>
+          </a:p>
+        </p:txBody>
+      </p:sp>
+      <p:sp>
+        <p:nvSpPr>
+          <p:cNvPr id="13" name="Rectangle 12"/>
+          <p:cNvSpPr/>
+          <p:nvPr/>
+        </p:nvSpPr>
+        <p:spPr>
+          <a:xfrm>
+            <a:off x="6355080" y="3291840"/>
+            <a:ext cx="640080" cy="1143000"/>
+          </a:xfrm>
+          <a:prstGeom prst="rect">
+            <a:avLst/>
+          </a:prstGeom>
+          <a:solidFill>
+            <a:srgbClr val="1E2761"/>
+          </a:solidFill>
+          <a:ln>
+            <a:noFill/>
+          </a:ln>
+          <a:effectLst/>
+        </p:spPr>
+        <p:style>
+          <a:lnRef idx="1">
+            <a:schemeClr val="accent1"/>
+          </a:lnRef>
+          <a:fillRef idx="3">
+            <a:schemeClr val="accent1"/>
+          </a:fillRef>
+          <a:effectRef idx="2">
+            <a:schemeClr val="accent1"/>
+          </a:effectRef>
+          <a:fontRef idx="minor">
+            <a:schemeClr val="lt1"/>
+          </a:fontRef>
+        </p:style>
+        <p:txBody>
+          <a:bodyPr rtlCol="0" anchor="ctr"/>
+          <a:lstStyle/>
+          <a:p>
+            <a:pPr algn="ctr"/>
+          </a:p>
+        </p:txBody>
+      </p:sp>
+      <p:sp>
+        <p:nvSpPr>
+          <p:cNvPr id="14" name="TextBox 13"/>
+          <p:cNvSpPr txBox="1"/>
+          <p:nvPr/>
+        </p:nvSpPr>
+        <p:spPr>
+          <a:xfrm>
+            <a:off x="6355080" y="3611880"/>
+            <a:ext cx="640080" cy="548640"/>
+          </a:xfrm>
+          <a:prstGeom prst="rect">
+            <a:avLst/>
+          </a:prstGeom>
+          <a:noFill/>
+        </p:spPr>
+        <p:txBody>
+          <a:bodyPr wrap="square">
+            <a:spAutoFit/>
+          </a:bodyPr>
+          <a:lstStyle/>
+          <a:p>
+            <a:pPr algn="ctr"/>
+            <a:r>
+              <a:rPr sz="2200" b="1" i="0">
+                <a:solidFill>
+                  <a:srgbClr val="FFFFFF"/>
+                </a:solidFill>
+                <a:latin typeface="Montserrat"/>
+              </a:rPr>
+              <a:t>B</a:t>
+            </a:r>
+          </a:p>
+        </p:txBody>
+      </p:sp>
+      <p:sp>
+        <p:nvSpPr>
+          <p:cNvPr id="15" name="TextBox 14"/>
+          <p:cNvSpPr txBox="1"/>
+          <p:nvPr/>
+        </p:nvSpPr>
+        <p:spPr>
+          <a:xfrm>
+            <a:off x="7132320" y="3474720"/>
+            <a:ext cx="4114800" cy="868680"/>
+          </a:xfrm>
+          <a:prstGeom prst="rect">
+            <a:avLst/>
+          </a:prstGeom>
+          <a:noFill/>
+        </p:spPr>
+        <p:txBody>
+          <a:bodyPr wrap="square">
+            <a:spAutoFit/>
+          </a:bodyPr>
+          <a:lstStyle/>
+          <a:p>
+            <a:r>
+              <a:rPr sz="1400" b="0" i="0">
+                <a:solidFill>
+                  <a:srgbClr val="1B2330"/>
+                </a:solidFill>
+                <a:latin typeface="Montserrat"/>
+              </a:rPr>
+              <a:t>900.000 €</a:t>
+            </a:r>
+          </a:p>
+        </p:txBody>
+      </p:sp>
+      <p:sp>
+        <p:nvSpPr>
+          <p:cNvPr id="16" name="Rounded Rectangle 15"/>
+          <p:cNvSpPr/>
+          <p:nvPr/>
+        </p:nvSpPr>
+        <p:spPr>
+          <a:xfrm>
+            <a:off x="822960" y="4617720"/>
+            <a:ext cx="4983480" cy="1143000"/>
+          </a:xfrm>
+          <a:prstGeom prst="roundRect">
+            <a:avLst/>
+          </a:prstGeom>
+          <a:solidFill>
+            <a:srgbClr val="F3F6FB"/>
+          </a:solidFill>
+          <a:ln w="12700">
+            <a:solidFill>
+              <a:srgbClr val="C7D2E6"/>
+            </a:solidFill>
+          </a:ln>
+          <a:effectLst/>
+        </p:spPr>
+        <p:style>
+          <a:lnRef idx="1">
+            <a:schemeClr val="accent1"/>
+          </a:lnRef>
+          <a:fillRef idx="3">
+            <a:schemeClr val="accent1"/>
+          </a:fillRef>
+          <a:effectRef idx="2">
+            <a:schemeClr val="accent1"/>
+          </a:effectRef>
+          <a:fontRef idx="minor">
+            <a:schemeClr val="lt1"/>
+          </a:fontRef>
+        </p:style>
+        <p:txBody>
+          <a:bodyPr rtlCol="0" anchor="ctr"/>
+          <a:lstStyle/>
+          <a:p>
+            <a:pPr algn="ctr"/>
+          </a:p>
+        </p:txBody>
+      </p:sp>
+      <p:sp>
+        <p:nvSpPr>
+          <p:cNvPr id="17" name="Rectangle 16"/>
+          <p:cNvSpPr/>
+          <p:nvPr/>
+        </p:nvSpPr>
+        <p:spPr>
+          <a:xfrm>
+            <a:off x="822960" y="4617720"/>
+            <a:ext cx="640080" cy="1143000"/>
+          </a:xfrm>
+          <a:prstGeom prst="rect">
+            <a:avLst/>
+          </a:prstGeom>
+          <a:solidFill>
+            <a:srgbClr val="1E2761"/>
+          </a:solidFill>
+          <a:ln>
+            <a:noFill/>
+          </a:ln>
+          <a:effectLst/>
+        </p:spPr>
+        <p:style>
+          <a:lnRef idx="1">
+            <a:schemeClr val="accent1"/>
+          </a:lnRef>
+          <a:fillRef idx="3">
+            <a:schemeClr val="accent1"/>
+          </a:fillRef>
+          <a:effectRef idx="2">
+            <a:schemeClr val="accent1"/>
+          </a:effectRef>
+          <a:fontRef idx="minor">
+            <a:schemeClr val="lt1"/>
+          </a:fontRef>
+        </p:style>
+        <p:txBody>
+          <a:bodyPr rtlCol="0" anchor="ctr"/>
+          <a:lstStyle/>
+          <a:p>
+            <a:pPr algn="ctr"/>
+          </a:p>
+        </p:txBody>
+      </p:sp>
+      <p:sp>
+        <p:nvSpPr>
+          <p:cNvPr id="18" name="TextBox 17"/>
+          <p:cNvSpPr txBox="1"/>
+          <p:nvPr/>
+        </p:nvSpPr>
+        <p:spPr>
+          <a:xfrm>
+            <a:off x="822960" y="4937760"/>
+            <a:ext cx="640080" cy="548640"/>
+          </a:xfrm>
+          <a:prstGeom prst="rect">
+            <a:avLst/>
+          </a:prstGeom>
+          <a:noFill/>
+        </p:spPr>
+        <p:txBody>
+          <a:bodyPr wrap="square">
+            <a:spAutoFit/>
+          </a:bodyPr>
+          <a:lstStyle/>
+          <a:p>
+            <a:pPr algn="ctr"/>
+            <a:r>
+              <a:rPr sz="2200" b="1" i="0">
+                <a:solidFill>
+                  <a:srgbClr val="FFFFFF"/>
+                </a:solidFill>
+                <a:latin typeface="Montserrat"/>
+              </a:rPr>
+              <a:t>C</a:t>
+            </a:r>
+          </a:p>
+        </p:txBody>
+      </p:sp>
+      <p:sp>
+        <p:nvSpPr>
+          <p:cNvPr id="19" name="TextBox 18"/>
+          <p:cNvSpPr txBox="1"/>
+          <p:nvPr/>
+        </p:nvSpPr>
+        <p:spPr>
+          <a:xfrm>
+            <a:off x="1600200" y="4800600"/>
+            <a:ext cx="4114800" cy="868680"/>
+          </a:xfrm>
+          <a:prstGeom prst="rect">
+            <a:avLst/>
+          </a:prstGeom>
+          <a:noFill/>
+        </p:spPr>
+        <p:txBody>
+          <a:bodyPr wrap="square">
+            <a:spAutoFit/>
+          </a:bodyPr>
+          <a:lstStyle/>
+          <a:p>
+            <a:r>
+              <a:rPr sz="1400" b="0" i="0">
+                <a:solidFill>
+                  <a:srgbClr val="1B2330"/>
+                </a:solidFill>
+                <a:latin typeface="Montserrat"/>
+              </a:rPr>
+              <a:t>300.000 €</a:t>
+            </a:r>
+          </a:p>
+        </p:txBody>
+      </p:sp>
+      <p:sp>
+        <p:nvSpPr>
+          <p:cNvPr id="20" name="Rounded Rectangle 19"/>
+          <p:cNvSpPr/>
+          <p:nvPr/>
+        </p:nvSpPr>
+        <p:spPr>
+          <a:xfrm>
+            <a:off x="6355080" y="4617720"/>
+            <a:ext cx="4983480" cy="1143000"/>
+          </a:xfrm>
+          <a:prstGeom prst="roundRect">
+            <a:avLst/>
+          </a:prstGeom>
+          <a:solidFill>
+            <a:srgbClr val="F3F6FB"/>
+          </a:solidFill>
+          <a:ln w="12700">
+            <a:solidFill>
+              <a:srgbClr val="C7D2E6"/>
+            </a:solidFill>
+          </a:ln>
+          <a:effectLst/>
+        </p:spPr>
+        <p:style>
+          <a:lnRef idx="1">
+            <a:schemeClr val="accent1"/>
+          </a:lnRef>
+          <a:fillRef idx="3">
+            <a:schemeClr val="accent1"/>
+          </a:fillRef>
+          <a:effectRef idx="2">
+            <a:schemeClr val="accent1"/>
+          </a:effectRef>
+          <a:fontRef idx="minor">
+            <a:schemeClr val="lt1"/>
+          </a:fontRef>
+        </p:style>
+        <p:txBody>
+          <a:bodyPr rtlCol="0" anchor="ctr"/>
+          <a:lstStyle/>
+          <a:p>
+            <a:pPr algn="ctr"/>
+          </a:p>
+        </p:txBody>
+      </p:sp>
+      <p:sp>
+        <p:nvSpPr>
+          <p:cNvPr id="21" name="Rectangle 20"/>
+          <p:cNvSpPr/>
+          <p:nvPr/>
+        </p:nvSpPr>
+        <p:spPr>
+          <a:xfrm>
+            <a:off x="6355080" y="4617720"/>
+            <a:ext cx="640080" cy="1143000"/>
+          </a:xfrm>
+          <a:prstGeom prst="rect">
+            <a:avLst/>
+          </a:prstGeom>
+          <a:solidFill>
+            <a:srgbClr val="1E2761"/>
+          </a:solidFill>
+          <a:ln>
+            <a:noFill/>
+          </a:ln>
+          <a:effectLst/>
+        </p:spPr>
+        <p:style>
+          <a:lnRef idx="1">
+            <a:schemeClr val="accent1"/>
+          </a:lnRef>
+          <a:fillRef idx="3">
+            <a:schemeClr val="accent1"/>
+          </a:fillRef>
+          <a:effectRef idx="2">
+            <a:schemeClr val="accent1"/>
+          </a:effectRef>
+          <a:fontRef idx="minor">
+            <a:schemeClr val="lt1"/>
+          </a:fontRef>
+        </p:style>
+        <p:txBody>
+          <a:bodyPr rtlCol="0" anchor="ctr"/>
+          <a:lstStyle/>
+          <a:p>
+            <a:pPr algn="ctr"/>
+          </a:p>
+        </p:txBody>
+      </p:sp>
+      <p:sp>
+        <p:nvSpPr>
+          <p:cNvPr id="22" name="TextBox 21"/>
+          <p:cNvSpPr txBox="1"/>
+          <p:nvPr/>
+        </p:nvSpPr>
+        <p:spPr>
+          <a:xfrm>
+            <a:off x="6355080" y="4937760"/>
+            <a:ext cx="640080" cy="548640"/>
+          </a:xfrm>
+          <a:prstGeom prst="rect">
+            <a:avLst/>
+          </a:prstGeom>
+          <a:noFill/>
+        </p:spPr>
+        <p:txBody>
+          <a:bodyPr wrap="square">
+            <a:spAutoFit/>
+          </a:bodyPr>
+          <a:lstStyle/>
+          <a:p>
+            <a:pPr algn="ctr"/>
+            <a:r>
+              <a:rPr sz="2200" b="1" i="0">
+                <a:solidFill>
+                  <a:srgbClr val="FFFFFF"/>
+                </a:solidFill>
+                <a:latin typeface="Montserrat"/>
+              </a:rPr>
+              <a:t>D</a:t>
+            </a:r>
+          </a:p>
+        </p:txBody>
+      </p:sp>
+      <p:sp>
+        <p:nvSpPr>
+          <p:cNvPr id="23" name="TextBox 22"/>
+          <p:cNvSpPr txBox="1"/>
+          <p:nvPr/>
+        </p:nvSpPr>
+        <p:spPr>
+          <a:xfrm>
+            <a:off x="7132320" y="4800600"/>
+            <a:ext cx="4114800" cy="868680"/>
+          </a:xfrm>
+          <a:prstGeom prst="rect">
+            <a:avLst/>
+          </a:prstGeom>
+          <a:noFill/>
+        </p:spPr>
+        <p:txBody>
+          <a:bodyPr wrap="square">
+            <a:spAutoFit/>
+          </a:bodyPr>
+          <a:lstStyle/>
+          <a:p>
+            <a:r>
+              <a:rPr sz="1400" b="0" i="0">
+                <a:solidFill>
+                  <a:srgbClr val="1B2330"/>
+                </a:solidFill>
+                <a:latin typeface="Montserrat"/>
+              </a:rPr>
+              <a:t>1.200.000 €</a:t>
             </a:r>
           </a:p>
         </p:txBody>
@@ -6288,6 +7073,18 @@
   <p:clrMapOvr>
     <a:masterClrMapping/>
   </p:clrMapOvr>
+  <mc:AlternateContent xmlns:mc="http://schemas.openxmlformats.org/markup-compatibility/2006">
+    <mc:Choice xmlns:p14="http://schemas.microsoft.com/office/powerpoint/2010/main" Requires="p14">
+      <p:transition spd="med" p14:dur="700">
+        <p14:cube dir="r"/>
+      </p:transition>
+    </mc:Choice>
+    <mc:Fallback>
+      <p:transition spd="med">
+        <p:push dir="r"/>
+      </p:transition>
+    </mc:Fallback>
+  </mc:AlternateContent>
 </p:sld>
 </file>
 
@@ -6375,7 +7172,7 @@
                 </a:solidFill>
                 <a:latin typeface="Montserrat"/>
               </a:rPr>
-              <a:t>013 / 017</a:t>
+              <a:t>013 / 021</a:t>
             </a:r>
           </a:p>
         </p:txBody>
@@ -6416,88 +7213,20 @@
       </p:sp>
       <p:sp>
         <p:nvSpPr>
-          <p:cNvPr id="5" name="TextBox 4"/>
-          <p:cNvSpPr txBox="1"/>
-          <p:nvPr/>
-        </p:nvSpPr>
-        <p:spPr>
-          <a:xfrm>
-            <a:off x="822960" y="457200"/>
-            <a:ext cx="10058400" cy="365760"/>
-          </a:xfrm>
-          <a:prstGeom prst="rect">
-            <a:avLst/>
-          </a:prstGeom>
-          <a:noFill/>
-        </p:spPr>
-        <p:txBody>
-          <a:bodyPr wrap="square">
-            <a:spAutoFit/>
-          </a:bodyPr>
-          <a:lstStyle/>
-          <a:p>
-            <a:r>
-              <a:rPr sz="1300" b="1" i="0">
-                <a:solidFill>
-                  <a:srgbClr val="E8801A"/>
-                </a:solidFill>
-                <a:latin typeface="Montserrat"/>
-              </a:rPr>
-              <a:t>APARTADO 3.10 · RÉGIMEN DE CONTROL</a:t>
-            </a:r>
-          </a:p>
-        </p:txBody>
-      </p:sp>
-      <p:sp>
-        <p:nvSpPr>
-          <p:cNvPr id="6" name="TextBox 5"/>
-          <p:cNvSpPr txBox="1"/>
-          <p:nvPr/>
-        </p:nvSpPr>
-        <p:spPr>
-          <a:xfrm>
-            <a:off x="822960" y="868680"/>
-            <a:ext cx="10515600" cy="914400"/>
-          </a:xfrm>
-          <a:prstGeom prst="rect">
-            <a:avLst/>
-          </a:prstGeom>
-          <a:noFill/>
-        </p:spPr>
-        <p:txBody>
-          <a:bodyPr wrap="square">
-            <a:spAutoFit/>
-          </a:bodyPr>
-          <a:lstStyle/>
-          <a:p>
-            <a:r>
-              <a:rPr sz="2800" b="1" i="0">
-                <a:solidFill>
-                  <a:srgbClr val="1E2761"/>
-                </a:solidFill>
-                <a:latin typeface="Montserrat"/>
-              </a:rPr>
-              <a:t>Dos plazos que se confunden</a:t>
-            </a:r>
-          </a:p>
-        </p:txBody>
-      </p:sp>
-      <p:sp>
-        <p:nvSpPr>
-          <p:cNvPr id="7" name="Rounded Rectangle 6"/>
+          <p:cNvPr id="5" name="Rectangle 4"/>
           <p:cNvSpPr/>
           <p:nvPr/>
         </p:nvSpPr>
         <p:spPr>
           <a:xfrm>
-            <a:off x="868680" y="1627632"/>
-            <a:ext cx="2011680" cy="73152"/>
-          </a:xfrm>
-          <a:prstGeom prst="roundRect">
+            <a:off x="0" y="0"/>
+            <a:ext cx="12191695" cy="1143000"/>
+          </a:xfrm>
+          <a:prstGeom prst="rect">
             <a:avLst/>
           </a:prstGeom>
           <a:solidFill>
-            <a:srgbClr val="E8801A"/>
+            <a:srgbClr val="1E8E4B"/>
           </a:solidFill>
           <a:ln>
             <a:noFill/>
@@ -6528,14 +7257,14 @@
       </p:sp>
       <p:sp>
         <p:nvSpPr>
-          <p:cNvPr id="8" name="TextBox 7"/>
+          <p:cNvPr id="6" name="TextBox 5"/>
           <p:cNvSpPr txBox="1"/>
           <p:nvPr/>
         </p:nvSpPr>
         <p:spPr>
           <a:xfrm>
-            <a:off x="822960" y="1965960"/>
-            <a:ext cx="4983480" cy="4206240"/>
+            <a:off x="822960" y="274320"/>
+            <a:ext cx="10515600" cy="640080"/>
           </a:xfrm>
           <a:prstGeom prst="rect">
             <a:avLst/>
@@ -6548,102 +7277,72 @@
           </a:bodyPr>
           <a:lstStyle/>
           <a:p>
-            <a:pPr>
-              <a:spcAft>
-                <a:spcPts val="1100"/>
-              </a:spcAft>
-            </a:pPr>
-            <a:r>
-              <a:rPr sz="1600" b="1" i="0">
-                <a:solidFill>
-                  <a:srgbClr val="E8801A"/>
-                </a:solidFill>
-                <a:latin typeface="Montserrat"/>
-              </a:rPr>
-              <a:t>▸  </a:t>
-            </a:r>
-            <a:r>
-              <a:rPr sz="1600" b="0" i="0">
-                <a:solidFill>
-                  <a:srgbClr val="1B2330"/>
-                </a:solidFill>
-                <a:latin typeface="Montserrat"/>
-              </a:rPr>
-              <a:t>15 días naturales para alegar</a:t>
-            </a:r>
-          </a:p>
-          <a:p>
-            <a:pPr>
-              <a:spcAft>
-                <a:spcPts val="1100"/>
-              </a:spcAft>
-            </a:pPr>
-            <a:r>
-              <a:rPr sz="1600" b="1" i="0">
-                <a:solidFill>
-                  <a:srgbClr val="E8801A"/>
-                </a:solidFill>
-                <a:latin typeface="Montserrat"/>
-              </a:rPr>
-              <a:t>▸  </a:t>
-            </a:r>
-            <a:r>
-              <a:rPr sz="1600" b="0" i="0">
-                <a:solidFill>
-                  <a:srgbClr val="1B2330"/>
-                </a:solidFill>
-                <a:latin typeface="Montserrat"/>
-              </a:rPr>
-              <a:t>Suspensión cautelar: máximo 3 meses</a:t>
-            </a:r>
-          </a:p>
-          <a:p>
-            <a:pPr>
-              <a:spcAft>
-                <a:spcPts val="1100"/>
-              </a:spcAft>
-            </a:pPr>
-            <a:r>
-              <a:rPr sz="1600" b="1" i="0">
-                <a:solidFill>
-                  <a:srgbClr val="E8801A"/>
-                </a:solidFill>
-                <a:latin typeface="Montserrat"/>
-              </a:rPr>
-              <a:t>▸  </a:t>
-            </a:r>
-            <a:r>
-              <a:rPr sz="1600" b="0" i="0">
-                <a:solidFill>
-                  <a:srgbClr val="1B2330"/>
-                </a:solidFill>
-                <a:latin typeface="Montserrat"/>
-              </a:rPr>
-              <a:t>No los confundas con el mes del cese</a:t>
-            </a:r>
-          </a:p>
-        </p:txBody>
-      </p:sp>
-      <p:sp>
-        <p:nvSpPr>
-          <p:cNvPr id="9" name="imgph" descr="IMGQ:calendar with marked deadline dates"/>
+            <a:r>
+              <a:rPr sz="2400" b="1" i="0">
+                <a:solidFill>
+                  <a:srgbClr val="FFFFFF"/>
+                </a:solidFill>
+                <a:latin typeface="Montserrat"/>
+              </a:rPr>
+              <a:t>✔  RESPUESTA:  A</a:t>
+            </a:r>
+          </a:p>
+        </p:txBody>
+      </p:sp>
+      <p:sp>
+        <p:nvSpPr>
+          <p:cNvPr id="7" name="TextBox 6"/>
+          <p:cNvSpPr txBox="1"/>
+          <p:nvPr/>
+        </p:nvSpPr>
+        <p:spPr>
+          <a:xfrm>
+            <a:off x="822960" y="1417320"/>
+            <a:ext cx="10515600" cy="914400"/>
+          </a:xfrm>
+          <a:prstGeom prst="rect">
+            <a:avLst/>
+          </a:prstGeom>
+          <a:noFill/>
+        </p:spPr>
+        <p:txBody>
+          <a:bodyPr wrap="square">
+            <a:spAutoFit/>
+          </a:bodyPr>
+          <a:lstStyle/>
+          <a:p>
+            <a:r>
+              <a:rPr sz="1800" b="1" i="0">
+                <a:solidFill>
+                  <a:srgbClr val="64748B"/>
+                </a:solidFill>
+                <a:latin typeface="Montserrat"/>
+              </a:rPr>
+              <a:t>¿Qué seguro de responsabilidad civil por siniestro necesita una empresa instaladora de categoría B?</a:t>
+            </a:r>
+          </a:p>
+        </p:txBody>
+      </p:sp>
+      <p:sp>
+        <p:nvSpPr>
+          <p:cNvPr id="8" name="Rounded Rectangle 7"/>
           <p:cNvSpPr/>
           <p:nvPr/>
         </p:nvSpPr>
         <p:spPr>
           <a:xfrm>
-            <a:off x="5806440" y="1051560"/>
-            <a:ext cx="5298947" cy="4629150"/>
+            <a:off x="822960" y="2514600"/>
+            <a:ext cx="10515600" cy="914400"/>
           </a:xfrm>
           <a:prstGeom prst="roundRect">
             <a:avLst/>
           </a:prstGeom>
           <a:solidFill>
-            <a:srgbClr val="F3F6FB"/>
+            <a:srgbClr val="E9F6EE"/>
           </a:solidFill>
           <a:ln w="12700">
             <a:solidFill>
-              <a:srgbClr val="C7D2E6"/>
+              <a:srgbClr val="1E8E4B"/>
             </a:solidFill>
           </a:ln>
           <a:effectLst/>
@@ -6672,14 +7371,14 @@
       </p:sp>
       <p:sp>
         <p:nvSpPr>
-          <p:cNvPr id="10" name="TextBox 9"/>
+          <p:cNvPr id="9" name="TextBox 8"/>
           <p:cNvSpPr txBox="1"/>
           <p:nvPr/>
         </p:nvSpPr>
         <p:spPr>
           <a:xfrm>
-            <a:off x="6080760" y="2726055"/>
-            <a:ext cx="4750307" cy="1280160"/>
+            <a:off x="1097280" y="2697480"/>
+            <a:ext cx="10058400" cy="640080"/>
           </a:xfrm>
           <a:prstGeom prst="rect">
             <a:avLst/>
@@ -6692,27 +7391,66 @@
           </a:bodyPr>
           <a:lstStyle/>
           <a:p>
-            <a:pPr algn="ctr"/>
-            <a:r>
-              <a:rPr sz="1400" b="1" i="0">
-                <a:solidFill>
-                  <a:srgbClr val="64748B"/>
-                </a:solidFill>
-                <a:latin typeface="Montserrat"/>
-              </a:rPr>
-              <a:t>IMAGEN REALISTA</a:t>
-            </a:r>
-          </a:p>
-          <a:p>
-            <a:pPr algn="ctr"/>
-            <a:r>
-              <a:rPr sz="1100" b="0" i="1">
-                <a:solidFill>
-                  <a:srgbClr val="64748B"/>
-                </a:solidFill>
-                <a:latin typeface="Montserrat"/>
-              </a:rPr>
-              <a:t>calendar with marked deadline dates</a:t>
+            <a:r>
+              <a:rPr sz="1800" b="1" i="0">
+                <a:solidFill>
+                  <a:srgbClr val="1E8E4B"/>
+                </a:solidFill>
+                <a:latin typeface="Montserrat"/>
+              </a:rPr>
+              <a:t>A.  </a:t>
+            </a:r>
+            <a:r>
+              <a:rPr sz="1800" b="1" i="0">
+                <a:solidFill>
+                  <a:srgbClr val="1E2761"/>
+                </a:solidFill>
+                <a:latin typeface="Montserrat"/>
+              </a:rPr>
+              <a:t>600.000 €</a:t>
+            </a:r>
+          </a:p>
+        </p:txBody>
+      </p:sp>
+      <p:sp>
+        <p:nvSpPr>
+          <p:cNvPr id="10" name="TextBox 9"/>
+          <p:cNvSpPr txBox="1"/>
+          <p:nvPr/>
+        </p:nvSpPr>
+        <p:spPr>
+          <a:xfrm>
+            <a:off x="822960" y="3749039"/>
+            <a:ext cx="10515600" cy="2194560"/>
+          </a:xfrm>
+          <a:prstGeom prst="rect">
+            <a:avLst/>
+          </a:prstGeom>
+          <a:noFill/>
+        </p:spPr>
+        <p:txBody>
+          <a:bodyPr wrap="square">
+            <a:spAutoFit/>
+          </a:bodyPr>
+          <a:lstStyle/>
+          <a:p>
+            <a:r>
+              <a:rPr sz="1500" b="1" i="0">
+                <a:solidFill>
+                  <a:srgbClr val="E8801A"/>
+                </a:solidFill>
+                <a:latin typeface="Montserrat"/>
+              </a:rPr>
+              <a:t>Por qué:  </a:t>
+            </a:r>
+            <a:r>
+              <a:rPr sz="1500" b="0" i="0">
+                <a:solidFill>
+                  <a:srgbClr val="1B2330"/>
+                </a:solidFill>
+                <a:latin typeface="Montserrat"/>
+              </a:rPr>
+              <a:t>Las cuantías por siniestro son 900.000 € la A, 600.000 € la B y 300.000 € la C; la B necesita 600.000 €.</a:t>
             </a:r>
           </a:p>
         </p:txBody>
@@ -6722,6 +7460,18 @@
   <p:clrMapOvr>
     <a:masterClrMapping/>
   </p:clrMapOvr>
+  <mc:AlternateContent xmlns:mc="http://schemas.openxmlformats.org/markup-compatibility/2006">
+    <mc:Choice xmlns:p14="http://schemas.microsoft.com/office/powerpoint/2010/main" Requires="p14">
+      <p:transition spd="med" p14:dur="700">
+        <p14:cube dir="l"/>
+      </p:transition>
+    </mc:Choice>
+    <mc:Fallback>
+      <p:transition spd="med">
+        <p:push dir="l"/>
+      </p:transition>
+    </mc:Fallback>
+  </mc:AlternateContent>
 </p:sld>
 </file>
 
@@ -6809,7 +7559,7 @@
                 </a:solidFill>
                 <a:latin typeface="Montserrat"/>
               </a:rPr>
-              <a:t>014 / 017</a:t>
+              <a:t>014 / 021</a:t>
             </a:r>
           </a:p>
         </p:txBody>
@@ -6877,7 +7627,7 @@
                 </a:solidFill>
                 <a:latin typeface="Montserrat"/>
               </a:rPr>
-              <a:t>APARTADO 3.12 · OBLIGACIONES</a:t>
+              <a:t>APARTADO 3.9 · PROHIBICIÓN</a:t>
             </a:r>
           </a:p>
         </p:txBody>
@@ -6911,14 +7661,14 @@
                 </a:solidFill>
                 <a:latin typeface="Montserrat"/>
               </a:rPr>
-              <a:t>Certificados, garantía y registros</a:t>
-            </a:r>
-          </a:p>
-        </p:txBody>
-      </p:sp>
-      <p:sp>
-        <p:nvSpPr>
-          <p:cNvPr id="7" name="Rounded Rectangle 6"/>
+              <a:t>Nada de vender boletines</a:t>
+            </a:r>
+          </a:p>
+        </p:txBody>
+      </p:sp>
+      <p:sp>
+        <p:nvSpPr>
+          <p:cNvPr id="7" name="Rectangle 6"/>
           <p:cNvSpPr/>
           <p:nvPr/>
         </p:nvSpPr>
@@ -6927,7 +7677,7 @@
             <a:off x="868680" y="1627632"/>
             <a:ext cx="2011680" cy="73152"/>
           </a:xfrm>
-          <a:prstGeom prst="roundRect">
+          <a:prstGeom prst="rect">
             <a:avLst/>
           </a:prstGeom>
           <a:solidFill>
@@ -6969,7 +7719,7 @@
         <p:spPr>
           <a:xfrm>
             <a:off x="822960" y="1965960"/>
-            <a:ext cx="4983480" cy="4206240"/>
+            <a:ext cx="5029200" cy="4206240"/>
           </a:xfrm>
           <a:prstGeom prst="rect">
             <a:avLst/>
@@ -7003,7 +7753,7 @@
                 </a:solidFill>
                 <a:latin typeface="Montserrat"/>
               </a:rPr>
-              <a:t>Emitir los certificados reglamentarios</a:t>
+              <a:t>No cedas certificados de obras ajenas</a:t>
             </a:r>
           </a:p>
           <a:p>
@@ -7028,7 +7778,7 @@
                 </a:solidFill>
                 <a:latin typeface="Montserrat"/>
               </a:rPr>
-              <a:t>Garantía de 4 años por mala ejecución</a:t>
+              <a:t>Si no la montas, no la firmas</a:t>
             </a:r>
           </a:p>
           <a:p>
@@ -7053,46 +7803,21 @@
                 </a:solidFill>
                 <a:latin typeface="Montserrat"/>
               </a:rPr>
-              <a:t>Un registro para la comunidad autónoma</a:t>
-            </a:r>
-          </a:p>
-          <a:p>
-            <a:pPr>
-              <a:spcAft>
-                <a:spcPts val="1100"/>
-              </a:spcAft>
-            </a:pPr>
-            <a:r>
-              <a:rPr sz="1600" b="1" i="0">
-                <a:solidFill>
-                  <a:srgbClr val="E8801A"/>
-                </a:solidFill>
-                <a:latin typeface="Montserrat"/>
-              </a:rPr>
-              <a:t>▸  </a:t>
-            </a:r>
-            <a:r>
-              <a:rPr sz="1600" b="0" i="0">
-                <a:solidFill>
-                  <a:srgbClr val="1B2330"/>
-                </a:solidFill>
-                <a:latin typeface="Montserrat"/>
-              </a:rPr>
-              <a:t>Otro registro para la distribuidora</a:t>
-            </a:r>
-          </a:p>
-        </p:txBody>
-      </p:sp>
-      <p:sp>
-        <p:nvSpPr>
-          <p:cNvPr id="9" name="imgph" descr="IMGQ:filing cabinet with document records"/>
+              <a:t>De las infracciones más perseguidas</a:t>
+            </a:r>
+          </a:p>
+        </p:txBody>
+      </p:sp>
+      <p:sp>
+        <p:nvSpPr>
+          <p:cNvPr id="9" name="imgph" descr="IMGQ:gas installation certificate with stamp"/>
           <p:cNvSpPr/>
           <p:nvPr/>
         </p:nvSpPr>
         <p:spPr>
           <a:xfrm>
-            <a:off x="5806440" y="1051560"/>
-            <a:ext cx="5298947" cy="4629150"/>
+            <a:off x="6080760" y="1965960"/>
+            <a:ext cx="5303520" cy="4572000"/>
           </a:xfrm>
           <a:prstGeom prst="roundRect">
             <a:avLst/>
@@ -7137,8 +7862,8 @@
         </p:nvSpPr>
         <p:spPr>
           <a:xfrm>
-            <a:off x="6080760" y="2726055"/>
-            <a:ext cx="4750307" cy="1280160"/>
+            <a:off x="6355080" y="3611880"/>
+            <a:ext cx="4754880" cy="1280160"/>
           </a:xfrm>
           <a:prstGeom prst="rect">
             <a:avLst/>
@@ -7159,7 +7884,7 @@
                 </a:solidFill>
                 <a:latin typeface="Montserrat"/>
               </a:rPr>
-              <a:t>IMAGEN REALISTA</a:t>
+              <a:t>IMAGEN</a:t>
             </a:r>
           </a:p>
           <a:p>
@@ -7171,7 +7896,7 @@
                 </a:solidFill>
                 <a:latin typeface="Montserrat"/>
               </a:rPr>
-              <a:t>filing cabinet with document records</a:t>
+              <a:t>gas installation certificate with stamp</a:t>
             </a:r>
           </a:p>
         </p:txBody>
@@ -7181,6 +7906,18 @@
   <p:clrMapOvr>
     <a:masterClrMapping/>
   </p:clrMapOvr>
+  <mc:AlternateContent xmlns:mc="http://schemas.openxmlformats.org/markup-compatibility/2006">
+    <mc:Choice xmlns:p14="http://schemas.microsoft.com/office/powerpoint/2010/main" Requires="p14">
+      <p:transition spd="med" p14:dur="700">
+        <p14:cube dir="r"/>
+      </p:transition>
+    </mc:Choice>
+    <mc:Fallback>
+      <p:transition spd="med">
+        <p:push dir="r"/>
+      </p:transition>
+    </mc:Fallback>
+  </mc:AlternateContent>
 </p:sld>
 </file>
 
@@ -7268,7 +8005,7 @@
                 </a:solidFill>
                 <a:latin typeface="Montserrat"/>
               </a:rPr>
-              <a:t>015 / 017</a:t>
+              <a:t>015 / 021</a:t>
             </a:r>
           </a:p>
         </p:txBody>
@@ -7336,7 +8073,7 @@
                 </a:solidFill>
                 <a:latin typeface="Montserrat"/>
               </a:rPr>
-              <a:t>APARTADO 4.1 · APARATOS GRANDES</a:t>
+              <a:t>APARTADO 3.10 · RÉGIMEN DE CONTROL</a:t>
             </a:r>
           </a:p>
         </p:txBody>
@@ -7370,14 +8107,14 @@
                 </a:solidFill>
                 <a:latin typeface="Montserrat"/>
               </a:rPr>
-              <a:t>Los aparatos gordos piden un plus</a:t>
-            </a:r>
-          </a:p>
-        </p:txBody>
-      </p:sp>
-      <p:sp>
-        <p:nvSpPr>
-          <p:cNvPr id="7" name="Rounded Rectangle 6"/>
+              <a:t>Dos plazos que se confunden</a:t>
+            </a:r>
+          </a:p>
+        </p:txBody>
+      </p:sp>
+      <p:sp>
+        <p:nvSpPr>
+          <p:cNvPr id="7" name="Rectangle 6"/>
           <p:cNvSpPr/>
           <p:nvPr/>
         </p:nvSpPr>
@@ -7386,7 +8123,7 @@
             <a:off x="868680" y="1627632"/>
             <a:ext cx="2011680" cy="73152"/>
           </a:xfrm>
-          <a:prstGeom prst="roundRect">
+          <a:prstGeom prst="rect">
             <a:avLst/>
           </a:prstGeom>
           <a:solidFill>
@@ -7427,8 +8164,8 @@
         </p:nvSpPr>
         <p:spPr>
           <a:xfrm>
-            <a:off x="822960" y="1965960"/>
-            <a:ext cx="4983480" cy="4206240"/>
+            <a:off x="6355080" y="1965960"/>
+            <a:ext cx="5029200" cy="4206240"/>
           </a:xfrm>
           <a:prstGeom prst="rect">
             <a:avLst/>
@@ -7462,7 +8199,7 @@
                 </a:solidFill>
                 <a:latin typeface="Montserrat"/>
               </a:rPr>
-              <a:t>Conducidos &gt; 24,4 kW y vitro cubierta</a:t>
+              <a:t>15 días naturales para alegar</a:t>
             </a:r>
           </a:p>
           <a:p>
@@ -7487,7 +8224,7 @@
                 </a:solidFill>
                 <a:latin typeface="Montserrat"/>
               </a:rPr>
-              <a:t>Cualquier categoría puede acreditarlo</a:t>
+              <a:t>Suspensión cautelar: máximo 3 meses</a:t>
             </a:r>
           </a:p>
           <a:p>
@@ -7512,46 +8249,21 @@
                 </a:solidFill>
                 <a:latin typeface="Montserrat"/>
               </a:rPr>
-              <a:t>Vía más habitual: acreditación del fabricante</a:t>
-            </a:r>
-          </a:p>
-          <a:p>
-            <a:pPr>
-              <a:spcAft>
-                <a:spcPts val="1100"/>
-              </a:spcAft>
-            </a:pPr>
-            <a:r>
-              <a:rPr sz="1600" b="1" i="0">
-                <a:solidFill>
-                  <a:srgbClr val="E8801A"/>
-                </a:solidFill>
-                <a:latin typeface="Montserrat"/>
-              </a:rPr>
-              <a:t>▸  </a:t>
-            </a:r>
-            <a:r>
-              <a:rPr sz="1600" b="0" i="0">
-                <a:solidFill>
-                  <a:srgbClr val="1B2330"/>
-                </a:solidFill>
-                <a:latin typeface="Montserrat"/>
-              </a:rPr>
-              <a:t>O título, FP o entidad acreditada</a:t>
-            </a:r>
-          </a:p>
-        </p:txBody>
-      </p:sp>
-      <p:sp>
-        <p:nvSpPr>
-          <p:cNvPr id="9" name="imgph" descr="IMGQ:large commercial gas boiler room"/>
+              <a:t>No los confundas con el mes del cese</a:t>
+            </a:r>
+          </a:p>
+        </p:txBody>
+      </p:sp>
+      <p:sp>
+        <p:nvSpPr>
+          <p:cNvPr id="9" name="imgph" descr="IMGQ:calendar with marked deadline dates"/>
           <p:cNvSpPr/>
           <p:nvPr/>
         </p:nvSpPr>
         <p:spPr>
           <a:xfrm>
-            <a:off x="5806440" y="1051560"/>
-            <a:ext cx="5298947" cy="4629150"/>
+            <a:off x="822960" y="1965960"/>
+            <a:ext cx="5303520" cy="4572000"/>
           </a:xfrm>
           <a:prstGeom prst="roundRect">
             <a:avLst/>
@@ -7596,8 +8308,8 @@
         </p:nvSpPr>
         <p:spPr>
           <a:xfrm>
-            <a:off x="6080760" y="2726055"/>
-            <a:ext cx="4750307" cy="1280160"/>
+            <a:off x="1097280" y="3611880"/>
+            <a:ext cx="4754880" cy="1280160"/>
           </a:xfrm>
           <a:prstGeom prst="rect">
             <a:avLst/>
@@ -7618,7 +8330,7 @@
                 </a:solidFill>
                 <a:latin typeface="Montserrat"/>
               </a:rPr>
-              <a:t>IMAGEN REALISTA</a:t>
+              <a:t>IMAGEN</a:t>
             </a:r>
           </a:p>
           <a:p>
@@ -7630,7 +8342,7 @@
                 </a:solidFill>
                 <a:latin typeface="Montserrat"/>
               </a:rPr>
-              <a:t>large commercial gas boiler room</a:t>
+              <a:t>calendar with marked deadline dates</a:t>
             </a:r>
           </a:p>
         </p:txBody>
@@ -7640,6 +8352,18 @@
   <p:clrMapOvr>
     <a:masterClrMapping/>
   </p:clrMapOvr>
+  <mc:AlternateContent xmlns:mc="http://schemas.openxmlformats.org/markup-compatibility/2006">
+    <mc:Choice xmlns:p14="http://schemas.microsoft.com/office/powerpoint/2010/main" Requires="p14">
+      <p:transition spd="med" p14:dur="700">
+        <p14:cube dir="l"/>
+      </p:transition>
+    </mc:Choice>
+    <mc:Fallback>
+      <p:transition spd="med">
+        <p:push dir="l"/>
+      </p:transition>
+    </mc:Fallback>
+  </mc:AlternateContent>
 </p:sld>
 </file>
 
@@ -7727,7 +8451,7 @@
                 </a:solidFill>
                 <a:latin typeface="Montserrat"/>
               </a:rPr>
-              <a:t>016 / 017</a:t>
+              <a:t>016 / 021</a:t>
             </a:r>
           </a:p>
         </p:txBody>
@@ -7768,84 +8492,16 @@
       </p:sp>
       <p:sp>
         <p:nvSpPr>
-          <p:cNvPr id="5" name="TextBox 4"/>
-          <p:cNvSpPr txBox="1"/>
-          <p:nvPr/>
-        </p:nvSpPr>
-        <p:spPr>
-          <a:xfrm>
-            <a:off x="822960" y="457200"/>
-            <a:ext cx="10058400" cy="365760"/>
-          </a:xfrm>
-          <a:prstGeom prst="rect">
-            <a:avLst/>
-          </a:prstGeom>
-          <a:noFill/>
-        </p:spPr>
-        <p:txBody>
-          <a:bodyPr wrap="square">
-            <a:spAutoFit/>
-          </a:bodyPr>
-          <a:lstStyle/>
-          <a:p>
-            <a:r>
-              <a:rPr sz="1300" b="1" i="0">
-                <a:solidFill>
-                  <a:srgbClr val="E8801A"/>
-                </a:solidFill>
-                <a:latin typeface="Montserrat"/>
-              </a:rPr>
-              <a:t>APARTADO 4.2 · CAMBIO DE GAS</a:t>
-            </a:r>
-          </a:p>
-        </p:txBody>
-      </p:sp>
-      <p:sp>
-        <p:nvSpPr>
-          <p:cNvPr id="6" name="TextBox 5"/>
-          <p:cNvSpPr txBox="1"/>
-          <p:nvPr/>
-        </p:nvSpPr>
-        <p:spPr>
-          <a:xfrm>
-            <a:off x="822960" y="868680"/>
-            <a:ext cx="10515600" cy="914400"/>
-          </a:xfrm>
-          <a:prstGeom prst="rect">
-            <a:avLst/>
-          </a:prstGeom>
-          <a:noFill/>
-        </p:spPr>
-        <p:txBody>
-          <a:bodyPr wrap="square">
-            <a:spAutoFit/>
-          </a:bodyPr>
-          <a:lstStyle/>
-          <a:p>
-            <a:r>
-              <a:rPr sz="2800" b="1" i="0">
-                <a:solidFill>
-                  <a:srgbClr val="1E2761"/>
-                </a:solidFill>
-                <a:latin typeface="Montserrat"/>
-              </a:rPr>
-              <a:t>Cambio de familia: solo A y B</a:t>
-            </a:r>
-          </a:p>
-        </p:txBody>
-      </p:sp>
-      <p:sp>
-        <p:nvSpPr>
-          <p:cNvPr id="7" name="Rounded Rectangle 6"/>
+          <p:cNvPr id="5" name="Rectangle 4"/>
           <p:cNvSpPr/>
           <p:nvPr/>
         </p:nvSpPr>
         <p:spPr>
           <a:xfrm>
-            <a:off x="868680" y="1627632"/>
-            <a:ext cx="2011680" cy="73152"/>
-          </a:xfrm>
-          <a:prstGeom prst="roundRect">
+            <a:off x="0" y="0"/>
+            <a:ext cx="12191695" cy="1143000"/>
+          </a:xfrm>
+          <a:prstGeom prst="rect">
             <a:avLst/>
           </a:prstGeom>
           <a:solidFill>
@@ -7880,14 +8536,14 @@
       </p:sp>
       <p:sp>
         <p:nvSpPr>
-          <p:cNvPr id="8" name="TextBox 7"/>
+          <p:cNvPr id="6" name="TextBox 5"/>
           <p:cNvSpPr txBox="1"/>
           <p:nvPr/>
         </p:nvSpPr>
         <p:spPr>
           <a:xfrm>
-            <a:off x="822960" y="1965960"/>
-            <a:ext cx="4983480" cy="4206240"/>
+            <a:off x="822960" y="274320"/>
+            <a:ext cx="10515600" cy="640080"/>
           </a:xfrm>
           <a:prstGeom prst="rect">
             <a:avLst/>
@@ -7900,117 +8556,62 @@
           </a:bodyPr>
           <a:lstStyle/>
           <a:p>
-            <a:pPr>
-              <a:spcAft>
-                <a:spcPts val="1100"/>
-              </a:spcAft>
-            </a:pPr>
-            <a:r>
-              <a:rPr sz="1600" b="1" i="0">
-                <a:solidFill>
-                  <a:srgbClr val="E8801A"/>
-                </a:solidFill>
-                <a:latin typeface="Montserrat"/>
-              </a:rPr>
-              <a:t>▸  </a:t>
-            </a:r>
-            <a:r>
-              <a:rPr sz="1600" b="0" i="0">
-                <a:solidFill>
-                  <a:srgbClr val="1B2330"/>
-                </a:solidFill>
-                <a:latin typeface="Montserrat"/>
-              </a:rPr>
-              <a:t>Adecuar de una familia de gas a otra</a:t>
-            </a:r>
-          </a:p>
-          <a:p>
-            <a:pPr>
-              <a:spcAft>
-                <a:spcPts val="1100"/>
-              </a:spcAft>
-            </a:pPr>
-            <a:r>
-              <a:rPr sz="1600" b="1" i="0">
-                <a:solidFill>
-                  <a:srgbClr val="E8801A"/>
-                </a:solidFill>
-                <a:latin typeface="Montserrat"/>
-              </a:rPr>
-              <a:t>▸  </a:t>
-            </a:r>
-            <a:r>
-              <a:rPr sz="1600" b="0" i="0">
-                <a:solidFill>
-                  <a:srgbClr val="1B2330"/>
-                </a:solidFill>
-                <a:latin typeface="Montserrat"/>
-              </a:rPr>
-              <a:t>Solo categorías A o B</a:t>
-            </a:r>
-          </a:p>
-          <a:p>
-            <a:pPr>
-              <a:spcAft>
-                <a:spcPts val="1100"/>
-              </a:spcAft>
-            </a:pPr>
-            <a:r>
-              <a:rPr sz="1600" b="1" i="0">
-                <a:solidFill>
-                  <a:srgbClr val="E8801A"/>
-                </a:solidFill>
-                <a:latin typeface="Montserrat"/>
-              </a:rPr>
-              <a:t>▸  </a:t>
-            </a:r>
-            <a:r>
-              <a:rPr sz="1600" b="0" i="0">
-                <a:solidFill>
-                  <a:srgbClr val="1B2330"/>
-                </a:solidFill>
-                <a:latin typeface="Montserrat"/>
-              </a:rPr>
-              <a:t>La C queda fuera</a:t>
-            </a:r>
-          </a:p>
-          <a:p>
-            <a:pPr>
-              <a:spcAft>
-                <a:spcPts val="1100"/>
-              </a:spcAft>
-            </a:pPr>
-            <a:r>
-              <a:rPr sz="1600" b="1" i="0">
-                <a:solidFill>
-                  <a:srgbClr val="E8801A"/>
-                </a:solidFill>
-                <a:latin typeface="Montserrat"/>
-              </a:rPr>
-              <a:t>▸  </a:t>
-            </a:r>
-            <a:r>
-              <a:rPr sz="1600" b="0" i="0">
-                <a:solidFill>
-                  <a:srgbClr val="1B2330"/>
-                </a:solidFill>
-                <a:latin typeface="Montserrat"/>
-              </a:rPr>
-              <a:t>Fabricante: reconocimiento explícito</a:t>
-            </a:r>
-          </a:p>
-        </p:txBody>
-      </p:sp>
-      <p:sp>
-        <p:nvSpPr>
-          <p:cNvPr id="9" name="imgph" descr="IMGQ:technician adjusting gas valve on appliance"/>
+            <a:r>
+              <a:rPr sz="2400" b="1" i="0">
+                <a:solidFill>
+                  <a:srgbClr val="FFFFFF"/>
+                </a:solidFill>
+                <a:latin typeface="Montserrat"/>
+              </a:rPr>
+              <a:t>⚡  PREGUNTA RÁPIDA</a:t>
+            </a:r>
+          </a:p>
+        </p:txBody>
+      </p:sp>
+      <p:sp>
+        <p:nvSpPr>
+          <p:cNvPr id="7" name="TextBox 6"/>
+          <p:cNvSpPr txBox="1"/>
+          <p:nvPr/>
+        </p:nvSpPr>
+        <p:spPr>
+          <a:xfrm>
+            <a:off x="822960" y="1508760"/>
+            <a:ext cx="10515600" cy="1371600"/>
+          </a:xfrm>
+          <a:prstGeom prst="rect">
+            <a:avLst/>
+          </a:prstGeom>
+          <a:noFill/>
+        </p:spPr>
+        <p:txBody>
+          <a:bodyPr wrap="square">
+            <a:spAutoFit/>
+          </a:bodyPr>
+          <a:lstStyle/>
+          <a:p>
+            <a:r>
+              <a:rPr sz="2400" b="1" i="0">
+                <a:solidFill>
+                  <a:srgbClr val="1E2761"/>
+                </a:solidFill>
+                <a:latin typeface="Montserrat"/>
+              </a:rPr>
+              <a:t>¿En qué plazo debe la empresa comunicar a la comunidad autónoma un cambio de datos o el cese de la actividad?</a:t>
+            </a:r>
+          </a:p>
+        </p:txBody>
+      </p:sp>
+      <p:sp>
+        <p:nvSpPr>
+          <p:cNvPr id="8" name="Rounded Rectangle 7"/>
           <p:cNvSpPr/>
           <p:nvPr/>
         </p:nvSpPr>
         <p:spPr>
           <a:xfrm>
-            <a:off x="5806440" y="1051560"/>
-            <a:ext cx="5298947" cy="4629150"/>
+            <a:off x="822960" y="3291840"/>
+            <a:ext cx="4983480" cy="1143000"/>
           </a:xfrm>
           <a:prstGeom prst="roundRect">
             <a:avLst/>
@@ -8049,14 +8650,58 @@
       </p:sp>
       <p:sp>
         <p:nvSpPr>
+          <p:cNvPr id="9" name="Rectangle 8"/>
+          <p:cNvSpPr/>
+          <p:nvPr/>
+        </p:nvSpPr>
+        <p:spPr>
+          <a:xfrm>
+            <a:off x="822960" y="3291840"/>
+            <a:ext cx="640080" cy="1143000"/>
+          </a:xfrm>
+          <a:prstGeom prst="rect">
+            <a:avLst/>
+          </a:prstGeom>
+          <a:solidFill>
+            <a:srgbClr val="1E2761"/>
+          </a:solidFill>
+          <a:ln>
+            <a:noFill/>
+          </a:ln>
+          <a:effectLst/>
+        </p:spPr>
+        <p:style>
+          <a:lnRef idx="1">
+            <a:schemeClr val="accent1"/>
+          </a:lnRef>
+          <a:fillRef idx="3">
+            <a:schemeClr val="accent1"/>
+          </a:fillRef>
+          <a:effectRef idx="2">
+            <a:schemeClr val="accent1"/>
+          </a:effectRef>
+          <a:fontRef idx="minor">
+            <a:schemeClr val="lt1"/>
+          </a:fontRef>
+        </p:style>
+        <p:txBody>
+          <a:bodyPr rtlCol="0" anchor="ctr"/>
+          <a:lstStyle/>
+          <a:p>
+            <a:pPr algn="ctr"/>
+          </a:p>
+        </p:txBody>
+      </p:sp>
+      <p:sp>
+        <p:nvSpPr>
           <p:cNvPr id="10" name="TextBox 9"/>
           <p:cNvSpPr txBox="1"/>
           <p:nvPr/>
         </p:nvSpPr>
         <p:spPr>
           <a:xfrm>
-            <a:off x="6080760" y="2726055"/>
-            <a:ext cx="4750307" cy="1280160"/>
+            <a:off x="822960" y="3611880"/>
+            <a:ext cx="640080" cy="548640"/>
           </a:xfrm>
           <a:prstGeom prst="rect">
             <a:avLst/>
@@ -8071,25 +8716,524 @@
           <a:p>
             <a:pPr algn="ctr"/>
             <a:r>
-              <a:rPr sz="1400" b="1" i="0">
-                <a:solidFill>
-                  <a:srgbClr val="64748B"/>
-                </a:solidFill>
-                <a:latin typeface="Montserrat"/>
-              </a:rPr>
-              <a:t>IMAGEN REALISTA</a:t>
-            </a:r>
-          </a:p>
+              <a:rPr sz="2200" b="1" i="0">
+                <a:solidFill>
+                  <a:srgbClr val="FFFFFF"/>
+                </a:solidFill>
+                <a:latin typeface="Montserrat"/>
+              </a:rPr>
+              <a:t>A</a:t>
+            </a:r>
+          </a:p>
+        </p:txBody>
+      </p:sp>
+      <p:sp>
+        <p:nvSpPr>
+          <p:cNvPr id="11" name="TextBox 10"/>
+          <p:cNvSpPr txBox="1"/>
+          <p:nvPr/>
+        </p:nvSpPr>
+        <p:spPr>
+          <a:xfrm>
+            <a:off x="1600200" y="3474720"/>
+            <a:ext cx="4114800" cy="868680"/>
+          </a:xfrm>
+          <a:prstGeom prst="rect">
+            <a:avLst/>
+          </a:prstGeom>
+          <a:noFill/>
+        </p:spPr>
+        <p:txBody>
+          <a:bodyPr wrap="square">
+            <a:spAutoFit/>
+          </a:bodyPr>
+          <a:lstStyle/>
+          <a:p>
+            <a:r>
+              <a:rPr sz="1400" b="0" i="0">
+                <a:solidFill>
+                  <a:srgbClr val="1B2330"/>
+                </a:solidFill>
+                <a:latin typeface="Montserrat"/>
+              </a:rPr>
+              <a:t>Un mes</a:t>
+            </a:r>
+          </a:p>
+        </p:txBody>
+      </p:sp>
+      <p:sp>
+        <p:nvSpPr>
+          <p:cNvPr id="12" name="Rounded Rectangle 11"/>
+          <p:cNvSpPr/>
+          <p:nvPr/>
+        </p:nvSpPr>
+        <p:spPr>
+          <a:xfrm>
+            <a:off x="6355080" y="3291840"/>
+            <a:ext cx="4983480" cy="1143000"/>
+          </a:xfrm>
+          <a:prstGeom prst="roundRect">
+            <a:avLst/>
+          </a:prstGeom>
+          <a:solidFill>
+            <a:srgbClr val="F3F6FB"/>
+          </a:solidFill>
+          <a:ln w="12700">
+            <a:solidFill>
+              <a:srgbClr val="C7D2E6"/>
+            </a:solidFill>
+          </a:ln>
+          <a:effectLst/>
+        </p:spPr>
+        <p:style>
+          <a:lnRef idx="1">
+            <a:schemeClr val="accent1"/>
+          </a:lnRef>
+          <a:fillRef idx="3">
+            <a:schemeClr val="accent1"/>
+          </a:fillRef>
+          <a:effectRef idx="2">
+            <a:schemeClr val="accent1"/>
+          </a:effectRef>
+          <a:fontRef idx="minor">
+            <a:schemeClr val="lt1"/>
+          </a:fontRef>
+        </p:style>
+        <p:txBody>
+          <a:bodyPr rtlCol="0" anchor="ctr"/>
+          <a:lstStyle/>
           <a:p>
             <a:pPr algn="ctr"/>
-            <a:r>
-              <a:rPr sz="1100" b="0" i="1">
-                <a:solidFill>
-                  <a:srgbClr val="64748B"/>
-                </a:solidFill>
-                <a:latin typeface="Montserrat"/>
-              </a:rPr>
-              <a:t>technician adjusting gas valve on appliance</a:t>
+          </a:p>
+        </p:txBody>
+      </p:sp>
+      <p:sp>
+        <p:nvSpPr>
+          <p:cNvPr id="13" name="Rectangle 12"/>
+          <p:cNvSpPr/>
+          <p:nvPr/>
+        </p:nvSpPr>
+        <p:spPr>
+          <a:xfrm>
+            <a:off x="6355080" y="3291840"/>
+            <a:ext cx="640080" cy="1143000"/>
+          </a:xfrm>
+          <a:prstGeom prst="rect">
+            <a:avLst/>
+          </a:prstGeom>
+          <a:solidFill>
+            <a:srgbClr val="1E2761"/>
+          </a:solidFill>
+          <a:ln>
+            <a:noFill/>
+          </a:ln>
+          <a:effectLst/>
+        </p:spPr>
+        <p:style>
+          <a:lnRef idx="1">
+            <a:schemeClr val="accent1"/>
+          </a:lnRef>
+          <a:fillRef idx="3">
+            <a:schemeClr val="accent1"/>
+          </a:fillRef>
+          <a:effectRef idx="2">
+            <a:schemeClr val="accent1"/>
+          </a:effectRef>
+          <a:fontRef idx="minor">
+            <a:schemeClr val="lt1"/>
+          </a:fontRef>
+        </p:style>
+        <p:txBody>
+          <a:bodyPr rtlCol="0" anchor="ctr"/>
+          <a:lstStyle/>
+          <a:p>
+            <a:pPr algn="ctr"/>
+          </a:p>
+        </p:txBody>
+      </p:sp>
+      <p:sp>
+        <p:nvSpPr>
+          <p:cNvPr id="14" name="TextBox 13"/>
+          <p:cNvSpPr txBox="1"/>
+          <p:nvPr/>
+        </p:nvSpPr>
+        <p:spPr>
+          <a:xfrm>
+            <a:off x="6355080" y="3611880"/>
+            <a:ext cx="640080" cy="548640"/>
+          </a:xfrm>
+          <a:prstGeom prst="rect">
+            <a:avLst/>
+          </a:prstGeom>
+          <a:noFill/>
+        </p:spPr>
+        <p:txBody>
+          <a:bodyPr wrap="square">
+            <a:spAutoFit/>
+          </a:bodyPr>
+          <a:lstStyle/>
+          <a:p>
+            <a:pPr algn="ctr"/>
+            <a:r>
+              <a:rPr sz="2200" b="1" i="0">
+                <a:solidFill>
+                  <a:srgbClr val="FFFFFF"/>
+                </a:solidFill>
+                <a:latin typeface="Montserrat"/>
+              </a:rPr>
+              <a:t>B</a:t>
+            </a:r>
+          </a:p>
+        </p:txBody>
+      </p:sp>
+      <p:sp>
+        <p:nvSpPr>
+          <p:cNvPr id="15" name="TextBox 14"/>
+          <p:cNvSpPr txBox="1"/>
+          <p:nvPr/>
+        </p:nvSpPr>
+        <p:spPr>
+          <a:xfrm>
+            <a:off x="7132320" y="3474720"/>
+            <a:ext cx="4114800" cy="868680"/>
+          </a:xfrm>
+          <a:prstGeom prst="rect">
+            <a:avLst/>
+          </a:prstGeom>
+          <a:noFill/>
+        </p:spPr>
+        <p:txBody>
+          <a:bodyPr wrap="square">
+            <a:spAutoFit/>
+          </a:bodyPr>
+          <a:lstStyle/>
+          <a:p>
+            <a:r>
+              <a:rPr sz="1400" b="0" i="0">
+                <a:solidFill>
+                  <a:srgbClr val="1B2330"/>
+                </a:solidFill>
+                <a:latin typeface="Montserrat"/>
+              </a:rPr>
+              <a:t>Quince días naturales</a:t>
+            </a:r>
+          </a:p>
+        </p:txBody>
+      </p:sp>
+      <p:sp>
+        <p:nvSpPr>
+          <p:cNvPr id="16" name="Rounded Rectangle 15"/>
+          <p:cNvSpPr/>
+          <p:nvPr/>
+        </p:nvSpPr>
+        <p:spPr>
+          <a:xfrm>
+            <a:off x="822960" y="4617720"/>
+            <a:ext cx="4983480" cy="1143000"/>
+          </a:xfrm>
+          <a:prstGeom prst="roundRect">
+            <a:avLst/>
+          </a:prstGeom>
+          <a:solidFill>
+            <a:srgbClr val="F3F6FB"/>
+          </a:solidFill>
+          <a:ln w="12700">
+            <a:solidFill>
+              <a:srgbClr val="C7D2E6"/>
+            </a:solidFill>
+          </a:ln>
+          <a:effectLst/>
+        </p:spPr>
+        <p:style>
+          <a:lnRef idx="1">
+            <a:schemeClr val="accent1"/>
+          </a:lnRef>
+          <a:fillRef idx="3">
+            <a:schemeClr val="accent1"/>
+          </a:fillRef>
+          <a:effectRef idx="2">
+            <a:schemeClr val="accent1"/>
+          </a:effectRef>
+          <a:fontRef idx="minor">
+            <a:schemeClr val="lt1"/>
+          </a:fontRef>
+        </p:style>
+        <p:txBody>
+          <a:bodyPr rtlCol="0" anchor="ctr"/>
+          <a:lstStyle/>
+          <a:p>
+            <a:pPr algn="ctr"/>
+          </a:p>
+        </p:txBody>
+      </p:sp>
+      <p:sp>
+        <p:nvSpPr>
+          <p:cNvPr id="17" name="Rectangle 16"/>
+          <p:cNvSpPr/>
+          <p:nvPr/>
+        </p:nvSpPr>
+        <p:spPr>
+          <a:xfrm>
+            <a:off x="822960" y="4617720"/>
+            <a:ext cx="640080" cy="1143000"/>
+          </a:xfrm>
+          <a:prstGeom prst="rect">
+            <a:avLst/>
+          </a:prstGeom>
+          <a:solidFill>
+            <a:srgbClr val="1E2761"/>
+          </a:solidFill>
+          <a:ln>
+            <a:noFill/>
+          </a:ln>
+          <a:effectLst/>
+        </p:spPr>
+        <p:style>
+          <a:lnRef idx="1">
+            <a:schemeClr val="accent1"/>
+          </a:lnRef>
+          <a:fillRef idx="3">
+            <a:schemeClr val="accent1"/>
+          </a:fillRef>
+          <a:effectRef idx="2">
+            <a:schemeClr val="accent1"/>
+          </a:effectRef>
+          <a:fontRef idx="minor">
+            <a:schemeClr val="lt1"/>
+          </a:fontRef>
+        </p:style>
+        <p:txBody>
+          <a:bodyPr rtlCol="0" anchor="ctr"/>
+          <a:lstStyle/>
+          <a:p>
+            <a:pPr algn="ctr"/>
+          </a:p>
+        </p:txBody>
+      </p:sp>
+      <p:sp>
+        <p:nvSpPr>
+          <p:cNvPr id="18" name="TextBox 17"/>
+          <p:cNvSpPr txBox="1"/>
+          <p:nvPr/>
+        </p:nvSpPr>
+        <p:spPr>
+          <a:xfrm>
+            <a:off x="822960" y="4937760"/>
+            <a:ext cx="640080" cy="548640"/>
+          </a:xfrm>
+          <a:prstGeom prst="rect">
+            <a:avLst/>
+          </a:prstGeom>
+          <a:noFill/>
+        </p:spPr>
+        <p:txBody>
+          <a:bodyPr wrap="square">
+            <a:spAutoFit/>
+          </a:bodyPr>
+          <a:lstStyle/>
+          <a:p>
+            <a:pPr algn="ctr"/>
+            <a:r>
+              <a:rPr sz="2200" b="1" i="0">
+                <a:solidFill>
+                  <a:srgbClr val="FFFFFF"/>
+                </a:solidFill>
+                <a:latin typeface="Montserrat"/>
+              </a:rPr>
+              <a:t>C</a:t>
+            </a:r>
+          </a:p>
+        </p:txBody>
+      </p:sp>
+      <p:sp>
+        <p:nvSpPr>
+          <p:cNvPr id="19" name="TextBox 18"/>
+          <p:cNvSpPr txBox="1"/>
+          <p:nvPr/>
+        </p:nvSpPr>
+        <p:spPr>
+          <a:xfrm>
+            <a:off x="1600200" y="4800600"/>
+            <a:ext cx="4114800" cy="868680"/>
+          </a:xfrm>
+          <a:prstGeom prst="rect">
+            <a:avLst/>
+          </a:prstGeom>
+          <a:noFill/>
+        </p:spPr>
+        <p:txBody>
+          <a:bodyPr wrap="square">
+            <a:spAutoFit/>
+          </a:bodyPr>
+          <a:lstStyle/>
+          <a:p>
+            <a:r>
+              <a:rPr sz="1400" b="0" i="0">
+                <a:solidFill>
+                  <a:srgbClr val="1B2330"/>
+                </a:solidFill>
+                <a:latin typeface="Montserrat"/>
+              </a:rPr>
+              <a:t>Tres meses</a:t>
+            </a:r>
+          </a:p>
+        </p:txBody>
+      </p:sp>
+      <p:sp>
+        <p:nvSpPr>
+          <p:cNvPr id="20" name="Rounded Rectangle 19"/>
+          <p:cNvSpPr/>
+          <p:nvPr/>
+        </p:nvSpPr>
+        <p:spPr>
+          <a:xfrm>
+            <a:off x="6355080" y="4617720"/>
+            <a:ext cx="4983480" cy="1143000"/>
+          </a:xfrm>
+          <a:prstGeom prst="roundRect">
+            <a:avLst/>
+          </a:prstGeom>
+          <a:solidFill>
+            <a:srgbClr val="F3F6FB"/>
+          </a:solidFill>
+          <a:ln w="12700">
+            <a:solidFill>
+              <a:srgbClr val="C7D2E6"/>
+            </a:solidFill>
+          </a:ln>
+          <a:effectLst/>
+        </p:spPr>
+        <p:style>
+          <a:lnRef idx="1">
+            <a:schemeClr val="accent1"/>
+          </a:lnRef>
+          <a:fillRef idx="3">
+            <a:schemeClr val="accent1"/>
+          </a:fillRef>
+          <a:effectRef idx="2">
+            <a:schemeClr val="accent1"/>
+          </a:effectRef>
+          <a:fontRef idx="minor">
+            <a:schemeClr val="lt1"/>
+          </a:fontRef>
+        </p:style>
+        <p:txBody>
+          <a:bodyPr rtlCol="0" anchor="ctr"/>
+          <a:lstStyle/>
+          <a:p>
+            <a:pPr algn="ctr"/>
+          </a:p>
+        </p:txBody>
+      </p:sp>
+      <p:sp>
+        <p:nvSpPr>
+          <p:cNvPr id="21" name="Rectangle 20"/>
+          <p:cNvSpPr/>
+          <p:nvPr/>
+        </p:nvSpPr>
+        <p:spPr>
+          <a:xfrm>
+            <a:off x="6355080" y="4617720"/>
+            <a:ext cx="640080" cy="1143000"/>
+          </a:xfrm>
+          <a:prstGeom prst="rect">
+            <a:avLst/>
+          </a:prstGeom>
+          <a:solidFill>
+            <a:srgbClr val="1E2761"/>
+          </a:solidFill>
+          <a:ln>
+            <a:noFill/>
+          </a:ln>
+          <a:effectLst/>
+        </p:spPr>
+        <p:style>
+          <a:lnRef idx="1">
+            <a:schemeClr val="accent1"/>
+          </a:lnRef>
+          <a:fillRef idx="3">
+            <a:schemeClr val="accent1"/>
+          </a:fillRef>
+          <a:effectRef idx="2">
+            <a:schemeClr val="accent1"/>
+          </a:effectRef>
+          <a:fontRef idx="minor">
+            <a:schemeClr val="lt1"/>
+          </a:fontRef>
+        </p:style>
+        <p:txBody>
+          <a:bodyPr rtlCol="0" anchor="ctr"/>
+          <a:lstStyle/>
+          <a:p>
+            <a:pPr algn="ctr"/>
+          </a:p>
+        </p:txBody>
+      </p:sp>
+      <p:sp>
+        <p:nvSpPr>
+          <p:cNvPr id="22" name="TextBox 21"/>
+          <p:cNvSpPr txBox="1"/>
+          <p:nvPr/>
+        </p:nvSpPr>
+        <p:spPr>
+          <a:xfrm>
+            <a:off x="6355080" y="4937760"/>
+            <a:ext cx="640080" cy="548640"/>
+          </a:xfrm>
+          <a:prstGeom prst="rect">
+            <a:avLst/>
+          </a:prstGeom>
+          <a:noFill/>
+        </p:spPr>
+        <p:txBody>
+          <a:bodyPr wrap="square">
+            <a:spAutoFit/>
+          </a:bodyPr>
+          <a:lstStyle/>
+          <a:p>
+            <a:pPr algn="ctr"/>
+            <a:r>
+              <a:rPr sz="2200" b="1" i="0">
+                <a:solidFill>
+                  <a:srgbClr val="FFFFFF"/>
+                </a:solidFill>
+                <a:latin typeface="Montserrat"/>
+              </a:rPr>
+              <a:t>D</a:t>
+            </a:r>
+          </a:p>
+        </p:txBody>
+      </p:sp>
+      <p:sp>
+        <p:nvSpPr>
+          <p:cNvPr id="23" name="TextBox 22"/>
+          <p:cNvSpPr txBox="1"/>
+          <p:nvPr/>
+        </p:nvSpPr>
+        <p:spPr>
+          <a:xfrm>
+            <a:off x="7132320" y="4800600"/>
+            <a:ext cx="4114800" cy="868680"/>
+          </a:xfrm>
+          <a:prstGeom prst="rect">
+            <a:avLst/>
+          </a:prstGeom>
+          <a:noFill/>
+        </p:spPr>
+        <p:txBody>
+          <a:bodyPr wrap="square">
+            <a:spAutoFit/>
+          </a:bodyPr>
+          <a:lstStyle/>
+          <a:p>
+            <a:r>
+              <a:rPr sz="1400" b="0" i="0">
+                <a:solidFill>
+                  <a:srgbClr val="1B2330"/>
+                </a:solidFill>
+                <a:latin typeface="Montserrat"/>
+              </a:rPr>
+              <a:t>Cuatro años</a:t>
             </a:r>
           </a:p>
         </p:txBody>
@@ -8099,6 +9243,18 @@
   <p:clrMapOvr>
     <a:masterClrMapping/>
   </p:clrMapOvr>
+  <mc:AlternateContent xmlns:mc="http://schemas.openxmlformats.org/markup-compatibility/2006">
+    <mc:Choice xmlns:p14="http://schemas.microsoft.com/office/powerpoint/2010/main" Requires="p14">
+      <p:transition spd="med" p14:dur="700">
+        <p14:cube dir="r"/>
+      </p:transition>
+    </mc:Choice>
+    <mc:Fallback>
+      <p:transition spd="med">
+        <p:push dir="r"/>
+      </p:transition>
+    </mc:Fallback>
+  </mc:AlternateContent>
 </p:sld>
 </file>
 
@@ -8127,7 +9283,7 @@
             <a:avLst/>
           </a:prstGeom>
           <a:solidFill>
-            <a:srgbClr val="1E2761"/>
+            <a:srgbClr val="FFFFFF"/>
           </a:solidFill>
           <a:ln>
             <a:noFill/>
@@ -8164,8 +9320,8 @@
         </p:nvSpPr>
         <p:spPr>
           <a:xfrm>
-            <a:off x="822960" y="640080"/>
-            <a:ext cx="10515600" cy="457200"/>
+            <a:off x="10607040" y="320040"/>
+            <a:ext cx="1371600" cy="365760"/>
           </a:xfrm>
           <a:prstGeom prst="rect">
             <a:avLst/>
@@ -8178,30 +9334,520 @@
           </a:bodyPr>
           <a:lstStyle/>
           <a:p>
-            <a:r>
-              <a:rPr sz="1400" b="1" i="0">
-                <a:solidFill>
-                  <a:srgbClr val="F4A24C"/>
-                </a:solidFill>
-                <a:latin typeface="Montserrat"/>
-              </a:rPr>
-              <a:t>LO QUE YA DOMINAS</a:t>
-            </a:r>
-          </a:p>
-        </p:txBody>
-      </p:sp>
-      <p:sp>
-        <p:nvSpPr>
-          <p:cNvPr id="4" name="Rounded Rectangle 3"/>
+            <a:pPr algn="r"/>
+            <a:r>
+              <a:rPr sz="1000" b="1" i="0">
+                <a:solidFill>
+                  <a:srgbClr val="64748B"/>
+                </a:solidFill>
+                <a:latin typeface="Montserrat"/>
+              </a:rPr>
+              <a:t>017 / 021</a:t>
+            </a:r>
+          </a:p>
+        </p:txBody>
+      </p:sp>
+      <p:sp>
+        <p:nvSpPr>
+          <p:cNvPr id="4" name="TextBox 3"/>
+          <p:cNvSpPr txBox="1"/>
+          <p:nvPr/>
+        </p:nvSpPr>
+        <p:spPr>
+          <a:xfrm>
+            <a:off x="457200" y="6419088"/>
+            <a:ext cx="8229600" cy="365760"/>
+          </a:xfrm>
+          <a:prstGeom prst="rect">
+            <a:avLst/>
+          </a:prstGeom>
+          <a:noFill/>
+        </p:spPr>
+        <p:txBody>
+          <a:bodyPr wrap="square">
+            <a:spAutoFit/>
+          </a:bodyPr>
+          <a:lstStyle/>
+          <a:p>
+            <a:r>
+              <a:rPr sz="900" b="0" i="0">
+                <a:solidFill>
+                  <a:srgbClr val="64748B"/>
+                </a:solidFill>
+                <a:latin typeface="Montserrat"/>
+              </a:rPr>
+              <a:t>Curso Gas B · Tema 06 · Instaladores y empresas instaladoras</a:t>
+            </a:r>
+          </a:p>
+        </p:txBody>
+      </p:sp>
+      <p:sp>
+        <p:nvSpPr>
+          <p:cNvPr id="5" name="Rectangle 4"/>
           <p:cNvSpPr/>
           <p:nvPr/>
         </p:nvSpPr>
         <p:spPr>
           <a:xfrm>
-            <a:off x="868680" y="1051560"/>
-            <a:ext cx="1463040" cy="82296"/>
+            <a:off x="0" y="0"/>
+            <a:ext cx="12191695" cy="1143000"/>
+          </a:xfrm>
+          <a:prstGeom prst="rect">
+            <a:avLst/>
+          </a:prstGeom>
+          <a:solidFill>
+            <a:srgbClr val="1E8E4B"/>
+          </a:solidFill>
+          <a:ln>
+            <a:noFill/>
+          </a:ln>
+          <a:effectLst/>
+        </p:spPr>
+        <p:style>
+          <a:lnRef idx="1">
+            <a:schemeClr val="accent1"/>
+          </a:lnRef>
+          <a:fillRef idx="3">
+            <a:schemeClr val="accent1"/>
+          </a:fillRef>
+          <a:effectRef idx="2">
+            <a:schemeClr val="accent1"/>
+          </a:effectRef>
+          <a:fontRef idx="minor">
+            <a:schemeClr val="lt1"/>
+          </a:fontRef>
+        </p:style>
+        <p:txBody>
+          <a:bodyPr rtlCol="0" anchor="ctr"/>
+          <a:lstStyle/>
+          <a:p>
+            <a:pPr algn="ctr"/>
+          </a:p>
+        </p:txBody>
+      </p:sp>
+      <p:sp>
+        <p:nvSpPr>
+          <p:cNvPr id="6" name="TextBox 5"/>
+          <p:cNvSpPr txBox="1"/>
+          <p:nvPr/>
+        </p:nvSpPr>
+        <p:spPr>
+          <a:xfrm>
+            <a:off x="822960" y="274320"/>
+            <a:ext cx="10515600" cy="640080"/>
+          </a:xfrm>
+          <a:prstGeom prst="rect">
+            <a:avLst/>
+          </a:prstGeom>
+          <a:noFill/>
+        </p:spPr>
+        <p:txBody>
+          <a:bodyPr wrap="square">
+            <a:spAutoFit/>
+          </a:bodyPr>
+          <a:lstStyle/>
+          <a:p>
+            <a:r>
+              <a:rPr sz="2400" b="1" i="0">
+                <a:solidFill>
+                  <a:srgbClr val="FFFFFF"/>
+                </a:solidFill>
+                <a:latin typeface="Montserrat"/>
+              </a:rPr>
+              <a:t>✔  RESPUESTA:  A</a:t>
+            </a:r>
+          </a:p>
+        </p:txBody>
+      </p:sp>
+      <p:sp>
+        <p:nvSpPr>
+          <p:cNvPr id="7" name="TextBox 6"/>
+          <p:cNvSpPr txBox="1"/>
+          <p:nvPr/>
+        </p:nvSpPr>
+        <p:spPr>
+          <a:xfrm>
+            <a:off x="822960" y="1417320"/>
+            <a:ext cx="10515600" cy="914400"/>
+          </a:xfrm>
+          <a:prstGeom prst="rect">
+            <a:avLst/>
+          </a:prstGeom>
+          <a:noFill/>
+        </p:spPr>
+        <p:txBody>
+          <a:bodyPr wrap="square">
+            <a:spAutoFit/>
+          </a:bodyPr>
+          <a:lstStyle/>
+          <a:p>
+            <a:r>
+              <a:rPr sz="1800" b="1" i="0">
+                <a:solidFill>
+                  <a:srgbClr val="64748B"/>
+                </a:solidFill>
+                <a:latin typeface="Montserrat"/>
+              </a:rPr>
+              <a:t>¿En qué plazo debe la empresa comunicar a la comunidad autónoma un cambio de datos o el cese de la actividad?</a:t>
+            </a:r>
+          </a:p>
+        </p:txBody>
+      </p:sp>
+      <p:sp>
+        <p:nvSpPr>
+          <p:cNvPr id="8" name="Rounded Rectangle 7"/>
+          <p:cNvSpPr/>
+          <p:nvPr/>
+        </p:nvSpPr>
+        <p:spPr>
+          <a:xfrm>
+            <a:off x="822960" y="2514600"/>
+            <a:ext cx="10515600" cy="914400"/>
           </a:xfrm>
           <a:prstGeom prst="roundRect">
+            <a:avLst/>
+          </a:prstGeom>
+          <a:solidFill>
+            <a:srgbClr val="E9F6EE"/>
+          </a:solidFill>
+          <a:ln w="12700">
+            <a:solidFill>
+              <a:srgbClr val="1E8E4B"/>
+            </a:solidFill>
+          </a:ln>
+          <a:effectLst/>
+        </p:spPr>
+        <p:style>
+          <a:lnRef idx="1">
+            <a:schemeClr val="accent1"/>
+          </a:lnRef>
+          <a:fillRef idx="3">
+            <a:schemeClr val="accent1"/>
+          </a:fillRef>
+          <a:effectRef idx="2">
+            <a:schemeClr val="accent1"/>
+          </a:effectRef>
+          <a:fontRef idx="minor">
+            <a:schemeClr val="lt1"/>
+          </a:fontRef>
+        </p:style>
+        <p:txBody>
+          <a:bodyPr rtlCol="0" anchor="ctr"/>
+          <a:lstStyle/>
+          <a:p>
+            <a:pPr algn="ctr"/>
+          </a:p>
+        </p:txBody>
+      </p:sp>
+      <p:sp>
+        <p:nvSpPr>
+          <p:cNvPr id="9" name="TextBox 8"/>
+          <p:cNvSpPr txBox="1"/>
+          <p:nvPr/>
+        </p:nvSpPr>
+        <p:spPr>
+          <a:xfrm>
+            <a:off x="1097280" y="2697480"/>
+            <a:ext cx="10058400" cy="640080"/>
+          </a:xfrm>
+          <a:prstGeom prst="rect">
+            <a:avLst/>
+          </a:prstGeom>
+          <a:noFill/>
+        </p:spPr>
+        <p:txBody>
+          <a:bodyPr wrap="square">
+            <a:spAutoFit/>
+          </a:bodyPr>
+          <a:lstStyle/>
+          <a:p>
+            <a:r>
+              <a:rPr sz="1800" b="1" i="0">
+                <a:solidFill>
+                  <a:srgbClr val="1E8E4B"/>
+                </a:solidFill>
+                <a:latin typeface="Montserrat"/>
+              </a:rPr>
+              <a:t>A.  </a:t>
+            </a:r>
+            <a:r>
+              <a:rPr sz="1800" b="1" i="0">
+                <a:solidFill>
+                  <a:srgbClr val="1E2761"/>
+                </a:solidFill>
+                <a:latin typeface="Montserrat"/>
+              </a:rPr>
+              <a:t>Un mes</a:t>
+            </a:r>
+          </a:p>
+        </p:txBody>
+      </p:sp>
+      <p:sp>
+        <p:nvSpPr>
+          <p:cNvPr id="10" name="TextBox 9"/>
+          <p:cNvSpPr txBox="1"/>
+          <p:nvPr/>
+        </p:nvSpPr>
+        <p:spPr>
+          <a:xfrm>
+            <a:off x="822960" y="3749039"/>
+            <a:ext cx="10515600" cy="2194560"/>
+          </a:xfrm>
+          <a:prstGeom prst="rect">
+            <a:avLst/>
+          </a:prstGeom>
+          <a:noFill/>
+        </p:spPr>
+        <p:txBody>
+          <a:bodyPr wrap="square">
+            <a:spAutoFit/>
+          </a:bodyPr>
+          <a:lstStyle/>
+          <a:p>
+            <a:r>
+              <a:rPr sz="1500" b="1" i="0">
+                <a:solidFill>
+                  <a:srgbClr val="E8801A"/>
+                </a:solidFill>
+                <a:latin typeface="Montserrat"/>
+              </a:rPr>
+              <a:t>Por qué:  </a:t>
+            </a:r>
+            <a:r>
+              <a:rPr sz="1500" b="0" i="0">
+                <a:solidFill>
+                  <a:srgbClr val="1B2330"/>
+                </a:solidFill>
+                <a:latin typeface="Montserrat"/>
+              </a:rPr>
+              <a:t>El cambio o el cese se comunican en el plazo de un mes; no lo confundas con los 15 días para alegar ni con los 3 meses de suspensión cautelar.</a:t>
+            </a:r>
+          </a:p>
+        </p:txBody>
+      </p:sp>
+    </p:spTree>
+  </p:cSld>
+  <p:clrMapOvr>
+    <a:masterClrMapping/>
+  </p:clrMapOvr>
+  <mc:AlternateContent xmlns:mc="http://schemas.openxmlformats.org/markup-compatibility/2006">
+    <mc:Choice xmlns:p14="http://schemas.microsoft.com/office/powerpoint/2010/main" Requires="p14">
+      <p:transition spd="med" p14:dur="700">
+        <p14:cube dir="l"/>
+      </p:transition>
+    </mc:Choice>
+    <mc:Fallback>
+      <p:transition spd="med">
+        <p:push dir="l"/>
+      </p:transition>
+    </mc:Fallback>
+  </mc:AlternateContent>
+</p:sld>
+</file>
+
+<file path=ppt/slides/slide18.xml><?xml version="1.0" encoding="utf-8"?>
+<p:sld xmlns:a="http://schemas.openxmlformats.org/drawingml/2006/main" xmlns:p="http://schemas.openxmlformats.org/presentationml/2006/main" xmlns:r="http://schemas.openxmlformats.org/officeDocument/2006/relationships">
+  <p:cSld>
+    <p:spTree>
+      <p:nvGrpSpPr>
+        <p:cNvPr id="1" name=""/>
+        <p:cNvGrpSpPr/>
+        <p:nvPr/>
+      </p:nvGrpSpPr>
+      <p:grpSpPr/>
+      <p:sp>
+        <p:nvSpPr>
+          <p:cNvPr id="2" name="Rectangle 1"/>
+          <p:cNvSpPr/>
+          <p:nvPr/>
+        </p:nvSpPr>
+        <p:spPr>
+          <a:xfrm>
+            <a:off x="0" y="0"/>
+            <a:ext cx="12191695" cy="6858000"/>
+          </a:xfrm>
+          <a:prstGeom prst="rect">
+            <a:avLst/>
+          </a:prstGeom>
+          <a:solidFill>
+            <a:srgbClr val="FFFFFF"/>
+          </a:solidFill>
+          <a:ln>
+            <a:noFill/>
+          </a:ln>
+          <a:effectLst/>
+        </p:spPr>
+        <p:style>
+          <a:lnRef idx="1">
+            <a:schemeClr val="accent1"/>
+          </a:lnRef>
+          <a:fillRef idx="3">
+            <a:schemeClr val="accent1"/>
+          </a:fillRef>
+          <a:effectRef idx="2">
+            <a:schemeClr val="accent1"/>
+          </a:effectRef>
+          <a:fontRef idx="minor">
+            <a:schemeClr val="lt1"/>
+          </a:fontRef>
+        </p:style>
+        <p:txBody>
+          <a:bodyPr rtlCol="0" anchor="ctr"/>
+          <a:lstStyle/>
+          <a:p>
+            <a:pPr algn="ctr"/>
+          </a:p>
+        </p:txBody>
+      </p:sp>
+      <p:sp>
+        <p:nvSpPr>
+          <p:cNvPr id="3" name="TextBox 2"/>
+          <p:cNvSpPr txBox="1"/>
+          <p:nvPr/>
+        </p:nvSpPr>
+        <p:spPr>
+          <a:xfrm>
+            <a:off x="10607040" y="320040"/>
+            <a:ext cx="1371600" cy="365760"/>
+          </a:xfrm>
+          <a:prstGeom prst="rect">
+            <a:avLst/>
+          </a:prstGeom>
+          <a:noFill/>
+        </p:spPr>
+        <p:txBody>
+          <a:bodyPr wrap="square">
+            <a:spAutoFit/>
+          </a:bodyPr>
+          <a:lstStyle/>
+          <a:p>
+            <a:pPr algn="r"/>
+            <a:r>
+              <a:rPr sz="1000" b="1" i="0">
+                <a:solidFill>
+                  <a:srgbClr val="64748B"/>
+                </a:solidFill>
+                <a:latin typeface="Montserrat"/>
+              </a:rPr>
+              <a:t>018 / 021</a:t>
+            </a:r>
+          </a:p>
+        </p:txBody>
+      </p:sp>
+      <p:sp>
+        <p:nvSpPr>
+          <p:cNvPr id="4" name="TextBox 3"/>
+          <p:cNvSpPr txBox="1"/>
+          <p:nvPr/>
+        </p:nvSpPr>
+        <p:spPr>
+          <a:xfrm>
+            <a:off x="457200" y="6419088"/>
+            <a:ext cx="8229600" cy="365760"/>
+          </a:xfrm>
+          <a:prstGeom prst="rect">
+            <a:avLst/>
+          </a:prstGeom>
+          <a:noFill/>
+        </p:spPr>
+        <p:txBody>
+          <a:bodyPr wrap="square">
+            <a:spAutoFit/>
+          </a:bodyPr>
+          <a:lstStyle/>
+          <a:p>
+            <a:r>
+              <a:rPr sz="900" b="0" i="0">
+                <a:solidFill>
+                  <a:srgbClr val="64748B"/>
+                </a:solidFill>
+                <a:latin typeface="Montserrat"/>
+              </a:rPr>
+              <a:t>Curso Gas B · Tema 06 · Instaladores y empresas instaladoras</a:t>
+            </a:r>
+          </a:p>
+        </p:txBody>
+      </p:sp>
+      <p:sp>
+        <p:nvSpPr>
+          <p:cNvPr id="5" name="TextBox 4"/>
+          <p:cNvSpPr txBox="1"/>
+          <p:nvPr/>
+        </p:nvSpPr>
+        <p:spPr>
+          <a:xfrm>
+            <a:off x="822960" y="457200"/>
+            <a:ext cx="10058400" cy="365760"/>
+          </a:xfrm>
+          <a:prstGeom prst="rect">
+            <a:avLst/>
+          </a:prstGeom>
+          <a:noFill/>
+        </p:spPr>
+        <p:txBody>
+          <a:bodyPr wrap="square">
+            <a:spAutoFit/>
+          </a:bodyPr>
+          <a:lstStyle/>
+          <a:p>
+            <a:r>
+              <a:rPr sz="1300" b="1" i="0">
+                <a:solidFill>
+                  <a:srgbClr val="E8801A"/>
+                </a:solidFill>
+                <a:latin typeface="Montserrat"/>
+              </a:rPr>
+              <a:t>APARTADO 3.12 · OBLIGACIONES</a:t>
+            </a:r>
+          </a:p>
+        </p:txBody>
+      </p:sp>
+      <p:sp>
+        <p:nvSpPr>
+          <p:cNvPr id="6" name="TextBox 5"/>
+          <p:cNvSpPr txBox="1"/>
+          <p:nvPr/>
+        </p:nvSpPr>
+        <p:spPr>
+          <a:xfrm>
+            <a:off x="822960" y="868680"/>
+            <a:ext cx="10515600" cy="914400"/>
+          </a:xfrm>
+          <a:prstGeom prst="rect">
+            <a:avLst/>
+          </a:prstGeom>
+          <a:noFill/>
+        </p:spPr>
+        <p:txBody>
+          <a:bodyPr wrap="square">
+            <a:spAutoFit/>
+          </a:bodyPr>
+          <a:lstStyle/>
+          <a:p>
+            <a:r>
+              <a:rPr sz="2800" b="1" i="0">
+                <a:solidFill>
+                  <a:srgbClr val="1E2761"/>
+                </a:solidFill>
+                <a:latin typeface="Montserrat"/>
+              </a:rPr>
+              <a:t>Certificados, garantía y registros</a:t>
+            </a:r>
+          </a:p>
+        </p:txBody>
+      </p:sp>
+      <p:sp>
+        <p:nvSpPr>
+          <p:cNvPr id="7" name="Rectangle 6"/>
+          <p:cNvSpPr/>
+          <p:nvPr/>
+        </p:nvSpPr>
+        <p:spPr>
+          <a:xfrm>
+            <a:off x="868680" y="1627632"/>
+            <a:ext cx="2011680" cy="73152"/>
+          </a:xfrm>
+          <a:prstGeom prst="rect">
             <a:avLst/>
           </a:prstGeom>
           <a:solidFill>
@@ -8236,14 +9882,14 @@
       </p:sp>
       <p:sp>
         <p:nvSpPr>
-          <p:cNvPr id="5" name="TextBox 4"/>
+          <p:cNvPr id="8" name="TextBox 7"/>
           <p:cNvSpPr txBox="1"/>
           <p:nvPr/>
         </p:nvSpPr>
         <p:spPr>
           <a:xfrm>
-            <a:off x="822960" y="1234440"/>
-            <a:ext cx="10515600" cy="1097280"/>
+            <a:off x="822960" y="1965960"/>
+            <a:ext cx="5029200" cy="4206240"/>
           </a:xfrm>
           <a:prstGeom prst="rect">
             <a:avLst/>
@@ -8256,28 +9902,163 @@
           </a:bodyPr>
           <a:lstStyle/>
           <a:p>
-            <a:r>
-              <a:rPr sz="3400" b="1" i="0">
-                <a:solidFill>
-                  <a:srgbClr val="FFFFFF"/>
-                </a:solidFill>
-                <a:latin typeface="Montserrat"/>
-              </a:rPr>
-              <a:t>Ya sabes montar y sostener la empresa</a:t>
-            </a:r>
-          </a:p>
-        </p:txBody>
-      </p:sp>
-      <p:sp>
-        <p:nvSpPr>
-          <p:cNvPr id="6" name="TextBox 5"/>
+            <a:pPr>
+              <a:spcAft>
+                <a:spcPts val="1100"/>
+              </a:spcAft>
+            </a:pPr>
+            <a:r>
+              <a:rPr sz="1600" b="1" i="0">
+                <a:solidFill>
+                  <a:srgbClr val="E8801A"/>
+                </a:solidFill>
+                <a:latin typeface="Montserrat"/>
+              </a:rPr>
+              <a:t>▸  </a:t>
+            </a:r>
+            <a:r>
+              <a:rPr sz="1600" b="0" i="0">
+                <a:solidFill>
+                  <a:srgbClr val="1B2330"/>
+                </a:solidFill>
+                <a:latin typeface="Montserrat"/>
+              </a:rPr>
+              <a:t>Emitir los certificados reglamentarios</a:t>
+            </a:r>
+          </a:p>
+          <a:p>
+            <a:pPr>
+              <a:spcAft>
+                <a:spcPts val="1100"/>
+              </a:spcAft>
+            </a:pPr>
+            <a:r>
+              <a:rPr sz="1600" b="1" i="0">
+                <a:solidFill>
+                  <a:srgbClr val="E8801A"/>
+                </a:solidFill>
+                <a:latin typeface="Montserrat"/>
+              </a:rPr>
+              <a:t>▸  </a:t>
+            </a:r>
+            <a:r>
+              <a:rPr sz="1600" b="0" i="0">
+                <a:solidFill>
+                  <a:srgbClr val="1B2330"/>
+                </a:solidFill>
+                <a:latin typeface="Montserrat"/>
+              </a:rPr>
+              <a:t>Garantía de 4 años por mala ejecución</a:t>
+            </a:r>
+          </a:p>
+          <a:p>
+            <a:pPr>
+              <a:spcAft>
+                <a:spcPts val="1100"/>
+              </a:spcAft>
+            </a:pPr>
+            <a:r>
+              <a:rPr sz="1600" b="1" i="0">
+                <a:solidFill>
+                  <a:srgbClr val="E8801A"/>
+                </a:solidFill>
+                <a:latin typeface="Montserrat"/>
+              </a:rPr>
+              <a:t>▸  </a:t>
+            </a:r>
+            <a:r>
+              <a:rPr sz="1600" b="0" i="0">
+                <a:solidFill>
+                  <a:srgbClr val="1B2330"/>
+                </a:solidFill>
+                <a:latin typeface="Montserrat"/>
+              </a:rPr>
+              <a:t>Un registro para la comunidad autónoma</a:t>
+            </a:r>
+          </a:p>
+          <a:p>
+            <a:pPr>
+              <a:spcAft>
+                <a:spcPts val="1100"/>
+              </a:spcAft>
+            </a:pPr>
+            <a:r>
+              <a:rPr sz="1600" b="1" i="0">
+                <a:solidFill>
+                  <a:srgbClr val="E8801A"/>
+                </a:solidFill>
+                <a:latin typeface="Montserrat"/>
+              </a:rPr>
+              <a:t>▸  </a:t>
+            </a:r>
+            <a:r>
+              <a:rPr sz="1600" b="0" i="0">
+                <a:solidFill>
+                  <a:srgbClr val="1B2330"/>
+                </a:solidFill>
+                <a:latin typeface="Montserrat"/>
+              </a:rPr>
+              <a:t>Otro registro para la distribuidora</a:t>
+            </a:r>
+          </a:p>
+        </p:txBody>
+      </p:sp>
+      <p:sp>
+        <p:nvSpPr>
+          <p:cNvPr id="9" name="imgph" descr="IMGQ:filing cabinet with document records"/>
+          <p:cNvSpPr/>
+          <p:nvPr/>
+        </p:nvSpPr>
+        <p:spPr>
+          <a:xfrm>
+            <a:off x="6080760" y="1965960"/>
+            <a:ext cx="5303520" cy="4572000"/>
+          </a:xfrm>
+          <a:prstGeom prst="roundRect">
+            <a:avLst/>
+          </a:prstGeom>
+          <a:solidFill>
+            <a:srgbClr val="F3F6FB"/>
+          </a:solidFill>
+          <a:ln w="12700">
+            <a:solidFill>
+              <a:srgbClr val="C7D2E6"/>
+            </a:solidFill>
+          </a:ln>
+          <a:effectLst/>
+        </p:spPr>
+        <p:style>
+          <a:lnRef idx="1">
+            <a:schemeClr val="accent1"/>
+          </a:lnRef>
+          <a:fillRef idx="3">
+            <a:schemeClr val="accent1"/>
+          </a:fillRef>
+          <a:effectRef idx="2">
+            <a:schemeClr val="accent1"/>
+          </a:effectRef>
+          <a:fontRef idx="minor">
+            <a:schemeClr val="lt1"/>
+          </a:fontRef>
+        </p:style>
+        <p:txBody>
+          <a:bodyPr rtlCol="0" anchor="ctr"/>
+          <a:lstStyle/>
+          <a:p>
+            <a:pPr algn="ctr"/>
+          </a:p>
+        </p:txBody>
+      </p:sp>
+      <p:sp>
+        <p:nvSpPr>
+          <p:cNvPr id="10" name="TextBox 9"/>
           <p:cNvSpPr txBox="1"/>
           <p:nvPr/>
         </p:nvSpPr>
         <p:spPr>
           <a:xfrm>
-            <a:off x="822960" y="2606040"/>
-            <a:ext cx="10515600" cy="2743200"/>
+            <a:off x="6355080" y="3611880"/>
+            <a:ext cx="4754880" cy="1280160"/>
           </a:xfrm>
           <a:prstGeom prst="rect">
             <a:avLst/>
@@ -8290,119 +10071,254 @@
           </a:bodyPr>
           <a:lstStyle/>
           <a:p>
-            <a:pPr>
-              <a:spcAft>
-                <a:spcPts val="1200"/>
-              </a:spcAft>
-            </a:pPr>
-            <a:r>
-              <a:rPr sz="2000" b="1" i="0">
-                <a:solidFill>
-                  <a:srgbClr val="F4A24C"/>
-                </a:solidFill>
-                <a:latin typeface="Montserrat"/>
-              </a:rPr>
-              <a:t>✓  </a:t>
-            </a:r>
-            <a:r>
-              <a:rPr sz="1900" b="0" i="0">
-                <a:solidFill>
-                  <a:srgbClr val="FFFFFF"/>
-                </a:solidFill>
-                <a:latin typeface="Montserrat"/>
-              </a:rPr>
-              <a:t>Declaración responsable: habilitada al instante y para siempre</a:t>
-            </a:r>
-          </a:p>
-          <a:p>
-            <a:pPr>
-              <a:spcAft>
-                <a:spcPts val="1200"/>
-              </a:spcAft>
-            </a:pPr>
-            <a:r>
-              <a:rPr sz="2000" b="1" i="0">
-                <a:solidFill>
-                  <a:srgbClr val="F4A24C"/>
-                </a:solidFill>
-                <a:latin typeface="Montserrat"/>
-              </a:rPr>
-              <a:t>✓  </a:t>
-            </a:r>
-            <a:r>
-              <a:rPr sz="1900" b="0" i="0">
-                <a:solidFill>
-                  <a:srgbClr val="FFFFFF"/>
-                </a:solidFill>
-                <a:latin typeface="Montserrat"/>
-              </a:rPr>
-              <a:t>Un instalador en plantilla, de categoría igual o superior</a:t>
-            </a:r>
-          </a:p>
-          <a:p>
-            <a:pPr>
-              <a:spcAft>
-                <a:spcPts val="1200"/>
-              </a:spcAft>
-            </a:pPr>
-            <a:r>
-              <a:rPr sz="2000" b="1" i="0">
-                <a:solidFill>
-                  <a:srgbClr val="F4A24C"/>
-                </a:solidFill>
-                <a:latin typeface="Montserrat"/>
-              </a:rPr>
-              <a:t>✓  </a:t>
-            </a:r>
-            <a:r>
-              <a:rPr sz="1900" b="0" i="0">
-                <a:solidFill>
-                  <a:srgbClr val="FFFFFF"/>
-                </a:solidFill>
-                <a:latin typeface="Montserrat"/>
-              </a:rPr>
-              <a:t>Seguro 900 / 600 / 300 y garantía de 4 años</a:t>
-            </a:r>
-          </a:p>
-          <a:p>
-            <a:pPr>
-              <a:spcAft>
-                <a:spcPts val="1200"/>
-              </a:spcAft>
-            </a:pPr>
-            <a:r>
-              <a:rPr sz="2000" b="1" i="0">
-                <a:solidFill>
-                  <a:srgbClr val="F4A24C"/>
-                </a:solidFill>
-                <a:latin typeface="Montserrat"/>
-              </a:rPr>
-              <a:t>✓  </a:t>
-            </a:r>
-            <a:r>
-              <a:rPr sz="1900" b="0" i="0">
-                <a:solidFill>
-                  <a:srgbClr val="FFFFFF"/>
-                </a:solidFill>
-                <a:latin typeface="Montserrat"/>
-              </a:rPr>
-              <a:t>Plazos: 1 mes, 15 días y 3 meses</a:t>
-            </a:r>
-          </a:p>
-        </p:txBody>
-      </p:sp>
-      <p:sp>
-        <p:nvSpPr>
-          <p:cNvPr id="7" name="Rounded Rectangle 6"/>
+            <a:pPr algn="ctr"/>
+            <a:r>
+              <a:rPr sz="1400" b="1" i="0">
+                <a:solidFill>
+                  <a:srgbClr val="64748B"/>
+                </a:solidFill>
+                <a:latin typeface="Montserrat"/>
+              </a:rPr>
+              <a:t>IMAGEN</a:t>
+            </a:r>
+          </a:p>
+          <a:p>
+            <a:pPr algn="ctr"/>
+            <a:r>
+              <a:rPr sz="1100" b="0" i="1">
+                <a:solidFill>
+                  <a:srgbClr val="64748B"/>
+                </a:solidFill>
+                <a:latin typeface="Montserrat"/>
+              </a:rPr>
+              <a:t>filing cabinet with document records</a:t>
+            </a:r>
+          </a:p>
+        </p:txBody>
+      </p:sp>
+    </p:spTree>
+  </p:cSld>
+  <p:clrMapOvr>
+    <a:masterClrMapping/>
+  </p:clrMapOvr>
+  <mc:AlternateContent xmlns:mc="http://schemas.openxmlformats.org/markup-compatibility/2006">
+    <mc:Choice xmlns:p14="http://schemas.microsoft.com/office/powerpoint/2010/main" Requires="p14">
+      <p:transition spd="med" p14:dur="700">
+        <p14:cube dir="r"/>
+      </p:transition>
+    </mc:Choice>
+    <mc:Fallback>
+      <p:transition spd="med">
+        <p:push dir="r"/>
+      </p:transition>
+    </mc:Fallback>
+  </mc:AlternateContent>
+</p:sld>
+</file>
+
+<file path=ppt/slides/slide19.xml><?xml version="1.0" encoding="utf-8"?>
+<p:sld xmlns:a="http://schemas.openxmlformats.org/drawingml/2006/main" xmlns:p="http://schemas.openxmlformats.org/presentationml/2006/main" xmlns:r="http://schemas.openxmlformats.org/officeDocument/2006/relationships">
+  <p:cSld>
+    <p:spTree>
+      <p:nvGrpSpPr>
+        <p:cNvPr id="1" name=""/>
+        <p:cNvGrpSpPr/>
+        <p:nvPr/>
+      </p:nvGrpSpPr>
+      <p:grpSpPr/>
+      <p:sp>
+        <p:nvSpPr>
+          <p:cNvPr id="2" name="Rectangle 1"/>
           <p:cNvSpPr/>
           <p:nvPr/>
         </p:nvSpPr>
         <p:spPr>
           <a:xfrm>
-            <a:off x="822960" y="5532120"/>
-            <a:ext cx="10515600" cy="822960"/>
-          </a:xfrm>
-          <a:prstGeom prst="roundRect">
+            <a:off x="0" y="0"/>
+            <a:ext cx="12191695" cy="6858000"/>
+          </a:xfrm>
+          <a:prstGeom prst="rect">
+            <a:avLst/>
+          </a:prstGeom>
+          <a:solidFill>
+            <a:srgbClr val="FFFFFF"/>
+          </a:solidFill>
+          <a:ln>
+            <a:noFill/>
+          </a:ln>
+          <a:effectLst/>
+        </p:spPr>
+        <p:style>
+          <a:lnRef idx="1">
+            <a:schemeClr val="accent1"/>
+          </a:lnRef>
+          <a:fillRef idx="3">
+            <a:schemeClr val="accent1"/>
+          </a:fillRef>
+          <a:effectRef idx="2">
+            <a:schemeClr val="accent1"/>
+          </a:effectRef>
+          <a:fontRef idx="minor">
+            <a:schemeClr val="lt1"/>
+          </a:fontRef>
+        </p:style>
+        <p:txBody>
+          <a:bodyPr rtlCol="0" anchor="ctr"/>
+          <a:lstStyle/>
+          <a:p>
+            <a:pPr algn="ctr"/>
+          </a:p>
+        </p:txBody>
+      </p:sp>
+      <p:sp>
+        <p:nvSpPr>
+          <p:cNvPr id="3" name="TextBox 2"/>
+          <p:cNvSpPr txBox="1"/>
+          <p:nvPr/>
+        </p:nvSpPr>
+        <p:spPr>
+          <a:xfrm>
+            <a:off x="10607040" y="320040"/>
+            <a:ext cx="1371600" cy="365760"/>
+          </a:xfrm>
+          <a:prstGeom prst="rect">
+            <a:avLst/>
+          </a:prstGeom>
+          <a:noFill/>
+        </p:spPr>
+        <p:txBody>
+          <a:bodyPr wrap="square">
+            <a:spAutoFit/>
+          </a:bodyPr>
+          <a:lstStyle/>
+          <a:p>
+            <a:pPr algn="r"/>
+            <a:r>
+              <a:rPr sz="1000" b="1" i="0">
+                <a:solidFill>
+                  <a:srgbClr val="64748B"/>
+                </a:solidFill>
+                <a:latin typeface="Montserrat"/>
+              </a:rPr>
+              <a:t>019 / 021</a:t>
+            </a:r>
+          </a:p>
+        </p:txBody>
+      </p:sp>
+      <p:sp>
+        <p:nvSpPr>
+          <p:cNvPr id="4" name="TextBox 3"/>
+          <p:cNvSpPr txBox="1"/>
+          <p:nvPr/>
+        </p:nvSpPr>
+        <p:spPr>
+          <a:xfrm>
+            <a:off x="457200" y="6419088"/>
+            <a:ext cx="8229600" cy="365760"/>
+          </a:xfrm>
+          <a:prstGeom prst="rect">
+            <a:avLst/>
+          </a:prstGeom>
+          <a:noFill/>
+        </p:spPr>
+        <p:txBody>
+          <a:bodyPr wrap="square">
+            <a:spAutoFit/>
+          </a:bodyPr>
+          <a:lstStyle/>
+          <a:p>
+            <a:r>
+              <a:rPr sz="900" b="0" i="0">
+                <a:solidFill>
+                  <a:srgbClr val="64748B"/>
+                </a:solidFill>
+                <a:latin typeface="Montserrat"/>
+              </a:rPr>
+              <a:t>Curso Gas B · Tema 06 · Instaladores y empresas instaladoras</a:t>
+            </a:r>
+          </a:p>
+        </p:txBody>
+      </p:sp>
+      <p:sp>
+        <p:nvSpPr>
+          <p:cNvPr id="5" name="TextBox 4"/>
+          <p:cNvSpPr txBox="1"/>
+          <p:nvPr/>
+        </p:nvSpPr>
+        <p:spPr>
+          <a:xfrm>
+            <a:off x="822960" y="457200"/>
+            <a:ext cx="10058400" cy="365760"/>
+          </a:xfrm>
+          <a:prstGeom prst="rect">
+            <a:avLst/>
+          </a:prstGeom>
+          <a:noFill/>
+        </p:spPr>
+        <p:txBody>
+          <a:bodyPr wrap="square">
+            <a:spAutoFit/>
+          </a:bodyPr>
+          <a:lstStyle/>
+          <a:p>
+            <a:r>
+              <a:rPr sz="1300" b="1" i="0">
+                <a:solidFill>
+                  <a:srgbClr val="E8801A"/>
+                </a:solidFill>
+                <a:latin typeface="Montserrat"/>
+              </a:rPr>
+              <a:t>APARTADO 4.1 · APARATOS GRANDES</a:t>
+            </a:r>
+          </a:p>
+        </p:txBody>
+      </p:sp>
+      <p:sp>
+        <p:nvSpPr>
+          <p:cNvPr id="6" name="TextBox 5"/>
+          <p:cNvSpPr txBox="1"/>
+          <p:nvPr/>
+        </p:nvSpPr>
+        <p:spPr>
+          <a:xfrm>
+            <a:off x="822960" y="868680"/>
+            <a:ext cx="10515600" cy="914400"/>
+          </a:xfrm>
+          <a:prstGeom prst="rect">
+            <a:avLst/>
+          </a:prstGeom>
+          <a:noFill/>
+        </p:spPr>
+        <p:txBody>
+          <a:bodyPr wrap="square">
+            <a:spAutoFit/>
+          </a:bodyPr>
+          <a:lstStyle/>
+          <a:p>
+            <a:r>
+              <a:rPr sz="2800" b="1" i="0">
+                <a:solidFill>
+                  <a:srgbClr val="1E2761"/>
+                </a:solidFill>
+                <a:latin typeface="Montserrat"/>
+              </a:rPr>
+              <a:t>Los aparatos gordos piden un plus</a:t>
+            </a:r>
+          </a:p>
+        </p:txBody>
+      </p:sp>
+      <p:sp>
+        <p:nvSpPr>
+          <p:cNvPr id="7" name="Rectangle 6"/>
+          <p:cNvSpPr/>
+          <p:nvPr/>
+        </p:nvSpPr>
+        <p:spPr>
+          <a:xfrm>
+            <a:off x="868680" y="1627632"/>
+            <a:ext cx="2011680" cy="73152"/>
+          </a:xfrm>
+          <a:prstGeom prst="rect">
             <a:avLst/>
           </a:prstGeom>
           <a:solidFill>
@@ -8443,8 +10359,8 @@
         </p:nvSpPr>
         <p:spPr>
           <a:xfrm>
-            <a:off x="1051560" y="5623560"/>
-            <a:ext cx="10058400" cy="640080"/>
+            <a:off x="6355080" y="1965960"/>
+            <a:ext cx="5029200" cy="4206240"/>
           </a:xfrm>
           <a:prstGeom prst="rect">
             <a:avLst/>
@@ -8457,14 +10373,196 @@
           </a:bodyPr>
           <a:lstStyle/>
           <a:p>
-            <a:r>
-              <a:rPr sz="1500" b="1" i="1">
-                <a:solidFill>
-                  <a:srgbClr val="1E2761"/>
-                </a:solidFill>
-                <a:latin typeface="Montserrat"/>
-              </a:rPr>
-              <a:t>Con la persona y la empresa dominadas, solo falta el temario oficial. Vamos a por los anexos.</a:t>
+            <a:pPr>
+              <a:spcAft>
+                <a:spcPts val="1100"/>
+              </a:spcAft>
+            </a:pPr>
+            <a:r>
+              <a:rPr sz="1600" b="1" i="0">
+                <a:solidFill>
+                  <a:srgbClr val="E8801A"/>
+                </a:solidFill>
+                <a:latin typeface="Montserrat"/>
+              </a:rPr>
+              <a:t>▸  </a:t>
+            </a:r>
+            <a:r>
+              <a:rPr sz="1600" b="0" i="0">
+                <a:solidFill>
+                  <a:srgbClr val="1B2330"/>
+                </a:solidFill>
+                <a:latin typeface="Montserrat"/>
+              </a:rPr>
+              <a:t>Conducidos &gt; 24,4 kW y vitro cubierta</a:t>
+            </a:r>
+          </a:p>
+          <a:p>
+            <a:pPr>
+              <a:spcAft>
+                <a:spcPts val="1100"/>
+              </a:spcAft>
+            </a:pPr>
+            <a:r>
+              <a:rPr sz="1600" b="1" i="0">
+                <a:solidFill>
+                  <a:srgbClr val="E8801A"/>
+                </a:solidFill>
+                <a:latin typeface="Montserrat"/>
+              </a:rPr>
+              <a:t>▸  </a:t>
+            </a:r>
+            <a:r>
+              <a:rPr sz="1600" b="0" i="0">
+                <a:solidFill>
+                  <a:srgbClr val="1B2330"/>
+                </a:solidFill>
+                <a:latin typeface="Montserrat"/>
+              </a:rPr>
+              <a:t>Cualquier categoría puede acreditarlo</a:t>
+            </a:r>
+          </a:p>
+          <a:p>
+            <a:pPr>
+              <a:spcAft>
+                <a:spcPts val="1100"/>
+              </a:spcAft>
+            </a:pPr>
+            <a:r>
+              <a:rPr sz="1600" b="1" i="0">
+                <a:solidFill>
+                  <a:srgbClr val="E8801A"/>
+                </a:solidFill>
+                <a:latin typeface="Montserrat"/>
+              </a:rPr>
+              <a:t>▸  </a:t>
+            </a:r>
+            <a:r>
+              <a:rPr sz="1600" b="0" i="0">
+                <a:solidFill>
+                  <a:srgbClr val="1B2330"/>
+                </a:solidFill>
+                <a:latin typeface="Montserrat"/>
+              </a:rPr>
+              <a:t>Vía más habitual: acreditación del fabricante</a:t>
+            </a:r>
+          </a:p>
+          <a:p>
+            <a:pPr>
+              <a:spcAft>
+                <a:spcPts val="1100"/>
+              </a:spcAft>
+            </a:pPr>
+            <a:r>
+              <a:rPr sz="1600" b="1" i="0">
+                <a:solidFill>
+                  <a:srgbClr val="E8801A"/>
+                </a:solidFill>
+                <a:latin typeface="Montserrat"/>
+              </a:rPr>
+              <a:t>▸  </a:t>
+            </a:r>
+            <a:r>
+              <a:rPr sz="1600" b="0" i="0">
+                <a:solidFill>
+                  <a:srgbClr val="1B2330"/>
+                </a:solidFill>
+                <a:latin typeface="Montserrat"/>
+              </a:rPr>
+              <a:t>O título, FP o entidad acreditada</a:t>
+            </a:r>
+          </a:p>
+        </p:txBody>
+      </p:sp>
+      <p:sp>
+        <p:nvSpPr>
+          <p:cNvPr id="9" name="imgph" descr="IMGQ:large commercial gas boiler room"/>
+          <p:cNvSpPr/>
+          <p:nvPr/>
+        </p:nvSpPr>
+        <p:spPr>
+          <a:xfrm>
+            <a:off x="822960" y="1965960"/>
+            <a:ext cx="5303520" cy="4572000"/>
+          </a:xfrm>
+          <a:prstGeom prst="roundRect">
+            <a:avLst/>
+          </a:prstGeom>
+          <a:solidFill>
+            <a:srgbClr val="F3F6FB"/>
+          </a:solidFill>
+          <a:ln w="12700">
+            <a:solidFill>
+              <a:srgbClr val="C7D2E6"/>
+            </a:solidFill>
+          </a:ln>
+          <a:effectLst/>
+        </p:spPr>
+        <p:style>
+          <a:lnRef idx="1">
+            <a:schemeClr val="accent1"/>
+          </a:lnRef>
+          <a:fillRef idx="3">
+            <a:schemeClr val="accent1"/>
+          </a:fillRef>
+          <a:effectRef idx="2">
+            <a:schemeClr val="accent1"/>
+          </a:effectRef>
+          <a:fontRef idx="minor">
+            <a:schemeClr val="lt1"/>
+          </a:fontRef>
+        </p:style>
+        <p:txBody>
+          <a:bodyPr rtlCol="0" anchor="ctr"/>
+          <a:lstStyle/>
+          <a:p>
+            <a:pPr algn="ctr"/>
+          </a:p>
+        </p:txBody>
+      </p:sp>
+      <p:sp>
+        <p:nvSpPr>
+          <p:cNvPr id="10" name="TextBox 9"/>
+          <p:cNvSpPr txBox="1"/>
+          <p:nvPr/>
+        </p:nvSpPr>
+        <p:spPr>
+          <a:xfrm>
+            <a:off x="1097280" y="3611880"/>
+            <a:ext cx="4754880" cy="1280160"/>
+          </a:xfrm>
+          <a:prstGeom prst="rect">
+            <a:avLst/>
+          </a:prstGeom>
+          <a:noFill/>
+        </p:spPr>
+        <p:txBody>
+          <a:bodyPr wrap="square">
+            <a:spAutoFit/>
+          </a:bodyPr>
+          <a:lstStyle/>
+          <a:p>
+            <a:pPr algn="ctr"/>
+            <a:r>
+              <a:rPr sz="1400" b="1" i="0">
+                <a:solidFill>
+                  <a:srgbClr val="64748B"/>
+                </a:solidFill>
+                <a:latin typeface="Montserrat"/>
+              </a:rPr>
+              <a:t>IMAGEN</a:t>
+            </a:r>
+          </a:p>
+          <a:p>
+            <a:pPr algn="ctr"/>
+            <a:r>
+              <a:rPr sz="1100" b="0" i="1">
+                <a:solidFill>
+                  <a:srgbClr val="64748B"/>
+                </a:solidFill>
+                <a:latin typeface="Montserrat"/>
+              </a:rPr>
+              <a:t>large commercial gas boiler room</a:t>
             </a:r>
           </a:p>
         </p:txBody>
@@ -8474,6 +10572,18 @@
   <p:clrMapOvr>
     <a:masterClrMapping/>
   </p:clrMapOvr>
+  <mc:AlternateContent xmlns:mc="http://schemas.openxmlformats.org/markup-compatibility/2006">
+    <mc:Choice xmlns:p14="http://schemas.microsoft.com/office/powerpoint/2010/main" Requires="p14">
+      <p:transition spd="med" p14:dur="700">
+        <p14:cube dir="l"/>
+      </p:transition>
+    </mc:Choice>
+    <mc:Fallback>
+      <p:transition spd="med">
+        <p:push dir="l"/>
+      </p:transition>
+    </mc:Fallback>
+  </mc:AlternateContent>
 </p:sld>
 </file>
 
@@ -8561,7 +10671,7 @@
                 </a:solidFill>
                 <a:latin typeface="Montserrat"/>
               </a:rPr>
-              <a:t>002 / 017</a:t>
+              <a:t>002 / 021</a:t>
             </a:r>
           </a:p>
         </p:txBody>
@@ -8636,7 +10746,7 @@
       </p:sp>
       <p:sp>
         <p:nvSpPr>
-          <p:cNvPr id="6" name="Rounded Rectangle 5"/>
+          <p:cNvPr id="6" name="Rectangle 5"/>
           <p:cNvSpPr/>
           <p:nvPr/>
         </p:nvSpPr>
@@ -8645,7 +10755,7 @@
             <a:off x="868680" y="1234440"/>
             <a:ext cx="1463040" cy="73152"/>
           </a:xfrm>
-          <a:prstGeom prst="roundRect">
+          <a:prstGeom prst="rect">
             <a:avLst/>
           </a:prstGeom>
           <a:solidFill>
@@ -8726,14 +10836,58 @@
       </p:sp>
       <p:sp>
         <p:nvSpPr>
-          <p:cNvPr id="8" name="TextBox 7"/>
+          <p:cNvPr id="8" name="Rectangle 7"/>
+          <p:cNvSpPr/>
+          <p:nvPr/>
+        </p:nvSpPr>
+        <p:spPr>
+          <a:xfrm>
+            <a:off x="822960" y="2011680"/>
+            <a:ext cx="3017520" cy="128016"/>
+          </a:xfrm>
+          <a:prstGeom prst="rect">
+            <a:avLst/>
+          </a:prstGeom>
+          <a:solidFill>
+            <a:srgbClr val="E8801A"/>
+          </a:solidFill>
+          <a:ln>
+            <a:noFill/>
+          </a:ln>
+          <a:effectLst/>
+        </p:spPr>
+        <p:style>
+          <a:lnRef idx="1">
+            <a:schemeClr val="accent1"/>
+          </a:lnRef>
+          <a:fillRef idx="3">
+            <a:schemeClr val="accent1"/>
+          </a:fillRef>
+          <a:effectRef idx="2">
+            <a:schemeClr val="accent1"/>
+          </a:effectRef>
+          <a:fontRef idx="minor">
+            <a:schemeClr val="lt1"/>
+          </a:fontRef>
+        </p:style>
+        <p:txBody>
+          <a:bodyPr rtlCol="0" anchor="ctr"/>
+          <a:lstStyle/>
+          <a:p>
+            <a:pPr algn="ctr"/>
+          </a:p>
+        </p:txBody>
+      </p:sp>
+      <p:sp>
+        <p:nvSpPr>
+          <p:cNvPr id="9" name="TextBox 8"/>
           <p:cNvSpPr txBox="1"/>
           <p:nvPr/>
         </p:nvSpPr>
         <p:spPr>
           <a:xfrm>
-            <a:off x="822960" y="2331720"/>
-            <a:ext cx="3017520" cy="1463040"/>
+            <a:off x="822960" y="2377440"/>
+            <a:ext cx="3017520" cy="1371600"/>
           </a:xfrm>
           <a:prstGeom prst="rect">
             <a:avLst/>
@@ -8748,7 +10902,7 @@
           <a:p>
             <a:pPr algn="ctr"/>
             <a:r>
-              <a:rPr sz="6000" b="1" i="0">
+              <a:rPr sz="5800" b="1" i="0">
                 <a:solidFill>
                   <a:srgbClr val="1E2761"/>
                 </a:solidFill>
@@ -8761,13 +10915,13 @@
       </p:sp>
       <p:sp>
         <p:nvSpPr>
-          <p:cNvPr id="9" name="TextBox 8"/>
+          <p:cNvPr id="10" name="TextBox 9"/>
           <p:cNvSpPr txBox="1"/>
           <p:nvPr/>
         </p:nvSpPr>
         <p:spPr>
           <a:xfrm>
-            <a:off x="1051560" y="3611880"/>
+            <a:off x="1051560" y="3657600"/>
             <a:ext cx="2560320" cy="1005840"/>
           </a:xfrm>
           <a:prstGeom prst="rect">
@@ -8796,7 +10950,7 @@
       </p:sp>
       <p:sp>
         <p:nvSpPr>
-          <p:cNvPr id="10" name="Rounded Rectangle 9"/>
+          <p:cNvPr id="11" name="Rounded Rectangle 10"/>
           <p:cNvSpPr/>
           <p:nvPr/>
         </p:nvSpPr>
@@ -8842,14 +10996,58 @@
       </p:sp>
       <p:sp>
         <p:nvSpPr>
-          <p:cNvPr id="11" name="TextBox 10"/>
+          <p:cNvPr id="12" name="Rectangle 11"/>
+          <p:cNvSpPr/>
+          <p:nvPr/>
+        </p:nvSpPr>
+        <p:spPr>
+          <a:xfrm>
+            <a:off x="4617720" y="2011680"/>
+            <a:ext cx="3017520" cy="128016"/>
+          </a:xfrm>
+          <a:prstGeom prst="rect">
+            <a:avLst/>
+          </a:prstGeom>
+          <a:solidFill>
+            <a:srgbClr val="E8801A"/>
+          </a:solidFill>
+          <a:ln>
+            <a:noFill/>
+          </a:ln>
+          <a:effectLst/>
+        </p:spPr>
+        <p:style>
+          <a:lnRef idx="1">
+            <a:schemeClr val="accent1"/>
+          </a:lnRef>
+          <a:fillRef idx="3">
+            <a:schemeClr val="accent1"/>
+          </a:fillRef>
+          <a:effectRef idx="2">
+            <a:schemeClr val="accent1"/>
+          </a:effectRef>
+          <a:fontRef idx="minor">
+            <a:schemeClr val="lt1"/>
+          </a:fontRef>
+        </p:style>
+        <p:txBody>
+          <a:bodyPr rtlCol="0" anchor="ctr"/>
+          <a:lstStyle/>
+          <a:p>
+            <a:pPr algn="ctr"/>
+          </a:p>
+        </p:txBody>
+      </p:sp>
+      <p:sp>
+        <p:nvSpPr>
+          <p:cNvPr id="13" name="TextBox 12"/>
           <p:cNvSpPr txBox="1"/>
           <p:nvPr/>
         </p:nvSpPr>
         <p:spPr>
           <a:xfrm>
-            <a:off x="4617720" y="2331720"/>
-            <a:ext cx="3017520" cy="1463040"/>
+            <a:off x="4617720" y="2377440"/>
+            <a:ext cx="3017520" cy="1371600"/>
           </a:xfrm>
           <a:prstGeom prst="rect">
             <a:avLst/>
@@ -8864,7 +11062,7 @@
           <a:p>
             <a:pPr algn="ctr"/>
             <a:r>
-              <a:rPr sz="6000" b="1" i="0">
+              <a:rPr sz="5800" b="1" i="0">
                 <a:solidFill>
                   <a:srgbClr val="1E2761"/>
                 </a:solidFill>
@@ -8877,13 +11075,13 @@
       </p:sp>
       <p:sp>
         <p:nvSpPr>
-          <p:cNvPr id="12" name="TextBox 11"/>
+          <p:cNvPr id="14" name="TextBox 13"/>
           <p:cNvSpPr txBox="1"/>
           <p:nvPr/>
         </p:nvSpPr>
         <p:spPr>
           <a:xfrm>
-            <a:off x="4846320" y="3611880"/>
+            <a:off x="4846320" y="3657600"/>
             <a:ext cx="2560320" cy="1005840"/>
           </a:xfrm>
           <a:prstGeom prst="rect">
@@ -8912,7 +11110,7 @@
       </p:sp>
       <p:sp>
         <p:nvSpPr>
-          <p:cNvPr id="13" name="Rounded Rectangle 12"/>
+          <p:cNvPr id="15" name="Rounded Rectangle 14"/>
           <p:cNvSpPr/>
           <p:nvPr/>
         </p:nvSpPr>
@@ -8958,14 +11156,58 @@
       </p:sp>
       <p:sp>
         <p:nvSpPr>
-          <p:cNvPr id="14" name="TextBox 13"/>
+          <p:cNvPr id="16" name="Rectangle 15"/>
+          <p:cNvSpPr/>
+          <p:nvPr/>
+        </p:nvSpPr>
+        <p:spPr>
+          <a:xfrm>
+            <a:off x="8412480" y="2011680"/>
+            <a:ext cx="3017520" cy="128016"/>
+          </a:xfrm>
+          <a:prstGeom prst="rect">
+            <a:avLst/>
+          </a:prstGeom>
+          <a:solidFill>
+            <a:srgbClr val="E8801A"/>
+          </a:solidFill>
+          <a:ln>
+            <a:noFill/>
+          </a:ln>
+          <a:effectLst/>
+        </p:spPr>
+        <p:style>
+          <a:lnRef idx="1">
+            <a:schemeClr val="accent1"/>
+          </a:lnRef>
+          <a:fillRef idx="3">
+            <a:schemeClr val="accent1"/>
+          </a:fillRef>
+          <a:effectRef idx="2">
+            <a:schemeClr val="accent1"/>
+          </a:effectRef>
+          <a:fontRef idx="minor">
+            <a:schemeClr val="lt1"/>
+          </a:fontRef>
+        </p:style>
+        <p:txBody>
+          <a:bodyPr rtlCol="0" anchor="ctr"/>
+          <a:lstStyle/>
+          <a:p>
+            <a:pPr algn="ctr"/>
+          </a:p>
+        </p:txBody>
+      </p:sp>
+      <p:sp>
+        <p:nvSpPr>
+          <p:cNvPr id="17" name="TextBox 16"/>
           <p:cNvSpPr txBox="1"/>
           <p:nvPr/>
         </p:nvSpPr>
         <p:spPr>
           <a:xfrm>
-            <a:off x="8412480" y="2331720"/>
-            <a:ext cx="3017520" cy="1463040"/>
+            <a:off x="8412480" y="2377440"/>
+            <a:ext cx="3017520" cy="1371600"/>
           </a:xfrm>
           <a:prstGeom prst="rect">
             <a:avLst/>
@@ -8980,7 +11222,7 @@
           <a:p>
             <a:pPr algn="ctr"/>
             <a:r>
-              <a:rPr sz="6000" b="1" i="0">
+              <a:rPr sz="5800" b="1" i="0">
                 <a:solidFill>
                   <a:srgbClr val="1E2761"/>
                 </a:solidFill>
@@ -8993,13 +11235,13 @@
       </p:sp>
       <p:sp>
         <p:nvSpPr>
-          <p:cNvPr id="15" name="TextBox 14"/>
+          <p:cNvPr id="18" name="TextBox 17"/>
           <p:cNvSpPr txBox="1"/>
           <p:nvPr/>
         </p:nvSpPr>
         <p:spPr>
           <a:xfrm>
-            <a:off x="8641080" y="3611880"/>
+            <a:off x="8641080" y="3657600"/>
             <a:ext cx="2560320" cy="1005840"/>
           </a:xfrm>
           <a:prstGeom prst="rect">
@@ -9031,6 +11273,876 @@
   <p:clrMapOvr>
     <a:masterClrMapping/>
   </p:clrMapOvr>
+  <mc:AlternateContent xmlns:mc="http://schemas.openxmlformats.org/markup-compatibility/2006">
+    <mc:Choice xmlns:p14="http://schemas.microsoft.com/office/powerpoint/2010/main" Requires="p14">
+      <p:transition spd="med" p14:dur="700">
+        <p14:cube dir="r"/>
+      </p:transition>
+    </mc:Choice>
+    <mc:Fallback>
+      <p:transition spd="med">
+        <p:push dir="r"/>
+      </p:transition>
+    </mc:Fallback>
+  </mc:AlternateContent>
+</p:sld>
+</file>
+
+<file path=ppt/slides/slide20.xml><?xml version="1.0" encoding="utf-8"?>
+<p:sld xmlns:a="http://schemas.openxmlformats.org/drawingml/2006/main" xmlns:p="http://schemas.openxmlformats.org/presentationml/2006/main" xmlns:r="http://schemas.openxmlformats.org/officeDocument/2006/relationships">
+  <p:cSld>
+    <p:spTree>
+      <p:nvGrpSpPr>
+        <p:cNvPr id="1" name=""/>
+        <p:cNvGrpSpPr/>
+        <p:nvPr/>
+      </p:nvGrpSpPr>
+      <p:grpSpPr/>
+      <p:sp>
+        <p:nvSpPr>
+          <p:cNvPr id="2" name="Rectangle 1"/>
+          <p:cNvSpPr/>
+          <p:nvPr/>
+        </p:nvSpPr>
+        <p:spPr>
+          <a:xfrm>
+            <a:off x="0" y="0"/>
+            <a:ext cx="12191695" cy="6858000"/>
+          </a:xfrm>
+          <a:prstGeom prst="rect">
+            <a:avLst/>
+          </a:prstGeom>
+          <a:solidFill>
+            <a:srgbClr val="FFFFFF"/>
+          </a:solidFill>
+          <a:ln>
+            <a:noFill/>
+          </a:ln>
+          <a:effectLst/>
+        </p:spPr>
+        <p:style>
+          <a:lnRef idx="1">
+            <a:schemeClr val="accent1"/>
+          </a:lnRef>
+          <a:fillRef idx="3">
+            <a:schemeClr val="accent1"/>
+          </a:fillRef>
+          <a:effectRef idx="2">
+            <a:schemeClr val="accent1"/>
+          </a:effectRef>
+          <a:fontRef idx="minor">
+            <a:schemeClr val="lt1"/>
+          </a:fontRef>
+        </p:style>
+        <p:txBody>
+          <a:bodyPr rtlCol="0" anchor="ctr"/>
+          <a:lstStyle/>
+          <a:p>
+            <a:pPr algn="ctr"/>
+          </a:p>
+        </p:txBody>
+      </p:sp>
+      <p:sp>
+        <p:nvSpPr>
+          <p:cNvPr id="3" name="TextBox 2"/>
+          <p:cNvSpPr txBox="1"/>
+          <p:nvPr/>
+        </p:nvSpPr>
+        <p:spPr>
+          <a:xfrm>
+            <a:off x="10607040" y="320040"/>
+            <a:ext cx="1371600" cy="365760"/>
+          </a:xfrm>
+          <a:prstGeom prst="rect">
+            <a:avLst/>
+          </a:prstGeom>
+          <a:noFill/>
+        </p:spPr>
+        <p:txBody>
+          <a:bodyPr wrap="square">
+            <a:spAutoFit/>
+          </a:bodyPr>
+          <a:lstStyle/>
+          <a:p>
+            <a:pPr algn="r"/>
+            <a:r>
+              <a:rPr sz="1000" b="1" i="0">
+                <a:solidFill>
+                  <a:srgbClr val="64748B"/>
+                </a:solidFill>
+                <a:latin typeface="Montserrat"/>
+              </a:rPr>
+              <a:t>020 / 021</a:t>
+            </a:r>
+          </a:p>
+        </p:txBody>
+      </p:sp>
+      <p:sp>
+        <p:nvSpPr>
+          <p:cNvPr id="4" name="TextBox 3"/>
+          <p:cNvSpPr txBox="1"/>
+          <p:nvPr/>
+        </p:nvSpPr>
+        <p:spPr>
+          <a:xfrm>
+            <a:off x="457200" y="6419088"/>
+            <a:ext cx="8229600" cy="365760"/>
+          </a:xfrm>
+          <a:prstGeom prst="rect">
+            <a:avLst/>
+          </a:prstGeom>
+          <a:noFill/>
+        </p:spPr>
+        <p:txBody>
+          <a:bodyPr wrap="square">
+            <a:spAutoFit/>
+          </a:bodyPr>
+          <a:lstStyle/>
+          <a:p>
+            <a:r>
+              <a:rPr sz="900" b="0" i="0">
+                <a:solidFill>
+                  <a:srgbClr val="64748B"/>
+                </a:solidFill>
+                <a:latin typeface="Montserrat"/>
+              </a:rPr>
+              <a:t>Curso Gas B · Tema 06 · Instaladores y empresas instaladoras</a:t>
+            </a:r>
+          </a:p>
+        </p:txBody>
+      </p:sp>
+      <p:sp>
+        <p:nvSpPr>
+          <p:cNvPr id="5" name="TextBox 4"/>
+          <p:cNvSpPr txBox="1"/>
+          <p:nvPr/>
+        </p:nvSpPr>
+        <p:spPr>
+          <a:xfrm>
+            <a:off x="822960" y="457200"/>
+            <a:ext cx="10058400" cy="365760"/>
+          </a:xfrm>
+          <a:prstGeom prst="rect">
+            <a:avLst/>
+          </a:prstGeom>
+          <a:noFill/>
+        </p:spPr>
+        <p:txBody>
+          <a:bodyPr wrap="square">
+            <a:spAutoFit/>
+          </a:bodyPr>
+          <a:lstStyle/>
+          <a:p>
+            <a:r>
+              <a:rPr sz="1300" b="1" i="0">
+                <a:solidFill>
+                  <a:srgbClr val="E8801A"/>
+                </a:solidFill>
+                <a:latin typeface="Montserrat"/>
+              </a:rPr>
+              <a:t>APARTADO 4.2 · CAMBIO DE GAS</a:t>
+            </a:r>
+          </a:p>
+        </p:txBody>
+      </p:sp>
+      <p:sp>
+        <p:nvSpPr>
+          <p:cNvPr id="6" name="TextBox 5"/>
+          <p:cNvSpPr txBox="1"/>
+          <p:nvPr/>
+        </p:nvSpPr>
+        <p:spPr>
+          <a:xfrm>
+            <a:off x="822960" y="868680"/>
+            <a:ext cx="10515600" cy="914400"/>
+          </a:xfrm>
+          <a:prstGeom prst="rect">
+            <a:avLst/>
+          </a:prstGeom>
+          <a:noFill/>
+        </p:spPr>
+        <p:txBody>
+          <a:bodyPr wrap="square">
+            <a:spAutoFit/>
+          </a:bodyPr>
+          <a:lstStyle/>
+          <a:p>
+            <a:r>
+              <a:rPr sz="2800" b="1" i="0">
+                <a:solidFill>
+                  <a:srgbClr val="1E2761"/>
+                </a:solidFill>
+                <a:latin typeface="Montserrat"/>
+              </a:rPr>
+              <a:t>Cambio de familia: solo A y B</a:t>
+            </a:r>
+          </a:p>
+        </p:txBody>
+      </p:sp>
+      <p:sp>
+        <p:nvSpPr>
+          <p:cNvPr id="7" name="Rectangle 6"/>
+          <p:cNvSpPr/>
+          <p:nvPr/>
+        </p:nvSpPr>
+        <p:spPr>
+          <a:xfrm>
+            <a:off x="868680" y="1627632"/>
+            <a:ext cx="2011680" cy="73152"/>
+          </a:xfrm>
+          <a:prstGeom prst="rect">
+            <a:avLst/>
+          </a:prstGeom>
+          <a:solidFill>
+            <a:srgbClr val="E8801A"/>
+          </a:solidFill>
+          <a:ln>
+            <a:noFill/>
+          </a:ln>
+          <a:effectLst/>
+        </p:spPr>
+        <p:style>
+          <a:lnRef idx="1">
+            <a:schemeClr val="accent1"/>
+          </a:lnRef>
+          <a:fillRef idx="3">
+            <a:schemeClr val="accent1"/>
+          </a:fillRef>
+          <a:effectRef idx="2">
+            <a:schemeClr val="accent1"/>
+          </a:effectRef>
+          <a:fontRef idx="minor">
+            <a:schemeClr val="lt1"/>
+          </a:fontRef>
+        </p:style>
+        <p:txBody>
+          <a:bodyPr rtlCol="0" anchor="ctr"/>
+          <a:lstStyle/>
+          <a:p>
+            <a:pPr algn="ctr"/>
+          </a:p>
+        </p:txBody>
+      </p:sp>
+      <p:sp>
+        <p:nvSpPr>
+          <p:cNvPr id="8" name="TextBox 7"/>
+          <p:cNvSpPr txBox="1"/>
+          <p:nvPr/>
+        </p:nvSpPr>
+        <p:spPr>
+          <a:xfrm>
+            <a:off x="822960" y="1965960"/>
+            <a:ext cx="5029200" cy="4206240"/>
+          </a:xfrm>
+          <a:prstGeom prst="rect">
+            <a:avLst/>
+          </a:prstGeom>
+          <a:noFill/>
+        </p:spPr>
+        <p:txBody>
+          <a:bodyPr wrap="square">
+            <a:spAutoFit/>
+          </a:bodyPr>
+          <a:lstStyle/>
+          <a:p>
+            <a:pPr>
+              <a:spcAft>
+                <a:spcPts val="1100"/>
+              </a:spcAft>
+            </a:pPr>
+            <a:r>
+              <a:rPr sz="1600" b="1" i="0">
+                <a:solidFill>
+                  <a:srgbClr val="E8801A"/>
+                </a:solidFill>
+                <a:latin typeface="Montserrat"/>
+              </a:rPr>
+              <a:t>▸  </a:t>
+            </a:r>
+            <a:r>
+              <a:rPr sz="1600" b="0" i="0">
+                <a:solidFill>
+                  <a:srgbClr val="1B2330"/>
+                </a:solidFill>
+                <a:latin typeface="Montserrat"/>
+              </a:rPr>
+              <a:t>Adecuar de una familia de gas a otra</a:t>
+            </a:r>
+          </a:p>
+          <a:p>
+            <a:pPr>
+              <a:spcAft>
+                <a:spcPts val="1100"/>
+              </a:spcAft>
+            </a:pPr>
+            <a:r>
+              <a:rPr sz="1600" b="1" i="0">
+                <a:solidFill>
+                  <a:srgbClr val="E8801A"/>
+                </a:solidFill>
+                <a:latin typeface="Montserrat"/>
+              </a:rPr>
+              <a:t>▸  </a:t>
+            </a:r>
+            <a:r>
+              <a:rPr sz="1600" b="0" i="0">
+                <a:solidFill>
+                  <a:srgbClr val="1B2330"/>
+                </a:solidFill>
+                <a:latin typeface="Montserrat"/>
+              </a:rPr>
+              <a:t>Solo categorías A o B</a:t>
+            </a:r>
+          </a:p>
+          <a:p>
+            <a:pPr>
+              <a:spcAft>
+                <a:spcPts val="1100"/>
+              </a:spcAft>
+            </a:pPr>
+            <a:r>
+              <a:rPr sz="1600" b="1" i="0">
+                <a:solidFill>
+                  <a:srgbClr val="E8801A"/>
+                </a:solidFill>
+                <a:latin typeface="Montserrat"/>
+              </a:rPr>
+              <a:t>▸  </a:t>
+            </a:r>
+            <a:r>
+              <a:rPr sz="1600" b="0" i="0">
+                <a:solidFill>
+                  <a:srgbClr val="1B2330"/>
+                </a:solidFill>
+                <a:latin typeface="Montserrat"/>
+              </a:rPr>
+              <a:t>La C queda fuera</a:t>
+            </a:r>
+          </a:p>
+          <a:p>
+            <a:pPr>
+              <a:spcAft>
+                <a:spcPts val="1100"/>
+              </a:spcAft>
+            </a:pPr>
+            <a:r>
+              <a:rPr sz="1600" b="1" i="0">
+                <a:solidFill>
+                  <a:srgbClr val="E8801A"/>
+                </a:solidFill>
+                <a:latin typeface="Montserrat"/>
+              </a:rPr>
+              <a:t>▸  </a:t>
+            </a:r>
+            <a:r>
+              <a:rPr sz="1600" b="0" i="0">
+                <a:solidFill>
+                  <a:srgbClr val="1B2330"/>
+                </a:solidFill>
+                <a:latin typeface="Montserrat"/>
+              </a:rPr>
+              <a:t>Fabricante: reconocimiento explícito</a:t>
+            </a:r>
+          </a:p>
+        </p:txBody>
+      </p:sp>
+      <p:sp>
+        <p:nvSpPr>
+          <p:cNvPr id="9" name="imgph" descr="IMGQ:technician adjusting gas valve on appliance"/>
+          <p:cNvSpPr/>
+          <p:nvPr/>
+        </p:nvSpPr>
+        <p:spPr>
+          <a:xfrm>
+            <a:off x="6080760" y="1965960"/>
+            <a:ext cx="5303520" cy="4572000"/>
+          </a:xfrm>
+          <a:prstGeom prst="roundRect">
+            <a:avLst/>
+          </a:prstGeom>
+          <a:solidFill>
+            <a:srgbClr val="F3F6FB"/>
+          </a:solidFill>
+          <a:ln w="12700">
+            <a:solidFill>
+              <a:srgbClr val="C7D2E6"/>
+            </a:solidFill>
+          </a:ln>
+          <a:effectLst/>
+        </p:spPr>
+        <p:style>
+          <a:lnRef idx="1">
+            <a:schemeClr val="accent1"/>
+          </a:lnRef>
+          <a:fillRef idx="3">
+            <a:schemeClr val="accent1"/>
+          </a:fillRef>
+          <a:effectRef idx="2">
+            <a:schemeClr val="accent1"/>
+          </a:effectRef>
+          <a:fontRef idx="minor">
+            <a:schemeClr val="lt1"/>
+          </a:fontRef>
+        </p:style>
+        <p:txBody>
+          <a:bodyPr rtlCol="0" anchor="ctr"/>
+          <a:lstStyle/>
+          <a:p>
+            <a:pPr algn="ctr"/>
+          </a:p>
+        </p:txBody>
+      </p:sp>
+      <p:sp>
+        <p:nvSpPr>
+          <p:cNvPr id="10" name="TextBox 9"/>
+          <p:cNvSpPr txBox="1"/>
+          <p:nvPr/>
+        </p:nvSpPr>
+        <p:spPr>
+          <a:xfrm>
+            <a:off x="6355080" y="3611880"/>
+            <a:ext cx="4754880" cy="1280160"/>
+          </a:xfrm>
+          <a:prstGeom prst="rect">
+            <a:avLst/>
+          </a:prstGeom>
+          <a:noFill/>
+        </p:spPr>
+        <p:txBody>
+          <a:bodyPr wrap="square">
+            <a:spAutoFit/>
+          </a:bodyPr>
+          <a:lstStyle/>
+          <a:p>
+            <a:pPr algn="ctr"/>
+            <a:r>
+              <a:rPr sz="1400" b="1" i="0">
+                <a:solidFill>
+                  <a:srgbClr val="64748B"/>
+                </a:solidFill>
+                <a:latin typeface="Montserrat"/>
+              </a:rPr>
+              <a:t>IMAGEN</a:t>
+            </a:r>
+          </a:p>
+          <a:p>
+            <a:pPr algn="ctr"/>
+            <a:r>
+              <a:rPr sz="1100" b="0" i="1">
+                <a:solidFill>
+                  <a:srgbClr val="64748B"/>
+                </a:solidFill>
+                <a:latin typeface="Montserrat"/>
+              </a:rPr>
+              <a:t>technician adjusting gas valve on appliance</a:t>
+            </a:r>
+          </a:p>
+        </p:txBody>
+      </p:sp>
+    </p:spTree>
+  </p:cSld>
+  <p:clrMapOvr>
+    <a:masterClrMapping/>
+  </p:clrMapOvr>
+  <mc:AlternateContent xmlns:mc="http://schemas.openxmlformats.org/markup-compatibility/2006">
+    <mc:Choice xmlns:p14="http://schemas.microsoft.com/office/powerpoint/2010/main" Requires="p14">
+      <p:transition spd="med" p14:dur="700">
+        <p14:cube dir="r"/>
+      </p:transition>
+    </mc:Choice>
+    <mc:Fallback>
+      <p:transition spd="med">
+        <p:push dir="r"/>
+      </p:transition>
+    </mc:Fallback>
+  </mc:AlternateContent>
+</p:sld>
+</file>
+
+<file path=ppt/slides/slide21.xml><?xml version="1.0" encoding="utf-8"?>
+<p:sld xmlns:a="http://schemas.openxmlformats.org/drawingml/2006/main" xmlns:p="http://schemas.openxmlformats.org/presentationml/2006/main" xmlns:r="http://schemas.openxmlformats.org/officeDocument/2006/relationships">
+  <p:cSld>
+    <p:spTree>
+      <p:nvGrpSpPr>
+        <p:cNvPr id="1" name=""/>
+        <p:cNvGrpSpPr/>
+        <p:nvPr/>
+      </p:nvGrpSpPr>
+      <p:grpSpPr/>
+      <p:sp>
+        <p:nvSpPr>
+          <p:cNvPr id="2" name="Rectangle 1"/>
+          <p:cNvSpPr/>
+          <p:nvPr/>
+        </p:nvSpPr>
+        <p:spPr>
+          <a:xfrm>
+            <a:off x="0" y="0"/>
+            <a:ext cx="12191695" cy="6858000"/>
+          </a:xfrm>
+          <a:prstGeom prst="rect">
+            <a:avLst/>
+          </a:prstGeom>
+          <a:solidFill>
+            <a:srgbClr val="1E2761"/>
+          </a:solidFill>
+          <a:ln>
+            <a:noFill/>
+          </a:ln>
+          <a:effectLst/>
+        </p:spPr>
+        <p:style>
+          <a:lnRef idx="1">
+            <a:schemeClr val="accent1"/>
+          </a:lnRef>
+          <a:fillRef idx="3">
+            <a:schemeClr val="accent1"/>
+          </a:fillRef>
+          <a:effectRef idx="2">
+            <a:schemeClr val="accent1"/>
+          </a:effectRef>
+          <a:fontRef idx="minor">
+            <a:schemeClr val="lt1"/>
+          </a:fontRef>
+        </p:style>
+        <p:txBody>
+          <a:bodyPr rtlCol="0" anchor="ctr"/>
+          <a:lstStyle/>
+          <a:p>
+            <a:pPr algn="ctr"/>
+          </a:p>
+        </p:txBody>
+      </p:sp>
+      <p:sp>
+        <p:nvSpPr>
+          <p:cNvPr id="3" name="TextBox 2"/>
+          <p:cNvSpPr txBox="1"/>
+          <p:nvPr/>
+        </p:nvSpPr>
+        <p:spPr>
+          <a:xfrm>
+            <a:off x="822960" y="640080"/>
+            <a:ext cx="10515600" cy="457200"/>
+          </a:xfrm>
+          <a:prstGeom prst="rect">
+            <a:avLst/>
+          </a:prstGeom>
+          <a:noFill/>
+        </p:spPr>
+        <p:txBody>
+          <a:bodyPr wrap="square">
+            <a:spAutoFit/>
+          </a:bodyPr>
+          <a:lstStyle/>
+          <a:p>
+            <a:r>
+              <a:rPr sz="1400" b="1" i="0">
+                <a:solidFill>
+                  <a:srgbClr val="F4A24C"/>
+                </a:solidFill>
+                <a:latin typeface="Montserrat"/>
+              </a:rPr>
+              <a:t>LO QUE YA DOMINAS</a:t>
+            </a:r>
+          </a:p>
+        </p:txBody>
+      </p:sp>
+      <p:sp>
+        <p:nvSpPr>
+          <p:cNvPr id="4" name="Rectangle 3"/>
+          <p:cNvSpPr/>
+          <p:nvPr/>
+        </p:nvSpPr>
+        <p:spPr>
+          <a:xfrm>
+            <a:off x="868680" y="1051560"/>
+            <a:ext cx="1463040" cy="82296"/>
+          </a:xfrm>
+          <a:prstGeom prst="rect">
+            <a:avLst/>
+          </a:prstGeom>
+          <a:solidFill>
+            <a:srgbClr val="E8801A"/>
+          </a:solidFill>
+          <a:ln>
+            <a:noFill/>
+          </a:ln>
+          <a:effectLst/>
+        </p:spPr>
+        <p:style>
+          <a:lnRef idx="1">
+            <a:schemeClr val="accent1"/>
+          </a:lnRef>
+          <a:fillRef idx="3">
+            <a:schemeClr val="accent1"/>
+          </a:fillRef>
+          <a:effectRef idx="2">
+            <a:schemeClr val="accent1"/>
+          </a:effectRef>
+          <a:fontRef idx="minor">
+            <a:schemeClr val="lt1"/>
+          </a:fontRef>
+        </p:style>
+        <p:txBody>
+          <a:bodyPr rtlCol="0" anchor="ctr"/>
+          <a:lstStyle/>
+          <a:p>
+            <a:pPr algn="ctr"/>
+          </a:p>
+        </p:txBody>
+      </p:sp>
+      <p:sp>
+        <p:nvSpPr>
+          <p:cNvPr id="5" name="TextBox 4"/>
+          <p:cNvSpPr txBox="1"/>
+          <p:nvPr/>
+        </p:nvSpPr>
+        <p:spPr>
+          <a:xfrm>
+            <a:off x="822960" y="1234440"/>
+            <a:ext cx="10515600" cy="1097280"/>
+          </a:xfrm>
+          <a:prstGeom prst="rect">
+            <a:avLst/>
+          </a:prstGeom>
+          <a:noFill/>
+        </p:spPr>
+        <p:txBody>
+          <a:bodyPr wrap="square">
+            <a:spAutoFit/>
+          </a:bodyPr>
+          <a:lstStyle/>
+          <a:p>
+            <a:r>
+              <a:rPr sz="3400" b="1" i="0">
+                <a:solidFill>
+                  <a:srgbClr val="FFFFFF"/>
+                </a:solidFill>
+                <a:latin typeface="Montserrat"/>
+              </a:rPr>
+              <a:t>Ya sabes montar y sostener la empresa</a:t>
+            </a:r>
+          </a:p>
+        </p:txBody>
+      </p:sp>
+      <p:sp>
+        <p:nvSpPr>
+          <p:cNvPr id="6" name="TextBox 5"/>
+          <p:cNvSpPr txBox="1"/>
+          <p:nvPr/>
+        </p:nvSpPr>
+        <p:spPr>
+          <a:xfrm>
+            <a:off x="822960" y="2606040"/>
+            <a:ext cx="10515600" cy="2743200"/>
+          </a:xfrm>
+          <a:prstGeom prst="rect">
+            <a:avLst/>
+          </a:prstGeom>
+          <a:noFill/>
+        </p:spPr>
+        <p:txBody>
+          <a:bodyPr wrap="square">
+            <a:spAutoFit/>
+          </a:bodyPr>
+          <a:lstStyle/>
+          <a:p>
+            <a:pPr>
+              <a:spcAft>
+                <a:spcPts val="1200"/>
+              </a:spcAft>
+            </a:pPr>
+            <a:r>
+              <a:rPr sz="2000" b="1" i="0">
+                <a:solidFill>
+                  <a:srgbClr val="F4A24C"/>
+                </a:solidFill>
+                <a:latin typeface="Montserrat"/>
+              </a:rPr>
+              <a:t>✓  </a:t>
+            </a:r>
+            <a:r>
+              <a:rPr sz="1900" b="0" i="0">
+                <a:solidFill>
+                  <a:srgbClr val="FFFFFF"/>
+                </a:solidFill>
+                <a:latin typeface="Montserrat"/>
+              </a:rPr>
+              <a:t>Declaración responsable: habilitada al instante y para siempre</a:t>
+            </a:r>
+          </a:p>
+          <a:p>
+            <a:pPr>
+              <a:spcAft>
+                <a:spcPts val="1200"/>
+              </a:spcAft>
+            </a:pPr>
+            <a:r>
+              <a:rPr sz="2000" b="1" i="0">
+                <a:solidFill>
+                  <a:srgbClr val="F4A24C"/>
+                </a:solidFill>
+                <a:latin typeface="Montserrat"/>
+              </a:rPr>
+              <a:t>✓  </a:t>
+            </a:r>
+            <a:r>
+              <a:rPr sz="1900" b="0" i="0">
+                <a:solidFill>
+                  <a:srgbClr val="FFFFFF"/>
+                </a:solidFill>
+                <a:latin typeface="Montserrat"/>
+              </a:rPr>
+              <a:t>Un instalador en plantilla, de categoría igual o superior</a:t>
+            </a:r>
+          </a:p>
+          <a:p>
+            <a:pPr>
+              <a:spcAft>
+                <a:spcPts val="1200"/>
+              </a:spcAft>
+            </a:pPr>
+            <a:r>
+              <a:rPr sz="2000" b="1" i="0">
+                <a:solidFill>
+                  <a:srgbClr val="F4A24C"/>
+                </a:solidFill>
+                <a:latin typeface="Montserrat"/>
+              </a:rPr>
+              <a:t>✓  </a:t>
+            </a:r>
+            <a:r>
+              <a:rPr sz="1900" b="0" i="0">
+                <a:solidFill>
+                  <a:srgbClr val="FFFFFF"/>
+                </a:solidFill>
+                <a:latin typeface="Montserrat"/>
+              </a:rPr>
+              <a:t>Seguro 900 / 600 / 300 y garantía de 4 años</a:t>
+            </a:r>
+          </a:p>
+          <a:p>
+            <a:pPr>
+              <a:spcAft>
+                <a:spcPts val="1200"/>
+              </a:spcAft>
+            </a:pPr>
+            <a:r>
+              <a:rPr sz="2000" b="1" i="0">
+                <a:solidFill>
+                  <a:srgbClr val="F4A24C"/>
+                </a:solidFill>
+                <a:latin typeface="Montserrat"/>
+              </a:rPr>
+              <a:t>✓  </a:t>
+            </a:r>
+            <a:r>
+              <a:rPr sz="1900" b="0" i="0">
+                <a:solidFill>
+                  <a:srgbClr val="FFFFFF"/>
+                </a:solidFill>
+                <a:latin typeface="Montserrat"/>
+              </a:rPr>
+              <a:t>Plazos: 1 mes, 15 días y 3 meses</a:t>
+            </a:r>
+          </a:p>
+        </p:txBody>
+      </p:sp>
+      <p:sp>
+        <p:nvSpPr>
+          <p:cNvPr id="7" name="Rounded Rectangle 6"/>
+          <p:cNvSpPr/>
+          <p:nvPr/>
+        </p:nvSpPr>
+        <p:spPr>
+          <a:xfrm>
+            <a:off x="822960" y="5532120"/>
+            <a:ext cx="10515600" cy="822960"/>
+          </a:xfrm>
+          <a:prstGeom prst="roundRect">
+            <a:avLst/>
+          </a:prstGeom>
+          <a:solidFill>
+            <a:srgbClr val="E8801A"/>
+          </a:solidFill>
+          <a:ln>
+            <a:noFill/>
+          </a:ln>
+          <a:effectLst/>
+        </p:spPr>
+        <p:style>
+          <a:lnRef idx="1">
+            <a:schemeClr val="accent1"/>
+          </a:lnRef>
+          <a:fillRef idx="3">
+            <a:schemeClr val="accent1"/>
+          </a:fillRef>
+          <a:effectRef idx="2">
+            <a:schemeClr val="accent1"/>
+          </a:effectRef>
+          <a:fontRef idx="minor">
+            <a:schemeClr val="lt1"/>
+          </a:fontRef>
+        </p:style>
+        <p:txBody>
+          <a:bodyPr rtlCol="0" anchor="ctr"/>
+          <a:lstStyle/>
+          <a:p>
+            <a:pPr algn="ctr"/>
+          </a:p>
+        </p:txBody>
+      </p:sp>
+      <p:sp>
+        <p:nvSpPr>
+          <p:cNvPr id="8" name="TextBox 7"/>
+          <p:cNvSpPr txBox="1"/>
+          <p:nvPr/>
+        </p:nvSpPr>
+        <p:spPr>
+          <a:xfrm>
+            <a:off x="1051560" y="5623560"/>
+            <a:ext cx="10058400" cy="640080"/>
+          </a:xfrm>
+          <a:prstGeom prst="rect">
+            <a:avLst/>
+          </a:prstGeom>
+          <a:noFill/>
+        </p:spPr>
+        <p:txBody>
+          <a:bodyPr wrap="square">
+            <a:spAutoFit/>
+          </a:bodyPr>
+          <a:lstStyle/>
+          <a:p>
+            <a:r>
+              <a:rPr sz="1500" b="1" i="1">
+                <a:solidFill>
+                  <a:srgbClr val="1E2761"/>
+                </a:solidFill>
+                <a:latin typeface="Montserrat"/>
+              </a:rPr>
+              <a:t>Con la persona y la empresa dominadas, solo falta el temario oficial. Vamos a por los anexos.</a:t>
+            </a:r>
+          </a:p>
+        </p:txBody>
+      </p:sp>
+    </p:spTree>
+  </p:cSld>
+  <p:clrMapOvr>
+    <a:masterClrMapping/>
+  </p:clrMapOvr>
+  <mc:AlternateContent xmlns:mc="http://schemas.openxmlformats.org/markup-compatibility/2006">
+    <mc:Choice xmlns:p14="http://schemas.microsoft.com/office/powerpoint/2010/main" Requires="p14">
+      <p:transition spd="med" p14:dur="700">
+        <p14:cube dir="l"/>
+      </p:transition>
+    </mc:Choice>
+    <mc:Fallback>
+      <p:transition spd="med">
+        <p:push dir="l"/>
+      </p:transition>
+    </mc:Fallback>
+  </mc:AlternateContent>
 </p:sld>
 </file>
 
@@ -9118,7 +12230,7 @@
                 </a:solidFill>
                 <a:latin typeface="Montserrat"/>
               </a:rPr>
-              <a:t>003 / 017</a:t>
+              <a:t>003 / 021</a:t>
             </a:r>
           </a:p>
         </p:txBody>
@@ -9227,7 +12339,7 @@
       </p:sp>
       <p:sp>
         <p:nvSpPr>
-          <p:cNvPr id="7" name="Rounded Rectangle 6"/>
+          <p:cNvPr id="7" name="Rectangle 6"/>
           <p:cNvSpPr/>
           <p:nvPr/>
         </p:nvSpPr>
@@ -9236,7 +12348,7 @@
             <a:off x="868680" y="1673352"/>
             <a:ext cx="2011680" cy="73152"/>
           </a:xfrm>
-          <a:prstGeom prst="roundRect">
+          <a:prstGeom prst="rect">
             <a:avLst/>
           </a:prstGeom>
           <a:solidFill>
@@ -9522,6 +12634,18 @@
   <p:clrMapOvr>
     <a:masterClrMapping/>
   </p:clrMapOvr>
+  <mc:AlternateContent xmlns:mc="http://schemas.openxmlformats.org/markup-compatibility/2006">
+    <mc:Choice xmlns:p14="http://schemas.microsoft.com/office/powerpoint/2010/main" Requires="p14">
+      <p:transition spd="med" p14:dur="700">
+        <p14:cube dir="l"/>
+      </p:transition>
+    </mc:Choice>
+    <mc:Fallback>
+      <p:transition spd="med">
+        <p:push dir="l"/>
+      </p:transition>
+    </mc:Fallback>
+  </mc:AlternateContent>
 </p:sld>
 </file>
 
@@ -9609,7 +12733,7 @@
                 </a:solidFill>
                 <a:latin typeface="Montserrat"/>
               </a:rPr>
-              <a:t>004 / 017</a:t>
+              <a:t>004 / 021</a:t>
             </a:r>
           </a:p>
         </p:txBody>
@@ -9718,7 +12842,7 @@
       </p:sp>
       <p:sp>
         <p:nvSpPr>
-          <p:cNvPr id="7" name="Rounded Rectangle 6"/>
+          <p:cNvPr id="7" name="Rectangle 6"/>
           <p:cNvSpPr/>
           <p:nvPr/>
         </p:nvSpPr>
@@ -9727,7 +12851,7 @@
             <a:off x="868680" y="1627632"/>
             <a:ext cx="2011680" cy="73152"/>
           </a:xfrm>
-          <a:prstGeom prst="roundRect">
+          <a:prstGeom prst="rect">
             <a:avLst/>
           </a:prstGeom>
           <a:solidFill>
@@ -9769,7 +12893,7 @@
         <p:spPr>
           <a:xfrm>
             <a:off x="822960" y="1965960"/>
-            <a:ext cx="4983480" cy="4206240"/>
+            <a:ext cx="5029200" cy="4206240"/>
           </a:xfrm>
           <a:prstGeom prst="rect">
             <a:avLst/>
@@ -9891,8 +13015,8 @@
         </p:nvSpPr>
         <p:spPr>
           <a:xfrm>
-            <a:off x="5806440" y="1051560"/>
-            <a:ext cx="5298947" cy="4629150"/>
+            <a:off x="6080760" y="1965960"/>
+            <a:ext cx="5303520" cy="4572000"/>
           </a:xfrm>
           <a:prstGeom prst="roundRect">
             <a:avLst/>
@@ -9937,8 +13061,8 @@
         </p:nvSpPr>
         <p:spPr>
           <a:xfrm>
-            <a:off x="6080760" y="2726055"/>
-            <a:ext cx="4750307" cy="1280160"/>
+            <a:off x="6355080" y="3611880"/>
+            <a:ext cx="4754880" cy="1280160"/>
           </a:xfrm>
           <a:prstGeom prst="rect">
             <a:avLst/>
@@ -9959,7 +13083,7 @@
                 </a:solidFill>
                 <a:latin typeface="Montserrat"/>
               </a:rPr>
-              <a:t>IMAGEN REALISTA</a:t>
+              <a:t>IMAGEN</a:t>
             </a:r>
           </a:p>
           <a:p>
@@ -9981,6 +13105,18 @@
   <p:clrMapOvr>
     <a:masterClrMapping/>
   </p:clrMapOvr>
+  <mc:AlternateContent xmlns:mc="http://schemas.openxmlformats.org/markup-compatibility/2006">
+    <mc:Choice xmlns:p14="http://schemas.microsoft.com/office/powerpoint/2010/main" Requires="p14">
+      <p:transition spd="med" p14:dur="700">
+        <p14:cube dir="r"/>
+      </p:transition>
+    </mc:Choice>
+    <mc:Fallback>
+      <p:transition spd="med">
+        <p:push dir="r"/>
+      </p:transition>
+    </mc:Fallback>
+  </mc:AlternateContent>
 </p:sld>
 </file>
 
@@ -10068,7 +13204,7 @@
                 </a:solidFill>
                 <a:latin typeface="Montserrat"/>
               </a:rPr>
-              <a:t>005 / 017</a:t>
+              <a:t>005 / 021</a:t>
             </a:r>
           </a:p>
         </p:txBody>
@@ -10177,7 +13313,7 @@
       </p:sp>
       <p:sp>
         <p:nvSpPr>
-          <p:cNvPr id="7" name="Rounded Rectangle 6"/>
+          <p:cNvPr id="7" name="Rectangle 6"/>
           <p:cNvSpPr/>
           <p:nvPr/>
         </p:nvSpPr>
@@ -10186,7 +13322,7 @@
             <a:off x="868680" y="1627632"/>
             <a:ext cx="2011680" cy="73152"/>
           </a:xfrm>
-          <a:prstGeom prst="roundRect">
+          <a:prstGeom prst="rect">
             <a:avLst/>
           </a:prstGeom>
           <a:solidFill>
@@ -10227,8 +13363,8 @@
         </p:nvSpPr>
         <p:spPr>
           <a:xfrm>
-            <a:off x="822960" y="1965960"/>
-            <a:ext cx="4983480" cy="4206240"/>
+            <a:off x="6355080" y="1965960"/>
+            <a:ext cx="5029200" cy="4206240"/>
           </a:xfrm>
           <a:prstGeom prst="rect">
             <a:avLst/>
@@ -10350,8 +13486,8 @@
         </p:nvSpPr>
         <p:spPr>
           <a:xfrm>
-            <a:off x="5806440" y="1051560"/>
-            <a:ext cx="5298947" cy="4629150"/>
+            <a:off x="822960" y="1965960"/>
+            <a:ext cx="5303520" cy="4572000"/>
           </a:xfrm>
           <a:prstGeom prst="roundRect">
             <a:avLst/>
@@ -10396,8 +13532,8 @@
         </p:nvSpPr>
         <p:spPr>
           <a:xfrm>
-            <a:off x="6080760" y="2726055"/>
-            <a:ext cx="4750307" cy="1280160"/>
+            <a:off x="1097280" y="3611880"/>
+            <a:ext cx="4754880" cy="1280160"/>
           </a:xfrm>
           <a:prstGeom prst="rect">
             <a:avLst/>
@@ -10418,7 +13554,7 @@
                 </a:solidFill>
                 <a:latin typeface="Montserrat"/>
               </a:rPr>
-              <a:t>IMAGEN REALISTA</a:t>
+              <a:t>IMAGEN</a:t>
             </a:r>
           </a:p>
           <a:p>
@@ -10440,6 +13576,18 @@
   <p:clrMapOvr>
     <a:masterClrMapping/>
   </p:clrMapOvr>
+  <mc:AlternateContent xmlns:mc="http://schemas.openxmlformats.org/markup-compatibility/2006">
+    <mc:Choice xmlns:p14="http://schemas.microsoft.com/office/powerpoint/2010/main" Requires="p14">
+      <p:transition spd="med" p14:dur="700">
+        <p14:cube dir="l"/>
+      </p:transition>
+    </mc:Choice>
+    <mc:Fallback>
+      <p:transition spd="med">
+        <p:push dir="l"/>
+      </p:transition>
+    </mc:Fallback>
+  </mc:AlternateContent>
 </p:sld>
 </file>
 
@@ -10527,7 +13675,7 @@
                 </a:solidFill>
                 <a:latin typeface="Montserrat"/>
               </a:rPr>
-              <a:t>006 / 017</a:t>
+              <a:t>006 / 021</a:t>
             </a:r>
           </a:p>
         </p:txBody>
@@ -10636,7 +13784,7 @@
       </p:sp>
       <p:sp>
         <p:nvSpPr>
-          <p:cNvPr id="7" name="Rounded Rectangle 6"/>
+          <p:cNvPr id="7" name="Rectangle 6"/>
           <p:cNvSpPr/>
           <p:nvPr/>
         </p:nvSpPr>
@@ -10645,7 +13793,7 @@
             <a:off x="868680" y="1627632"/>
             <a:ext cx="2011680" cy="73152"/>
           </a:xfrm>
-          <a:prstGeom prst="roundRect">
+          <a:prstGeom prst="rect">
             <a:avLst/>
           </a:prstGeom>
           <a:solidFill>
@@ -10687,7 +13835,7 @@
         <p:spPr>
           <a:xfrm>
             <a:off x="822960" y="1965960"/>
-            <a:ext cx="4983480" cy="4206240"/>
+            <a:ext cx="5029200" cy="4206240"/>
           </a:xfrm>
           <a:prstGeom prst="rect">
             <a:avLst/>
@@ -10809,8 +13957,8 @@
         </p:nvSpPr>
         <p:spPr>
           <a:xfrm>
-            <a:off x="5806440" y="1051560"/>
-            <a:ext cx="5298947" cy="4629150"/>
+            <a:off x="6080760" y="1965960"/>
+            <a:ext cx="5303520" cy="4572000"/>
           </a:xfrm>
           <a:prstGeom prst="roundRect">
             <a:avLst/>
@@ -10855,8 +14003,8 @@
         </p:nvSpPr>
         <p:spPr>
           <a:xfrm>
-            <a:off x="6080760" y="2726055"/>
-            <a:ext cx="4750307" cy="1280160"/>
+            <a:off x="6355080" y="3611880"/>
+            <a:ext cx="4754880" cy="1280160"/>
           </a:xfrm>
           <a:prstGeom prst="rect">
             <a:avLst/>
@@ -10877,7 +14025,7 @@
                 </a:solidFill>
                 <a:latin typeface="Montserrat"/>
               </a:rPr>
-              <a:t>IMAGEN REALISTA</a:t>
+              <a:t>IMAGEN</a:t>
             </a:r>
           </a:p>
           <a:p>
@@ -10899,6 +14047,18 @@
   <p:clrMapOvr>
     <a:masterClrMapping/>
   </p:clrMapOvr>
+  <mc:AlternateContent xmlns:mc="http://schemas.openxmlformats.org/markup-compatibility/2006">
+    <mc:Choice xmlns:p14="http://schemas.microsoft.com/office/powerpoint/2010/main" Requires="p14">
+      <p:transition spd="med" p14:dur="700">
+        <p14:cube dir="r"/>
+      </p:transition>
+    </mc:Choice>
+    <mc:Fallback>
+      <p:transition spd="med">
+        <p:push dir="r"/>
+      </p:transition>
+    </mc:Fallback>
+  </mc:AlternateContent>
 </p:sld>
 </file>
 
@@ -10986,7 +14146,7 @@
                 </a:solidFill>
                 <a:latin typeface="Montserrat"/>
               </a:rPr>
-              <a:t>007 / 017</a:t>
+              <a:t>007 / 021</a:t>
             </a:r>
           </a:p>
         </p:txBody>
@@ -11095,7 +14255,7 @@
       </p:sp>
       <p:sp>
         <p:nvSpPr>
-          <p:cNvPr id="7" name="Rounded Rectangle 6"/>
+          <p:cNvPr id="7" name="Rectangle 6"/>
           <p:cNvSpPr/>
           <p:nvPr/>
         </p:nvSpPr>
@@ -11104,7 +14264,7 @@
             <a:off x="868680" y="1627632"/>
             <a:ext cx="2011680" cy="73152"/>
           </a:xfrm>
-          <a:prstGeom prst="roundRect">
+          <a:prstGeom prst="rect">
             <a:avLst/>
           </a:prstGeom>
           <a:solidFill>
@@ -11145,8 +14305,8 @@
         </p:nvSpPr>
         <p:spPr>
           <a:xfrm>
-            <a:off x="822960" y="1965960"/>
-            <a:ext cx="4983480" cy="4206240"/>
+            <a:off x="6355080" y="1965960"/>
+            <a:ext cx="5029200" cy="4206240"/>
           </a:xfrm>
           <a:prstGeom prst="rect">
             <a:avLst/>
@@ -11268,8 +14428,8 @@
         </p:nvSpPr>
         <p:spPr>
           <a:xfrm>
-            <a:off x="5806440" y="1051560"/>
-            <a:ext cx="5298947" cy="4629150"/>
+            <a:off x="822960" y="1965960"/>
+            <a:ext cx="5303520" cy="4572000"/>
           </a:xfrm>
           <a:prstGeom prst="roundRect">
             <a:avLst/>
@@ -11314,8 +14474,8 @@
         </p:nvSpPr>
         <p:spPr>
           <a:xfrm>
-            <a:off x="6080760" y="2726055"/>
-            <a:ext cx="4750307" cy="1280160"/>
+            <a:off x="1097280" y="3611880"/>
+            <a:ext cx="4754880" cy="1280160"/>
           </a:xfrm>
           <a:prstGeom prst="rect">
             <a:avLst/>
@@ -11336,7 +14496,7 @@
                 </a:solidFill>
                 <a:latin typeface="Montserrat"/>
               </a:rPr>
-              <a:t>IMAGEN REALISTA</a:t>
+              <a:t>IMAGEN</a:t>
             </a:r>
           </a:p>
           <a:p>
@@ -11358,6 +14518,18 @@
   <p:clrMapOvr>
     <a:masterClrMapping/>
   </p:clrMapOvr>
+  <mc:AlternateContent xmlns:mc="http://schemas.openxmlformats.org/markup-compatibility/2006">
+    <mc:Choice xmlns:p14="http://schemas.microsoft.com/office/powerpoint/2010/main" Requires="p14">
+      <p:transition spd="med" p14:dur="700">
+        <p14:cube dir="l"/>
+      </p:transition>
+    </mc:Choice>
+    <mc:Fallback>
+      <p:transition spd="med">
+        <p:push dir="l"/>
+      </p:transition>
+    </mc:Fallback>
+  </mc:AlternateContent>
 </p:sld>
 </file>
 
@@ -11445,7 +14617,7 @@
                 </a:solidFill>
                 <a:latin typeface="Montserrat"/>
               </a:rPr>
-              <a:t>008 / 017</a:t>
+              <a:t>008 / 021</a:t>
             </a:r>
           </a:p>
         </p:txBody>
@@ -11554,7 +14726,7 @@
       </p:sp>
       <p:sp>
         <p:nvSpPr>
-          <p:cNvPr id="7" name="Rounded Rectangle 6"/>
+          <p:cNvPr id="7" name="Rectangle 6"/>
           <p:cNvSpPr/>
           <p:nvPr/>
         </p:nvSpPr>
@@ -11563,7 +14735,7 @@
             <a:off x="868680" y="1627632"/>
             <a:ext cx="2011680" cy="73152"/>
           </a:xfrm>
-          <a:prstGeom prst="roundRect">
+          <a:prstGeom prst="rect">
             <a:avLst/>
           </a:prstGeom>
           <a:solidFill>
@@ -11605,7 +14777,7 @@
         <p:spPr>
           <a:xfrm>
             <a:off x="822960" y="1965960"/>
-            <a:ext cx="4983480" cy="4206240"/>
+            <a:ext cx="5029200" cy="4206240"/>
           </a:xfrm>
           <a:prstGeom prst="rect">
             <a:avLst/>
@@ -11727,8 +14899,8 @@
         </p:nvSpPr>
         <p:spPr>
           <a:xfrm>
-            <a:off x="5806440" y="1051560"/>
-            <a:ext cx="5298947" cy="4629150"/>
+            <a:off x="6080760" y="1965960"/>
+            <a:ext cx="5303520" cy="4572000"/>
           </a:xfrm>
           <a:prstGeom prst="roundRect">
             <a:avLst/>
@@ -11773,8 +14945,8 @@
         </p:nvSpPr>
         <p:spPr>
           <a:xfrm>
-            <a:off x="6080760" y="2726055"/>
-            <a:ext cx="4750307" cy="1280160"/>
+            <a:off x="6355080" y="3611880"/>
+            <a:ext cx="4754880" cy="1280160"/>
           </a:xfrm>
           <a:prstGeom prst="rect">
             <a:avLst/>
@@ -11795,7 +14967,7 @@
                 </a:solidFill>
                 <a:latin typeface="Montserrat"/>
               </a:rPr>
-              <a:t>IMAGEN REALISTA</a:t>
+              <a:t>IMAGEN</a:t>
             </a:r>
           </a:p>
           <a:p>
@@ -11817,6 +14989,18 @@
   <p:clrMapOvr>
     <a:masterClrMapping/>
   </p:clrMapOvr>
+  <mc:AlternateContent xmlns:mc="http://schemas.openxmlformats.org/markup-compatibility/2006">
+    <mc:Choice xmlns:p14="http://schemas.microsoft.com/office/powerpoint/2010/main" Requires="p14">
+      <p:transition spd="med" p14:dur="700">
+        <p14:cube dir="r"/>
+      </p:transition>
+    </mc:Choice>
+    <mc:Fallback>
+      <p:transition spd="med">
+        <p:push dir="r"/>
+      </p:transition>
+    </mc:Fallback>
+  </mc:AlternateContent>
 </p:sld>
 </file>
 
@@ -11904,7 +15088,7 @@
                 </a:solidFill>
                 <a:latin typeface="Montserrat"/>
               </a:rPr>
-              <a:t>009 / 017</a:t>
+              <a:t>009 / 021</a:t>
             </a:r>
           </a:p>
         </p:txBody>
@@ -12013,7 +15197,7 @@
       </p:sp>
       <p:sp>
         <p:nvSpPr>
-          <p:cNvPr id="7" name="Rounded Rectangle 6"/>
+          <p:cNvPr id="7" name="Rectangle 6"/>
           <p:cNvSpPr/>
           <p:nvPr/>
         </p:nvSpPr>
@@ -12022,7 +15206,7 @@
             <a:off x="868680" y="1627632"/>
             <a:ext cx="2011680" cy="73152"/>
           </a:xfrm>
-          <a:prstGeom prst="roundRect">
+          <a:prstGeom prst="rect">
             <a:avLst/>
           </a:prstGeom>
           <a:solidFill>
@@ -12063,8 +15247,8 @@
         </p:nvSpPr>
         <p:spPr>
           <a:xfrm>
-            <a:off x="822960" y="1965960"/>
-            <a:ext cx="4983480" cy="4206240"/>
+            <a:off x="6355080" y="1965960"/>
+            <a:ext cx="5029200" cy="4206240"/>
           </a:xfrm>
           <a:prstGeom prst="rect">
             <a:avLst/>
@@ -12186,8 +15370,8 @@
         </p:nvSpPr>
         <p:spPr>
           <a:xfrm>
-            <a:off x="5806440" y="1051560"/>
-            <a:ext cx="5298947" cy="4629150"/>
+            <a:off x="822960" y="1965960"/>
+            <a:ext cx="5303520" cy="4572000"/>
           </a:xfrm>
           <a:prstGeom prst="roundRect">
             <a:avLst/>
@@ -12232,8 +15416,8 @@
         </p:nvSpPr>
         <p:spPr>
           <a:xfrm>
-            <a:off x="6080760" y="2726055"/>
-            <a:ext cx="4750307" cy="1280160"/>
+            <a:off x="1097280" y="3611880"/>
+            <a:ext cx="4754880" cy="1280160"/>
           </a:xfrm>
           <a:prstGeom prst="rect">
             <a:avLst/>
@@ -12254,7 +15438,7 @@
                 </a:solidFill>
                 <a:latin typeface="Montserrat"/>
               </a:rPr>
-              <a:t>IMAGEN REALISTA</a:t>
+              <a:t>IMAGEN</a:t>
             </a:r>
           </a:p>
           <a:p>
@@ -12276,6 +15460,18 @@
   <p:clrMapOvr>
     <a:masterClrMapping/>
   </p:clrMapOvr>
+  <mc:AlternateContent xmlns:mc="http://schemas.openxmlformats.org/markup-compatibility/2006">
+    <mc:Choice xmlns:p14="http://schemas.microsoft.com/office/powerpoint/2010/main" Requires="p14">
+      <p:transition spd="med" p14:dur="700">
+        <p14:cube dir="l"/>
+      </p:transition>
+    </mc:Choice>
+    <mc:Fallback>
+      <p:transition spd="med">
+        <p:push dir="l"/>
+      </p:transition>
+    </mc:Fallback>
+  </mc:AlternateContent>
 </p:sld>
 </file>
 

--- a/Curso Gas B/06 - ITC-ICG 09 - Instaladores y empresas instaladoras/06 - ITC-ICG 09 - Instaladores y empresas instaladoras - Vídeo 2.pptx
+++ b/Curso Gas B/06 - ITC-ICG 09 - Instaladores y empresas instaladoras/06 - ITC-ICG 09 - Instaladores y empresas instaladoras - Vídeo 2.pptx
@@ -747,12 +747,12 @@
           <a:lstStyle/>
           <a:p>
             <a:r>
-              <a:t>N1: Pregunta de número puro, de las que caen sí o sí. Tu empresa es categoría be: ¿cuánto seguro por siniestro necesitas?</a:t>
-            </a:r>
-          </a:p>
-          <a:p>
-            <a:r>
-              <a:t>N2: Acuérdate del truco: bajan de mayor a menor con la letra y en saltos de trescientos mil. La be está justo en el medio.</a:t>
+              <a:t>N1: Pregunta de número puro, de las que caen sí o sí. Escucha la pregunta y las cuatro cifras. Tu empresa es de categoría be: ¿qué seguro de responsabilidad civil por siniestro necesita? Opción A, seiscientos mil euros. Opción B, novecientos mil euros. Opción C, trescientos mil euros. Opción D, un millón doscientos mil euros. Tómate un segundo.</a:t>
+            </a:r>
+          </a:p>
+          <a:p>
+            <a:r>
+              <a:t>N2: Acuérdate del truco: las cuantías bajan de mayor a menor según la letra, en saltos de trescientos mil. La be está justo en el medio.</a:t>
             </a:r>
           </a:p>
         </p:txBody>
@@ -822,12 +822,12 @@
           <a:lstStyle/>
           <a:p>
             <a:r>
-              <a:t>N1: ¿Por qué seiscientos mil y no otra cifra?</a:t>
-            </a:r>
-          </a:p>
-          <a:p>
-            <a:r>
-              <a:t>N2: Porque las tres cuantías son novecientos mil la a, seiscientos mil la be y trescientos mil la ce. La be, la reina del día a día, cae en medio: seiscientos mil euros por siniestro, y siempre vigente. La trampa suele ser colarte el millón doscientos mil, que no existe en la norma.</a:t>
+              <a:t>N2: La respuesta correcta es la opción A: seiscientos mil euros. Las tres cuantías por siniestro son novecientos mil la a, seiscientos mil la be y trescientos mil la ce. La be, la reina del día a día, cae en el centro: seiscientos mil euros, y siempre vigente. La trampa es la opción D, el millón doscientos mil, que suena a mucho pero no existe en la norma.</a:t>
+            </a:r>
+          </a:p>
+          <a:p>
+            <a:r>
+              <a:t>N1: Novecientos, seiscientos, trescientos; tú, be, seiscientos mil.</a:t>
             </a:r>
           </a:p>
         </p:txBody>
@@ -1047,12 +1047,12 @@
           <a:lstStyle/>
           <a:p>
             <a:r>
-              <a:t>N1: Cuidado, que aquí el examen mezcla plazos a propósito. ¿Cuánto tienes para avisar de un cambio de datos o del cierre de tu empresa?</a:t>
-            </a:r>
-          </a:p>
-          <a:p>
-            <a:r>
-              <a:t>N2: Hay tres plazos en este vídeo y solo uno es el correcto para avisar tú, por tu cuenta. Los otros son del régimen sancionador.</a:t>
+              <a:t>N1: Cuidado, que aquí el examen mezcla plazos a propósito. Escucha la pregunta y las cuatro opciones. ¿En qué plazo debe la empresa comunicar a la comunidad autónoma un cambio de datos o el cese de la actividad? Opción A, un mes. Opción B, quince días naturales. Opción C, tres meses. Opción D, cuatro años. Piénsalo, que hay varios plazos rondando este vídeo.</a:t>
+            </a:r>
+          </a:p>
+          <a:p>
+            <a:r>
+              <a:t>N2: Una pista: de todos esos plazos, solo uno es el que usas tú, por tu cuenta, para avisar. Los otros son del régimen sancionador o de la garantía.</a:t>
             </a:r>
           </a:p>
         </p:txBody>
@@ -1122,12 +1122,12 @@
           <a:lstStyle/>
           <a:p>
             <a:r>
-              <a:t>N1: ¿Por qué un mes y no quince días o tres meses?</a:t>
-            </a:r>
-          </a:p>
-          <a:p>
-            <a:r>
-              <a:t>N2: Porque el mes es el plazo para comunicar tú los cambios o el cese, algo voluntario. Los quince días naturales son para alegar cuando te abren expediente, y los tres meses son el tope de la suspensión cautelar si la infracción es grave. Y los cuatro años son la garantía por mala ejecución, otra cosa distinta. Ordénalos: un mes para avisar, quince días para defenderte, tres meses de suspensión como tope.</a:t>
+              <a:t>N2: La respuesta correcta es la opción A: un mes. Ese es el plazo para comunicar tú los cambios o el cese, algo que haces voluntariamente. Los quince días naturales de la opción B son para alegar cuando te abren expediente; los tres meses de la opción C son el tope de la suspensión cautelar si la infracción es grave; y los cuatro años de la opción D son la garantía por mala ejecución, otra cosa distinta.</a:t>
+            </a:r>
+          </a:p>
+          <a:p>
+            <a:r>
+              <a:t>N1: Ordénalos: un mes para avisar, quince días para defenderte, tres meses de suspensión como tope, y cuatro años de garantía.</a:t>
             </a:r>
           </a:p>
         </p:txBody>
